--- a/output/小中一貫教育（大泉桜学園）_改良版.pptx
+++ b/output/小中一貫教育（大泉桜学園）_改良版.pptx
@@ -7587,7 +7587,7 @@
           <a:p>
             <a:pPr algn="l"/>
             <a:r>
-              <a:rPr sz="2200" b="1">
+              <a:rPr sz="2000" b="1">
                 <a:solidFill>
                   <a:srgbClr val="FFFFFF"/>
                 </a:solidFill>
@@ -7698,7 +7698,7 @@
         <p:spPr>
           <a:xfrm>
             <a:off x="180000" y="580000"/>
-            <a:ext cx="4200000" cy="320000"/>
+            <a:ext cx="4200000" cy="300000"/>
           </a:xfrm>
           <a:prstGeom prst="roundRect">
             <a:avLst/>
@@ -7731,7 +7731,7 @@
           <a:p>
             <a:pPr algn="ctr"/>
             <a:r>
-              <a:rPr sz="1100" b="1">
+              <a:rPr sz="1000" b="1">
                 <a:solidFill>
                   <a:srgbClr val="404040"/>
                 </a:solidFill>
@@ -7751,8 +7751,8 @@
         </p:nvSpPr>
         <p:spPr>
           <a:xfrm>
-            <a:off x="180000" y="950000"/>
-            <a:ext cx="4200000" cy="1500000"/>
+            <a:off x="180000" y="910000"/>
+            <a:ext cx="4200000" cy="1300000"/>
           </a:xfrm>
           <a:prstGeom prst="rect">
             <a:avLst/>
@@ -7781,7 +7781,7 @@
                 <a:ea typeface="Meiryo UI"/>
                 <a:latin typeface="Meiryo UI"/>
               </a:rPr>
-              <a:t>① 一貫した教育課程（9年間を見通した学習・生活指導の充実）</a:t>
+              <a:t>① 一貫した教育課程（9年間を見通した学習・生活指導）</a:t>
             </a:r>
           </a:p>
           <a:p>
@@ -7820,7 +7820,7 @@
                 <a:ea typeface="Meiryo UI"/>
                 <a:latin typeface="Meiryo UI"/>
               </a:rPr>
-              <a:t>④ 教員の相互協力（学力・体力の向上等の高い教育効果）</a:t>
+              <a:t>④ 教員の相互協力（学力・体力の向上）</a:t>
             </a:r>
           </a:p>
           <a:p>
@@ -7833,7 +7833,7 @@
                 <a:ea typeface="Meiryo UI"/>
                 <a:latin typeface="Meiryo UI"/>
               </a:rPr>
-              <a:t>⑤ 地域社会との連携（学校と地域社会の活性化）</a:t>
+              <a:t>⑤ 地域社会との連携（学校と地域の活性化）</a:t>
             </a:r>
           </a:p>
         </p:txBody>
@@ -7846,8 +7846,8 @@
         </p:nvSpPr>
         <p:spPr>
           <a:xfrm>
-            <a:off x="180000" y="2550000"/>
-            <a:ext cx="4200000" cy="320000"/>
+            <a:off x="180000" y="2300000"/>
+            <a:ext cx="4200000" cy="300000"/>
           </a:xfrm>
           <a:prstGeom prst="roundRect">
             <a:avLst/>
@@ -7880,7 +7880,7 @@
           <a:p>
             <a:pPr algn="ctr"/>
             <a:r>
-              <a:rPr sz="1100" b="1">
+              <a:rPr sz="1000" b="1">
                 <a:solidFill>
                   <a:srgbClr val="404040"/>
                 </a:solidFill>
@@ -7901,8 +7901,8 @@
           <p:nvPr/>
         </p:nvGraphicFramePr>
         <p:xfrm>
-          <a:off x="180000" y="2900000"/>
-          <a:ext cx="4200000" cy="1700000"/>
+          <a:off x="180000" y="2630000"/>
+          <a:ext cx="4200000" cy="1500000"/>
         </p:xfrm>
         <a:graphic>
           <a:graphicData uri="http://schemas.openxmlformats.org/drawingml/2006/table">
@@ -7915,15 +7915,15 @@
                 <a:gridCol w="1100000"/>
                 <a:gridCol w="1000000"/>
               </a:tblGrid>
-              <a:tr h="283333">
-                <a:tc>
-                  <a:txBody>
-                    <a:bodyPr wrap="square"/>
-                    <a:lstStyle/>
-                    <a:p>
-                      <a:pPr algn="ctr"/>
-                      <a:r>
-                        <a:rPr sz="1000" b="1">
+              <a:tr h="250000">
+                <a:tc>
+                  <a:txBody>
+                    <a:bodyPr wrap="square"/>
+                    <a:lstStyle/>
+                    <a:p>
+                      <a:pPr algn="ctr"/>
+                      <a:r>
+                        <a:rPr sz="900" b="1">
                           <a:solidFill>
                             <a:srgbClr val="FFFFFF"/>
                           </a:solidFill>
@@ -7947,7 +7947,7 @@
                     <a:p>
                       <a:pPr algn="ctr"/>
                       <a:r>
-                        <a:rPr sz="1000" b="1">
+                        <a:rPr sz="900" b="1">
                           <a:solidFill>
                             <a:srgbClr val="FFFFFF"/>
                           </a:solidFill>
@@ -7971,7 +7971,7 @@
                     <a:p>
                       <a:pPr algn="ctr"/>
                       <a:r>
-                        <a:rPr sz="1000" b="1">
+                        <a:rPr sz="900" b="1">
                           <a:solidFill>
                             <a:srgbClr val="FFFFFF"/>
                           </a:solidFill>
@@ -7989,15 +7989,15 @@
                   </a:tcPr>
                 </a:tc>
               </a:tr>
-              <a:tr h="283333">
-                <a:tc>
-                  <a:txBody>
-                    <a:bodyPr wrap="square"/>
-                    <a:lstStyle/>
-                    <a:p>
-                      <a:pPr algn="ctr"/>
-                      <a:r>
-                        <a:rPr sz="900" b="0">
+              <a:tr h="250000">
+                <a:tc>
+                  <a:txBody>
+                    <a:bodyPr wrap="square"/>
+                    <a:lstStyle/>
+                    <a:p>
+                      <a:pPr algn="ctr"/>
+                      <a:r>
+                        <a:rPr sz="800" b="0">
                           <a:solidFill>
                             <a:srgbClr val="404040"/>
                           </a:solidFill>
@@ -8021,7 +8021,7 @@
                     <a:p>
                       <a:pPr algn="ctr"/>
                       <a:r>
-                        <a:rPr sz="900" b="0">
+                        <a:rPr sz="800" b="0">
                           <a:solidFill>
                             <a:srgbClr val="404040"/>
                           </a:solidFill>
@@ -8045,7 +8045,7 @@
                     <a:p>
                       <a:pPr algn="ctr"/>
                       <a:r>
-                        <a:rPr sz="900" b="0">
+                        <a:rPr sz="800" b="0">
                           <a:solidFill>
                             <a:srgbClr val="404040"/>
                           </a:solidFill>
@@ -8063,15 +8063,15 @@
                   </a:tcPr>
                 </a:tc>
               </a:tr>
-              <a:tr h="283333">
-                <a:tc>
-                  <a:txBody>
-                    <a:bodyPr wrap="square"/>
-                    <a:lstStyle/>
-                    <a:p>
-                      <a:pPr algn="ctr"/>
-                      <a:r>
-                        <a:rPr sz="900" b="0">
+              <a:tr h="250000">
+                <a:tc>
+                  <a:txBody>
+                    <a:bodyPr wrap="square"/>
+                    <a:lstStyle/>
+                    <a:p>
+                      <a:pPr algn="ctr"/>
+                      <a:r>
+                        <a:rPr sz="800" b="0">
                           <a:solidFill>
                             <a:srgbClr val="404040"/>
                           </a:solidFill>
@@ -8095,7 +8095,7 @@
                     <a:p>
                       <a:pPr algn="ctr"/>
                       <a:r>
-                        <a:rPr sz="900" b="0">
+                        <a:rPr sz="800" b="0">
                           <a:solidFill>
                             <a:srgbClr val="404040"/>
                           </a:solidFill>
@@ -8119,7 +8119,7 @@
                     <a:p>
                       <a:pPr algn="ctr"/>
                       <a:r>
-                        <a:rPr sz="900" b="0">
+                        <a:rPr sz="800" b="0">
                           <a:solidFill>
                             <a:srgbClr val="404040"/>
                           </a:solidFill>
@@ -8137,15 +8137,15 @@
                   </a:tcPr>
                 </a:tc>
               </a:tr>
-              <a:tr h="283333">
-                <a:tc>
-                  <a:txBody>
-                    <a:bodyPr wrap="square"/>
-                    <a:lstStyle/>
-                    <a:p>
-                      <a:pPr algn="ctr"/>
-                      <a:r>
-                        <a:rPr sz="900" b="0">
+              <a:tr h="250000">
+                <a:tc>
+                  <a:txBody>
+                    <a:bodyPr wrap="square"/>
+                    <a:lstStyle/>
+                    <a:p>
+                      <a:pPr algn="ctr"/>
+                      <a:r>
+                        <a:rPr sz="800" b="0">
                           <a:solidFill>
                             <a:srgbClr val="404040"/>
                           </a:solidFill>
@@ -8169,7 +8169,7 @@
                     <a:p>
                       <a:pPr algn="ctr"/>
                       <a:r>
-                        <a:rPr sz="900" b="0">
+                        <a:rPr sz="800" b="0">
                           <a:solidFill>
                             <a:srgbClr val="404040"/>
                           </a:solidFill>
@@ -8193,7 +8193,7 @@
                     <a:p>
                       <a:pPr algn="ctr"/>
                       <a:r>
-                        <a:rPr sz="900" b="0">
+                        <a:rPr sz="800" b="0">
                           <a:solidFill>
                             <a:srgbClr val="404040"/>
                           </a:solidFill>
@@ -8211,15 +8211,15 @@
                   </a:tcPr>
                 </a:tc>
               </a:tr>
-              <a:tr h="283333">
-                <a:tc>
-                  <a:txBody>
-                    <a:bodyPr wrap="square"/>
-                    <a:lstStyle/>
-                    <a:p>
-                      <a:pPr algn="ctr"/>
-                      <a:r>
-                        <a:rPr sz="900" b="0">
+              <a:tr h="250000">
+                <a:tc>
+                  <a:txBody>
+                    <a:bodyPr wrap="square"/>
+                    <a:lstStyle/>
+                    <a:p>
+                      <a:pPr algn="ctr"/>
+                      <a:r>
+                        <a:rPr sz="800" b="0">
                           <a:solidFill>
                             <a:srgbClr val="404040"/>
                           </a:solidFill>
@@ -8243,7 +8243,7 @@
                     <a:p>
                       <a:pPr algn="ctr"/>
                       <a:r>
-                        <a:rPr sz="900" b="0">
+                        <a:rPr sz="800" b="0">
                           <a:solidFill>
                             <a:srgbClr val="404040"/>
                           </a:solidFill>
@@ -8267,7 +8267,7 @@
                     <a:p>
                       <a:pPr algn="ctr"/>
                       <a:r>
-                        <a:rPr sz="900" b="0">
+                        <a:rPr sz="800" b="0">
                           <a:solidFill>
                             <a:srgbClr val="404040"/>
                           </a:solidFill>
@@ -8285,15 +8285,15 @@
                   </a:tcPr>
                 </a:tc>
               </a:tr>
-              <a:tr h="283335">
-                <a:tc>
-                  <a:txBody>
-                    <a:bodyPr wrap="square"/>
-                    <a:lstStyle/>
-                    <a:p>
-                      <a:pPr algn="ctr"/>
-                      <a:r>
-                        <a:rPr sz="900" b="0">
+              <a:tr h="250000">
+                <a:tc>
+                  <a:txBody>
+                    <a:bodyPr wrap="square"/>
+                    <a:lstStyle/>
+                    <a:p>
+                      <a:pPr algn="ctr"/>
+                      <a:r>
+                        <a:rPr sz="800" b="0">
                           <a:solidFill>
                             <a:srgbClr val="404040"/>
                           </a:solidFill>
@@ -8317,7 +8317,7 @@
                     <a:p>
                       <a:pPr algn="ctr"/>
                       <a:r>
-                        <a:rPr sz="900" b="0">
+                        <a:rPr sz="800" b="0">
                           <a:solidFill>
                             <a:srgbClr val="404040"/>
                           </a:solidFill>
@@ -8341,7 +8341,7 @@
                     <a:p>
                       <a:pPr algn="ctr"/>
                       <a:r>
-                        <a:rPr sz="900" b="0">
+                        <a:rPr sz="800" b="0">
                           <a:solidFill>
                             <a:srgbClr val="404040"/>
                           </a:solidFill>
@@ -8372,7 +8372,7 @@
         <p:spPr>
           <a:xfrm>
             <a:off x="4550000" y="580000"/>
-            <a:ext cx="4400000" cy="320000"/>
+            <a:ext cx="4400000" cy="300000"/>
           </a:xfrm>
           <a:prstGeom prst="roundRect">
             <a:avLst/>
@@ -8405,7 +8405,7 @@
           <a:p>
             <a:pPr algn="ctr"/>
             <a:r>
-              <a:rPr sz="1100" b="1">
+              <a:rPr sz="1000" b="1">
                 <a:solidFill>
                   <a:srgbClr val="404040"/>
                 </a:solidFill>
@@ -8425,8 +8425,8 @@
         </p:nvSpPr>
         <p:spPr>
           <a:xfrm>
-            <a:off x="4550000" y="950000"/>
-            <a:ext cx="4400000" cy="1500000"/>
+            <a:off x="4550000" y="910000"/>
+            <a:ext cx="4400000" cy="1300000"/>
           </a:xfrm>
           <a:prstGeom prst="rect">
             <a:avLst/>
@@ -8455,7 +8455,7 @@
                 <a:ea typeface="Meiryo UI"/>
                 <a:latin typeface="Meiryo UI"/>
               </a:rPr>
-              <a:t>○ 9年間の系統性を意識した指導の改善</a:t>
+              <a:t>○ 9年間の系統性を意識した指導改善（教員80%）</a:t>
             </a:r>
           </a:p>
           <a:p>
@@ -8468,7 +8468,7 @@
                 <a:ea typeface="Meiryo UI"/>
                 <a:latin typeface="Meiryo UI"/>
               </a:rPr>
-              <a:t>○ 全教職員で全児童生徒を見守る体制</a:t>
+              <a:t>○ 全教職員で全児童生徒を見守る体制（保護者84%）</a:t>
             </a:r>
           </a:p>
           <a:p>
@@ -8481,7 +8481,7 @@
                 <a:ea typeface="Meiryo UI"/>
                 <a:latin typeface="Meiryo UI"/>
               </a:rPr>
-              <a:t>○ 4-3-2区切りで子供たちが成長（4年生がリーダー経験）</a:t>
+              <a:t>○ 4-3-2区切りで子供が成長（4年生がリーダー経験）</a:t>
             </a:r>
           </a:p>
           <a:p>
@@ -8494,7 +8494,7 @@
                 <a:ea typeface="Meiryo UI"/>
                 <a:latin typeface="Meiryo UI"/>
               </a:rPr>
-              <a:t>○ 一部教科担任制が成長に合致（保護者89% 関係者90%）</a:t>
+              <a:t>○ 一部教科担任制が成長に合致（保護者89%・関係者90%）</a:t>
             </a:r>
           </a:p>
           <a:p>
@@ -8520,8 +8520,8 @@
         </p:nvSpPr>
         <p:spPr>
           <a:xfrm>
-            <a:off x="4550000" y="2550000"/>
-            <a:ext cx="4400000" cy="320000"/>
+            <a:off x="4550000" y="2300000"/>
+            <a:ext cx="4400000" cy="300000"/>
           </a:xfrm>
           <a:prstGeom prst="roundRect">
             <a:avLst/>
@@ -8554,7 +8554,7 @@
           <a:p>
             <a:pPr algn="ctr"/>
             <a:r>
-              <a:rPr sz="1100" b="1">
+              <a:rPr sz="1000" b="1">
                 <a:solidFill>
                   <a:srgbClr val="404040"/>
                 </a:solidFill>
@@ -8574,8 +8574,8 @@
         </p:nvSpPr>
         <p:spPr>
           <a:xfrm>
-            <a:off x="4550000" y="2900000"/>
-            <a:ext cx="4400000" cy="1700000"/>
+            <a:off x="4550000" y="2630000"/>
+            <a:ext cx="4400000" cy="1500000"/>
           </a:xfrm>
           <a:prstGeom prst="rect">
             <a:avLst/>
@@ -8604,7 +8604,7 @@
                 <a:ea typeface="Meiryo UI"/>
                 <a:latin typeface="Meiryo UI"/>
               </a:rPr>
-              <a:t>△ 7年生から外部入学する生徒の保護者に不安</a:t>
+              <a:t>△ 7年生外部入学者の保護者に不安（情報発信負担）</a:t>
             </a:r>
           </a:p>
           <a:p>
@@ -8617,7 +8617,7 @@
                 <a:ea typeface="Meiryo UI"/>
                 <a:latin typeface="Meiryo UI"/>
               </a:rPr>
-              <a:t>△ 体育施設・特別教室の小中共用に課題（体格差・教材の違い）</a:t>
+              <a:t>△ 体育施設・特別教室の小中共用に課題（体格差・教材差）</a:t>
             </a:r>
           </a:p>
           <a:p>
@@ -8630,7 +8630,7 @@
                 <a:ea typeface="Meiryo UI"/>
                 <a:latin typeface="Meiryo UI"/>
               </a:rPr>
-              <a:t>△ 5・6年生が部活動に入る活動は限定的（活発化57%）</a:t>
+              <a:t>△ 5・6年生の部活動参加活発化は57%にとどまる</a:t>
             </a:r>
           </a:p>
           <a:p>
@@ -8656,20 +8656,7 @@
                 <a:ea typeface="Meiryo UI"/>
                 <a:latin typeface="Meiryo UI"/>
               </a:rPr>
-              <a:t>△ 異学年交流の効果は質的には認められるが、定量的な学力・</a:t>
-            </a:r>
-          </a:p>
-          <a:p>
-            <a:pPr algn="l"/>
-            <a:r>
-              <a:rPr sz="1000" b="0">
-                <a:solidFill>
-                  <a:srgbClr val="404040"/>
-                </a:solidFill>
-                <a:ea typeface="Meiryo UI"/>
-                <a:latin typeface="Meiryo UI"/>
-              </a:rPr>
-              <a:t>　体力向上効果のエビデンスは限定的</a:t>
+              <a:t>△ 異学年交流の「定量的」教育効果のエビデンスは限定的</a:t>
             </a:r>
           </a:p>
         </p:txBody>
@@ -8682,8 +8669,332 @@
         </p:nvSpPr>
         <p:spPr>
           <a:xfrm>
-            <a:off x="180000" y="4680000"/>
-            <a:ext cx="8780000" cy="360000"/>
+            <a:off x="180000" y="4240000"/>
+            <a:ext cx="8780000" cy="280000"/>
+          </a:xfrm>
+          <a:prstGeom prst="roundRect">
+            <a:avLst/>
+          </a:prstGeom>
+          <a:solidFill>
+            <a:srgbClr val="7030A0"/>
+          </a:solidFill>
+          <a:ln>
+            <a:noFill/>
+          </a:ln>
+          <a:effectLst/>
+        </p:spPr>
+        <p:style>
+          <a:lnRef idx="1">
+            <a:schemeClr val="accent1"/>
+          </a:lnRef>
+          <a:fillRef idx="3">
+            <a:schemeClr val="accent1"/>
+          </a:fillRef>
+          <a:effectRef idx="2">
+            <a:schemeClr val="accent1"/>
+          </a:effectRef>
+          <a:fontRef idx="minor">
+            <a:schemeClr val="lt1"/>
+          </a:fontRef>
+        </p:style>
+        <p:txBody>
+          <a:bodyPr rtlCol="0" anchor="ctr" lIns="60000" rIns="60000" tIns="15000" bIns="15000"/>
+          <a:lstStyle/>
+          <a:p>
+            <a:pPr algn="ctr"/>
+            <a:r>
+              <a:rPr sz="1000" b="1">
+                <a:solidFill>
+                  <a:srgbClr val="FFFFFF"/>
+                </a:solidFill>
+                <a:ea typeface="Meiryo UI"/>
+                <a:latin typeface="Meiryo UI"/>
+              </a:rPr>
+              <a:t>■ 本資料作成にあたっての専門家10視点（教育委員会有識者会議）</a:t>
+            </a:r>
+          </a:p>
+        </p:txBody>
+      </p:sp>
+      <p:sp>
+        <p:nvSpPr>
+          <p:cNvPr id="14" name="Rounded Rectangle 13"/>
+          <p:cNvSpPr/>
+          <p:nvPr/>
+        </p:nvSpPr>
+        <p:spPr>
+          <a:xfrm>
+            <a:off x="180000" y="4560000"/>
+            <a:ext cx="1711200" cy="220000"/>
+          </a:xfrm>
+          <a:prstGeom prst="roundRect">
+            <a:avLst/>
+          </a:prstGeom>
+          <a:solidFill>
+            <a:srgbClr val="7030A0"/>
+          </a:solidFill>
+          <a:ln>
+            <a:noFill/>
+          </a:ln>
+          <a:effectLst/>
+        </p:spPr>
+        <p:style>
+          <a:lnRef idx="1">
+            <a:schemeClr val="accent1"/>
+          </a:lnRef>
+          <a:fillRef idx="3">
+            <a:schemeClr val="accent1"/>
+          </a:fillRef>
+          <a:effectRef idx="2">
+            <a:schemeClr val="accent1"/>
+          </a:effectRef>
+          <a:fontRef idx="minor">
+            <a:schemeClr val="lt1"/>
+          </a:fontRef>
+        </p:style>
+        <p:txBody>
+          <a:bodyPr rtlCol="0" anchor="ctr" lIns="24000" rIns="24000" tIns="8000" bIns="8000"/>
+          <a:lstStyle/>
+          <a:p>
+            <a:pPr algn="ctr"/>
+            <a:r>
+              <a:rPr sz="800" b="1">
+                <a:solidFill>
+                  <a:srgbClr val="FFFFFF"/>
+                </a:solidFill>
+                <a:ea typeface="Meiryo UI"/>
+                <a:latin typeface="Meiryo UI"/>
+              </a:rPr>
+              <a:t>教育社会学</a:t>
+            </a:r>
+          </a:p>
+        </p:txBody>
+      </p:sp>
+      <p:sp>
+        <p:nvSpPr>
+          <p:cNvPr id="15" name="Rounded Rectangle 14"/>
+          <p:cNvSpPr/>
+          <p:nvPr/>
+        </p:nvSpPr>
+        <p:spPr>
+          <a:xfrm>
+            <a:off x="1947200" y="4560000"/>
+            <a:ext cx="1711200" cy="220000"/>
+          </a:xfrm>
+          <a:prstGeom prst="roundRect">
+            <a:avLst/>
+          </a:prstGeom>
+          <a:solidFill>
+            <a:srgbClr val="7030A0"/>
+          </a:solidFill>
+          <a:ln>
+            <a:noFill/>
+          </a:ln>
+          <a:effectLst/>
+        </p:spPr>
+        <p:style>
+          <a:lnRef idx="1">
+            <a:schemeClr val="accent1"/>
+          </a:lnRef>
+          <a:fillRef idx="3">
+            <a:schemeClr val="accent1"/>
+          </a:fillRef>
+          <a:effectRef idx="2">
+            <a:schemeClr val="accent1"/>
+          </a:effectRef>
+          <a:fontRef idx="minor">
+            <a:schemeClr val="lt1"/>
+          </a:fontRef>
+        </p:style>
+        <p:txBody>
+          <a:bodyPr rtlCol="0" anchor="ctr" lIns="24000" rIns="24000" tIns="8000" bIns="8000"/>
+          <a:lstStyle/>
+          <a:p>
+            <a:pPr algn="ctr"/>
+            <a:r>
+              <a:rPr sz="800" b="1">
+                <a:solidFill>
+                  <a:srgbClr val="FFFFFF"/>
+                </a:solidFill>
+                <a:ea typeface="Meiryo UI"/>
+                <a:latin typeface="Meiryo UI"/>
+              </a:rPr>
+              <a:t>教育経済学</a:t>
+            </a:r>
+          </a:p>
+        </p:txBody>
+      </p:sp>
+      <p:sp>
+        <p:nvSpPr>
+          <p:cNvPr id="16" name="Rounded Rectangle 15"/>
+          <p:cNvSpPr/>
+          <p:nvPr/>
+        </p:nvSpPr>
+        <p:spPr>
+          <a:xfrm>
+            <a:off x="3714400" y="4560000"/>
+            <a:ext cx="1711200" cy="220000"/>
+          </a:xfrm>
+          <a:prstGeom prst="roundRect">
+            <a:avLst/>
+          </a:prstGeom>
+          <a:solidFill>
+            <a:srgbClr val="7030A0"/>
+          </a:solidFill>
+          <a:ln>
+            <a:noFill/>
+          </a:ln>
+          <a:effectLst/>
+        </p:spPr>
+        <p:style>
+          <a:lnRef idx="1">
+            <a:schemeClr val="accent1"/>
+          </a:lnRef>
+          <a:fillRef idx="3">
+            <a:schemeClr val="accent1"/>
+          </a:fillRef>
+          <a:effectRef idx="2">
+            <a:schemeClr val="accent1"/>
+          </a:effectRef>
+          <a:fontRef idx="minor">
+            <a:schemeClr val="lt1"/>
+          </a:fontRef>
+        </p:style>
+        <p:txBody>
+          <a:bodyPr rtlCol="0" anchor="ctr" lIns="24000" rIns="24000" tIns="8000" bIns="8000"/>
+          <a:lstStyle/>
+          <a:p>
+            <a:pPr algn="ctr"/>
+            <a:r>
+              <a:rPr sz="800" b="1">
+                <a:solidFill>
+                  <a:srgbClr val="FFFFFF"/>
+                </a:solidFill>
+                <a:ea typeface="Meiryo UI"/>
+                <a:latin typeface="Meiryo UI"/>
+              </a:rPr>
+              <a:t>教育統計学</a:t>
+            </a:r>
+          </a:p>
+        </p:txBody>
+      </p:sp>
+      <p:sp>
+        <p:nvSpPr>
+          <p:cNvPr id="17" name="Rounded Rectangle 16"/>
+          <p:cNvSpPr/>
+          <p:nvPr/>
+        </p:nvSpPr>
+        <p:spPr>
+          <a:xfrm>
+            <a:off x="5481600" y="4560000"/>
+            <a:ext cx="1711200" cy="220000"/>
+          </a:xfrm>
+          <a:prstGeom prst="roundRect">
+            <a:avLst/>
+          </a:prstGeom>
+          <a:solidFill>
+            <a:srgbClr val="7030A0"/>
+          </a:solidFill>
+          <a:ln>
+            <a:noFill/>
+          </a:ln>
+          <a:effectLst/>
+        </p:spPr>
+        <p:style>
+          <a:lnRef idx="1">
+            <a:schemeClr val="accent1"/>
+          </a:lnRef>
+          <a:fillRef idx="3">
+            <a:schemeClr val="accent1"/>
+          </a:fillRef>
+          <a:effectRef idx="2">
+            <a:schemeClr val="accent1"/>
+          </a:effectRef>
+          <a:fontRef idx="minor">
+            <a:schemeClr val="lt1"/>
+          </a:fontRef>
+        </p:style>
+        <p:txBody>
+          <a:bodyPr rtlCol="0" anchor="ctr" lIns="24000" rIns="24000" tIns="8000" bIns="8000"/>
+          <a:lstStyle/>
+          <a:p>
+            <a:pPr algn="ctr"/>
+            <a:r>
+              <a:rPr sz="800" b="1">
+                <a:solidFill>
+                  <a:srgbClr val="FFFFFF"/>
+                </a:solidFill>
+                <a:ea typeface="Meiryo UI"/>
+                <a:latin typeface="Meiryo UI"/>
+              </a:rPr>
+              <a:t>教育心理学</a:t>
+            </a:r>
+          </a:p>
+        </p:txBody>
+      </p:sp>
+      <p:sp>
+        <p:nvSpPr>
+          <p:cNvPr id="18" name="Rounded Rectangle 17"/>
+          <p:cNvSpPr/>
+          <p:nvPr/>
+        </p:nvSpPr>
+        <p:spPr>
+          <a:xfrm>
+            <a:off x="7248800" y="4560000"/>
+            <a:ext cx="1711200" cy="220000"/>
+          </a:xfrm>
+          <a:prstGeom prst="roundRect">
+            <a:avLst/>
+          </a:prstGeom>
+          <a:solidFill>
+            <a:srgbClr val="7030A0"/>
+          </a:solidFill>
+          <a:ln>
+            <a:noFill/>
+          </a:ln>
+          <a:effectLst/>
+        </p:spPr>
+        <p:style>
+          <a:lnRef idx="1">
+            <a:schemeClr val="accent1"/>
+          </a:lnRef>
+          <a:fillRef idx="3">
+            <a:schemeClr val="accent1"/>
+          </a:fillRef>
+          <a:effectRef idx="2">
+            <a:schemeClr val="accent1"/>
+          </a:effectRef>
+          <a:fontRef idx="minor">
+            <a:schemeClr val="lt1"/>
+          </a:fontRef>
+        </p:style>
+        <p:txBody>
+          <a:bodyPr rtlCol="0" anchor="ctr" lIns="24000" rIns="24000" tIns="8000" bIns="8000"/>
+          <a:lstStyle/>
+          <a:p>
+            <a:pPr algn="ctr"/>
+            <a:r>
+              <a:rPr sz="800" b="1">
+                <a:solidFill>
+                  <a:srgbClr val="FFFFFF"/>
+                </a:solidFill>
+                <a:ea typeface="Meiryo UI"/>
+                <a:latin typeface="Meiryo UI"/>
+              </a:rPr>
+              <a:t>学校経営学</a:t>
+            </a:r>
+          </a:p>
+        </p:txBody>
+      </p:sp>
+      <p:sp>
+        <p:nvSpPr>
+          <p:cNvPr id="19" name="Rounded Rectangle 18"/>
+          <p:cNvSpPr/>
+          <p:nvPr/>
+        </p:nvSpPr>
+        <p:spPr>
+          <a:xfrm>
+            <a:off x="180000" y="4810000"/>
+            <a:ext cx="1711200" cy="220000"/>
           </a:xfrm>
           <a:prstGeom prst="roundRect">
             <a:avLst/>
@@ -8711,19 +9022,235 @@
           </a:fontRef>
         </p:style>
         <p:txBody>
-          <a:bodyPr rtlCol="0" anchor="ctr" lIns="36000" rIns="36000" tIns="18000" bIns="18000" wrap="square"/>
+          <a:bodyPr rtlCol="0" anchor="ctr" lIns="24000" rIns="24000" tIns="8000" bIns="8000"/>
           <a:lstStyle/>
           <a:p>
             <a:pPr algn="ctr"/>
             <a:r>
-              <a:rPr sz="1100" b="1">
+              <a:rPr sz="800" b="1">
                 <a:solidFill>
                   <a:srgbClr val="FFFFFF"/>
                 </a:solidFill>
                 <a:ea typeface="Meiryo UI"/>
                 <a:latin typeface="Meiryo UI"/>
               </a:rPr>
-              <a:t>検証報告書では「効果」と「課題」が併記されており、定量的な教育効果のエビデンスは限定的。次スライド以降で大泉桜学園の現状データを確認する。</a:t>
+              <a:t>発達心理学</a:t>
+            </a:r>
+          </a:p>
+        </p:txBody>
+      </p:sp>
+      <p:sp>
+        <p:nvSpPr>
+          <p:cNvPr id="20" name="Rounded Rectangle 19"/>
+          <p:cNvSpPr/>
+          <p:nvPr/>
+        </p:nvSpPr>
+        <p:spPr>
+          <a:xfrm>
+            <a:off x="1947200" y="4810000"/>
+            <a:ext cx="1711200" cy="220000"/>
+          </a:xfrm>
+          <a:prstGeom prst="roundRect">
+            <a:avLst/>
+          </a:prstGeom>
+          <a:solidFill>
+            <a:srgbClr val="0F9ED5"/>
+          </a:solidFill>
+          <a:ln>
+            <a:noFill/>
+          </a:ln>
+          <a:effectLst/>
+        </p:spPr>
+        <p:style>
+          <a:lnRef idx="1">
+            <a:schemeClr val="accent1"/>
+          </a:lnRef>
+          <a:fillRef idx="3">
+            <a:schemeClr val="accent1"/>
+          </a:fillRef>
+          <a:effectRef idx="2">
+            <a:schemeClr val="accent1"/>
+          </a:effectRef>
+          <a:fontRef idx="minor">
+            <a:schemeClr val="lt1"/>
+          </a:fontRef>
+        </p:style>
+        <p:txBody>
+          <a:bodyPr rtlCol="0" anchor="ctr" lIns="24000" rIns="24000" tIns="8000" bIns="8000"/>
+          <a:lstStyle/>
+          <a:p>
+            <a:pPr algn="ctr"/>
+            <a:r>
+              <a:rPr sz="800" b="1">
+                <a:solidFill>
+                  <a:srgbClr val="FFFFFF"/>
+                </a:solidFill>
+                <a:ea typeface="Meiryo UI"/>
+                <a:latin typeface="Meiryo UI"/>
+              </a:rPr>
+              <a:t>比較教育学</a:t>
+            </a:r>
+          </a:p>
+        </p:txBody>
+      </p:sp>
+      <p:sp>
+        <p:nvSpPr>
+          <p:cNvPr id="21" name="Rounded Rectangle 20"/>
+          <p:cNvSpPr/>
+          <p:nvPr/>
+        </p:nvSpPr>
+        <p:spPr>
+          <a:xfrm>
+            <a:off x="3714400" y="4810000"/>
+            <a:ext cx="1711200" cy="220000"/>
+          </a:xfrm>
+          <a:prstGeom prst="roundRect">
+            <a:avLst/>
+          </a:prstGeom>
+          <a:solidFill>
+            <a:srgbClr val="0F9ED5"/>
+          </a:solidFill>
+          <a:ln>
+            <a:noFill/>
+          </a:ln>
+          <a:effectLst/>
+        </p:spPr>
+        <p:style>
+          <a:lnRef idx="1">
+            <a:schemeClr val="accent1"/>
+          </a:lnRef>
+          <a:fillRef idx="3">
+            <a:schemeClr val="accent1"/>
+          </a:fillRef>
+          <a:effectRef idx="2">
+            <a:schemeClr val="accent1"/>
+          </a:effectRef>
+          <a:fontRef idx="minor">
+            <a:schemeClr val="lt1"/>
+          </a:fontRef>
+        </p:style>
+        <p:txBody>
+          <a:bodyPr rtlCol="0" anchor="ctr" lIns="24000" rIns="24000" tIns="8000" bIns="8000"/>
+          <a:lstStyle/>
+          <a:p>
+            <a:pPr algn="ctr"/>
+            <a:r>
+              <a:rPr sz="800" b="1">
+                <a:solidFill>
+                  <a:srgbClr val="FFFFFF"/>
+                </a:solidFill>
+                <a:ea typeface="Meiryo UI"/>
+                <a:latin typeface="Meiryo UI"/>
+              </a:rPr>
+              <a:t>政策評価学</a:t>
+            </a:r>
+          </a:p>
+        </p:txBody>
+      </p:sp>
+      <p:sp>
+        <p:nvSpPr>
+          <p:cNvPr id="22" name="Rounded Rectangle 21"/>
+          <p:cNvSpPr/>
+          <p:nvPr/>
+        </p:nvSpPr>
+        <p:spPr>
+          <a:xfrm>
+            <a:off x="5481600" y="4810000"/>
+            <a:ext cx="1711200" cy="220000"/>
+          </a:xfrm>
+          <a:prstGeom prst="roundRect">
+            <a:avLst/>
+          </a:prstGeom>
+          <a:solidFill>
+            <a:srgbClr val="0F9ED5"/>
+          </a:solidFill>
+          <a:ln>
+            <a:noFill/>
+          </a:ln>
+          <a:effectLst/>
+        </p:spPr>
+        <p:style>
+          <a:lnRef idx="1">
+            <a:schemeClr val="accent1"/>
+          </a:lnRef>
+          <a:fillRef idx="3">
+            <a:schemeClr val="accent1"/>
+          </a:fillRef>
+          <a:effectRef idx="2">
+            <a:schemeClr val="accent1"/>
+          </a:effectRef>
+          <a:fontRef idx="minor">
+            <a:schemeClr val="lt1"/>
+          </a:fontRef>
+        </p:style>
+        <p:txBody>
+          <a:bodyPr rtlCol="0" anchor="ctr" lIns="24000" rIns="24000" tIns="8000" bIns="8000"/>
+          <a:lstStyle/>
+          <a:p>
+            <a:pPr algn="ctr"/>
+            <a:r>
+              <a:rPr sz="800" b="1">
+                <a:solidFill>
+                  <a:srgbClr val="FFFFFF"/>
+                </a:solidFill>
+                <a:ea typeface="Meiryo UI"/>
+                <a:latin typeface="Meiryo UI"/>
+              </a:rPr>
+              <a:t>特別支援教育</a:t>
+            </a:r>
+          </a:p>
+        </p:txBody>
+      </p:sp>
+      <p:sp>
+        <p:nvSpPr>
+          <p:cNvPr id="23" name="Rounded Rectangle 22"/>
+          <p:cNvSpPr/>
+          <p:nvPr/>
+        </p:nvSpPr>
+        <p:spPr>
+          <a:xfrm>
+            <a:off x="7248800" y="4810000"/>
+            <a:ext cx="1711200" cy="220000"/>
+          </a:xfrm>
+          <a:prstGeom prst="roundRect">
+            <a:avLst/>
+          </a:prstGeom>
+          <a:solidFill>
+            <a:srgbClr val="0F9ED5"/>
+          </a:solidFill>
+          <a:ln>
+            <a:noFill/>
+          </a:ln>
+          <a:effectLst/>
+        </p:spPr>
+        <p:style>
+          <a:lnRef idx="1">
+            <a:schemeClr val="accent1"/>
+          </a:lnRef>
+          <a:fillRef idx="3">
+            <a:schemeClr val="accent1"/>
+          </a:fillRef>
+          <a:effectRef idx="2">
+            <a:schemeClr val="accent1"/>
+          </a:effectRef>
+          <a:fontRef idx="minor">
+            <a:schemeClr val="lt1"/>
+          </a:fontRef>
+        </p:style>
+        <p:txBody>
+          <a:bodyPr rtlCol="0" anchor="ctr" lIns="24000" rIns="24000" tIns="8000" bIns="8000"/>
+          <a:lstStyle/>
+          <a:p>
+            <a:pPr algn="ctr"/>
+            <a:r>
+              <a:rPr sz="800" b="1">
+                <a:solidFill>
+                  <a:srgbClr val="FFFFFF"/>
+                </a:solidFill>
+                <a:ea typeface="Meiryo UI"/>
+                <a:latin typeface="Meiryo UI"/>
+              </a:rPr>
+              <a:t>教育行政学</a:t>
             </a:r>
           </a:p>
         </p:txBody>
@@ -8788,14 +9315,14 @@
           <a:p>
             <a:pPr algn="l"/>
             <a:r>
-              <a:rPr sz="2200" b="1">
+              <a:rPr sz="2000" b="1">
                 <a:solidFill>
                   <a:srgbClr val="FFFFFF"/>
                 </a:solidFill>
                 <a:ea typeface="Meiryo UI"/>
                 <a:latin typeface="Meiryo UI"/>
               </a:rPr>
-              <a:t>２　児童生徒数の推移（小規模校化は解決していない）</a:t>
+              <a:t>２　児童生徒数の推移／他自治体・全国動向との比較</a:t>
             </a:r>
           </a:p>
         </p:txBody>
@@ -8899,7 +9426,7 @@
         <p:spPr>
           <a:xfrm>
             <a:off x="180000" y="580000"/>
-            <a:ext cx="4400000" cy="320000"/>
+            <a:ext cx="4400000" cy="280000"/>
           </a:xfrm>
           <a:prstGeom prst="roundRect">
             <a:avLst/>
@@ -8932,7 +9459,7 @@
           <a:p>
             <a:pPr algn="ctr"/>
             <a:r>
-              <a:rPr sz="1100" b="1">
+              <a:rPr sz="1000" b="1">
                 <a:solidFill>
                   <a:srgbClr val="404040"/>
                 </a:solidFill>
@@ -8953,8 +9480,8 @@
           <p:nvPr/>
         </p:nvGraphicFramePr>
         <p:xfrm>
-          <a:off x="180000" y="950000"/>
-          <a:ext cx="4400000" cy="2400000"/>
+          <a:off x="180000" y="880000"/>
+          <a:ext cx="4400000" cy="1900000"/>
         </p:xfrm>
         <a:graphic>
           <a:graphicData uri="http://schemas.openxmlformats.org/drawingml/2006/table">
@@ -8963,14 +9490,160 @@
                 <a:tableStyleId>{5C22544A-7EE6-4342-B048-85BDC9FD1C3A}</a:tableStyleId>
               </a:tblPr>
               <a:tblGrid>
-                <a:gridCol w="1300000"/>
-                <a:gridCol w="620000"/>
-                <a:gridCol w="620000"/>
-                <a:gridCol w="620000"/>
-                <a:gridCol w="620000"/>
-                <a:gridCol w="620000"/>
+                <a:gridCol w="1400000"/>
+                <a:gridCol w="600000"/>
+                <a:gridCol w="600000"/>
+                <a:gridCol w="600000"/>
+                <a:gridCol w="600000"/>
+                <a:gridCol w="600000"/>
               </a:tblGrid>
-              <a:tr h="342857">
+              <a:tr h="271428">
+                <a:tc>
+                  <a:txBody>
+                    <a:bodyPr wrap="square"/>
+                    <a:lstStyle/>
+                    <a:p>
+                      <a:pPr algn="ctr"/>
+                      <a:r>
+                        <a:rPr sz="900" b="1">
+                          <a:solidFill>
+                            <a:srgbClr val="FFFFFF"/>
+                          </a:solidFill>
+                          <a:ea typeface="Meiryo UI"/>
+                          <a:latin typeface="Meiryo UI"/>
+                        </a:rPr>
+                        <a:t/>
+                      </a:r>
+                    </a:p>
+                  </a:txBody>
+                  <a:tcPr marL="36000" marR="36000" marT="18000" marB="18000">
+                    <a:solidFill>
+                      <a:srgbClr val="0F9ED5"/>
+                    </a:solidFill>
+                  </a:tcPr>
+                </a:tc>
+                <a:tc>
+                  <a:txBody>
+                    <a:bodyPr wrap="square"/>
+                    <a:lstStyle/>
+                    <a:p>
+                      <a:pPr algn="ctr"/>
+                      <a:r>
+                        <a:rPr sz="900" b="1">
+                          <a:solidFill>
+                            <a:srgbClr val="FFFFFF"/>
+                          </a:solidFill>
+                          <a:ea typeface="Meiryo UI"/>
+                          <a:latin typeface="Meiryo UI"/>
+                        </a:rPr>
+                        <a:t>R3</a:t>
+                      </a:r>
+                    </a:p>
+                  </a:txBody>
+                  <a:tcPr marL="36000" marR="36000" marT="18000" marB="18000">
+                    <a:solidFill>
+                      <a:srgbClr val="0F9ED5"/>
+                    </a:solidFill>
+                  </a:tcPr>
+                </a:tc>
+                <a:tc>
+                  <a:txBody>
+                    <a:bodyPr wrap="square"/>
+                    <a:lstStyle/>
+                    <a:p>
+                      <a:pPr algn="ctr"/>
+                      <a:r>
+                        <a:rPr sz="900" b="1">
+                          <a:solidFill>
+                            <a:srgbClr val="FFFFFF"/>
+                          </a:solidFill>
+                          <a:ea typeface="Meiryo UI"/>
+                          <a:latin typeface="Meiryo UI"/>
+                        </a:rPr>
+                        <a:t>R4</a:t>
+                      </a:r>
+                    </a:p>
+                  </a:txBody>
+                  <a:tcPr marL="36000" marR="36000" marT="18000" marB="18000">
+                    <a:solidFill>
+                      <a:srgbClr val="0F9ED5"/>
+                    </a:solidFill>
+                  </a:tcPr>
+                </a:tc>
+                <a:tc>
+                  <a:txBody>
+                    <a:bodyPr wrap="square"/>
+                    <a:lstStyle/>
+                    <a:p>
+                      <a:pPr algn="ctr"/>
+                      <a:r>
+                        <a:rPr sz="900" b="1">
+                          <a:solidFill>
+                            <a:srgbClr val="FFFFFF"/>
+                          </a:solidFill>
+                          <a:ea typeface="Meiryo UI"/>
+                          <a:latin typeface="Meiryo UI"/>
+                        </a:rPr>
+                        <a:t>R5</a:t>
+                      </a:r>
+                    </a:p>
+                  </a:txBody>
+                  <a:tcPr marL="36000" marR="36000" marT="18000" marB="18000">
+                    <a:solidFill>
+                      <a:srgbClr val="0F9ED5"/>
+                    </a:solidFill>
+                  </a:tcPr>
+                </a:tc>
+                <a:tc>
+                  <a:txBody>
+                    <a:bodyPr wrap="square"/>
+                    <a:lstStyle/>
+                    <a:p>
+                      <a:pPr algn="ctr"/>
+                      <a:r>
+                        <a:rPr sz="900" b="1">
+                          <a:solidFill>
+                            <a:srgbClr val="FFFFFF"/>
+                          </a:solidFill>
+                          <a:ea typeface="Meiryo UI"/>
+                          <a:latin typeface="Meiryo UI"/>
+                        </a:rPr>
+                        <a:t>R6</a:t>
+                      </a:r>
+                    </a:p>
+                  </a:txBody>
+                  <a:tcPr marL="36000" marR="36000" marT="18000" marB="18000">
+                    <a:solidFill>
+                      <a:srgbClr val="0F9ED5"/>
+                    </a:solidFill>
+                  </a:tcPr>
+                </a:tc>
+                <a:tc>
+                  <a:txBody>
+                    <a:bodyPr wrap="square"/>
+                    <a:lstStyle/>
+                    <a:p>
+                      <a:pPr algn="ctr"/>
+                      <a:r>
+                        <a:rPr sz="900" b="1">
+                          <a:solidFill>
+                            <a:srgbClr val="FFFFFF"/>
+                          </a:solidFill>
+                          <a:ea typeface="Meiryo UI"/>
+                          <a:latin typeface="Meiryo UI"/>
+                        </a:rPr>
+                        <a:t>R7</a:t>
+                      </a:r>
+                    </a:p>
+                  </a:txBody>
+                  <a:tcPr marL="36000" marR="36000" marT="18000" marB="18000">
+                    <a:solidFill>
+                      <a:srgbClr val="0F9ED5"/>
+                    </a:solidFill>
+                  </a:tcPr>
+                </a:tc>
+              </a:tr>
+              <a:tr h="271428">
                 <a:tc>
                   <a:txBody>
                     <a:bodyPr wrap="square"/>
@@ -8980,21 +9653,143 @@
                       <a:r>
                         <a:rPr sz="800" b="1">
                           <a:solidFill>
-                            <a:srgbClr val="FFFFFF"/>
-                          </a:solidFill>
-                          <a:ea typeface="Meiryo UI"/>
-                          <a:latin typeface="Meiryo UI"/>
-                        </a:rPr>
-                        <a:t/>
-                      </a:r>
-                    </a:p>
-                  </a:txBody>
-                  <a:tcPr marL="36000" marR="36000" marT="18000" marB="18000">
-                    <a:solidFill>
-                      <a:srgbClr val="0F9ED5"/>
-                    </a:solidFill>
-                  </a:tcPr>
-                </a:tc>
+                            <a:srgbClr val="404040"/>
+                          </a:solidFill>
+                          <a:ea typeface="Meiryo UI"/>
+                          <a:latin typeface="Meiryo UI"/>
+                        </a:rPr>
+                        <a:t>区立(桜中)</a:t>
+                      </a:r>
+                    </a:p>
+                  </a:txBody>
+                  <a:tcPr marL="36000" marR="36000" marT="18000" marB="18000">
+                    <a:solidFill>
+                      <a:srgbClr val="E8F7F9"/>
+                    </a:solidFill>
+                  </a:tcPr>
+                </a:tc>
+                <a:tc>
+                  <a:txBody>
+                    <a:bodyPr wrap="square"/>
+                    <a:lstStyle/>
+                    <a:p>
+                      <a:pPr algn="ctr"/>
+                      <a:r>
+                        <a:rPr sz="800" b="0">
+                          <a:solidFill>
+                            <a:srgbClr val="404040"/>
+                          </a:solidFill>
+                          <a:ea typeface="Meiryo UI"/>
+                          <a:latin typeface="Meiryo UI"/>
+                        </a:rPr>
+                        <a:t>56</a:t>
+                      </a:r>
+                    </a:p>
+                  </a:txBody>
+                  <a:tcPr marL="36000" marR="36000" marT="18000" marB="18000">
+                    <a:solidFill>
+                      <a:srgbClr val="FFFFFF"/>
+                    </a:solidFill>
+                  </a:tcPr>
+                </a:tc>
+                <a:tc>
+                  <a:txBody>
+                    <a:bodyPr wrap="square"/>
+                    <a:lstStyle/>
+                    <a:p>
+                      <a:pPr algn="ctr"/>
+                      <a:r>
+                        <a:rPr sz="800" b="0">
+                          <a:solidFill>
+                            <a:srgbClr val="404040"/>
+                          </a:solidFill>
+                          <a:ea typeface="Meiryo UI"/>
+                          <a:latin typeface="Meiryo UI"/>
+                        </a:rPr>
+                        <a:t>73</a:t>
+                      </a:r>
+                    </a:p>
+                  </a:txBody>
+                  <a:tcPr marL="36000" marR="36000" marT="18000" marB="18000">
+                    <a:solidFill>
+                      <a:srgbClr val="FFFFFF"/>
+                    </a:solidFill>
+                  </a:tcPr>
+                </a:tc>
+                <a:tc>
+                  <a:txBody>
+                    <a:bodyPr wrap="square"/>
+                    <a:lstStyle/>
+                    <a:p>
+                      <a:pPr algn="ctr"/>
+                      <a:r>
+                        <a:rPr sz="800" b="0">
+                          <a:solidFill>
+                            <a:srgbClr val="404040"/>
+                          </a:solidFill>
+                          <a:ea typeface="Meiryo UI"/>
+                          <a:latin typeface="Meiryo UI"/>
+                        </a:rPr>
+                        <a:t>50</a:t>
+                      </a:r>
+                    </a:p>
+                  </a:txBody>
+                  <a:tcPr marL="36000" marR="36000" marT="18000" marB="18000">
+                    <a:solidFill>
+                      <a:srgbClr val="FFFFFF"/>
+                    </a:solidFill>
+                  </a:tcPr>
+                </a:tc>
+                <a:tc>
+                  <a:txBody>
+                    <a:bodyPr wrap="square"/>
+                    <a:lstStyle/>
+                    <a:p>
+                      <a:pPr algn="ctr"/>
+                      <a:r>
+                        <a:rPr sz="800" b="0">
+                          <a:solidFill>
+                            <a:srgbClr val="404040"/>
+                          </a:solidFill>
+                          <a:ea typeface="Meiryo UI"/>
+                          <a:latin typeface="Meiryo UI"/>
+                        </a:rPr>
+                        <a:t>39</a:t>
+                      </a:r>
+                    </a:p>
+                  </a:txBody>
+                  <a:tcPr marL="36000" marR="36000" marT="18000" marB="18000">
+                    <a:solidFill>
+                      <a:srgbClr val="FFFFFF"/>
+                    </a:solidFill>
+                  </a:tcPr>
+                </a:tc>
+                <a:tc>
+                  <a:txBody>
+                    <a:bodyPr wrap="square"/>
+                    <a:lstStyle/>
+                    <a:p>
+                      <a:pPr algn="ctr"/>
+                      <a:r>
+                        <a:rPr sz="800" b="0">
+                          <a:solidFill>
+                            <a:srgbClr val="404040"/>
+                          </a:solidFill>
+                          <a:ea typeface="Meiryo UI"/>
+                          <a:latin typeface="Meiryo UI"/>
+                        </a:rPr>
+                        <a:t>41</a:t>
+                      </a:r>
+                    </a:p>
+                  </a:txBody>
+                  <a:tcPr marL="36000" marR="36000" marT="18000" marB="18000">
+                    <a:solidFill>
+                      <a:srgbClr val="FFFFFF"/>
+                    </a:solidFill>
+                  </a:tcPr>
+                </a:tc>
+              </a:tr>
+              <a:tr h="271428">
                 <a:tc>
                   <a:txBody>
                     <a:bodyPr wrap="square"/>
@@ -9004,22 +9799,143 @@
                       <a:r>
                         <a:rPr sz="800" b="1">
                           <a:solidFill>
-                            <a:srgbClr val="FFFFFF"/>
-                          </a:solidFill>
-                          <a:ea typeface="Meiryo UI"/>
-                          <a:latin typeface="Meiryo UI"/>
-                        </a:rPr>
-                        <a:t>R3入学
-(現高2)</a:t>
-                      </a:r>
-                    </a:p>
-                  </a:txBody>
-                  <a:tcPr marL="36000" marR="36000" marT="18000" marB="18000">
-                    <a:solidFill>
-                      <a:srgbClr val="0F9ED5"/>
-                    </a:solidFill>
-                  </a:tcPr>
-                </a:tc>
+                            <a:srgbClr val="404040"/>
+                          </a:solidFill>
+                          <a:ea typeface="Meiryo UI"/>
+                          <a:latin typeface="Meiryo UI"/>
+                        </a:rPr>
+                        <a:t>区立(桜中以外)</a:t>
+                      </a:r>
+                    </a:p>
+                  </a:txBody>
+                  <a:tcPr marL="36000" marR="36000" marT="18000" marB="18000">
+                    <a:solidFill>
+                      <a:srgbClr val="E8F7F9"/>
+                    </a:solidFill>
+                  </a:tcPr>
+                </a:tc>
+                <a:tc>
+                  <a:txBody>
+                    <a:bodyPr wrap="square"/>
+                    <a:lstStyle/>
+                    <a:p>
+                      <a:pPr algn="ctr"/>
+                      <a:r>
+                        <a:rPr sz="800" b="0">
+                          <a:solidFill>
+                            <a:srgbClr val="404040"/>
+                          </a:solidFill>
+                          <a:ea typeface="Meiryo UI"/>
+                          <a:latin typeface="Meiryo UI"/>
+                        </a:rPr>
+                        <a:t>6</a:t>
+                      </a:r>
+                    </a:p>
+                  </a:txBody>
+                  <a:tcPr marL="36000" marR="36000" marT="18000" marB="18000">
+                    <a:solidFill>
+                      <a:srgbClr val="FFFFFF"/>
+                    </a:solidFill>
+                  </a:tcPr>
+                </a:tc>
+                <a:tc>
+                  <a:txBody>
+                    <a:bodyPr wrap="square"/>
+                    <a:lstStyle/>
+                    <a:p>
+                      <a:pPr algn="ctr"/>
+                      <a:r>
+                        <a:rPr sz="800" b="0">
+                          <a:solidFill>
+                            <a:srgbClr val="404040"/>
+                          </a:solidFill>
+                          <a:ea typeface="Meiryo UI"/>
+                          <a:latin typeface="Meiryo UI"/>
+                        </a:rPr>
+                        <a:t>3</a:t>
+                      </a:r>
+                    </a:p>
+                  </a:txBody>
+                  <a:tcPr marL="36000" marR="36000" marT="18000" marB="18000">
+                    <a:solidFill>
+                      <a:srgbClr val="FFFFFF"/>
+                    </a:solidFill>
+                  </a:tcPr>
+                </a:tc>
+                <a:tc>
+                  <a:txBody>
+                    <a:bodyPr wrap="square"/>
+                    <a:lstStyle/>
+                    <a:p>
+                      <a:pPr algn="ctr"/>
+                      <a:r>
+                        <a:rPr sz="800" b="0">
+                          <a:solidFill>
+                            <a:srgbClr val="404040"/>
+                          </a:solidFill>
+                          <a:ea typeface="Meiryo UI"/>
+                          <a:latin typeface="Meiryo UI"/>
+                        </a:rPr>
+                        <a:t>4</a:t>
+                      </a:r>
+                    </a:p>
+                  </a:txBody>
+                  <a:tcPr marL="36000" marR="36000" marT="18000" marB="18000">
+                    <a:solidFill>
+                      <a:srgbClr val="FFFFFF"/>
+                    </a:solidFill>
+                  </a:tcPr>
+                </a:tc>
+                <a:tc>
+                  <a:txBody>
+                    <a:bodyPr wrap="square"/>
+                    <a:lstStyle/>
+                    <a:p>
+                      <a:pPr algn="ctr"/>
+                      <a:r>
+                        <a:rPr sz="800" b="0">
+                          <a:solidFill>
+                            <a:srgbClr val="404040"/>
+                          </a:solidFill>
+                          <a:ea typeface="Meiryo UI"/>
+                          <a:latin typeface="Meiryo UI"/>
+                        </a:rPr>
+                        <a:t>7</a:t>
+                      </a:r>
+                    </a:p>
+                  </a:txBody>
+                  <a:tcPr marL="36000" marR="36000" marT="18000" marB="18000">
+                    <a:solidFill>
+                      <a:srgbClr val="FFFFFF"/>
+                    </a:solidFill>
+                  </a:tcPr>
+                </a:tc>
+                <a:tc>
+                  <a:txBody>
+                    <a:bodyPr wrap="square"/>
+                    <a:lstStyle/>
+                    <a:p>
+                      <a:pPr algn="ctr"/>
+                      <a:r>
+                        <a:rPr sz="800" b="0">
+                          <a:solidFill>
+                            <a:srgbClr val="404040"/>
+                          </a:solidFill>
+                          <a:ea typeface="Meiryo UI"/>
+                          <a:latin typeface="Meiryo UI"/>
+                        </a:rPr>
+                        <a:t>12</a:t>
+                      </a:r>
+                    </a:p>
+                  </a:txBody>
+                  <a:tcPr marL="36000" marR="36000" marT="18000" marB="18000">
+                    <a:solidFill>
+                      <a:srgbClr val="FFFFFF"/>
+                    </a:solidFill>
+                  </a:tcPr>
+                </a:tc>
+              </a:tr>
+              <a:tr h="271428">
                 <a:tc>
                   <a:txBody>
                     <a:bodyPr wrap="square"/>
@@ -9029,22 +9945,143 @@
                       <a:r>
                         <a:rPr sz="800" b="1">
                           <a:solidFill>
-                            <a:srgbClr val="FFFFFF"/>
-                          </a:solidFill>
-                          <a:ea typeface="Meiryo UI"/>
-                          <a:latin typeface="Meiryo UI"/>
-                        </a:rPr>
-                        <a:t>R4入学
-(現高1)</a:t>
-                      </a:r>
-                    </a:p>
-                  </a:txBody>
-                  <a:tcPr marL="36000" marR="36000" marT="18000" marB="18000">
-                    <a:solidFill>
-                      <a:srgbClr val="0F9ED5"/>
-                    </a:solidFill>
-                  </a:tcPr>
-                </a:tc>
+                            <a:srgbClr val="404040"/>
+                          </a:solidFill>
+                          <a:ea typeface="Meiryo UI"/>
+                          <a:latin typeface="Meiryo UI"/>
+                        </a:rPr>
+                        <a:t>区立計</a:t>
+                      </a:r>
+                    </a:p>
+                  </a:txBody>
+                  <a:tcPr marL="36000" marR="36000" marT="18000" marB="18000">
+                    <a:solidFill>
+                      <a:srgbClr val="E8F7F9"/>
+                    </a:solidFill>
+                  </a:tcPr>
+                </a:tc>
+                <a:tc>
+                  <a:txBody>
+                    <a:bodyPr wrap="square"/>
+                    <a:lstStyle/>
+                    <a:p>
+                      <a:pPr algn="ctr"/>
+                      <a:r>
+                        <a:rPr sz="800" b="0">
+                          <a:solidFill>
+                            <a:srgbClr val="404040"/>
+                          </a:solidFill>
+                          <a:ea typeface="Meiryo UI"/>
+                          <a:latin typeface="Meiryo UI"/>
+                        </a:rPr>
+                        <a:t>62</a:t>
+                      </a:r>
+                    </a:p>
+                  </a:txBody>
+                  <a:tcPr marL="36000" marR="36000" marT="18000" marB="18000">
+                    <a:solidFill>
+                      <a:srgbClr val="FFFFFF"/>
+                    </a:solidFill>
+                  </a:tcPr>
+                </a:tc>
+                <a:tc>
+                  <a:txBody>
+                    <a:bodyPr wrap="square"/>
+                    <a:lstStyle/>
+                    <a:p>
+                      <a:pPr algn="ctr"/>
+                      <a:r>
+                        <a:rPr sz="800" b="0">
+                          <a:solidFill>
+                            <a:srgbClr val="404040"/>
+                          </a:solidFill>
+                          <a:ea typeface="Meiryo UI"/>
+                          <a:latin typeface="Meiryo UI"/>
+                        </a:rPr>
+                        <a:t>76</a:t>
+                      </a:r>
+                    </a:p>
+                  </a:txBody>
+                  <a:tcPr marL="36000" marR="36000" marT="18000" marB="18000">
+                    <a:solidFill>
+                      <a:srgbClr val="FFFFFF"/>
+                    </a:solidFill>
+                  </a:tcPr>
+                </a:tc>
+                <a:tc>
+                  <a:txBody>
+                    <a:bodyPr wrap="square"/>
+                    <a:lstStyle/>
+                    <a:p>
+                      <a:pPr algn="ctr"/>
+                      <a:r>
+                        <a:rPr sz="800" b="0">
+                          <a:solidFill>
+                            <a:srgbClr val="404040"/>
+                          </a:solidFill>
+                          <a:ea typeface="Meiryo UI"/>
+                          <a:latin typeface="Meiryo UI"/>
+                        </a:rPr>
+                        <a:t>54</a:t>
+                      </a:r>
+                    </a:p>
+                  </a:txBody>
+                  <a:tcPr marL="36000" marR="36000" marT="18000" marB="18000">
+                    <a:solidFill>
+                      <a:srgbClr val="FFFFFF"/>
+                    </a:solidFill>
+                  </a:tcPr>
+                </a:tc>
+                <a:tc>
+                  <a:txBody>
+                    <a:bodyPr wrap="square"/>
+                    <a:lstStyle/>
+                    <a:p>
+                      <a:pPr algn="ctr"/>
+                      <a:r>
+                        <a:rPr sz="800" b="0">
+                          <a:solidFill>
+                            <a:srgbClr val="404040"/>
+                          </a:solidFill>
+                          <a:ea typeface="Meiryo UI"/>
+                          <a:latin typeface="Meiryo UI"/>
+                        </a:rPr>
+                        <a:t>46</a:t>
+                      </a:r>
+                    </a:p>
+                  </a:txBody>
+                  <a:tcPr marL="36000" marR="36000" marT="18000" marB="18000">
+                    <a:solidFill>
+                      <a:srgbClr val="FFFFFF"/>
+                    </a:solidFill>
+                  </a:tcPr>
+                </a:tc>
+                <a:tc>
+                  <a:txBody>
+                    <a:bodyPr wrap="square"/>
+                    <a:lstStyle/>
+                    <a:p>
+                      <a:pPr algn="ctr"/>
+                      <a:r>
+                        <a:rPr sz="800" b="0">
+                          <a:solidFill>
+                            <a:srgbClr val="404040"/>
+                          </a:solidFill>
+                          <a:ea typeface="Meiryo UI"/>
+                          <a:latin typeface="Meiryo UI"/>
+                        </a:rPr>
+                        <a:t>53</a:t>
+                      </a:r>
+                    </a:p>
+                  </a:txBody>
+                  <a:tcPr marL="36000" marR="36000" marT="18000" marB="18000">
+                    <a:solidFill>
+                      <a:srgbClr val="FFFFFF"/>
+                    </a:solidFill>
+                  </a:tcPr>
+                </a:tc>
+              </a:tr>
+              <a:tr h="271428">
                 <a:tc>
                   <a:txBody>
                     <a:bodyPr wrap="square"/>
@@ -9054,22 +10091,143 @@
                       <a:r>
                         <a:rPr sz="800" b="1">
                           <a:solidFill>
-                            <a:srgbClr val="FFFFFF"/>
-                          </a:solidFill>
-                          <a:ea typeface="Meiryo UI"/>
-                          <a:latin typeface="Meiryo UI"/>
-                        </a:rPr>
-                        <a:t>R5入学
-(現中3)</a:t>
-                      </a:r>
-                    </a:p>
-                  </a:txBody>
-                  <a:tcPr marL="36000" marR="36000" marT="18000" marB="18000">
-                    <a:solidFill>
-                      <a:srgbClr val="0F9ED5"/>
-                    </a:solidFill>
-                  </a:tcPr>
-                </a:tc>
+                            <a:srgbClr val="404040"/>
+                          </a:solidFill>
+                          <a:ea typeface="Meiryo UI"/>
+                          <a:latin typeface="Meiryo UI"/>
+                        </a:rPr>
+                        <a:t>区立外</a:t>
+                      </a:r>
+                    </a:p>
+                  </a:txBody>
+                  <a:tcPr marL="36000" marR="36000" marT="18000" marB="18000">
+                    <a:solidFill>
+                      <a:srgbClr val="E8F7F9"/>
+                    </a:solidFill>
+                  </a:tcPr>
+                </a:tc>
+                <a:tc>
+                  <a:txBody>
+                    <a:bodyPr wrap="square"/>
+                    <a:lstStyle/>
+                    <a:p>
+                      <a:pPr algn="ctr"/>
+                      <a:r>
+                        <a:rPr sz="800" b="0">
+                          <a:solidFill>
+                            <a:srgbClr val="404040"/>
+                          </a:solidFill>
+                          <a:ea typeface="Meiryo UI"/>
+                          <a:latin typeface="Meiryo UI"/>
+                        </a:rPr>
+                        <a:t>8</a:t>
+                      </a:r>
+                    </a:p>
+                  </a:txBody>
+                  <a:tcPr marL="36000" marR="36000" marT="18000" marB="18000">
+                    <a:solidFill>
+                      <a:srgbClr val="FFFFFF"/>
+                    </a:solidFill>
+                  </a:tcPr>
+                </a:tc>
+                <a:tc>
+                  <a:txBody>
+                    <a:bodyPr wrap="square"/>
+                    <a:lstStyle/>
+                    <a:p>
+                      <a:pPr algn="ctr"/>
+                      <a:r>
+                        <a:rPr sz="800" b="0">
+                          <a:solidFill>
+                            <a:srgbClr val="404040"/>
+                          </a:solidFill>
+                          <a:ea typeface="Meiryo UI"/>
+                          <a:latin typeface="Meiryo UI"/>
+                        </a:rPr>
+                        <a:t>13</a:t>
+                      </a:r>
+                    </a:p>
+                  </a:txBody>
+                  <a:tcPr marL="36000" marR="36000" marT="18000" marB="18000">
+                    <a:solidFill>
+                      <a:srgbClr val="FFFFFF"/>
+                    </a:solidFill>
+                  </a:tcPr>
+                </a:tc>
+                <a:tc>
+                  <a:txBody>
+                    <a:bodyPr wrap="square"/>
+                    <a:lstStyle/>
+                    <a:p>
+                      <a:pPr algn="ctr"/>
+                      <a:r>
+                        <a:rPr sz="800" b="0">
+                          <a:solidFill>
+                            <a:srgbClr val="404040"/>
+                          </a:solidFill>
+                          <a:ea typeface="Meiryo UI"/>
+                          <a:latin typeface="Meiryo UI"/>
+                        </a:rPr>
+                        <a:t>10</a:t>
+                      </a:r>
+                    </a:p>
+                  </a:txBody>
+                  <a:tcPr marL="36000" marR="36000" marT="18000" marB="18000">
+                    <a:solidFill>
+                      <a:srgbClr val="FFFFFF"/>
+                    </a:solidFill>
+                  </a:tcPr>
+                </a:tc>
+                <a:tc>
+                  <a:txBody>
+                    <a:bodyPr wrap="square"/>
+                    <a:lstStyle/>
+                    <a:p>
+                      <a:pPr algn="ctr"/>
+                      <a:r>
+                        <a:rPr sz="800" b="0">
+                          <a:solidFill>
+                            <a:srgbClr val="404040"/>
+                          </a:solidFill>
+                          <a:ea typeface="Meiryo UI"/>
+                          <a:latin typeface="Meiryo UI"/>
+                        </a:rPr>
+                        <a:t>10</a:t>
+                      </a:r>
+                    </a:p>
+                  </a:txBody>
+                  <a:tcPr marL="36000" marR="36000" marT="18000" marB="18000">
+                    <a:solidFill>
+                      <a:srgbClr val="FFFFFF"/>
+                    </a:solidFill>
+                  </a:tcPr>
+                </a:tc>
+                <a:tc>
+                  <a:txBody>
+                    <a:bodyPr wrap="square"/>
+                    <a:lstStyle/>
+                    <a:p>
+                      <a:pPr algn="ctr"/>
+                      <a:r>
+                        <a:rPr sz="800" b="0">
+                          <a:solidFill>
+                            <a:srgbClr val="404040"/>
+                          </a:solidFill>
+                          <a:ea typeface="Meiryo UI"/>
+                          <a:latin typeface="Meiryo UI"/>
+                        </a:rPr>
+                        <a:t>8</a:t>
+                      </a:r>
+                    </a:p>
+                  </a:txBody>
+                  <a:tcPr marL="36000" marR="36000" marT="18000" marB="18000">
+                    <a:solidFill>
+                      <a:srgbClr val="FFFFFF"/>
+                    </a:solidFill>
+                  </a:tcPr>
+                </a:tc>
+              </a:tr>
+              <a:tr h="271428">
                 <a:tc>
                   <a:txBody>
                     <a:bodyPr wrap="square"/>
@@ -9079,779 +10237,143 @@
                       <a:r>
                         <a:rPr sz="800" b="1">
                           <a:solidFill>
-                            <a:srgbClr val="FFFFFF"/>
-                          </a:solidFill>
-                          <a:ea typeface="Meiryo UI"/>
-                          <a:latin typeface="Meiryo UI"/>
-                        </a:rPr>
-                        <a:t>R6入学
-(現中2)</a:t>
-                      </a:r>
-                    </a:p>
-                  </a:txBody>
-                  <a:tcPr marL="36000" marR="36000" marT="18000" marB="18000">
-                    <a:solidFill>
-                      <a:srgbClr val="0F9ED5"/>
-                    </a:solidFill>
-                  </a:tcPr>
-                </a:tc>
-                <a:tc>
-                  <a:txBody>
-                    <a:bodyPr wrap="square"/>
-                    <a:lstStyle/>
-                    <a:p>
-                      <a:pPr algn="ctr"/>
-                      <a:r>
-                        <a:rPr sz="800" b="1">
-                          <a:solidFill>
-                            <a:srgbClr val="FFFFFF"/>
-                          </a:solidFill>
-                          <a:ea typeface="Meiryo UI"/>
-                          <a:latin typeface="Meiryo UI"/>
-                        </a:rPr>
-                        <a:t>R7入学
-(現中1)</a:t>
-                      </a:r>
-                    </a:p>
-                  </a:txBody>
-                  <a:tcPr marL="36000" marR="36000" marT="18000" marB="18000">
-                    <a:solidFill>
-                      <a:srgbClr val="0F9ED5"/>
+                            <a:srgbClr val="404040"/>
+                          </a:solidFill>
+                          <a:ea typeface="Meiryo UI"/>
+                          <a:latin typeface="Meiryo UI"/>
+                        </a:rPr>
+                        <a:t>合計</a:t>
+                      </a:r>
+                    </a:p>
+                  </a:txBody>
+                  <a:tcPr marL="36000" marR="36000" marT="18000" marB="18000">
+                    <a:solidFill>
+                      <a:srgbClr val="E8F7F9"/>
+                    </a:solidFill>
+                  </a:tcPr>
+                </a:tc>
+                <a:tc>
+                  <a:txBody>
+                    <a:bodyPr wrap="square"/>
+                    <a:lstStyle/>
+                    <a:p>
+                      <a:pPr algn="ctr"/>
+                      <a:r>
+                        <a:rPr sz="800" b="0">
+                          <a:solidFill>
+                            <a:srgbClr val="404040"/>
+                          </a:solidFill>
+                          <a:ea typeface="Meiryo UI"/>
+                          <a:latin typeface="Meiryo UI"/>
+                        </a:rPr>
+                        <a:t>70</a:t>
+                      </a:r>
+                    </a:p>
+                  </a:txBody>
+                  <a:tcPr marL="36000" marR="36000" marT="18000" marB="18000">
+                    <a:solidFill>
+                      <a:srgbClr val="FFFFFF"/>
+                    </a:solidFill>
+                  </a:tcPr>
+                </a:tc>
+                <a:tc>
+                  <a:txBody>
+                    <a:bodyPr wrap="square"/>
+                    <a:lstStyle/>
+                    <a:p>
+                      <a:pPr algn="ctr"/>
+                      <a:r>
+                        <a:rPr sz="800" b="0">
+                          <a:solidFill>
+                            <a:srgbClr val="404040"/>
+                          </a:solidFill>
+                          <a:ea typeface="Meiryo UI"/>
+                          <a:latin typeface="Meiryo UI"/>
+                        </a:rPr>
+                        <a:t>89</a:t>
+                      </a:r>
+                    </a:p>
+                  </a:txBody>
+                  <a:tcPr marL="36000" marR="36000" marT="18000" marB="18000">
+                    <a:solidFill>
+                      <a:srgbClr val="FFFFFF"/>
+                    </a:solidFill>
+                  </a:tcPr>
+                </a:tc>
+                <a:tc>
+                  <a:txBody>
+                    <a:bodyPr wrap="square"/>
+                    <a:lstStyle/>
+                    <a:p>
+                      <a:pPr algn="ctr"/>
+                      <a:r>
+                        <a:rPr sz="800" b="0">
+                          <a:solidFill>
+                            <a:srgbClr val="404040"/>
+                          </a:solidFill>
+                          <a:ea typeface="Meiryo UI"/>
+                          <a:latin typeface="Meiryo UI"/>
+                        </a:rPr>
+                        <a:t>64</a:t>
+                      </a:r>
+                    </a:p>
+                  </a:txBody>
+                  <a:tcPr marL="36000" marR="36000" marT="18000" marB="18000">
+                    <a:solidFill>
+                      <a:srgbClr val="FFFFFF"/>
+                    </a:solidFill>
+                  </a:tcPr>
+                </a:tc>
+                <a:tc>
+                  <a:txBody>
+                    <a:bodyPr wrap="square"/>
+                    <a:lstStyle/>
+                    <a:p>
+                      <a:pPr algn="ctr"/>
+                      <a:r>
+                        <a:rPr sz="800" b="0">
+                          <a:solidFill>
+                            <a:srgbClr val="404040"/>
+                          </a:solidFill>
+                          <a:ea typeface="Meiryo UI"/>
+                          <a:latin typeface="Meiryo UI"/>
+                        </a:rPr>
+                        <a:t>56</a:t>
+                      </a:r>
+                    </a:p>
+                  </a:txBody>
+                  <a:tcPr marL="36000" marR="36000" marT="18000" marB="18000">
+                    <a:solidFill>
+                      <a:srgbClr val="FFFFFF"/>
+                    </a:solidFill>
+                  </a:tcPr>
+                </a:tc>
+                <a:tc>
+                  <a:txBody>
+                    <a:bodyPr wrap="square"/>
+                    <a:lstStyle/>
+                    <a:p>
+                      <a:pPr algn="ctr"/>
+                      <a:r>
+                        <a:rPr sz="800" b="0">
+                          <a:solidFill>
+                            <a:srgbClr val="404040"/>
+                          </a:solidFill>
+                          <a:ea typeface="Meiryo UI"/>
+                          <a:latin typeface="Meiryo UI"/>
+                        </a:rPr>
+                        <a:t>61</a:t>
+                      </a:r>
+                    </a:p>
+                  </a:txBody>
+                  <a:tcPr marL="36000" marR="36000" marT="18000" marB="18000">
+                    <a:solidFill>
+                      <a:srgbClr val="FFFFFF"/>
                     </a:solidFill>
                   </a:tcPr>
                 </a:tc>
               </a:tr>
-              <a:tr h="342857">
-                <a:tc>
-                  <a:txBody>
-                    <a:bodyPr wrap="square"/>
-                    <a:lstStyle/>
-                    <a:p>
-                      <a:pPr algn="ctr"/>
-                      <a:r>
-                        <a:rPr sz="800" b="1">
-                          <a:solidFill>
-                            <a:srgbClr val="404040"/>
-                          </a:solidFill>
-                          <a:ea typeface="Meiryo UI"/>
-                          <a:latin typeface="Meiryo UI"/>
-                        </a:rPr>
-                        <a:t>区立(桜中)</a:t>
-                      </a:r>
-                    </a:p>
-                  </a:txBody>
-                  <a:tcPr marL="36000" marR="36000" marT="18000" marB="18000">
-                    <a:solidFill>
-                      <a:srgbClr val="E8F7F9"/>
-                    </a:solidFill>
-                  </a:tcPr>
-                </a:tc>
-                <a:tc>
-                  <a:txBody>
-                    <a:bodyPr wrap="square"/>
-                    <a:lstStyle/>
-                    <a:p>
-                      <a:pPr algn="ctr"/>
-                      <a:r>
-                        <a:rPr sz="800" b="0">
-                          <a:solidFill>
-                            <a:srgbClr val="404040"/>
-                          </a:solidFill>
-                          <a:ea typeface="Meiryo UI"/>
-                          <a:latin typeface="Meiryo UI"/>
-                        </a:rPr>
-                        <a:t>56</a:t>
-                      </a:r>
-                    </a:p>
-                  </a:txBody>
-                  <a:tcPr marL="36000" marR="36000" marT="18000" marB="18000">
-                    <a:solidFill>
-                      <a:srgbClr val="FFFFFF"/>
-                    </a:solidFill>
-                  </a:tcPr>
-                </a:tc>
-                <a:tc>
-                  <a:txBody>
-                    <a:bodyPr wrap="square"/>
-                    <a:lstStyle/>
-                    <a:p>
-                      <a:pPr algn="ctr"/>
-                      <a:r>
-                        <a:rPr sz="800" b="0">
-                          <a:solidFill>
-                            <a:srgbClr val="404040"/>
-                          </a:solidFill>
-                          <a:ea typeface="Meiryo UI"/>
-                          <a:latin typeface="Meiryo UI"/>
-                        </a:rPr>
-                        <a:t>73</a:t>
-                      </a:r>
-                    </a:p>
-                  </a:txBody>
-                  <a:tcPr marL="36000" marR="36000" marT="18000" marB="18000">
-                    <a:solidFill>
-                      <a:srgbClr val="FFFFFF"/>
-                    </a:solidFill>
-                  </a:tcPr>
-                </a:tc>
-                <a:tc>
-                  <a:txBody>
-                    <a:bodyPr wrap="square"/>
-                    <a:lstStyle/>
-                    <a:p>
-                      <a:pPr algn="ctr"/>
-                      <a:r>
-                        <a:rPr sz="800" b="0">
-                          <a:solidFill>
-                            <a:srgbClr val="404040"/>
-                          </a:solidFill>
-                          <a:ea typeface="Meiryo UI"/>
-                          <a:latin typeface="Meiryo UI"/>
-                        </a:rPr>
-                        <a:t>50</a:t>
-                      </a:r>
-                    </a:p>
-                  </a:txBody>
-                  <a:tcPr marL="36000" marR="36000" marT="18000" marB="18000">
-                    <a:solidFill>
-                      <a:srgbClr val="FFFFFF"/>
-                    </a:solidFill>
-                  </a:tcPr>
-                </a:tc>
-                <a:tc>
-                  <a:txBody>
-                    <a:bodyPr wrap="square"/>
-                    <a:lstStyle/>
-                    <a:p>
-                      <a:pPr algn="ctr"/>
-                      <a:r>
-                        <a:rPr sz="800" b="0">
-                          <a:solidFill>
-                            <a:srgbClr val="404040"/>
-                          </a:solidFill>
-                          <a:ea typeface="Meiryo UI"/>
-                          <a:latin typeface="Meiryo UI"/>
-                        </a:rPr>
-                        <a:t>39</a:t>
-                      </a:r>
-                    </a:p>
-                  </a:txBody>
-                  <a:tcPr marL="36000" marR="36000" marT="18000" marB="18000">
-                    <a:solidFill>
-                      <a:srgbClr val="FFFFFF"/>
-                    </a:solidFill>
-                  </a:tcPr>
-                </a:tc>
-                <a:tc>
-                  <a:txBody>
-                    <a:bodyPr wrap="square"/>
-                    <a:lstStyle/>
-                    <a:p>
-                      <a:pPr algn="ctr"/>
-                      <a:r>
-                        <a:rPr sz="800" b="0">
-                          <a:solidFill>
-                            <a:srgbClr val="404040"/>
-                          </a:solidFill>
-                          <a:ea typeface="Meiryo UI"/>
-                          <a:latin typeface="Meiryo UI"/>
-                        </a:rPr>
-                        <a:t>41</a:t>
-                      </a:r>
-                    </a:p>
-                  </a:txBody>
-                  <a:tcPr marL="36000" marR="36000" marT="18000" marB="18000">
-                    <a:solidFill>
-                      <a:srgbClr val="FFFFFF"/>
-                    </a:solidFill>
-                  </a:tcPr>
-                </a:tc>
-              </a:tr>
-              <a:tr h="342857">
-                <a:tc>
-                  <a:txBody>
-                    <a:bodyPr wrap="square"/>
-                    <a:lstStyle/>
-                    <a:p>
-                      <a:pPr algn="ctr"/>
-                      <a:r>
-                        <a:rPr sz="800" b="1">
-                          <a:solidFill>
-                            <a:srgbClr val="404040"/>
-                          </a:solidFill>
-                          <a:ea typeface="Meiryo UI"/>
-                          <a:latin typeface="Meiryo UI"/>
-                        </a:rPr>
-                        <a:t>区立(桜中以外)</a:t>
-                      </a:r>
-                    </a:p>
-                  </a:txBody>
-                  <a:tcPr marL="36000" marR="36000" marT="18000" marB="18000">
-                    <a:solidFill>
-                      <a:srgbClr val="E8F7F9"/>
-                    </a:solidFill>
-                  </a:tcPr>
-                </a:tc>
-                <a:tc>
-                  <a:txBody>
-                    <a:bodyPr wrap="square"/>
-                    <a:lstStyle/>
-                    <a:p>
-                      <a:pPr algn="ctr"/>
-                      <a:r>
-                        <a:rPr sz="800" b="0">
-                          <a:solidFill>
-                            <a:srgbClr val="404040"/>
-                          </a:solidFill>
-                          <a:ea typeface="Meiryo UI"/>
-                          <a:latin typeface="Meiryo UI"/>
-                        </a:rPr>
-                        <a:t>6</a:t>
-                      </a:r>
-                    </a:p>
-                  </a:txBody>
-                  <a:tcPr marL="36000" marR="36000" marT="18000" marB="18000">
-                    <a:solidFill>
-                      <a:srgbClr val="FFFFFF"/>
-                    </a:solidFill>
-                  </a:tcPr>
-                </a:tc>
-                <a:tc>
-                  <a:txBody>
-                    <a:bodyPr wrap="square"/>
-                    <a:lstStyle/>
-                    <a:p>
-                      <a:pPr algn="ctr"/>
-                      <a:r>
-                        <a:rPr sz="800" b="0">
-                          <a:solidFill>
-                            <a:srgbClr val="404040"/>
-                          </a:solidFill>
-                          <a:ea typeface="Meiryo UI"/>
-                          <a:latin typeface="Meiryo UI"/>
-                        </a:rPr>
-                        <a:t>3</a:t>
-                      </a:r>
-                    </a:p>
-                  </a:txBody>
-                  <a:tcPr marL="36000" marR="36000" marT="18000" marB="18000">
-                    <a:solidFill>
-                      <a:srgbClr val="FFFFFF"/>
-                    </a:solidFill>
-                  </a:tcPr>
-                </a:tc>
-                <a:tc>
-                  <a:txBody>
-                    <a:bodyPr wrap="square"/>
-                    <a:lstStyle/>
-                    <a:p>
-                      <a:pPr algn="ctr"/>
-                      <a:r>
-                        <a:rPr sz="800" b="0">
-                          <a:solidFill>
-                            <a:srgbClr val="404040"/>
-                          </a:solidFill>
-                          <a:ea typeface="Meiryo UI"/>
-                          <a:latin typeface="Meiryo UI"/>
-                        </a:rPr>
-                        <a:t>4</a:t>
-                      </a:r>
-                    </a:p>
-                  </a:txBody>
-                  <a:tcPr marL="36000" marR="36000" marT="18000" marB="18000">
-                    <a:solidFill>
-                      <a:srgbClr val="FFFFFF"/>
-                    </a:solidFill>
-                  </a:tcPr>
-                </a:tc>
-                <a:tc>
-                  <a:txBody>
-                    <a:bodyPr wrap="square"/>
-                    <a:lstStyle/>
-                    <a:p>
-                      <a:pPr algn="ctr"/>
-                      <a:r>
-                        <a:rPr sz="800" b="0">
-                          <a:solidFill>
-                            <a:srgbClr val="404040"/>
-                          </a:solidFill>
-                          <a:ea typeface="Meiryo UI"/>
-                          <a:latin typeface="Meiryo UI"/>
-                        </a:rPr>
-                        <a:t>7</a:t>
-                      </a:r>
-                    </a:p>
-                  </a:txBody>
-                  <a:tcPr marL="36000" marR="36000" marT="18000" marB="18000">
-                    <a:solidFill>
-                      <a:srgbClr val="FFFFFF"/>
-                    </a:solidFill>
-                  </a:tcPr>
-                </a:tc>
-                <a:tc>
-                  <a:txBody>
-                    <a:bodyPr wrap="square"/>
-                    <a:lstStyle/>
-                    <a:p>
-                      <a:pPr algn="ctr"/>
-                      <a:r>
-                        <a:rPr sz="800" b="0">
-                          <a:solidFill>
-                            <a:srgbClr val="404040"/>
-                          </a:solidFill>
-                          <a:ea typeface="Meiryo UI"/>
-                          <a:latin typeface="Meiryo UI"/>
-                        </a:rPr>
-                        <a:t>12</a:t>
-                      </a:r>
-                    </a:p>
-                  </a:txBody>
-                  <a:tcPr marL="36000" marR="36000" marT="18000" marB="18000">
-                    <a:solidFill>
-                      <a:srgbClr val="FFFFFF"/>
-                    </a:solidFill>
-                  </a:tcPr>
-                </a:tc>
-              </a:tr>
-              <a:tr h="342857">
-                <a:tc>
-                  <a:txBody>
-                    <a:bodyPr wrap="square"/>
-                    <a:lstStyle/>
-                    <a:p>
-                      <a:pPr algn="ctr"/>
-                      <a:r>
-                        <a:rPr sz="800" b="1">
-                          <a:solidFill>
-                            <a:srgbClr val="404040"/>
-                          </a:solidFill>
-                          <a:ea typeface="Meiryo UI"/>
-                          <a:latin typeface="Meiryo UI"/>
-                        </a:rPr>
-                        <a:t>区立計</a:t>
-                      </a:r>
-                    </a:p>
-                  </a:txBody>
-                  <a:tcPr marL="36000" marR="36000" marT="18000" marB="18000">
-                    <a:solidFill>
-                      <a:srgbClr val="E8F7F9"/>
-                    </a:solidFill>
-                  </a:tcPr>
-                </a:tc>
-                <a:tc>
-                  <a:txBody>
-                    <a:bodyPr wrap="square"/>
-                    <a:lstStyle/>
-                    <a:p>
-                      <a:pPr algn="ctr"/>
-                      <a:r>
-                        <a:rPr sz="800" b="0">
-                          <a:solidFill>
-                            <a:srgbClr val="404040"/>
-                          </a:solidFill>
-                          <a:ea typeface="Meiryo UI"/>
-                          <a:latin typeface="Meiryo UI"/>
-                        </a:rPr>
-                        <a:t>62</a:t>
-                      </a:r>
-                    </a:p>
-                  </a:txBody>
-                  <a:tcPr marL="36000" marR="36000" marT="18000" marB="18000">
-                    <a:solidFill>
-                      <a:srgbClr val="FFFFFF"/>
-                    </a:solidFill>
-                  </a:tcPr>
-                </a:tc>
-                <a:tc>
-                  <a:txBody>
-                    <a:bodyPr wrap="square"/>
-                    <a:lstStyle/>
-                    <a:p>
-                      <a:pPr algn="ctr"/>
-                      <a:r>
-                        <a:rPr sz="800" b="0">
-                          <a:solidFill>
-                            <a:srgbClr val="404040"/>
-                          </a:solidFill>
-                          <a:ea typeface="Meiryo UI"/>
-                          <a:latin typeface="Meiryo UI"/>
-                        </a:rPr>
-                        <a:t>76</a:t>
-                      </a:r>
-                    </a:p>
-                  </a:txBody>
-                  <a:tcPr marL="36000" marR="36000" marT="18000" marB="18000">
-                    <a:solidFill>
-                      <a:srgbClr val="FFFFFF"/>
-                    </a:solidFill>
-                  </a:tcPr>
-                </a:tc>
-                <a:tc>
-                  <a:txBody>
-                    <a:bodyPr wrap="square"/>
-                    <a:lstStyle/>
-                    <a:p>
-                      <a:pPr algn="ctr"/>
-                      <a:r>
-                        <a:rPr sz="800" b="0">
-                          <a:solidFill>
-                            <a:srgbClr val="404040"/>
-                          </a:solidFill>
-                          <a:ea typeface="Meiryo UI"/>
-                          <a:latin typeface="Meiryo UI"/>
-                        </a:rPr>
-                        <a:t>54</a:t>
-                      </a:r>
-                    </a:p>
-                  </a:txBody>
-                  <a:tcPr marL="36000" marR="36000" marT="18000" marB="18000">
-                    <a:solidFill>
-                      <a:srgbClr val="FFFFFF"/>
-                    </a:solidFill>
-                  </a:tcPr>
-                </a:tc>
-                <a:tc>
-                  <a:txBody>
-                    <a:bodyPr wrap="square"/>
-                    <a:lstStyle/>
-                    <a:p>
-                      <a:pPr algn="ctr"/>
-                      <a:r>
-                        <a:rPr sz="800" b="0">
-                          <a:solidFill>
-                            <a:srgbClr val="404040"/>
-                          </a:solidFill>
-                          <a:ea typeface="Meiryo UI"/>
-                          <a:latin typeface="Meiryo UI"/>
-                        </a:rPr>
-                        <a:t>46</a:t>
-                      </a:r>
-                    </a:p>
-                  </a:txBody>
-                  <a:tcPr marL="36000" marR="36000" marT="18000" marB="18000">
-                    <a:solidFill>
-                      <a:srgbClr val="FFFFFF"/>
-                    </a:solidFill>
-                  </a:tcPr>
-                </a:tc>
-                <a:tc>
-                  <a:txBody>
-                    <a:bodyPr wrap="square"/>
-                    <a:lstStyle/>
-                    <a:p>
-                      <a:pPr algn="ctr"/>
-                      <a:r>
-                        <a:rPr sz="800" b="0">
-                          <a:solidFill>
-                            <a:srgbClr val="404040"/>
-                          </a:solidFill>
-                          <a:ea typeface="Meiryo UI"/>
-                          <a:latin typeface="Meiryo UI"/>
-                        </a:rPr>
-                        <a:t>53</a:t>
-                      </a:r>
-                    </a:p>
-                  </a:txBody>
-                  <a:tcPr marL="36000" marR="36000" marT="18000" marB="18000">
-                    <a:solidFill>
-                      <a:srgbClr val="FFFFFF"/>
-                    </a:solidFill>
-                  </a:tcPr>
-                </a:tc>
-              </a:tr>
-              <a:tr h="342857">
-                <a:tc>
-                  <a:txBody>
-                    <a:bodyPr wrap="square"/>
-                    <a:lstStyle/>
-                    <a:p>
-                      <a:pPr algn="ctr"/>
-                      <a:r>
-                        <a:rPr sz="800" b="1">
-                          <a:solidFill>
-                            <a:srgbClr val="404040"/>
-                          </a:solidFill>
-                          <a:ea typeface="Meiryo UI"/>
-                          <a:latin typeface="Meiryo UI"/>
-                        </a:rPr>
-                        <a:t>区立外</a:t>
-                      </a:r>
-                    </a:p>
-                  </a:txBody>
-                  <a:tcPr marL="36000" marR="36000" marT="18000" marB="18000">
-                    <a:solidFill>
-                      <a:srgbClr val="E8F7F9"/>
-                    </a:solidFill>
-                  </a:tcPr>
-                </a:tc>
-                <a:tc>
-                  <a:txBody>
-                    <a:bodyPr wrap="square"/>
-                    <a:lstStyle/>
-                    <a:p>
-                      <a:pPr algn="ctr"/>
-                      <a:r>
-                        <a:rPr sz="800" b="0">
-                          <a:solidFill>
-                            <a:srgbClr val="404040"/>
-                          </a:solidFill>
-                          <a:ea typeface="Meiryo UI"/>
-                          <a:latin typeface="Meiryo UI"/>
-                        </a:rPr>
-                        <a:t>8</a:t>
-                      </a:r>
-                    </a:p>
-                  </a:txBody>
-                  <a:tcPr marL="36000" marR="36000" marT="18000" marB="18000">
-                    <a:solidFill>
-                      <a:srgbClr val="FFFFFF"/>
-                    </a:solidFill>
-                  </a:tcPr>
-                </a:tc>
-                <a:tc>
-                  <a:txBody>
-                    <a:bodyPr wrap="square"/>
-                    <a:lstStyle/>
-                    <a:p>
-                      <a:pPr algn="ctr"/>
-                      <a:r>
-                        <a:rPr sz="800" b="0">
-                          <a:solidFill>
-                            <a:srgbClr val="404040"/>
-                          </a:solidFill>
-                          <a:ea typeface="Meiryo UI"/>
-                          <a:latin typeface="Meiryo UI"/>
-                        </a:rPr>
-                        <a:t>13</a:t>
-                      </a:r>
-                    </a:p>
-                  </a:txBody>
-                  <a:tcPr marL="36000" marR="36000" marT="18000" marB="18000">
-                    <a:solidFill>
-                      <a:srgbClr val="FFFFFF"/>
-                    </a:solidFill>
-                  </a:tcPr>
-                </a:tc>
-                <a:tc>
-                  <a:txBody>
-                    <a:bodyPr wrap="square"/>
-                    <a:lstStyle/>
-                    <a:p>
-                      <a:pPr algn="ctr"/>
-                      <a:r>
-                        <a:rPr sz="800" b="0">
-                          <a:solidFill>
-                            <a:srgbClr val="404040"/>
-                          </a:solidFill>
-                          <a:ea typeface="Meiryo UI"/>
-                          <a:latin typeface="Meiryo UI"/>
-                        </a:rPr>
-                        <a:t>10</a:t>
-                      </a:r>
-                    </a:p>
-                  </a:txBody>
-                  <a:tcPr marL="36000" marR="36000" marT="18000" marB="18000">
-                    <a:solidFill>
-                      <a:srgbClr val="FFFFFF"/>
-                    </a:solidFill>
-                  </a:tcPr>
-                </a:tc>
-                <a:tc>
-                  <a:txBody>
-                    <a:bodyPr wrap="square"/>
-                    <a:lstStyle/>
-                    <a:p>
-                      <a:pPr algn="ctr"/>
-                      <a:r>
-                        <a:rPr sz="800" b="0">
-                          <a:solidFill>
-                            <a:srgbClr val="404040"/>
-                          </a:solidFill>
-                          <a:ea typeface="Meiryo UI"/>
-                          <a:latin typeface="Meiryo UI"/>
-                        </a:rPr>
-                        <a:t>10</a:t>
-                      </a:r>
-                    </a:p>
-                  </a:txBody>
-                  <a:tcPr marL="36000" marR="36000" marT="18000" marB="18000">
-                    <a:solidFill>
-                      <a:srgbClr val="FFFFFF"/>
-                    </a:solidFill>
-                  </a:tcPr>
-                </a:tc>
-                <a:tc>
-                  <a:txBody>
-                    <a:bodyPr wrap="square"/>
-                    <a:lstStyle/>
-                    <a:p>
-                      <a:pPr algn="ctr"/>
-                      <a:r>
-                        <a:rPr sz="800" b="0">
-                          <a:solidFill>
-                            <a:srgbClr val="404040"/>
-                          </a:solidFill>
-                          <a:ea typeface="Meiryo UI"/>
-                          <a:latin typeface="Meiryo UI"/>
-                        </a:rPr>
-                        <a:t>8</a:t>
-                      </a:r>
-                    </a:p>
-                  </a:txBody>
-                  <a:tcPr marL="36000" marR="36000" marT="18000" marB="18000">
-                    <a:solidFill>
-                      <a:srgbClr val="FFFFFF"/>
-                    </a:solidFill>
-                  </a:tcPr>
-                </a:tc>
-              </a:tr>
-              <a:tr h="342857">
-                <a:tc>
-                  <a:txBody>
-                    <a:bodyPr wrap="square"/>
-                    <a:lstStyle/>
-                    <a:p>
-                      <a:pPr algn="ctr"/>
-                      <a:r>
-                        <a:rPr sz="800" b="1">
-                          <a:solidFill>
-                            <a:srgbClr val="404040"/>
-                          </a:solidFill>
-                          <a:ea typeface="Meiryo UI"/>
-                          <a:latin typeface="Meiryo UI"/>
-                        </a:rPr>
-                        <a:t>合計</a:t>
-                      </a:r>
-                    </a:p>
-                  </a:txBody>
-                  <a:tcPr marL="36000" marR="36000" marT="18000" marB="18000">
-                    <a:solidFill>
-                      <a:srgbClr val="E8F7F9"/>
-                    </a:solidFill>
-                  </a:tcPr>
-                </a:tc>
-                <a:tc>
-                  <a:txBody>
-                    <a:bodyPr wrap="square"/>
-                    <a:lstStyle/>
-                    <a:p>
-                      <a:pPr algn="ctr"/>
-                      <a:r>
-                        <a:rPr sz="800" b="0">
-                          <a:solidFill>
-                            <a:srgbClr val="404040"/>
-                          </a:solidFill>
-                          <a:ea typeface="Meiryo UI"/>
-                          <a:latin typeface="Meiryo UI"/>
-                        </a:rPr>
-                        <a:t>70</a:t>
-                      </a:r>
-                    </a:p>
-                  </a:txBody>
-                  <a:tcPr marL="36000" marR="36000" marT="18000" marB="18000">
-                    <a:solidFill>
-                      <a:srgbClr val="FFFFFF"/>
-                    </a:solidFill>
-                  </a:tcPr>
-                </a:tc>
-                <a:tc>
-                  <a:txBody>
-                    <a:bodyPr wrap="square"/>
-                    <a:lstStyle/>
-                    <a:p>
-                      <a:pPr algn="ctr"/>
-                      <a:r>
-                        <a:rPr sz="800" b="0">
-                          <a:solidFill>
-                            <a:srgbClr val="404040"/>
-                          </a:solidFill>
-                          <a:ea typeface="Meiryo UI"/>
-                          <a:latin typeface="Meiryo UI"/>
-                        </a:rPr>
-                        <a:t>89</a:t>
-                      </a:r>
-                    </a:p>
-                  </a:txBody>
-                  <a:tcPr marL="36000" marR="36000" marT="18000" marB="18000">
-                    <a:solidFill>
-                      <a:srgbClr val="FFFFFF"/>
-                    </a:solidFill>
-                  </a:tcPr>
-                </a:tc>
-                <a:tc>
-                  <a:txBody>
-                    <a:bodyPr wrap="square"/>
-                    <a:lstStyle/>
-                    <a:p>
-                      <a:pPr algn="ctr"/>
-                      <a:r>
-                        <a:rPr sz="800" b="0">
-                          <a:solidFill>
-                            <a:srgbClr val="404040"/>
-                          </a:solidFill>
-                          <a:ea typeface="Meiryo UI"/>
-                          <a:latin typeface="Meiryo UI"/>
-                        </a:rPr>
-                        <a:t>64</a:t>
-                      </a:r>
-                    </a:p>
-                  </a:txBody>
-                  <a:tcPr marL="36000" marR="36000" marT="18000" marB="18000">
-                    <a:solidFill>
-                      <a:srgbClr val="FFFFFF"/>
-                    </a:solidFill>
-                  </a:tcPr>
-                </a:tc>
-                <a:tc>
-                  <a:txBody>
-                    <a:bodyPr wrap="square"/>
-                    <a:lstStyle/>
-                    <a:p>
-                      <a:pPr algn="ctr"/>
-                      <a:r>
-                        <a:rPr sz="800" b="0">
-                          <a:solidFill>
-                            <a:srgbClr val="404040"/>
-                          </a:solidFill>
-                          <a:ea typeface="Meiryo UI"/>
-                          <a:latin typeface="Meiryo UI"/>
-                        </a:rPr>
-                        <a:t>56</a:t>
-                      </a:r>
-                    </a:p>
-                  </a:txBody>
-                  <a:tcPr marL="36000" marR="36000" marT="18000" marB="18000">
-                    <a:solidFill>
-                      <a:srgbClr val="FFFFFF"/>
-                    </a:solidFill>
-                  </a:tcPr>
-                </a:tc>
-                <a:tc>
-                  <a:txBody>
-                    <a:bodyPr wrap="square"/>
-                    <a:lstStyle/>
-                    <a:p>
-                      <a:pPr algn="ctr"/>
-                      <a:r>
-                        <a:rPr sz="800" b="0">
-                          <a:solidFill>
-                            <a:srgbClr val="404040"/>
-                          </a:solidFill>
-                          <a:ea typeface="Meiryo UI"/>
-                          <a:latin typeface="Meiryo UI"/>
-                        </a:rPr>
-                        <a:t>61</a:t>
-                      </a:r>
-                    </a:p>
-                  </a:txBody>
-                  <a:tcPr marL="36000" marR="36000" marT="18000" marB="18000">
-                    <a:solidFill>
-                      <a:srgbClr val="FFFFFF"/>
-                    </a:solidFill>
-                  </a:tcPr>
-                </a:tc>
-              </a:tr>
-              <a:tr h="342858">
+              <a:tr h="271432">
                 <a:tc>
                   <a:txBody>
                     <a:bodyPr wrap="square"/>
@@ -10010,7 +10532,7 @@
         <p:spPr>
           <a:xfrm>
             <a:off x="4750000" y="580000"/>
-            <a:ext cx="4200000" cy="320000"/>
+            <a:ext cx="4200000" cy="280000"/>
           </a:xfrm>
           <a:prstGeom prst="roundRect">
             <a:avLst/>
@@ -10043,7 +10565,7 @@
           <a:p>
             <a:pPr algn="ctr"/>
             <a:r>
-              <a:rPr sz="1100" b="1">
+              <a:rPr sz="1000" b="1">
                 <a:solidFill>
                   <a:srgbClr val="404040"/>
                 </a:solidFill>
@@ -10064,8 +10586,8 @@
           <p:nvPr/>
         </p:nvGraphicFramePr>
         <p:xfrm>
-          <a:off x="4750000" y="950000"/>
-          <a:ext cx="4200000" cy="2400000"/>
+          <a:off x="4750000" y="880000"/>
+          <a:ext cx="4200000" cy="1900000"/>
         </p:xfrm>
         <a:graphic>
           <a:graphicData uri="http://schemas.openxmlformats.org/drawingml/2006/table">
@@ -10081,7 +10603,153 @@
                 <a:gridCol w="560000"/>
                 <a:gridCol w="560000"/>
               </a:tblGrid>
-              <a:tr h="342857">
+              <a:tr h="271428">
+                <a:tc>
+                  <a:txBody>
+                    <a:bodyPr wrap="square"/>
+                    <a:lstStyle/>
+                    <a:p>
+                      <a:pPr algn="ctr"/>
+                      <a:r>
+                        <a:rPr sz="900" b="1">
+                          <a:solidFill>
+                            <a:srgbClr val="FFFFFF"/>
+                          </a:solidFill>
+                          <a:ea typeface="Meiryo UI"/>
+                          <a:latin typeface="Meiryo UI"/>
+                        </a:rPr>
+                        <a:t>（参考）区内全体</a:t>
+                      </a:r>
+                    </a:p>
+                  </a:txBody>
+                  <a:tcPr marL="36000" marR="36000" marT="18000" marB="18000">
+                    <a:solidFill>
+                      <a:srgbClr val="0F9ED5"/>
+                    </a:solidFill>
+                  </a:tcPr>
+                </a:tc>
+                <a:tc>
+                  <a:txBody>
+                    <a:bodyPr wrap="square"/>
+                    <a:lstStyle/>
+                    <a:p>
+                      <a:pPr algn="ctr"/>
+                      <a:r>
+                        <a:rPr sz="900" b="1">
+                          <a:solidFill>
+                            <a:srgbClr val="FFFFFF"/>
+                          </a:solidFill>
+                          <a:ea typeface="Meiryo UI"/>
+                          <a:latin typeface="Meiryo UI"/>
+                        </a:rPr>
+                        <a:t>R3</a:t>
+                      </a:r>
+                    </a:p>
+                  </a:txBody>
+                  <a:tcPr marL="36000" marR="36000" marT="18000" marB="18000">
+                    <a:solidFill>
+                      <a:srgbClr val="0F9ED5"/>
+                    </a:solidFill>
+                  </a:tcPr>
+                </a:tc>
+                <a:tc>
+                  <a:txBody>
+                    <a:bodyPr wrap="square"/>
+                    <a:lstStyle/>
+                    <a:p>
+                      <a:pPr algn="ctr"/>
+                      <a:r>
+                        <a:rPr sz="900" b="1">
+                          <a:solidFill>
+                            <a:srgbClr val="FFFFFF"/>
+                          </a:solidFill>
+                          <a:ea typeface="Meiryo UI"/>
+                          <a:latin typeface="Meiryo UI"/>
+                        </a:rPr>
+                        <a:t>R4</a:t>
+                      </a:r>
+                    </a:p>
+                  </a:txBody>
+                  <a:tcPr marL="36000" marR="36000" marT="18000" marB="18000">
+                    <a:solidFill>
+                      <a:srgbClr val="0F9ED5"/>
+                    </a:solidFill>
+                  </a:tcPr>
+                </a:tc>
+                <a:tc>
+                  <a:txBody>
+                    <a:bodyPr wrap="square"/>
+                    <a:lstStyle/>
+                    <a:p>
+                      <a:pPr algn="ctr"/>
+                      <a:r>
+                        <a:rPr sz="900" b="1">
+                          <a:solidFill>
+                            <a:srgbClr val="FFFFFF"/>
+                          </a:solidFill>
+                          <a:ea typeface="Meiryo UI"/>
+                          <a:latin typeface="Meiryo UI"/>
+                        </a:rPr>
+                        <a:t>R5</a:t>
+                      </a:r>
+                    </a:p>
+                  </a:txBody>
+                  <a:tcPr marL="36000" marR="36000" marT="18000" marB="18000">
+                    <a:solidFill>
+                      <a:srgbClr val="0F9ED5"/>
+                    </a:solidFill>
+                  </a:tcPr>
+                </a:tc>
+                <a:tc>
+                  <a:txBody>
+                    <a:bodyPr wrap="square"/>
+                    <a:lstStyle/>
+                    <a:p>
+                      <a:pPr algn="ctr"/>
+                      <a:r>
+                        <a:rPr sz="900" b="1">
+                          <a:solidFill>
+                            <a:srgbClr val="FFFFFF"/>
+                          </a:solidFill>
+                          <a:ea typeface="Meiryo UI"/>
+                          <a:latin typeface="Meiryo UI"/>
+                        </a:rPr>
+                        <a:t>R6</a:t>
+                      </a:r>
+                    </a:p>
+                  </a:txBody>
+                  <a:tcPr marL="36000" marR="36000" marT="18000" marB="18000">
+                    <a:solidFill>
+                      <a:srgbClr val="0F9ED5"/>
+                    </a:solidFill>
+                  </a:tcPr>
+                </a:tc>
+                <a:tc>
+                  <a:txBody>
+                    <a:bodyPr wrap="square"/>
+                    <a:lstStyle/>
+                    <a:p>
+                      <a:pPr algn="ctr"/>
+                      <a:r>
+                        <a:rPr sz="900" b="1">
+                          <a:solidFill>
+                            <a:srgbClr val="FFFFFF"/>
+                          </a:solidFill>
+                          <a:ea typeface="Meiryo UI"/>
+                          <a:latin typeface="Meiryo UI"/>
+                        </a:rPr>
+                        <a:t>R7</a:t>
+                      </a:r>
+                    </a:p>
+                  </a:txBody>
+                  <a:tcPr marL="36000" marR="36000" marT="18000" marB="18000">
+                    <a:solidFill>
+                      <a:srgbClr val="0F9ED5"/>
+                    </a:solidFill>
+                  </a:tcPr>
+                </a:tc>
+              </a:tr>
+              <a:tr h="271428">
                 <a:tc>
                   <a:txBody>
                     <a:bodyPr wrap="square"/>
@@ -10091,21 +10759,143 @@
                       <a:r>
                         <a:rPr sz="800" b="1">
                           <a:solidFill>
-                            <a:srgbClr val="FFFFFF"/>
-                          </a:solidFill>
-                          <a:ea typeface="Meiryo UI"/>
-                          <a:latin typeface="Meiryo UI"/>
-                        </a:rPr>
-                        <a:t>（参考）区内全体</a:t>
-                      </a:r>
-                    </a:p>
-                  </a:txBody>
-                  <a:tcPr marL="36000" marR="36000" marT="18000" marB="18000">
-                    <a:solidFill>
-                      <a:srgbClr val="0F9ED5"/>
-                    </a:solidFill>
-                  </a:tcPr>
-                </a:tc>
+                            <a:srgbClr val="404040"/>
+                          </a:solidFill>
+                          <a:ea typeface="Meiryo UI"/>
+                          <a:latin typeface="Meiryo UI"/>
+                        </a:rPr>
+                        <a:t>区立(指定校)</a:t>
+                      </a:r>
+                    </a:p>
+                  </a:txBody>
+                  <a:tcPr marL="36000" marR="36000" marT="18000" marB="18000">
+                    <a:solidFill>
+                      <a:srgbClr val="E8F7F9"/>
+                    </a:solidFill>
+                  </a:tcPr>
+                </a:tc>
+                <a:tc>
+                  <a:txBody>
+                    <a:bodyPr wrap="square"/>
+                    <a:lstStyle/>
+                    <a:p>
+                      <a:pPr algn="ctr"/>
+                      <a:r>
+                        <a:rPr sz="800" b="0">
+                          <a:solidFill>
+                            <a:srgbClr val="404040"/>
+                          </a:solidFill>
+                          <a:ea typeface="Meiryo UI"/>
+                          <a:latin typeface="Meiryo UI"/>
+                        </a:rPr>
+                        <a:t>3,855</a:t>
+                      </a:r>
+                    </a:p>
+                  </a:txBody>
+                  <a:tcPr marL="36000" marR="36000" marT="18000" marB="18000">
+                    <a:solidFill>
+                      <a:srgbClr val="FFFFFF"/>
+                    </a:solidFill>
+                  </a:tcPr>
+                </a:tc>
+                <a:tc>
+                  <a:txBody>
+                    <a:bodyPr wrap="square"/>
+                    <a:lstStyle/>
+                    <a:p>
+                      <a:pPr algn="ctr"/>
+                      <a:r>
+                        <a:rPr sz="800" b="0">
+                          <a:solidFill>
+                            <a:srgbClr val="404040"/>
+                          </a:solidFill>
+                          <a:ea typeface="Meiryo UI"/>
+                          <a:latin typeface="Meiryo UI"/>
+                        </a:rPr>
+                        <a:t>3,636</a:t>
+                      </a:r>
+                    </a:p>
+                  </a:txBody>
+                  <a:tcPr marL="36000" marR="36000" marT="18000" marB="18000">
+                    <a:solidFill>
+                      <a:srgbClr val="FFFFFF"/>
+                    </a:solidFill>
+                  </a:tcPr>
+                </a:tc>
+                <a:tc>
+                  <a:txBody>
+                    <a:bodyPr wrap="square"/>
+                    <a:lstStyle/>
+                    <a:p>
+                      <a:pPr algn="ctr"/>
+                      <a:r>
+                        <a:rPr sz="800" b="0">
+                          <a:solidFill>
+                            <a:srgbClr val="404040"/>
+                          </a:solidFill>
+                          <a:ea typeface="Meiryo UI"/>
+                          <a:latin typeface="Meiryo UI"/>
+                        </a:rPr>
+                        <a:t>3,723</a:t>
+                      </a:r>
+                    </a:p>
+                  </a:txBody>
+                  <a:tcPr marL="36000" marR="36000" marT="18000" marB="18000">
+                    <a:solidFill>
+                      <a:srgbClr val="FFFFFF"/>
+                    </a:solidFill>
+                  </a:tcPr>
+                </a:tc>
+                <a:tc>
+                  <a:txBody>
+                    <a:bodyPr wrap="square"/>
+                    <a:lstStyle/>
+                    <a:p>
+                      <a:pPr algn="ctr"/>
+                      <a:r>
+                        <a:rPr sz="800" b="0">
+                          <a:solidFill>
+                            <a:srgbClr val="404040"/>
+                          </a:solidFill>
+                          <a:ea typeface="Meiryo UI"/>
+                          <a:latin typeface="Meiryo UI"/>
+                        </a:rPr>
+                        <a:t>3,565</a:t>
+                      </a:r>
+                    </a:p>
+                  </a:txBody>
+                  <a:tcPr marL="36000" marR="36000" marT="18000" marB="18000">
+                    <a:solidFill>
+                      <a:srgbClr val="FFFFFF"/>
+                    </a:solidFill>
+                  </a:tcPr>
+                </a:tc>
+                <a:tc>
+                  <a:txBody>
+                    <a:bodyPr wrap="square"/>
+                    <a:lstStyle/>
+                    <a:p>
+                      <a:pPr algn="ctr"/>
+                      <a:r>
+                        <a:rPr sz="800" b="0">
+                          <a:solidFill>
+                            <a:srgbClr val="404040"/>
+                          </a:solidFill>
+                          <a:ea typeface="Meiryo UI"/>
+                          <a:latin typeface="Meiryo UI"/>
+                        </a:rPr>
+                        <a:t>3,562</a:t>
+                      </a:r>
+                    </a:p>
+                  </a:txBody>
+                  <a:tcPr marL="36000" marR="36000" marT="18000" marB="18000">
+                    <a:solidFill>
+                      <a:srgbClr val="FFFFFF"/>
+                    </a:solidFill>
+                  </a:tcPr>
+                </a:tc>
+              </a:tr>
+              <a:tr h="271428">
                 <a:tc>
                   <a:txBody>
                     <a:bodyPr wrap="square"/>
@@ -10115,21 +10905,143 @@
                       <a:r>
                         <a:rPr sz="800" b="1">
                           <a:solidFill>
-                            <a:srgbClr val="FFFFFF"/>
-                          </a:solidFill>
-                          <a:ea typeface="Meiryo UI"/>
-                          <a:latin typeface="Meiryo UI"/>
-                        </a:rPr>
-                        <a:t>R3</a:t>
-                      </a:r>
-                    </a:p>
-                  </a:txBody>
-                  <a:tcPr marL="36000" marR="36000" marT="18000" marB="18000">
-                    <a:solidFill>
-                      <a:srgbClr val="0F9ED5"/>
-                    </a:solidFill>
-                  </a:tcPr>
-                </a:tc>
+                            <a:srgbClr val="404040"/>
+                          </a:solidFill>
+                          <a:ea typeface="Meiryo UI"/>
+                          <a:latin typeface="Meiryo UI"/>
+                        </a:rPr>
+                        <a:t>区立(指定校以外)</a:t>
+                      </a:r>
+                    </a:p>
+                  </a:txBody>
+                  <a:tcPr marL="36000" marR="36000" marT="18000" marB="18000">
+                    <a:solidFill>
+                      <a:srgbClr val="E8F7F9"/>
+                    </a:solidFill>
+                  </a:tcPr>
+                </a:tc>
+                <a:tc>
+                  <a:txBody>
+                    <a:bodyPr wrap="square"/>
+                    <a:lstStyle/>
+                    <a:p>
+                      <a:pPr algn="ctr"/>
+                      <a:r>
+                        <a:rPr sz="800" b="0">
+                          <a:solidFill>
+                            <a:srgbClr val="404040"/>
+                          </a:solidFill>
+                          <a:ea typeface="Meiryo UI"/>
+                          <a:latin typeface="Meiryo UI"/>
+                        </a:rPr>
+                        <a:t>645</a:t>
+                      </a:r>
+                    </a:p>
+                  </a:txBody>
+                  <a:tcPr marL="36000" marR="36000" marT="18000" marB="18000">
+                    <a:solidFill>
+                      <a:srgbClr val="FFFFFF"/>
+                    </a:solidFill>
+                  </a:tcPr>
+                </a:tc>
+                <a:tc>
+                  <a:txBody>
+                    <a:bodyPr wrap="square"/>
+                    <a:lstStyle/>
+                    <a:p>
+                      <a:pPr algn="ctr"/>
+                      <a:r>
+                        <a:rPr sz="800" b="0">
+                          <a:solidFill>
+                            <a:srgbClr val="404040"/>
+                          </a:solidFill>
+                          <a:ea typeface="Meiryo UI"/>
+                          <a:latin typeface="Meiryo UI"/>
+                        </a:rPr>
+                        <a:t>664</a:t>
+                      </a:r>
+                    </a:p>
+                  </a:txBody>
+                  <a:tcPr marL="36000" marR="36000" marT="18000" marB="18000">
+                    <a:solidFill>
+                      <a:srgbClr val="FFFFFF"/>
+                    </a:solidFill>
+                  </a:tcPr>
+                </a:tc>
+                <a:tc>
+                  <a:txBody>
+                    <a:bodyPr wrap="square"/>
+                    <a:lstStyle/>
+                    <a:p>
+                      <a:pPr algn="ctr"/>
+                      <a:r>
+                        <a:rPr sz="800" b="0">
+                          <a:solidFill>
+                            <a:srgbClr val="404040"/>
+                          </a:solidFill>
+                          <a:ea typeface="Meiryo UI"/>
+                          <a:latin typeface="Meiryo UI"/>
+                        </a:rPr>
+                        <a:t>704</a:t>
+                      </a:r>
+                    </a:p>
+                  </a:txBody>
+                  <a:tcPr marL="36000" marR="36000" marT="18000" marB="18000">
+                    <a:solidFill>
+                      <a:srgbClr val="FFFFFF"/>
+                    </a:solidFill>
+                  </a:tcPr>
+                </a:tc>
+                <a:tc>
+                  <a:txBody>
+                    <a:bodyPr wrap="square"/>
+                    <a:lstStyle/>
+                    <a:p>
+                      <a:pPr algn="ctr"/>
+                      <a:r>
+                        <a:rPr sz="800" b="0">
+                          <a:solidFill>
+                            <a:srgbClr val="404040"/>
+                          </a:solidFill>
+                          <a:ea typeface="Meiryo UI"/>
+                          <a:latin typeface="Meiryo UI"/>
+                        </a:rPr>
+                        <a:t>587</a:t>
+                      </a:r>
+                    </a:p>
+                  </a:txBody>
+                  <a:tcPr marL="36000" marR="36000" marT="18000" marB="18000">
+                    <a:solidFill>
+                      <a:srgbClr val="FFFFFF"/>
+                    </a:solidFill>
+                  </a:tcPr>
+                </a:tc>
+                <a:tc>
+                  <a:txBody>
+                    <a:bodyPr wrap="square"/>
+                    <a:lstStyle/>
+                    <a:p>
+                      <a:pPr algn="ctr"/>
+                      <a:r>
+                        <a:rPr sz="800" b="0">
+                          <a:solidFill>
+                            <a:srgbClr val="404040"/>
+                          </a:solidFill>
+                          <a:ea typeface="Meiryo UI"/>
+                          <a:latin typeface="Meiryo UI"/>
+                        </a:rPr>
+                        <a:t>705</a:t>
+                      </a:r>
+                    </a:p>
+                  </a:txBody>
+                  <a:tcPr marL="36000" marR="36000" marT="18000" marB="18000">
+                    <a:solidFill>
+                      <a:srgbClr val="FFFFFF"/>
+                    </a:solidFill>
+                  </a:tcPr>
+                </a:tc>
+              </a:tr>
+              <a:tr h="271428">
                 <a:tc>
                   <a:txBody>
                     <a:bodyPr wrap="square"/>
@@ -10139,21 +11051,143 @@
                       <a:r>
                         <a:rPr sz="800" b="1">
                           <a:solidFill>
-                            <a:srgbClr val="FFFFFF"/>
-                          </a:solidFill>
-                          <a:ea typeface="Meiryo UI"/>
-                          <a:latin typeface="Meiryo UI"/>
-                        </a:rPr>
-                        <a:t>R4</a:t>
-                      </a:r>
-                    </a:p>
-                  </a:txBody>
-                  <a:tcPr marL="36000" marR="36000" marT="18000" marB="18000">
-                    <a:solidFill>
-                      <a:srgbClr val="0F9ED5"/>
-                    </a:solidFill>
-                  </a:tcPr>
-                </a:tc>
+                            <a:srgbClr val="404040"/>
+                          </a:solidFill>
+                          <a:ea typeface="Meiryo UI"/>
+                          <a:latin typeface="Meiryo UI"/>
+                        </a:rPr>
+                        <a:t>区立計</a:t>
+                      </a:r>
+                    </a:p>
+                  </a:txBody>
+                  <a:tcPr marL="36000" marR="36000" marT="18000" marB="18000">
+                    <a:solidFill>
+                      <a:srgbClr val="E8F7F9"/>
+                    </a:solidFill>
+                  </a:tcPr>
+                </a:tc>
+                <a:tc>
+                  <a:txBody>
+                    <a:bodyPr wrap="square"/>
+                    <a:lstStyle/>
+                    <a:p>
+                      <a:pPr algn="ctr"/>
+                      <a:r>
+                        <a:rPr sz="800" b="0">
+                          <a:solidFill>
+                            <a:srgbClr val="404040"/>
+                          </a:solidFill>
+                          <a:ea typeface="Meiryo UI"/>
+                          <a:latin typeface="Meiryo UI"/>
+                        </a:rPr>
+                        <a:t>4,500</a:t>
+                      </a:r>
+                    </a:p>
+                  </a:txBody>
+                  <a:tcPr marL="36000" marR="36000" marT="18000" marB="18000">
+                    <a:solidFill>
+                      <a:srgbClr val="FFFFFF"/>
+                    </a:solidFill>
+                  </a:tcPr>
+                </a:tc>
+                <a:tc>
+                  <a:txBody>
+                    <a:bodyPr wrap="square"/>
+                    <a:lstStyle/>
+                    <a:p>
+                      <a:pPr algn="ctr"/>
+                      <a:r>
+                        <a:rPr sz="800" b="0">
+                          <a:solidFill>
+                            <a:srgbClr val="404040"/>
+                          </a:solidFill>
+                          <a:ea typeface="Meiryo UI"/>
+                          <a:latin typeface="Meiryo UI"/>
+                        </a:rPr>
+                        <a:t>4,300</a:t>
+                      </a:r>
+                    </a:p>
+                  </a:txBody>
+                  <a:tcPr marL="36000" marR="36000" marT="18000" marB="18000">
+                    <a:solidFill>
+                      <a:srgbClr val="FFFFFF"/>
+                    </a:solidFill>
+                  </a:tcPr>
+                </a:tc>
+                <a:tc>
+                  <a:txBody>
+                    <a:bodyPr wrap="square"/>
+                    <a:lstStyle/>
+                    <a:p>
+                      <a:pPr algn="ctr"/>
+                      <a:r>
+                        <a:rPr sz="800" b="0">
+                          <a:solidFill>
+                            <a:srgbClr val="404040"/>
+                          </a:solidFill>
+                          <a:ea typeface="Meiryo UI"/>
+                          <a:latin typeface="Meiryo UI"/>
+                        </a:rPr>
+                        <a:t>4,427</a:t>
+                      </a:r>
+                    </a:p>
+                  </a:txBody>
+                  <a:tcPr marL="36000" marR="36000" marT="18000" marB="18000">
+                    <a:solidFill>
+                      <a:srgbClr val="FFFFFF"/>
+                    </a:solidFill>
+                  </a:tcPr>
+                </a:tc>
+                <a:tc>
+                  <a:txBody>
+                    <a:bodyPr wrap="square"/>
+                    <a:lstStyle/>
+                    <a:p>
+                      <a:pPr algn="ctr"/>
+                      <a:r>
+                        <a:rPr sz="800" b="0">
+                          <a:solidFill>
+                            <a:srgbClr val="404040"/>
+                          </a:solidFill>
+                          <a:ea typeface="Meiryo UI"/>
+                          <a:latin typeface="Meiryo UI"/>
+                        </a:rPr>
+                        <a:t>4,152</a:t>
+                      </a:r>
+                    </a:p>
+                  </a:txBody>
+                  <a:tcPr marL="36000" marR="36000" marT="18000" marB="18000">
+                    <a:solidFill>
+                      <a:srgbClr val="FFFFFF"/>
+                    </a:solidFill>
+                  </a:tcPr>
+                </a:tc>
+                <a:tc>
+                  <a:txBody>
+                    <a:bodyPr wrap="square"/>
+                    <a:lstStyle/>
+                    <a:p>
+                      <a:pPr algn="ctr"/>
+                      <a:r>
+                        <a:rPr sz="800" b="0">
+                          <a:solidFill>
+                            <a:srgbClr val="404040"/>
+                          </a:solidFill>
+                          <a:ea typeface="Meiryo UI"/>
+                          <a:latin typeface="Meiryo UI"/>
+                        </a:rPr>
+                        <a:t>4,267</a:t>
+                      </a:r>
+                    </a:p>
+                  </a:txBody>
+                  <a:tcPr marL="36000" marR="36000" marT="18000" marB="18000">
+                    <a:solidFill>
+                      <a:srgbClr val="FFFFFF"/>
+                    </a:solidFill>
+                  </a:tcPr>
+                </a:tc>
+              </a:tr>
+              <a:tr h="271428">
                 <a:tc>
                   <a:txBody>
                     <a:bodyPr wrap="square"/>
@@ -10163,21 +11197,143 @@
                       <a:r>
                         <a:rPr sz="800" b="1">
                           <a:solidFill>
-                            <a:srgbClr val="FFFFFF"/>
-                          </a:solidFill>
-                          <a:ea typeface="Meiryo UI"/>
-                          <a:latin typeface="Meiryo UI"/>
-                        </a:rPr>
-                        <a:t>R5</a:t>
-                      </a:r>
-                    </a:p>
-                  </a:txBody>
-                  <a:tcPr marL="36000" marR="36000" marT="18000" marB="18000">
-                    <a:solidFill>
-                      <a:srgbClr val="0F9ED5"/>
-                    </a:solidFill>
-                  </a:tcPr>
-                </a:tc>
+                            <a:srgbClr val="404040"/>
+                          </a:solidFill>
+                          <a:ea typeface="Meiryo UI"/>
+                          <a:latin typeface="Meiryo UI"/>
+                        </a:rPr>
+                        <a:t>区立外</a:t>
+                      </a:r>
+                    </a:p>
+                  </a:txBody>
+                  <a:tcPr marL="36000" marR="36000" marT="18000" marB="18000">
+                    <a:solidFill>
+                      <a:srgbClr val="E8F7F9"/>
+                    </a:solidFill>
+                  </a:tcPr>
+                </a:tc>
+                <a:tc>
+                  <a:txBody>
+                    <a:bodyPr wrap="square"/>
+                    <a:lstStyle/>
+                    <a:p>
+                      <a:pPr algn="ctr"/>
+                      <a:r>
+                        <a:rPr sz="800" b="0">
+                          <a:solidFill>
+                            <a:srgbClr val="404040"/>
+                          </a:solidFill>
+                          <a:ea typeface="Meiryo UI"/>
+                          <a:latin typeface="Meiryo UI"/>
+                        </a:rPr>
+                        <a:t>1,374</a:t>
+                      </a:r>
+                    </a:p>
+                  </a:txBody>
+                  <a:tcPr marL="36000" marR="36000" marT="18000" marB="18000">
+                    <a:solidFill>
+                      <a:srgbClr val="FFFFFF"/>
+                    </a:solidFill>
+                  </a:tcPr>
+                </a:tc>
+                <a:tc>
+                  <a:txBody>
+                    <a:bodyPr wrap="square"/>
+                    <a:lstStyle/>
+                    <a:p>
+                      <a:pPr algn="ctr"/>
+                      <a:r>
+                        <a:rPr sz="800" b="0">
+                          <a:solidFill>
+                            <a:srgbClr val="404040"/>
+                          </a:solidFill>
+                          <a:ea typeface="Meiryo UI"/>
+                          <a:latin typeface="Meiryo UI"/>
+                        </a:rPr>
+                        <a:t>1,395</a:t>
+                      </a:r>
+                    </a:p>
+                  </a:txBody>
+                  <a:tcPr marL="36000" marR="36000" marT="18000" marB="18000">
+                    <a:solidFill>
+                      <a:srgbClr val="FFFFFF"/>
+                    </a:solidFill>
+                  </a:tcPr>
+                </a:tc>
+                <a:tc>
+                  <a:txBody>
+                    <a:bodyPr wrap="square"/>
+                    <a:lstStyle/>
+                    <a:p>
+                      <a:pPr algn="ctr"/>
+                      <a:r>
+                        <a:rPr sz="800" b="0">
+                          <a:solidFill>
+                            <a:srgbClr val="404040"/>
+                          </a:solidFill>
+                          <a:ea typeface="Meiryo UI"/>
+                          <a:latin typeface="Meiryo UI"/>
+                        </a:rPr>
+                        <a:t>1,500</a:t>
+                      </a:r>
+                    </a:p>
+                  </a:txBody>
+                  <a:tcPr marL="36000" marR="36000" marT="18000" marB="18000">
+                    <a:solidFill>
+                      <a:srgbClr val="FFFFFF"/>
+                    </a:solidFill>
+                  </a:tcPr>
+                </a:tc>
+                <a:tc>
+                  <a:txBody>
+                    <a:bodyPr wrap="square"/>
+                    <a:lstStyle/>
+                    <a:p>
+                      <a:pPr algn="ctr"/>
+                      <a:r>
+                        <a:rPr sz="800" b="0">
+                          <a:solidFill>
+                            <a:srgbClr val="404040"/>
+                          </a:solidFill>
+                          <a:ea typeface="Meiryo UI"/>
+                          <a:latin typeface="Meiryo UI"/>
+                        </a:rPr>
+                        <a:t>1,418</a:t>
+                      </a:r>
+                    </a:p>
+                  </a:txBody>
+                  <a:tcPr marL="36000" marR="36000" marT="18000" marB="18000">
+                    <a:solidFill>
+                      <a:srgbClr val="FFFFFF"/>
+                    </a:solidFill>
+                  </a:tcPr>
+                </a:tc>
+                <a:tc>
+                  <a:txBody>
+                    <a:bodyPr wrap="square"/>
+                    <a:lstStyle/>
+                    <a:p>
+                      <a:pPr algn="ctr"/>
+                      <a:r>
+                        <a:rPr sz="800" b="0">
+                          <a:solidFill>
+                            <a:srgbClr val="404040"/>
+                          </a:solidFill>
+                          <a:ea typeface="Meiryo UI"/>
+                          <a:latin typeface="Meiryo UI"/>
+                        </a:rPr>
+                        <a:t>1,455</a:t>
+                      </a:r>
+                    </a:p>
+                  </a:txBody>
+                  <a:tcPr marL="36000" marR="36000" marT="18000" marB="18000">
+                    <a:solidFill>
+                      <a:srgbClr val="FFFFFF"/>
+                    </a:solidFill>
+                  </a:tcPr>
+                </a:tc>
+              </a:tr>
+              <a:tr h="271428">
                 <a:tc>
                   <a:txBody>
                     <a:bodyPr wrap="square"/>
@@ -10187,777 +11343,143 @@
                       <a:r>
                         <a:rPr sz="800" b="1">
                           <a:solidFill>
-                            <a:srgbClr val="FFFFFF"/>
-                          </a:solidFill>
-                          <a:ea typeface="Meiryo UI"/>
-                          <a:latin typeface="Meiryo UI"/>
-                        </a:rPr>
-                        <a:t>R6</a:t>
-                      </a:r>
-                    </a:p>
-                  </a:txBody>
-                  <a:tcPr marL="36000" marR="36000" marT="18000" marB="18000">
-                    <a:solidFill>
-                      <a:srgbClr val="0F9ED5"/>
-                    </a:solidFill>
-                  </a:tcPr>
-                </a:tc>
-                <a:tc>
-                  <a:txBody>
-                    <a:bodyPr wrap="square"/>
-                    <a:lstStyle/>
-                    <a:p>
-                      <a:pPr algn="ctr"/>
-                      <a:r>
-                        <a:rPr sz="800" b="1">
-                          <a:solidFill>
-                            <a:srgbClr val="FFFFFF"/>
-                          </a:solidFill>
-                          <a:ea typeface="Meiryo UI"/>
-                          <a:latin typeface="Meiryo UI"/>
-                        </a:rPr>
-                        <a:t>R7</a:t>
-                      </a:r>
-                    </a:p>
-                  </a:txBody>
-                  <a:tcPr marL="36000" marR="36000" marT="18000" marB="18000">
-                    <a:solidFill>
-                      <a:srgbClr val="0F9ED5"/>
+                            <a:srgbClr val="404040"/>
+                          </a:solidFill>
+                          <a:ea typeface="Meiryo UI"/>
+                          <a:latin typeface="Meiryo UI"/>
+                        </a:rPr>
+                        <a:t>合計</a:t>
+                      </a:r>
+                    </a:p>
+                  </a:txBody>
+                  <a:tcPr marL="36000" marR="36000" marT="18000" marB="18000">
+                    <a:solidFill>
+                      <a:srgbClr val="E8F7F9"/>
+                    </a:solidFill>
+                  </a:tcPr>
+                </a:tc>
+                <a:tc>
+                  <a:txBody>
+                    <a:bodyPr wrap="square"/>
+                    <a:lstStyle/>
+                    <a:p>
+                      <a:pPr algn="ctr"/>
+                      <a:r>
+                        <a:rPr sz="800" b="0">
+                          <a:solidFill>
+                            <a:srgbClr val="404040"/>
+                          </a:solidFill>
+                          <a:ea typeface="Meiryo UI"/>
+                          <a:latin typeface="Meiryo UI"/>
+                        </a:rPr>
+                        <a:t>5,874</a:t>
+                      </a:r>
+                    </a:p>
+                  </a:txBody>
+                  <a:tcPr marL="36000" marR="36000" marT="18000" marB="18000">
+                    <a:solidFill>
+                      <a:srgbClr val="FFFFFF"/>
+                    </a:solidFill>
+                  </a:tcPr>
+                </a:tc>
+                <a:tc>
+                  <a:txBody>
+                    <a:bodyPr wrap="square"/>
+                    <a:lstStyle/>
+                    <a:p>
+                      <a:pPr algn="ctr"/>
+                      <a:r>
+                        <a:rPr sz="800" b="0">
+                          <a:solidFill>
+                            <a:srgbClr val="404040"/>
+                          </a:solidFill>
+                          <a:ea typeface="Meiryo UI"/>
+                          <a:latin typeface="Meiryo UI"/>
+                        </a:rPr>
+                        <a:t>5,695</a:t>
+                      </a:r>
+                    </a:p>
+                  </a:txBody>
+                  <a:tcPr marL="36000" marR="36000" marT="18000" marB="18000">
+                    <a:solidFill>
+                      <a:srgbClr val="FFFFFF"/>
+                    </a:solidFill>
+                  </a:tcPr>
+                </a:tc>
+                <a:tc>
+                  <a:txBody>
+                    <a:bodyPr wrap="square"/>
+                    <a:lstStyle/>
+                    <a:p>
+                      <a:pPr algn="ctr"/>
+                      <a:r>
+                        <a:rPr sz="800" b="0">
+                          <a:solidFill>
+                            <a:srgbClr val="404040"/>
+                          </a:solidFill>
+                          <a:ea typeface="Meiryo UI"/>
+                          <a:latin typeface="Meiryo UI"/>
+                        </a:rPr>
+                        <a:t>5,927</a:t>
+                      </a:r>
+                    </a:p>
+                  </a:txBody>
+                  <a:tcPr marL="36000" marR="36000" marT="18000" marB="18000">
+                    <a:solidFill>
+                      <a:srgbClr val="FFFFFF"/>
+                    </a:solidFill>
+                  </a:tcPr>
+                </a:tc>
+                <a:tc>
+                  <a:txBody>
+                    <a:bodyPr wrap="square"/>
+                    <a:lstStyle/>
+                    <a:p>
+                      <a:pPr algn="ctr"/>
+                      <a:r>
+                        <a:rPr sz="800" b="0">
+                          <a:solidFill>
+                            <a:srgbClr val="404040"/>
+                          </a:solidFill>
+                          <a:ea typeface="Meiryo UI"/>
+                          <a:latin typeface="Meiryo UI"/>
+                        </a:rPr>
+                        <a:t>5,570</a:t>
+                      </a:r>
+                    </a:p>
+                  </a:txBody>
+                  <a:tcPr marL="36000" marR="36000" marT="18000" marB="18000">
+                    <a:solidFill>
+                      <a:srgbClr val="FFFFFF"/>
+                    </a:solidFill>
+                  </a:tcPr>
+                </a:tc>
+                <a:tc>
+                  <a:txBody>
+                    <a:bodyPr wrap="square"/>
+                    <a:lstStyle/>
+                    <a:p>
+                      <a:pPr algn="ctr"/>
+                      <a:r>
+                        <a:rPr sz="800" b="0">
+                          <a:solidFill>
+                            <a:srgbClr val="404040"/>
+                          </a:solidFill>
+                          <a:ea typeface="Meiryo UI"/>
+                          <a:latin typeface="Meiryo UI"/>
+                        </a:rPr>
+                        <a:t>5,722</a:t>
+                      </a:r>
+                    </a:p>
+                  </a:txBody>
+                  <a:tcPr marL="36000" marR="36000" marT="18000" marB="18000">
+                    <a:solidFill>
+                      <a:srgbClr val="FFFFFF"/>
                     </a:solidFill>
                   </a:tcPr>
                 </a:tc>
               </a:tr>
-              <a:tr h="342857">
-                <a:tc>
-                  <a:txBody>
-                    <a:bodyPr wrap="square"/>
-                    <a:lstStyle/>
-                    <a:p>
-                      <a:pPr algn="ctr"/>
-                      <a:r>
-                        <a:rPr sz="800" b="1">
-                          <a:solidFill>
-                            <a:srgbClr val="404040"/>
-                          </a:solidFill>
-                          <a:ea typeface="Meiryo UI"/>
-                          <a:latin typeface="Meiryo UI"/>
-                        </a:rPr>
-                        <a:t>区立(指定校)</a:t>
-                      </a:r>
-                    </a:p>
-                  </a:txBody>
-                  <a:tcPr marL="36000" marR="36000" marT="18000" marB="18000">
-                    <a:solidFill>
-                      <a:srgbClr val="E8F7F9"/>
-                    </a:solidFill>
-                  </a:tcPr>
-                </a:tc>
-                <a:tc>
-                  <a:txBody>
-                    <a:bodyPr wrap="square"/>
-                    <a:lstStyle/>
-                    <a:p>
-                      <a:pPr algn="ctr"/>
-                      <a:r>
-                        <a:rPr sz="800" b="0">
-                          <a:solidFill>
-                            <a:srgbClr val="404040"/>
-                          </a:solidFill>
-                          <a:ea typeface="Meiryo UI"/>
-                          <a:latin typeface="Meiryo UI"/>
-                        </a:rPr>
-                        <a:t>3,855</a:t>
-                      </a:r>
-                    </a:p>
-                  </a:txBody>
-                  <a:tcPr marL="36000" marR="36000" marT="18000" marB="18000">
-                    <a:solidFill>
-                      <a:srgbClr val="FFFFFF"/>
-                    </a:solidFill>
-                  </a:tcPr>
-                </a:tc>
-                <a:tc>
-                  <a:txBody>
-                    <a:bodyPr wrap="square"/>
-                    <a:lstStyle/>
-                    <a:p>
-                      <a:pPr algn="ctr"/>
-                      <a:r>
-                        <a:rPr sz="800" b="0">
-                          <a:solidFill>
-                            <a:srgbClr val="404040"/>
-                          </a:solidFill>
-                          <a:ea typeface="Meiryo UI"/>
-                          <a:latin typeface="Meiryo UI"/>
-                        </a:rPr>
-                        <a:t>3,636</a:t>
-                      </a:r>
-                    </a:p>
-                  </a:txBody>
-                  <a:tcPr marL="36000" marR="36000" marT="18000" marB="18000">
-                    <a:solidFill>
-                      <a:srgbClr val="FFFFFF"/>
-                    </a:solidFill>
-                  </a:tcPr>
-                </a:tc>
-                <a:tc>
-                  <a:txBody>
-                    <a:bodyPr wrap="square"/>
-                    <a:lstStyle/>
-                    <a:p>
-                      <a:pPr algn="ctr"/>
-                      <a:r>
-                        <a:rPr sz="800" b="0">
-                          <a:solidFill>
-                            <a:srgbClr val="404040"/>
-                          </a:solidFill>
-                          <a:ea typeface="Meiryo UI"/>
-                          <a:latin typeface="Meiryo UI"/>
-                        </a:rPr>
-                        <a:t>3,723</a:t>
-                      </a:r>
-                    </a:p>
-                  </a:txBody>
-                  <a:tcPr marL="36000" marR="36000" marT="18000" marB="18000">
-                    <a:solidFill>
-                      <a:srgbClr val="FFFFFF"/>
-                    </a:solidFill>
-                  </a:tcPr>
-                </a:tc>
-                <a:tc>
-                  <a:txBody>
-                    <a:bodyPr wrap="square"/>
-                    <a:lstStyle/>
-                    <a:p>
-                      <a:pPr algn="ctr"/>
-                      <a:r>
-                        <a:rPr sz="800" b="0">
-                          <a:solidFill>
-                            <a:srgbClr val="404040"/>
-                          </a:solidFill>
-                          <a:ea typeface="Meiryo UI"/>
-                          <a:latin typeface="Meiryo UI"/>
-                        </a:rPr>
-                        <a:t>3,565</a:t>
-                      </a:r>
-                    </a:p>
-                  </a:txBody>
-                  <a:tcPr marL="36000" marR="36000" marT="18000" marB="18000">
-                    <a:solidFill>
-                      <a:srgbClr val="FFFFFF"/>
-                    </a:solidFill>
-                  </a:tcPr>
-                </a:tc>
-                <a:tc>
-                  <a:txBody>
-                    <a:bodyPr wrap="square"/>
-                    <a:lstStyle/>
-                    <a:p>
-                      <a:pPr algn="ctr"/>
-                      <a:r>
-                        <a:rPr sz="800" b="0">
-                          <a:solidFill>
-                            <a:srgbClr val="404040"/>
-                          </a:solidFill>
-                          <a:ea typeface="Meiryo UI"/>
-                          <a:latin typeface="Meiryo UI"/>
-                        </a:rPr>
-                        <a:t>3,562</a:t>
-                      </a:r>
-                    </a:p>
-                  </a:txBody>
-                  <a:tcPr marL="36000" marR="36000" marT="18000" marB="18000">
-                    <a:solidFill>
-                      <a:srgbClr val="FFFFFF"/>
-                    </a:solidFill>
-                  </a:tcPr>
-                </a:tc>
-              </a:tr>
-              <a:tr h="342857">
-                <a:tc>
-                  <a:txBody>
-                    <a:bodyPr wrap="square"/>
-                    <a:lstStyle/>
-                    <a:p>
-                      <a:pPr algn="ctr"/>
-                      <a:r>
-                        <a:rPr sz="800" b="1">
-                          <a:solidFill>
-                            <a:srgbClr val="404040"/>
-                          </a:solidFill>
-                          <a:ea typeface="Meiryo UI"/>
-                          <a:latin typeface="Meiryo UI"/>
-                        </a:rPr>
-                        <a:t>区立(指定校以外)</a:t>
-                      </a:r>
-                    </a:p>
-                  </a:txBody>
-                  <a:tcPr marL="36000" marR="36000" marT="18000" marB="18000">
-                    <a:solidFill>
-                      <a:srgbClr val="E8F7F9"/>
-                    </a:solidFill>
-                  </a:tcPr>
-                </a:tc>
-                <a:tc>
-                  <a:txBody>
-                    <a:bodyPr wrap="square"/>
-                    <a:lstStyle/>
-                    <a:p>
-                      <a:pPr algn="ctr"/>
-                      <a:r>
-                        <a:rPr sz="800" b="0">
-                          <a:solidFill>
-                            <a:srgbClr val="404040"/>
-                          </a:solidFill>
-                          <a:ea typeface="Meiryo UI"/>
-                          <a:latin typeface="Meiryo UI"/>
-                        </a:rPr>
-                        <a:t>645</a:t>
-                      </a:r>
-                    </a:p>
-                  </a:txBody>
-                  <a:tcPr marL="36000" marR="36000" marT="18000" marB="18000">
-                    <a:solidFill>
-                      <a:srgbClr val="FFFFFF"/>
-                    </a:solidFill>
-                  </a:tcPr>
-                </a:tc>
-                <a:tc>
-                  <a:txBody>
-                    <a:bodyPr wrap="square"/>
-                    <a:lstStyle/>
-                    <a:p>
-                      <a:pPr algn="ctr"/>
-                      <a:r>
-                        <a:rPr sz="800" b="0">
-                          <a:solidFill>
-                            <a:srgbClr val="404040"/>
-                          </a:solidFill>
-                          <a:ea typeface="Meiryo UI"/>
-                          <a:latin typeface="Meiryo UI"/>
-                        </a:rPr>
-                        <a:t>664</a:t>
-                      </a:r>
-                    </a:p>
-                  </a:txBody>
-                  <a:tcPr marL="36000" marR="36000" marT="18000" marB="18000">
-                    <a:solidFill>
-                      <a:srgbClr val="FFFFFF"/>
-                    </a:solidFill>
-                  </a:tcPr>
-                </a:tc>
-                <a:tc>
-                  <a:txBody>
-                    <a:bodyPr wrap="square"/>
-                    <a:lstStyle/>
-                    <a:p>
-                      <a:pPr algn="ctr"/>
-                      <a:r>
-                        <a:rPr sz="800" b="0">
-                          <a:solidFill>
-                            <a:srgbClr val="404040"/>
-                          </a:solidFill>
-                          <a:ea typeface="Meiryo UI"/>
-                          <a:latin typeface="Meiryo UI"/>
-                        </a:rPr>
-                        <a:t>704</a:t>
-                      </a:r>
-                    </a:p>
-                  </a:txBody>
-                  <a:tcPr marL="36000" marR="36000" marT="18000" marB="18000">
-                    <a:solidFill>
-                      <a:srgbClr val="FFFFFF"/>
-                    </a:solidFill>
-                  </a:tcPr>
-                </a:tc>
-                <a:tc>
-                  <a:txBody>
-                    <a:bodyPr wrap="square"/>
-                    <a:lstStyle/>
-                    <a:p>
-                      <a:pPr algn="ctr"/>
-                      <a:r>
-                        <a:rPr sz="800" b="0">
-                          <a:solidFill>
-                            <a:srgbClr val="404040"/>
-                          </a:solidFill>
-                          <a:ea typeface="Meiryo UI"/>
-                          <a:latin typeface="Meiryo UI"/>
-                        </a:rPr>
-                        <a:t>587</a:t>
-                      </a:r>
-                    </a:p>
-                  </a:txBody>
-                  <a:tcPr marL="36000" marR="36000" marT="18000" marB="18000">
-                    <a:solidFill>
-                      <a:srgbClr val="FFFFFF"/>
-                    </a:solidFill>
-                  </a:tcPr>
-                </a:tc>
-                <a:tc>
-                  <a:txBody>
-                    <a:bodyPr wrap="square"/>
-                    <a:lstStyle/>
-                    <a:p>
-                      <a:pPr algn="ctr"/>
-                      <a:r>
-                        <a:rPr sz="800" b="0">
-                          <a:solidFill>
-                            <a:srgbClr val="404040"/>
-                          </a:solidFill>
-                          <a:ea typeface="Meiryo UI"/>
-                          <a:latin typeface="Meiryo UI"/>
-                        </a:rPr>
-                        <a:t>705</a:t>
-                      </a:r>
-                    </a:p>
-                  </a:txBody>
-                  <a:tcPr marL="36000" marR="36000" marT="18000" marB="18000">
-                    <a:solidFill>
-                      <a:srgbClr val="FFFFFF"/>
-                    </a:solidFill>
-                  </a:tcPr>
-                </a:tc>
-              </a:tr>
-              <a:tr h="342857">
-                <a:tc>
-                  <a:txBody>
-                    <a:bodyPr wrap="square"/>
-                    <a:lstStyle/>
-                    <a:p>
-                      <a:pPr algn="ctr"/>
-                      <a:r>
-                        <a:rPr sz="800" b="1">
-                          <a:solidFill>
-                            <a:srgbClr val="404040"/>
-                          </a:solidFill>
-                          <a:ea typeface="Meiryo UI"/>
-                          <a:latin typeface="Meiryo UI"/>
-                        </a:rPr>
-                        <a:t>区立計</a:t>
-                      </a:r>
-                    </a:p>
-                  </a:txBody>
-                  <a:tcPr marL="36000" marR="36000" marT="18000" marB="18000">
-                    <a:solidFill>
-                      <a:srgbClr val="E8F7F9"/>
-                    </a:solidFill>
-                  </a:tcPr>
-                </a:tc>
-                <a:tc>
-                  <a:txBody>
-                    <a:bodyPr wrap="square"/>
-                    <a:lstStyle/>
-                    <a:p>
-                      <a:pPr algn="ctr"/>
-                      <a:r>
-                        <a:rPr sz="800" b="0">
-                          <a:solidFill>
-                            <a:srgbClr val="404040"/>
-                          </a:solidFill>
-                          <a:ea typeface="Meiryo UI"/>
-                          <a:latin typeface="Meiryo UI"/>
-                        </a:rPr>
-                        <a:t>4,500</a:t>
-                      </a:r>
-                    </a:p>
-                  </a:txBody>
-                  <a:tcPr marL="36000" marR="36000" marT="18000" marB="18000">
-                    <a:solidFill>
-                      <a:srgbClr val="FFFFFF"/>
-                    </a:solidFill>
-                  </a:tcPr>
-                </a:tc>
-                <a:tc>
-                  <a:txBody>
-                    <a:bodyPr wrap="square"/>
-                    <a:lstStyle/>
-                    <a:p>
-                      <a:pPr algn="ctr"/>
-                      <a:r>
-                        <a:rPr sz="800" b="0">
-                          <a:solidFill>
-                            <a:srgbClr val="404040"/>
-                          </a:solidFill>
-                          <a:ea typeface="Meiryo UI"/>
-                          <a:latin typeface="Meiryo UI"/>
-                        </a:rPr>
-                        <a:t>4,300</a:t>
-                      </a:r>
-                    </a:p>
-                  </a:txBody>
-                  <a:tcPr marL="36000" marR="36000" marT="18000" marB="18000">
-                    <a:solidFill>
-                      <a:srgbClr val="FFFFFF"/>
-                    </a:solidFill>
-                  </a:tcPr>
-                </a:tc>
-                <a:tc>
-                  <a:txBody>
-                    <a:bodyPr wrap="square"/>
-                    <a:lstStyle/>
-                    <a:p>
-                      <a:pPr algn="ctr"/>
-                      <a:r>
-                        <a:rPr sz="800" b="0">
-                          <a:solidFill>
-                            <a:srgbClr val="404040"/>
-                          </a:solidFill>
-                          <a:ea typeface="Meiryo UI"/>
-                          <a:latin typeface="Meiryo UI"/>
-                        </a:rPr>
-                        <a:t>4,427</a:t>
-                      </a:r>
-                    </a:p>
-                  </a:txBody>
-                  <a:tcPr marL="36000" marR="36000" marT="18000" marB="18000">
-                    <a:solidFill>
-                      <a:srgbClr val="FFFFFF"/>
-                    </a:solidFill>
-                  </a:tcPr>
-                </a:tc>
-                <a:tc>
-                  <a:txBody>
-                    <a:bodyPr wrap="square"/>
-                    <a:lstStyle/>
-                    <a:p>
-                      <a:pPr algn="ctr"/>
-                      <a:r>
-                        <a:rPr sz="800" b="0">
-                          <a:solidFill>
-                            <a:srgbClr val="404040"/>
-                          </a:solidFill>
-                          <a:ea typeface="Meiryo UI"/>
-                          <a:latin typeface="Meiryo UI"/>
-                        </a:rPr>
-                        <a:t>4,152</a:t>
-                      </a:r>
-                    </a:p>
-                  </a:txBody>
-                  <a:tcPr marL="36000" marR="36000" marT="18000" marB="18000">
-                    <a:solidFill>
-                      <a:srgbClr val="FFFFFF"/>
-                    </a:solidFill>
-                  </a:tcPr>
-                </a:tc>
-                <a:tc>
-                  <a:txBody>
-                    <a:bodyPr wrap="square"/>
-                    <a:lstStyle/>
-                    <a:p>
-                      <a:pPr algn="ctr"/>
-                      <a:r>
-                        <a:rPr sz="800" b="0">
-                          <a:solidFill>
-                            <a:srgbClr val="404040"/>
-                          </a:solidFill>
-                          <a:ea typeface="Meiryo UI"/>
-                          <a:latin typeface="Meiryo UI"/>
-                        </a:rPr>
-                        <a:t>4,267</a:t>
-                      </a:r>
-                    </a:p>
-                  </a:txBody>
-                  <a:tcPr marL="36000" marR="36000" marT="18000" marB="18000">
-                    <a:solidFill>
-                      <a:srgbClr val="FFFFFF"/>
-                    </a:solidFill>
-                  </a:tcPr>
-                </a:tc>
-              </a:tr>
-              <a:tr h="342857">
-                <a:tc>
-                  <a:txBody>
-                    <a:bodyPr wrap="square"/>
-                    <a:lstStyle/>
-                    <a:p>
-                      <a:pPr algn="ctr"/>
-                      <a:r>
-                        <a:rPr sz="800" b="1">
-                          <a:solidFill>
-                            <a:srgbClr val="404040"/>
-                          </a:solidFill>
-                          <a:ea typeface="Meiryo UI"/>
-                          <a:latin typeface="Meiryo UI"/>
-                        </a:rPr>
-                        <a:t>区立外</a:t>
-                      </a:r>
-                    </a:p>
-                  </a:txBody>
-                  <a:tcPr marL="36000" marR="36000" marT="18000" marB="18000">
-                    <a:solidFill>
-                      <a:srgbClr val="E8F7F9"/>
-                    </a:solidFill>
-                  </a:tcPr>
-                </a:tc>
-                <a:tc>
-                  <a:txBody>
-                    <a:bodyPr wrap="square"/>
-                    <a:lstStyle/>
-                    <a:p>
-                      <a:pPr algn="ctr"/>
-                      <a:r>
-                        <a:rPr sz="800" b="0">
-                          <a:solidFill>
-                            <a:srgbClr val="404040"/>
-                          </a:solidFill>
-                          <a:ea typeface="Meiryo UI"/>
-                          <a:latin typeface="Meiryo UI"/>
-                        </a:rPr>
-                        <a:t>1,374</a:t>
-                      </a:r>
-                    </a:p>
-                  </a:txBody>
-                  <a:tcPr marL="36000" marR="36000" marT="18000" marB="18000">
-                    <a:solidFill>
-                      <a:srgbClr val="FFFFFF"/>
-                    </a:solidFill>
-                  </a:tcPr>
-                </a:tc>
-                <a:tc>
-                  <a:txBody>
-                    <a:bodyPr wrap="square"/>
-                    <a:lstStyle/>
-                    <a:p>
-                      <a:pPr algn="ctr"/>
-                      <a:r>
-                        <a:rPr sz="800" b="0">
-                          <a:solidFill>
-                            <a:srgbClr val="404040"/>
-                          </a:solidFill>
-                          <a:ea typeface="Meiryo UI"/>
-                          <a:latin typeface="Meiryo UI"/>
-                        </a:rPr>
-                        <a:t>1,395</a:t>
-                      </a:r>
-                    </a:p>
-                  </a:txBody>
-                  <a:tcPr marL="36000" marR="36000" marT="18000" marB="18000">
-                    <a:solidFill>
-                      <a:srgbClr val="FFFFFF"/>
-                    </a:solidFill>
-                  </a:tcPr>
-                </a:tc>
-                <a:tc>
-                  <a:txBody>
-                    <a:bodyPr wrap="square"/>
-                    <a:lstStyle/>
-                    <a:p>
-                      <a:pPr algn="ctr"/>
-                      <a:r>
-                        <a:rPr sz="800" b="0">
-                          <a:solidFill>
-                            <a:srgbClr val="404040"/>
-                          </a:solidFill>
-                          <a:ea typeface="Meiryo UI"/>
-                          <a:latin typeface="Meiryo UI"/>
-                        </a:rPr>
-                        <a:t>1,500</a:t>
-                      </a:r>
-                    </a:p>
-                  </a:txBody>
-                  <a:tcPr marL="36000" marR="36000" marT="18000" marB="18000">
-                    <a:solidFill>
-                      <a:srgbClr val="FFFFFF"/>
-                    </a:solidFill>
-                  </a:tcPr>
-                </a:tc>
-                <a:tc>
-                  <a:txBody>
-                    <a:bodyPr wrap="square"/>
-                    <a:lstStyle/>
-                    <a:p>
-                      <a:pPr algn="ctr"/>
-                      <a:r>
-                        <a:rPr sz="800" b="0">
-                          <a:solidFill>
-                            <a:srgbClr val="404040"/>
-                          </a:solidFill>
-                          <a:ea typeface="Meiryo UI"/>
-                          <a:latin typeface="Meiryo UI"/>
-                        </a:rPr>
-                        <a:t>1,418</a:t>
-                      </a:r>
-                    </a:p>
-                  </a:txBody>
-                  <a:tcPr marL="36000" marR="36000" marT="18000" marB="18000">
-                    <a:solidFill>
-                      <a:srgbClr val="FFFFFF"/>
-                    </a:solidFill>
-                  </a:tcPr>
-                </a:tc>
-                <a:tc>
-                  <a:txBody>
-                    <a:bodyPr wrap="square"/>
-                    <a:lstStyle/>
-                    <a:p>
-                      <a:pPr algn="ctr"/>
-                      <a:r>
-                        <a:rPr sz="800" b="0">
-                          <a:solidFill>
-                            <a:srgbClr val="404040"/>
-                          </a:solidFill>
-                          <a:ea typeface="Meiryo UI"/>
-                          <a:latin typeface="Meiryo UI"/>
-                        </a:rPr>
-                        <a:t>1,455</a:t>
-                      </a:r>
-                    </a:p>
-                  </a:txBody>
-                  <a:tcPr marL="36000" marR="36000" marT="18000" marB="18000">
-                    <a:solidFill>
-                      <a:srgbClr val="FFFFFF"/>
-                    </a:solidFill>
-                  </a:tcPr>
-                </a:tc>
-              </a:tr>
-              <a:tr h="342857">
-                <a:tc>
-                  <a:txBody>
-                    <a:bodyPr wrap="square"/>
-                    <a:lstStyle/>
-                    <a:p>
-                      <a:pPr algn="ctr"/>
-                      <a:r>
-                        <a:rPr sz="800" b="1">
-                          <a:solidFill>
-                            <a:srgbClr val="404040"/>
-                          </a:solidFill>
-                          <a:ea typeface="Meiryo UI"/>
-                          <a:latin typeface="Meiryo UI"/>
-                        </a:rPr>
-                        <a:t>合計</a:t>
-                      </a:r>
-                    </a:p>
-                  </a:txBody>
-                  <a:tcPr marL="36000" marR="36000" marT="18000" marB="18000">
-                    <a:solidFill>
-                      <a:srgbClr val="E8F7F9"/>
-                    </a:solidFill>
-                  </a:tcPr>
-                </a:tc>
-                <a:tc>
-                  <a:txBody>
-                    <a:bodyPr wrap="square"/>
-                    <a:lstStyle/>
-                    <a:p>
-                      <a:pPr algn="ctr"/>
-                      <a:r>
-                        <a:rPr sz="800" b="0">
-                          <a:solidFill>
-                            <a:srgbClr val="404040"/>
-                          </a:solidFill>
-                          <a:ea typeface="Meiryo UI"/>
-                          <a:latin typeface="Meiryo UI"/>
-                        </a:rPr>
-                        <a:t>5,874</a:t>
-                      </a:r>
-                    </a:p>
-                  </a:txBody>
-                  <a:tcPr marL="36000" marR="36000" marT="18000" marB="18000">
-                    <a:solidFill>
-                      <a:srgbClr val="FFFFFF"/>
-                    </a:solidFill>
-                  </a:tcPr>
-                </a:tc>
-                <a:tc>
-                  <a:txBody>
-                    <a:bodyPr wrap="square"/>
-                    <a:lstStyle/>
-                    <a:p>
-                      <a:pPr algn="ctr"/>
-                      <a:r>
-                        <a:rPr sz="800" b="0">
-                          <a:solidFill>
-                            <a:srgbClr val="404040"/>
-                          </a:solidFill>
-                          <a:ea typeface="Meiryo UI"/>
-                          <a:latin typeface="Meiryo UI"/>
-                        </a:rPr>
-                        <a:t>5,695</a:t>
-                      </a:r>
-                    </a:p>
-                  </a:txBody>
-                  <a:tcPr marL="36000" marR="36000" marT="18000" marB="18000">
-                    <a:solidFill>
-                      <a:srgbClr val="FFFFFF"/>
-                    </a:solidFill>
-                  </a:tcPr>
-                </a:tc>
-                <a:tc>
-                  <a:txBody>
-                    <a:bodyPr wrap="square"/>
-                    <a:lstStyle/>
-                    <a:p>
-                      <a:pPr algn="ctr"/>
-                      <a:r>
-                        <a:rPr sz="800" b="0">
-                          <a:solidFill>
-                            <a:srgbClr val="404040"/>
-                          </a:solidFill>
-                          <a:ea typeface="Meiryo UI"/>
-                          <a:latin typeface="Meiryo UI"/>
-                        </a:rPr>
-                        <a:t>5,927</a:t>
-                      </a:r>
-                    </a:p>
-                  </a:txBody>
-                  <a:tcPr marL="36000" marR="36000" marT="18000" marB="18000">
-                    <a:solidFill>
-                      <a:srgbClr val="FFFFFF"/>
-                    </a:solidFill>
-                  </a:tcPr>
-                </a:tc>
-                <a:tc>
-                  <a:txBody>
-                    <a:bodyPr wrap="square"/>
-                    <a:lstStyle/>
-                    <a:p>
-                      <a:pPr algn="ctr"/>
-                      <a:r>
-                        <a:rPr sz="800" b="0">
-                          <a:solidFill>
-                            <a:srgbClr val="404040"/>
-                          </a:solidFill>
-                          <a:ea typeface="Meiryo UI"/>
-                          <a:latin typeface="Meiryo UI"/>
-                        </a:rPr>
-                        <a:t>5,570</a:t>
-                      </a:r>
-                    </a:p>
-                  </a:txBody>
-                  <a:tcPr marL="36000" marR="36000" marT="18000" marB="18000">
-                    <a:solidFill>
-                      <a:srgbClr val="FFFFFF"/>
-                    </a:solidFill>
-                  </a:tcPr>
-                </a:tc>
-                <a:tc>
-                  <a:txBody>
-                    <a:bodyPr wrap="square"/>
-                    <a:lstStyle/>
-                    <a:p>
-                      <a:pPr algn="ctr"/>
-                      <a:r>
-                        <a:rPr sz="800" b="0">
-                          <a:solidFill>
-                            <a:srgbClr val="404040"/>
-                          </a:solidFill>
-                          <a:ea typeface="Meiryo UI"/>
-                          <a:latin typeface="Meiryo UI"/>
-                        </a:rPr>
-                        <a:t>5,722</a:t>
-                      </a:r>
-                    </a:p>
-                  </a:txBody>
-                  <a:tcPr marL="36000" marR="36000" marT="18000" marB="18000">
-                    <a:solidFill>
-                      <a:srgbClr val="FFFFFF"/>
-                    </a:solidFill>
-                  </a:tcPr>
-                </a:tc>
-              </a:tr>
-              <a:tr h="342858">
+              <a:tr h="271432">
                 <a:tc>
                   <a:txBody>
                     <a:bodyPr wrap="square"/>
@@ -11115,8 +11637,8 @@
         </p:nvSpPr>
         <p:spPr>
           <a:xfrm>
-            <a:off x="180000" y="3500000"/>
-            <a:ext cx="2870000" cy="700000"/>
+            <a:off x="180000" y="2850000"/>
+            <a:ext cx="2870000" cy="380000"/>
           </a:xfrm>
           <a:prstGeom prst="roundRect">
             <a:avLst/>
@@ -11151,7 +11673,7 @@
           <a:p>
             <a:pPr algn="ctr"/>
             <a:r>
-              <a:rPr sz="1100" b="1">
+              <a:rPr sz="900" b="1">
                 <a:solidFill>
                   <a:srgbClr val="404040"/>
                 </a:solidFill>
@@ -11164,14 +11686,14 @@
           <a:p>
             <a:pPr algn="ctr"/>
             <a:r>
-              <a:rPr sz="1100" b="1">
+              <a:rPr sz="900" b="1">
                 <a:solidFill>
                   <a:srgbClr val="404040"/>
                 </a:solidFill>
                 <a:ea typeface="Meiryo UI"/>
                 <a:latin typeface="Meiryo UI"/>
               </a:rPr>
-              <a:t>80%(R3)→67%(R7)　▲13ポイント</a:t>
+              <a:t>80%(R3) → 67%(R7)　▲13pt</a:t>
             </a:r>
           </a:p>
         </p:txBody>
@@ -11184,8 +11706,8 @@
         </p:nvSpPr>
         <p:spPr>
           <a:xfrm>
-            <a:off x="3120000" y="3500000"/>
-            <a:ext cx="2870000" cy="700000"/>
+            <a:off x="3120000" y="2850000"/>
+            <a:ext cx="2870000" cy="380000"/>
           </a:xfrm>
           <a:prstGeom prst="roundRect">
             <a:avLst/>
@@ -11220,7 +11742,7 @@
           <a:p>
             <a:pPr algn="ctr"/>
             <a:r>
-              <a:rPr sz="1100" b="1">
+              <a:rPr sz="900" b="1">
                 <a:solidFill>
                   <a:srgbClr val="404040"/>
                 </a:solidFill>
@@ -11233,14 +11755,14 @@
           <a:p>
             <a:pPr algn="ctr"/>
             <a:r>
-              <a:rPr sz="1100" b="1">
+              <a:rPr sz="900" b="1">
                 <a:solidFill>
                   <a:srgbClr val="404040"/>
                 </a:solidFill>
                 <a:ea typeface="Meiryo UI"/>
                 <a:latin typeface="Meiryo UI"/>
               </a:rPr>
-              <a:t>（66→62%、2-4ポイント減）</a:t>
+              <a:t>（66→62%、減少幅は2-4pt）</a:t>
             </a:r>
           </a:p>
         </p:txBody>
@@ -11253,8 +11775,8 @@
         </p:nvSpPr>
         <p:spPr>
           <a:xfrm>
-            <a:off x="6060000" y="3500000"/>
-            <a:ext cx="2900000" cy="700000"/>
+            <a:off x="6060000" y="2850000"/>
+            <a:ext cx="2900000" cy="380000"/>
           </a:xfrm>
           <a:prstGeom prst="roundRect">
             <a:avLst/>
@@ -11289,20 +11811,20 @@
           <a:p>
             <a:pPr algn="ctr"/>
             <a:r>
-              <a:rPr sz="1100" b="1">
+              <a:rPr sz="900" b="1">
                 <a:solidFill>
                   <a:srgbClr val="404040"/>
                 </a:solidFill>
                 <a:ea typeface="Meiryo UI"/>
                 <a:latin typeface="Meiryo UI"/>
               </a:rPr>
-              <a:t>③ 人口推計（区将来人口）</a:t>
+              <a:t>③ 区将来人口推計</a:t>
             </a:r>
           </a:p>
           <a:p>
             <a:pPr algn="ctr"/>
             <a:r>
-              <a:rPr sz="1100" b="1">
+              <a:rPr sz="900" b="1">
                 <a:solidFill>
                   <a:srgbClr val="404040"/>
                 </a:solidFill>
@@ -11316,20 +11838,20 @@
       </p:sp>
       <p:sp>
         <p:nvSpPr>
-          <p:cNvPr id="12" name="Down Arrow 11"/>
+          <p:cNvPr id="12" name="Rounded Rectangle 11"/>
           <p:cNvSpPr/>
           <p:nvPr/>
         </p:nvSpPr>
         <p:spPr>
           <a:xfrm>
-            <a:off x="4322000" y="4280000"/>
-            <a:ext cx="500000" cy="280000"/>
+            <a:off x="180000" y="3320000"/>
+            <a:ext cx="8780000" cy="280000"/>
           </a:xfrm>
-          <a:prstGeom prst="downArrow">
+          <a:prstGeom prst="roundRect">
             <a:avLst/>
           </a:prstGeom>
           <a:solidFill>
-            <a:srgbClr val="FFC000"/>
+            <a:srgbClr val="7030A0"/>
           </a:solidFill>
           <a:ln>
             <a:noFill/>
@@ -11351,23 +11873,551 @@
           </a:fontRef>
         </p:style>
         <p:txBody>
-          <a:bodyPr rtlCol="0" anchor="ctr"/>
+          <a:bodyPr rtlCol="0" anchor="ctr" lIns="60000" rIns="60000" tIns="15000" bIns="15000"/>
           <a:lstStyle/>
           <a:p>
             <a:pPr algn="ctr"/>
+            <a:r>
+              <a:rPr sz="1000" b="1">
+                <a:solidFill>
+                  <a:srgbClr val="FFFFFF"/>
+                </a:solidFill>
+                <a:ea typeface="Meiryo UI"/>
+                <a:latin typeface="Meiryo UI"/>
+              </a:rPr>
+              <a:t>■ 他自治体・全国動向との比較（比較教育学・政策評価学の視点）</a:t>
+            </a:r>
           </a:p>
         </p:txBody>
       </p:sp>
+      <p:graphicFrame>
+        <p:nvGraphicFramePr>
+          <p:cNvPr id="13" name="Table 12"/>
+          <p:cNvGraphicFramePr>
+            <a:graphicFrameLocks noGrp="1"/>
+          </p:cNvGraphicFramePr>
+          <p:nvPr/>
+        </p:nvGraphicFramePr>
+        <p:xfrm>
+          <a:off x="180000" y="3640000"/>
+          <a:ext cx="8780000" cy="1100000"/>
+        </p:xfrm>
+        <a:graphic>
+          <a:graphicData uri="http://schemas.openxmlformats.org/drawingml/2006/table">
+            <a:tbl>
+              <a:tblPr firstRow="1" bandRow="1">
+                <a:tableStyleId>{5C22544A-7EE6-4342-B048-85BDC9FD1C3A}</a:tableStyleId>
+              </a:tblPr>
+              <a:tblGrid>
+                <a:gridCol w="1600000"/>
+                <a:gridCol w="1800000"/>
+                <a:gridCol w="3580000"/>
+                <a:gridCol w="1800000"/>
+              </a:tblGrid>
+              <a:tr h="220000">
+                <a:tc>
+                  <a:txBody>
+                    <a:bodyPr wrap="square"/>
+                    <a:lstStyle/>
+                    <a:p>
+                      <a:pPr algn="ctr"/>
+                      <a:r>
+                        <a:rPr sz="800" b="1">
+                          <a:solidFill>
+                            <a:srgbClr val="FFFFFF"/>
+                          </a:solidFill>
+                          <a:ea typeface="Meiryo UI"/>
+                          <a:latin typeface="Meiryo UI"/>
+                        </a:rPr>
+                        <a:t/>
+                      </a:r>
+                    </a:p>
+                  </a:txBody>
+                  <a:tcPr marL="36000" marR="36000" marT="18000" marB="18000">
+                    <a:solidFill>
+                      <a:srgbClr val="0F9ED5"/>
+                    </a:solidFill>
+                  </a:tcPr>
+                </a:tc>
+                <a:tc>
+                  <a:txBody>
+                    <a:bodyPr wrap="square"/>
+                    <a:lstStyle/>
+                    <a:p>
+                      <a:pPr algn="ctr"/>
+                      <a:r>
+                        <a:rPr sz="800" b="1">
+                          <a:solidFill>
+                            <a:srgbClr val="FFFFFF"/>
+                          </a:solidFill>
+                          <a:ea typeface="Meiryo UI"/>
+                          <a:latin typeface="Meiryo UI"/>
+                        </a:rPr>
+                        <a:t>区立校数（一貫型）</a:t>
+                      </a:r>
+                    </a:p>
+                  </a:txBody>
+                  <a:tcPr marL="36000" marR="36000" marT="18000" marB="18000">
+                    <a:solidFill>
+                      <a:srgbClr val="0F9ED5"/>
+                    </a:solidFill>
+                  </a:tcPr>
+                </a:tc>
+                <a:tc>
+                  <a:txBody>
+                    <a:bodyPr wrap="square"/>
+                    <a:lstStyle/>
+                    <a:p>
+                      <a:pPr algn="ctr"/>
+                      <a:r>
+                        <a:rPr sz="800" b="1">
+                          <a:solidFill>
+                            <a:srgbClr val="FFFFFF"/>
+                          </a:solidFill>
+                          <a:ea typeface="Meiryo UI"/>
+                          <a:latin typeface="Meiryo UI"/>
+                        </a:rPr>
+                        <a:t>主な方針・実績</a:t>
+                      </a:r>
+                    </a:p>
+                  </a:txBody>
+                  <a:tcPr marL="36000" marR="36000" marT="18000" marB="18000">
+                    <a:solidFill>
+                      <a:srgbClr val="0F9ED5"/>
+                    </a:solidFill>
+                  </a:tcPr>
+                </a:tc>
+                <a:tc>
+                  <a:txBody>
+                    <a:bodyPr wrap="square"/>
+                    <a:lstStyle/>
+                    <a:p>
+                      <a:pPr algn="ctr"/>
+                      <a:r>
+                        <a:rPr sz="800" b="1">
+                          <a:solidFill>
+                            <a:srgbClr val="FFFFFF"/>
+                          </a:solidFill>
+                          <a:ea typeface="Meiryo UI"/>
+                          <a:latin typeface="Meiryo UI"/>
+                        </a:rPr>
+                        <a:t>教訓</a:t>
+                      </a:r>
+                    </a:p>
+                  </a:txBody>
+                  <a:tcPr marL="36000" marR="36000" marT="18000" marB="18000">
+                    <a:solidFill>
+                      <a:srgbClr val="0F9ED5"/>
+                    </a:solidFill>
+                  </a:tcPr>
+                </a:tc>
+              </a:tr>
+              <a:tr h="220000">
+                <a:tc>
+                  <a:txBody>
+                    <a:bodyPr wrap="square"/>
+                    <a:lstStyle/>
+                    <a:p>
+                      <a:pPr algn="ctr"/>
+                      <a:r>
+                        <a:rPr sz="800" b="1">
+                          <a:solidFill>
+                            <a:srgbClr val="404040"/>
+                          </a:solidFill>
+                          <a:ea typeface="Meiryo UI"/>
+                          <a:latin typeface="Meiryo UI"/>
+                        </a:rPr>
+                        <a:t>全国（文科省）</a:t>
+                      </a:r>
+                    </a:p>
+                  </a:txBody>
+                  <a:tcPr marL="36000" marR="36000" marT="18000" marB="18000">
+                    <a:solidFill>
+                      <a:srgbClr val="E9E3F5"/>
+                    </a:solidFill>
+                  </a:tcPr>
+                </a:tc>
+                <a:tc>
+                  <a:txBody>
+                    <a:bodyPr wrap="square"/>
+                    <a:lstStyle/>
+                    <a:p>
+                      <a:pPr algn="ctr"/>
+                      <a:r>
+                        <a:rPr sz="800" b="0">
+                          <a:solidFill>
+                            <a:srgbClr val="404040"/>
+                          </a:solidFill>
+                          <a:ea typeface="Meiryo UI"/>
+                          <a:latin typeface="Meiryo UI"/>
+                        </a:rPr>
+                        <a:t>義務教育学校 約207校（R5）</a:t>
+                      </a:r>
+                    </a:p>
+                  </a:txBody>
+                  <a:tcPr marL="36000" marR="36000" marT="18000" marB="18000">
+                    <a:solidFill>
+                      <a:srgbClr val="FFFFFF"/>
+                    </a:solidFill>
+                  </a:tcPr>
+                </a:tc>
+                <a:tc>
+                  <a:txBody>
+                    <a:bodyPr wrap="square"/>
+                    <a:lstStyle/>
+                    <a:p>
+                      <a:pPr algn="ctr"/>
+                      <a:r>
+                        <a:rPr sz="800" b="0">
+                          <a:solidFill>
+                            <a:srgbClr val="404040"/>
+                          </a:solidFill>
+                          <a:ea typeface="Meiryo UI"/>
+                          <a:latin typeface="Meiryo UI"/>
+                        </a:rPr>
+                        <a:t>全国学テで一貫校が通常校を有意に上回るとの結果は確認されず</a:t>
+                      </a:r>
+                    </a:p>
+                  </a:txBody>
+                  <a:tcPr marL="36000" marR="36000" marT="18000" marB="18000">
+                    <a:solidFill>
+                      <a:srgbClr val="FFFFFF"/>
+                    </a:solidFill>
+                  </a:tcPr>
+                </a:tc>
+                <a:tc>
+                  <a:txBody>
+                    <a:bodyPr wrap="square"/>
+                    <a:lstStyle/>
+                    <a:p>
+                      <a:pPr algn="ctr"/>
+                      <a:r>
+                        <a:rPr sz="800" b="0">
+                          <a:solidFill>
+                            <a:srgbClr val="404040"/>
+                          </a:solidFill>
+                          <a:ea typeface="Meiryo UI"/>
+                          <a:latin typeface="Meiryo UI"/>
+                        </a:rPr>
+                        <a:t>施設一体型の優位性は限定的</a:t>
+                      </a:r>
+                    </a:p>
+                  </a:txBody>
+                  <a:tcPr marL="36000" marR="36000" marT="18000" marB="18000">
+                    <a:solidFill>
+                      <a:srgbClr val="FFFFFF"/>
+                    </a:solidFill>
+                  </a:tcPr>
+                </a:tc>
+              </a:tr>
+              <a:tr h="220000">
+                <a:tc>
+                  <a:txBody>
+                    <a:bodyPr wrap="square"/>
+                    <a:lstStyle/>
+                    <a:p>
+                      <a:pPr algn="ctr"/>
+                      <a:r>
+                        <a:rPr sz="800" b="1">
+                          <a:solidFill>
+                            <a:srgbClr val="404040"/>
+                          </a:solidFill>
+                          <a:ea typeface="Meiryo UI"/>
+                          <a:latin typeface="Meiryo UI"/>
+                        </a:rPr>
+                        <a:t>世田谷区</a:t>
+                      </a:r>
+                    </a:p>
+                  </a:txBody>
+                  <a:tcPr marL="36000" marR="36000" marT="18000" marB="18000">
+                    <a:solidFill>
+                      <a:srgbClr val="E9E3F5"/>
+                    </a:solidFill>
+                  </a:tcPr>
+                </a:tc>
+                <a:tc>
+                  <a:txBody>
+                    <a:bodyPr wrap="square"/>
+                    <a:lstStyle/>
+                    <a:p>
+                      <a:pPr algn="ctr"/>
+                      <a:r>
+                        <a:rPr sz="800" b="0">
+                          <a:solidFill>
+                            <a:srgbClr val="404040"/>
+                          </a:solidFill>
+                          <a:ea typeface="Meiryo UI"/>
+                          <a:latin typeface="Meiryo UI"/>
+                        </a:rPr>
+                        <a:t>施設一体型：限定的</a:t>
+                      </a:r>
+                    </a:p>
+                  </a:txBody>
+                  <a:tcPr marL="36000" marR="36000" marT="18000" marB="18000">
+                    <a:solidFill>
+                      <a:srgbClr val="FFFFFF"/>
+                    </a:solidFill>
+                  </a:tcPr>
+                </a:tc>
+                <a:tc>
+                  <a:txBody>
+                    <a:bodyPr wrap="square"/>
+                    <a:lstStyle/>
+                    <a:p>
+                      <a:pPr algn="ctr"/>
+                      <a:r>
+                        <a:rPr sz="800" b="0">
+                          <a:solidFill>
+                            <a:srgbClr val="404040"/>
+                          </a:solidFill>
+                          <a:ea typeface="Meiryo UI"/>
+                          <a:latin typeface="Meiryo UI"/>
+                        </a:rPr>
+                        <a:t>「世田谷9年教育」連携型を全校で展開。一体型新設は推進せず</a:t>
+                      </a:r>
+                    </a:p>
+                  </a:txBody>
+                  <a:tcPr marL="36000" marR="36000" marT="18000" marB="18000">
+                    <a:solidFill>
+                      <a:srgbClr val="FFFFFF"/>
+                    </a:solidFill>
+                  </a:tcPr>
+                </a:tc>
+                <a:tc>
+                  <a:txBody>
+                    <a:bodyPr wrap="square"/>
+                    <a:lstStyle/>
+                    <a:p>
+                      <a:pPr algn="ctr"/>
+                      <a:r>
+                        <a:rPr sz="800" b="0">
+                          <a:solidFill>
+                            <a:srgbClr val="404040"/>
+                          </a:solidFill>
+                          <a:ea typeface="Meiryo UI"/>
+                          <a:latin typeface="Meiryo UI"/>
+                        </a:rPr>
+                        <a:t>連携型でも目標は達成可能</a:t>
+                      </a:r>
+                    </a:p>
+                  </a:txBody>
+                  <a:tcPr marL="36000" marR="36000" marT="18000" marB="18000">
+                    <a:solidFill>
+                      <a:srgbClr val="FFFFFF"/>
+                    </a:solidFill>
+                  </a:tcPr>
+                </a:tc>
+              </a:tr>
+              <a:tr h="220000">
+                <a:tc>
+                  <a:txBody>
+                    <a:bodyPr wrap="square"/>
+                    <a:lstStyle/>
+                    <a:p>
+                      <a:pPr algn="ctr"/>
+                      <a:r>
+                        <a:rPr sz="800" b="1">
+                          <a:solidFill>
+                            <a:srgbClr val="404040"/>
+                          </a:solidFill>
+                          <a:ea typeface="Meiryo UI"/>
+                          <a:latin typeface="Meiryo UI"/>
+                        </a:rPr>
+                        <a:t>品川区</a:t>
+                      </a:r>
+                    </a:p>
+                  </a:txBody>
+                  <a:tcPr marL="36000" marR="36000" marT="18000" marB="18000">
+                    <a:solidFill>
+                      <a:srgbClr val="E9E3F5"/>
+                    </a:solidFill>
+                  </a:tcPr>
+                </a:tc>
+                <a:tc>
+                  <a:txBody>
+                    <a:bodyPr wrap="square"/>
+                    <a:lstStyle/>
+                    <a:p>
+                      <a:pPr algn="ctr"/>
+                      <a:r>
+                        <a:rPr sz="800" b="0">
+                          <a:solidFill>
+                            <a:srgbClr val="404040"/>
+                          </a:solidFill>
+                          <a:ea typeface="Meiryo UI"/>
+                          <a:latin typeface="Meiryo UI"/>
+                        </a:rPr>
+                        <a:t>施設一体型：6校</a:t>
+                      </a:r>
+                    </a:p>
+                  </a:txBody>
+                  <a:tcPr marL="36000" marR="36000" marT="18000" marB="18000">
+                    <a:solidFill>
+                      <a:srgbClr val="FFFFFF"/>
+                    </a:solidFill>
+                  </a:tcPr>
+                </a:tc>
+                <a:tc>
+                  <a:txBody>
+                    <a:bodyPr wrap="square"/>
+                    <a:lstStyle/>
+                    <a:p>
+                      <a:pPr algn="ctr"/>
+                      <a:r>
+                        <a:rPr sz="800" b="0">
+                          <a:solidFill>
+                            <a:srgbClr val="404040"/>
+                          </a:solidFill>
+                          <a:ea typeface="Meiryo UI"/>
+                          <a:latin typeface="Meiryo UI"/>
+                        </a:rPr>
+                        <a:t>H18開設後、学力向上効果は地区差あり。中1ギャップ解消も限定的</a:t>
+                      </a:r>
+                    </a:p>
+                  </a:txBody>
+                  <a:tcPr marL="36000" marR="36000" marT="18000" marB="18000">
+                    <a:solidFill>
+                      <a:srgbClr val="FFFFFF"/>
+                    </a:solidFill>
+                  </a:tcPr>
+                </a:tc>
+                <a:tc>
+                  <a:txBody>
+                    <a:bodyPr wrap="square"/>
+                    <a:lstStyle/>
+                    <a:p>
+                      <a:pPr algn="ctr"/>
+                      <a:r>
+                        <a:rPr sz="800" b="0">
+                          <a:solidFill>
+                            <a:srgbClr val="404040"/>
+                          </a:solidFill>
+                          <a:ea typeface="Meiryo UI"/>
+                          <a:latin typeface="Meiryo UI"/>
+                        </a:rPr>
+                        <a:t>新設の費用対効果に課題</a:t>
+                      </a:r>
+                    </a:p>
+                  </a:txBody>
+                  <a:tcPr marL="36000" marR="36000" marT="18000" marB="18000">
+                    <a:solidFill>
+                      <a:srgbClr val="FFFFFF"/>
+                    </a:solidFill>
+                  </a:tcPr>
+                </a:tc>
+              </a:tr>
+              <a:tr h="220000">
+                <a:tc>
+                  <a:txBody>
+                    <a:bodyPr wrap="square"/>
+                    <a:lstStyle/>
+                    <a:p>
+                      <a:pPr algn="ctr"/>
+                      <a:r>
+                        <a:rPr sz="800" b="1">
+                          <a:solidFill>
+                            <a:srgbClr val="404040"/>
+                          </a:solidFill>
+                          <a:ea typeface="Meiryo UI"/>
+                          <a:latin typeface="Meiryo UI"/>
+                        </a:rPr>
+                        <a:t>三鷹市</a:t>
+                      </a:r>
+                    </a:p>
+                  </a:txBody>
+                  <a:tcPr marL="36000" marR="36000" marT="18000" marB="18000">
+                    <a:solidFill>
+                      <a:srgbClr val="E9E3F5"/>
+                    </a:solidFill>
+                  </a:tcPr>
+                </a:tc>
+                <a:tc>
+                  <a:txBody>
+                    <a:bodyPr wrap="square"/>
+                    <a:lstStyle/>
+                    <a:p>
+                      <a:pPr algn="ctr"/>
+                      <a:r>
+                        <a:rPr sz="800" b="0">
+                          <a:solidFill>
+                            <a:srgbClr val="404040"/>
+                          </a:solidFill>
+                          <a:ea typeface="Meiryo UI"/>
+                          <a:latin typeface="Meiryo UI"/>
+                        </a:rPr>
+                        <a:t>施設一体型：限定的</a:t>
+                      </a:r>
+                    </a:p>
+                  </a:txBody>
+                  <a:tcPr marL="36000" marR="36000" marT="18000" marB="18000">
+                    <a:solidFill>
+                      <a:srgbClr val="FFFFFF"/>
+                    </a:solidFill>
+                  </a:tcPr>
+                </a:tc>
+                <a:tc>
+                  <a:txBody>
+                    <a:bodyPr wrap="square"/>
+                    <a:lstStyle/>
+                    <a:p>
+                      <a:pPr algn="ctr"/>
+                      <a:r>
+                        <a:rPr sz="800" b="0">
+                          <a:solidFill>
+                            <a:srgbClr val="404040"/>
+                          </a:solidFill>
+                          <a:ea typeface="Meiryo UI"/>
+                          <a:latin typeface="Meiryo UI"/>
+                        </a:rPr>
+                        <a:t>コミュニティ・スクール＋連携型小中一貫教育を全市展開</a:t>
+                      </a:r>
+                    </a:p>
+                  </a:txBody>
+                  <a:tcPr marL="36000" marR="36000" marT="18000" marB="18000">
+                    <a:solidFill>
+                      <a:srgbClr val="FFFFFF"/>
+                    </a:solidFill>
+                  </a:tcPr>
+                </a:tc>
+                <a:tc>
+                  <a:txBody>
+                    <a:bodyPr wrap="square"/>
+                    <a:lstStyle/>
+                    <a:p>
+                      <a:pPr algn="ctr"/>
+                      <a:r>
+                        <a:rPr sz="800" b="0">
+                          <a:solidFill>
+                            <a:srgbClr val="404040"/>
+                          </a:solidFill>
+                          <a:ea typeface="Meiryo UI"/>
+                          <a:latin typeface="Meiryo UI"/>
+                        </a:rPr>
+                        <a:t>地域連携型でも効果あり</a:t>
+                      </a:r>
+                    </a:p>
+                  </a:txBody>
+                  <a:tcPr marL="36000" marR="36000" marT="18000" marB="18000">
+                    <a:solidFill>
+                      <a:srgbClr val="FFFFFF"/>
+                    </a:solidFill>
+                  </a:tcPr>
+                </a:tc>
+              </a:tr>
+            </a:tbl>
+          </a:graphicData>
+        </a:graphic>
+      </p:graphicFrame>
       <p:sp>
         <p:nvSpPr>
-          <p:cNvPr id="13" name="Rounded Rectangle 12"/>
+          <p:cNvPr id="14" name="Rounded Rectangle 13"/>
           <p:cNvSpPr/>
           <p:nvPr/>
         </p:nvSpPr>
         <p:spPr>
           <a:xfrm>
-            <a:off x="180000" y="4620000"/>
-            <a:ext cx="8780000" cy="420000"/>
+            <a:off x="180000" y="4790000"/>
+            <a:ext cx="8780000" cy="280000"/>
           </a:xfrm>
           <a:prstGeom prst="roundRect">
             <a:avLst/>
@@ -11407,20 +12457,7 @@
                 <a:ea typeface="Meiryo UI"/>
                 <a:latin typeface="Meiryo UI"/>
               </a:rPr>
-              <a:t>小中一貫教育校化しても、桜中進学率はむしろ低下傾向。区全体より進学率の減少幅が大きい。</a:t>
-            </a:r>
-          </a:p>
-          <a:p>
-            <a:pPr algn="ctr"/>
-            <a:r>
-              <a:rPr sz="1100" b="1">
-                <a:solidFill>
-                  <a:srgbClr val="FFFFFF"/>
-                </a:solidFill>
-                <a:ea typeface="Meiryo UI"/>
-                <a:latin typeface="Meiryo UI"/>
-              </a:rPr>
-              <a:t>小規模校化（中学校生徒数の減少）の課題は、小中一貫教育では解決できていない。</a:t>
+              <a:t>桜学園データ＋全国・他自治体動向：「施設一体型小中一貫教育校」は小規模校化の解決策にも、学力・生徒数増加策にもなっていない。</a:t>
             </a:r>
           </a:p>
         </p:txBody>
@@ -11485,14 +12522,14 @@
           <a:p>
             <a:pPr algn="l"/>
             <a:r>
-              <a:rPr sz="2200" b="1">
+              <a:rPr sz="2000" b="1">
                 <a:solidFill>
                   <a:srgbClr val="FFFFFF"/>
                 </a:solidFill>
                 <a:ea typeface="Meiryo UI"/>
                 <a:latin typeface="Meiryo UI"/>
               </a:rPr>
-              <a:t>３　大泉桜学園の現状（学力・体力・不登校）</a:t>
+              <a:t>３　大泉桜学園の現状＋専門家による因果分析</a:t>
             </a:r>
           </a:p>
         </p:txBody>
@@ -11596,7 +12633,7 @@
         <p:spPr>
           <a:xfrm>
             <a:off x="180000" y="580000"/>
-            <a:ext cx="4200000" cy="280000"/>
+            <a:ext cx="4200000" cy="240000"/>
           </a:xfrm>
           <a:prstGeom prst="roundRect">
             <a:avLst/>
@@ -11629,7 +12666,7 @@
           <a:p>
             <a:pPr algn="ctr"/>
             <a:r>
-              <a:rPr sz="1000" b="1">
+              <a:rPr sz="900" b="1">
                 <a:solidFill>
                   <a:srgbClr val="404040"/>
                 </a:solidFill>
@@ -11650,8 +12687,8 @@
           <p:nvPr/>
         </p:nvGraphicFramePr>
         <p:xfrm>
-          <a:off x="180000" y="880000"/>
-          <a:ext cx="4200000" cy="1100000"/>
+          <a:off x="180000" y="840000"/>
+          <a:ext cx="4200000" cy="950000"/>
         </p:xfrm>
         <a:graphic>
           <a:graphicData uri="http://schemas.openxmlformats.org/drawingml/2006/table">
@@ -11668,7 +12705,7 @@
                 <a:gridCol w="520000"/>
                 <a:gridCol w="520000"/>
               </a:tblGrid>
-              <a:tr h="220000">
+              <a:tr h="190000">
                 <a:tc>
                   <a:txBody>
                     <a:bodyPr wrap="square"/>
@@ -11838,7 +12875,7 @@
                   </a:tcPr>
                 </a:tc>
               </a:tr>
-              <a:tr h="220000">
+              <a:tr h="190000">
                 <a:tc>
                   <a:txBody>
                     <a:bodyPr wrap="square"/>
@@ -12008,7 +13045,7 @@
                   </a:tcPr>
                 </a:tc>
               </a:tr>
-              <a:tr h="220000">
+              <a:tr h="190000">
                 <a:tc>
                   <a:txBody>
                     <a:bodyPr wrap="square"/>
@@ -12178,7 +13215,7 @@
                   </a:tcPr>
                 </a:tc>
               </a:tr>
-              <a:tr h="220000">
+              <a:tr h="190000">
                 <a:tc>
                   <a:txBody>
                     <a:bodyPr wrap="square"/>
@@ -12348,7 +13385,7 @@
                   </a:tcPr>
                 </a:tc>
               </a:tr>
-              <a:tr h="220000">
+              <a:tr h="190000">
                 <a:tc>
                   <a:txBody>
                     <a:bodyPr wrap="square"/>
@@ -12531,7 +13568,7 @@
         <p:spPr>
           <a:xfrm>
             <a:off x="4500000" y="580000"/>
-            <a:ext cx="4450000" cy="280000"/>
+            <a:ext cx="4450000" cy="240000"/>
           </a:xfrm>
           <a:prstGeom prst="roundRect">
             <a:avLst/>
@@ -12564,7 +13601,7 @@
           <a:p>
             <a:pPr algn="ctr"/>
             <a:r>
-              <a:rPr sz="1000" b="1">
+              <a:rPr sz="900" b="1">
                 <a:solidFill>
                   <a:srgbClr val="404040"/>
                 </a:solidFill>
@@ -12585,8 +13622,8 @@
           <p:nvPr/>
         </p:nvGraphicFramePr>
         <p:xfrm>
-          <a:off x="4500000" y="880000"/>
-          <a:ext cx="4448000" cy="1100000"/>
+          <a:off x="4500000" y="840000"/>
+          <a:ext cx="4448000" cy="950000"/>
         </p:xfrm>
         <a:graphic>
           <a:graphicData uri="http://schemas.openxmlformats.org/drawingml/2006/table">
@@ -12603,7 +13640,7 @@
                 <a:gridCol w="553000"/>
                 <a:gridCol w="553000"/>
               </a:tblGrid>
-              <a:tr h="220000">
+              <a:tr h="190000">
                 <a:tc>
                   <a:txBody>
                     <a:bodyPr wrap="square"/>
@@ -12773,7 +13810,7 @@
                   </a:tcPr>
                 </a:tc>
               </a:tr>
-              <a:tr h="220000">
+              <a:tr h="190000">
                 <a:tc>
                   <a:txBody>
                     <a:bodyPr wrap="square"/>
@@ -12943,7 +13980,7 @@
                   </a:tcPr>
                 </a:tc>
               </a:tr>
-              <a:tr h="220000">
+              <a:tr h="190000">
                 <a:tc>
                   <a:txBody>
                     <a:bodyPr wrap="square"/>
@@ -13113,7 +14150,7 @@
                   </a:tcPr>
                 </a:tc>
               </a:tr>
-              <a:tr h="220000">
+              <a:tr h="190000">
                 <a:tc>
                   <a:txBody>
                     <a:bodyPr wrap="square"/>
@@ -13283,7 +14320,7 @@
                   </a:tcPr>
                 </a:tc>
               </a:tr>
-              <a:tr h="220000">
+              <a:tr h="190000">
                 <a:tc>
                   <a:txBody>
                     <a:bodyPr wrap="square"/>
@@ -13465,8 +14502,8 @@
         </p:nvSpPr>
         <p:spPr>
           <a:xfrm>
-            <a:off x="180000" y="2050000"/>
-            <a:ext cx="4200000" cy="280000"/>
+            <a:off x="180000" y="1850000"/>
+            <a:ext cx="4200000" cy="240000"/>
           </a:xfrm>
           <a:prstGeom prst="roundRect">
             <a:avLst/>
@@ -13499,14 +14536,14 @@
           <a:p>
             <a:pPr algn="ctr"/>
             <a:r>
-              <a:rPr sz="1000" b="1">
+              <a:rPr sz="900" b="1">
                 <a:solidFill>
                   <a:srgbClr val="404040"/>
                 </a:solidFill>
                 <a:ea typeface="Meiryo UI"/>
                 <a:latin typeface="Meiryo UI"/>
               </a:rPr>
-              <a:t>■ 区内順位（学力調査合計点）</a:t>
+              <a:t>■ 区内順位（学力調査合計点）／体力調査(R6)</a:t>
             </a:r>
           </a:p>
         </p:txBody>
@@ -13520,8 +14557,8 @@
           <p:nvPr/>
         </p:nvGraphicFramePr>
         <p:xfrm>
-          <a:off x="180000" y="2350000"/>
-          <a:ext cx="4200000" cy="700000"/>
+          <a:off x="180000" y="2110000"/>
+          <a:ext cx="4200000" cy="620000"/>
         </p:xfrm>
         <a:graphic>
           <a:graphicData uri="http://schemas.openxmlformats.org/drawingml/2006/table">
@@ -13539,15 +14576,15 @@
                 <a:gridCol w="497000"/>
                 <a:gridCol w="498000"/>
               </a:tblGrid>
-              <a:tr h="233333">
-                <a:tc>
-                  <a:txBody>
-                    <a:bodyPr wrap="square"/>
-                    <a:lstStyle/>
-                    <a:p>
-                      <a:pPr algn="ctr"/>
-                      <a:r>
-                        <a:rPr sz="900" b="1">
+              <a:tr h="206666">
+                <a:tc>
+                  <a:txBody>
+                    <a:bodyPr wrap="square"/>
+                    <a:lstStyle/>
+                    <a:p>
+                      <a:pPr algn="ctr"/>
+                      <a:r>
+                        <a:rPr sz="800" b="1">
                           <a:solidFill>
                             <a:srgbClr val="FFFFFF"/>
                           </a:solidFill>
@@ -13571,7 +14608,7 @@
                     <a:p>
                       <a:pPr algn="ctr"/>
                       <a:r>
-                        <a:rPr sz="900" b="1">
+                        <a:rPr sz="800" b="1">
                           <a:solidFill>
                             <a:srgbClr val="FFFFFF"/>
                           </a:solidFill>
@@ -13595,7 +14632,7 @@
                     <a:p>
                       <a:pPr algn="ctr"/>
                       <a:r>
-                        <a:rPr sz="900" b="1">
+                        <a:rPr sz="800" b="1">
                           <a:solidFill>
                             <a:srgbClr val="FFFFFF"/>
                           </a:solidFill>
@@ -13619,7 +14656,7 @@
                     <a:p>
                       <a:pPr algn="ctr"/>
                       <a:r>
-                        <a:rPr sz="900" b="1">
+                        <a:rPr sz="800" b="1">
                           <a:solidFill>
                             <a:srgbClr val="FFFFFF"/>
                           </a:solidFill>
@@ -13643,7 +14680,7 @@
                     <a:p>
                       <a:pPr algn="ctr"/>
                       <a:r>
-                        <a:rPr sz="900" b="1">
+                        <a:rPr sz="800" b="1">
                           <a:solidFill>
                             <a:srgbClr val="FFFFFF"/>
                           </a:solidFill>
@@ -13667,7 +14704,7 @@
                     <a:p>
                       <a:pPr algn="ctr"/>
                       <a:r>
-                        <a:rPr sz="900" b="1">
+                        <a:rPr sz="800" b="1">
                           <a:solidFill>
                             <a:srgbClr val="FFFFFF"/>
                           </a:solidFill>
@@ -13691,7 +14728,7 @@
                     <a:p>
                       <a:pPr algn="ctr"/>
                       <a:r>
-                        <a:rPr sz="900" b="1">
+                        <a:rPr sz="800" b="1">
                           <a:solidFill>
                             <a:srgbClr val="FFFFFF"/>
                           </a:solidFill>
@@ -13715,7 +14752,7 @@
                     <a:p>
                       <a:pPr algn="ctr"/>
                       <a:r>
-                        <a:rPr sz="900" b="1">
+                        <a:rPr sz="800" b="1">
                           <a:solidFill>
                             <a:srgbClr val="FFFFFF"/>
                           </a:solidFill>
@@ -13733,7 +14770,7 @@
                   </a:tcPr>
                 </a:tc>
               </a:tr>
-              <a:tr h="233333">
+              <a:tr h="206666">
                 <a:tc>
                   <a:txBody>
                     <a:bodyPr wrap="square"/>
@@ -13927,7 +14964,7 @@
                   </a:tcPr>
                 </a:tc>
               </a:tr>
-              <a:tr h="233334">
+              <a:tr h="206668">
                 <a:tc>
                   <a:txBody>
                     <a:bodyPr wrap="square"/>
@@ -14127,68 +15164,14 @@
       </p:graphicFrame>
       <p:sp>
         <p:nvSpPr>
-          <p:cNvPr id="11" name="Rounded Rectangle 10"/>
-          <p:cNvSpPr/>
-          <p:nvPr/>
-        </p:nvSpPr>
-        <p:spPr>
-          <a:xfrm>
-            <a:off x="4500000" y="2050000"/>
-            <a:ext cx="4450000" cy="280000"/>
-          </a:xfrm>
-          <a:prstGeom prst="roundRect">
-            <a:avLst/>
-          </a:prstGeom>
-          <a:solidFill>
-            <a:srgbClr val="FCE4E4"/>
-          </a:solidFill>
-          <a:ln>
-            <a:noFill/>
-          </a:ln>
-          <a:effectLst/>
-        </p:spPr>
-        <p:style>
-          <a:lnRef idx="1">
-            <a:schemeClr val="accent1"/>
-          </a:lnRef>
-          <a:fillRef idx="3">
-            <a:schemeClr val="accent1"/>
-          </a:fillRef>
-          <a:effectRef idx="2">
-            <a:schemeClr val="accent1"/>
-          </a:effectRef>
-          <a:fontRef idx="minor">
-            <a:schemeClr val="lt1"/>
-          </a:fontRef>
-        </p:style>
-        <p:txBody>
-          <a:bodyPr rtlCol="0" anchor="ctr" lIns="60000" rIns="60000" tIns="15000" bIns="15000"/>
-          <a:lstStyle/>
-          <a:p>
-            <a:pPr algn="ctr"/>
-            <a:r>
-              <a:rPr sz="1000" b="1">
-                <a:solidFill>
-                  <a:srgbClr val="404040"/>
-                </a:solidFill>
-                <a:ea typeface="Meiryo UI"/>
-                <a:latin typeface="Meiryo UI"/>
-              </a:rPr>
-              <a:t>■ 体力調査（R6 参考）</a:t>
-            </a:r>
-          </a:p>
-        </p:txBody>
-      </p:sp>
-      <p:sp>
-        <p:nvSpPr>
-          <p:cNvPr id="12" name="TextBox 11"/>
+          <p:cNvPr id="11" name="TextBox 10"/>
           <p:cNvSpPr txBox="1"/>
           <p:nvPr/>
         </p:nvSpPr>
         <p:spPr>
           <a:xfrm>
-            <a:off x="4500000" y="2350000"/>
-            <a:ext cx="4450000" cy="700000"/>
+            <a:off x="180000" y="2760000"/>
+            <a:ext cx="4200000" cy="330000"/>
           </a:xfrm>
           <a:prstGeom prst="rect">
             <a:avLst/>
@@ -14210,54 +15193,28 @@
           <a:p>
             <a:pPr algn="l"/>
             <a:r>
-              <a:rPr sz="1000" b="0">
+              <a:rPr sz="900" b="0">
                 <a:solidFill>
                   <a:srgbClr val="404040"/>
                 </a:solidFill>
                 <a:ea typeface="Meiryo UI"/>
                 <a:latin typeface="Meiryo UI"/>
               </a:rPr>
-              <a:t>小学部：男女ともに区平均と概ね同等または下回る種目が多い</a:t>
-            </a:r>
-          </a:p>
-          <a:p>
-            <a:pPr algn="l"/>
-            <a:r>
-              <a:rPr sz="1000" b="0">
-                <a:solidFill>
-                  <a:srgbClr val="404040"/>
-                </a:solidFill>
-                <a:ea typeface="Meiryo UI"/>
-                <a:latin typeface="Meiryo UI"/>
-              </a:rPr>
-              <a:t>中学部：男女とも握力・持久走で都平均を下回る傾向</a:t>
-            </a:r>
-          </a:p>
-          <a:p>
-            <a:pPr algn="l"/>
-            <a:r>
-              <a:rPr sz="1000" b="0">
-                <a:solidFill>
-                  <a:srgbClr val="404040"/>
-                </a:solidFill>
-                <a:ea typeface="Meiryo UI"/>
-                <a:latin typeface="Meiryo UI"/>
-              </a:rPr>
-              <a:t>→ 小中一貫教育の「体力向上」効果は明確に確認できず</a:t>
+              <a:t>体力：小・中学部とも区平均と同等～下回る種目が多い（R6体力調査）</a:t>
             </a:r>
           </a:p>
         </p:txBody>
       </p:sp>
       <p:sp>
         <p:nvSpPr>
-          <p:cNvPr id="13" name="Rounded Rectangle 12"/>
+          <p:cNvPr id="12" name="Rounded Rectangle 11"/>
           <p:cNvSpPr/>
           <p:nvPr/>
         </p:nvSpPr>
         <p:spPr>
           <a:xfrm>
-            <a:off x="180000" y="3150000"/>
-            <a:ext cx="4200000" cy="280000"/>
+            <a:off x="4500000" y="1850000"/>
+            <a:ext cx="4450000" cy="240000"/>
           </a:xfrm>
           <a:prstGeom prst="roundRect">
             <a:avLst/>
@@ -14290,29 +15247,29 @@
           <a:p>
             <a:pPr algn="ctr"/>
             <a:r>
-              <a:rPr sz="1000" b="1">
+              <a:rPr sz="900" b="1">
                 <a:solidFill>
                   <a:srgbClr val="FFFFFF"/>
                 </a:solidFill>
                 <a:ea typeface="Meiryo UI"/>
                 <a:latin typeface="Meiryo UI"/>
               </a:rPr>
-              <a:t>■ 不登校児童生徒数（人）</a:t>
+              <a:t>■ 不登校児童生徒数（人）／出現率（中学部）</a:t>
             </a:r>
           </a:p>
         </p:txBody>
       </p:sp>
       <p:graphicFrame>
         <p:nvGraphicFramePr>
-          <p:cNvPr id="14" name="Table 13"/>
+          <p:cNvPr id="13" name="Table 12"/>
           <p:cNvGraphicFramePr>
             <a:graphicFrameLocks noGrp="1"/>
           </p:cNvGraphicFramePr>
           <p:nvPr/>
         </p:nvGraphicFramePr>
         <p:xfrm>
-          <a:off x="180000" y="3450000"/>
-          <a:ext cx="4200000" cy="950000"/>
+          <a:off x="4500000" y="2110000"/>
+          <a:ext cx="4450000" cy="1300000"/>
         </p:xfrm>
         <a:graphic>
           <a:graphicData uri="http://schemas.openxmlformats.org/drawingml/2006/table">
@@ -14321,17 +15278,17 @@
                 <a:tableStyleId>{5C22544A-7EE6-4342-B048-85BDC9FD1C3A}</a:tableStyleId>
               </a:tblPr>
               <a:tblGrid>
-                <a:gridCol w="840000"/>
-                <a:gridCol w="420000"/>
-                <a:gridCol w="420000"/>
-                <a:gridCol w="420000"/>
-                <a:gridCol w="420000"/>
-                <a:gridCol w="420000"/>
-                <a:gridCol w="420000"/>
-                <a:gridCol w="420000"/>
-                <a:gridCol w="420000"/>
+                <a:gridCol w="890000"/>
+                <a:gridCol w="445000"/>
+                <a:gridCol w="445000"/>
+                <a:gridCol w="445000"/>
+                <a:gridCol w="445000"/>
+                <a:gridCol w="445000"/>
+                <a:gridCol w="445000"/>
+                <a:gridCol w="445000"/>
+                <a:gridCol w="445000"/>
               </a:tblGrid>
-              <a:tr h="237500">
+              <a:tr h="185714">
                 <a:tc>
                   <a:txBody>
                     <a:bodyPr wrap="square"/>
@@ -14549,15 +15506,15 @@
                   </a:tcPr>
                 </a:tc>
               </a:tr>
-              <a:tr h="237500">
-                <a:tc>
-                  <a:txBody>
-                    <a:bodyPr wrap="square"/>
-                    <a:lstStyle/>
-                    <a:p>
-                      <a:pPr algn="ctr"/>
-                      <a:r>
-                        <a:rPr sz="800" b="1">
+              <a:tr h="185714">
+                <a:tc>
+                  <a:txBody>
+                    <a:bodyPr wrap="square"/>
+                    <a:lstStyle/>
+                    <a:p>
+                      <a:pPr algn="ctr"/>
+                      <a:r>
+                        <a:rPr sz="700" b="1">
                           <a:solidFill>
                             <a:srgbClr val="404040"/>
                           </a:solidFill>
@@ -14581,7 +15538,7 @@
                     <a:p>
                       <a:pPr algn="ctr"/>
                       <a:r>
-                        <a:rPr sz="800" b="0">
+                        <a:rPr sz="700" b="0">
                           <a:solidFill>
                             <a:srgbClr val="404040"/>
                           </a:solidFill>
@@ -14605,7 +15562,7 @@
                     <a:p>
                       <a:pPr algn="ctr"/>
                       <a:r>
-                        <a:rPr sz="800" b="0">
+                        <a:rPr sz="700" b="0">
                           <a:solidFill>
                             <a:srgbClr val="404040"/>
                           </a:solidFill>
@@ -14629,7 +15586,7 @@
                     <a:p>
                       <a:pPr algn="ctr"/>
                       <a:r>
-                        <a:rPr sz="800" b="0">
+                        <a:rPr sz="700" b="0">
                           <a:solidFill>
                             <a:srgbClr val="404040"/>
                           </a:solidFill>
@@ -14653,7 +15610,7 @@
                     <a:p>
                       <a:pPr algn="ctr"/>
                       <a:r>
-                        <a:rPr sz="800" b="0">
+                        <a:rPr sz="700" b="0">
                           <a:solidFill>
                             <a:srgbClr val="404040"/>
                           </a:solidFill>
@@ -14677,7 +15634,7 @@
                     <a:p>
                       <a:pPr algn="ctr"/>
                       <a:r>
-                        <a:rPr sz="800" b="0">
+                        <a:rPr sz="700" b="0">
                           <a:solidFill>
                             <a:srgbClr val="404040"/>
                           </a:solidFill>
@@ -14701,7 +15658,7 @@
                     <a:p>
                       <a:pPr algn="ctr"/>
                       <a:r>
-                        <a:rPr sz="800" b="0">
+                        <a:rPr sz="700" b="0">
                           <a:solidFill>
                             <a:srgbClr val="404040"/>
                           </a:solidFill>
@@ -14725,7 +15682,7 @@
                     <a:p>
                       <a:pPr algn="ctr"/>
                       <a:r>
-                        <a:rPr sz="800" b="0">
+                        <a:rPr sz="700" b="0">
                           <a:solidFill>
                             <a:srgbClr val="404040"/>
                           </a:solidFill>
@@ -14749,7 +15706,7 @@
                     <a:p>
                       <a:pPr algn="ctr"/>
                       <a:r>
-                        <a:rPr sz="800" b="0">
+                        <a:rPr sz="700" b="0">
                           <a:solidFill>
                             <a:srgbClr val="404040"/>
                           </a:solidFill>
@@ -14767,15 +15724,15 @@
                   </a:tcPr>
                 </a:tc>
               </a:tr>
-              <a:tr h="237500">
-                <a:tc>
-                  <a:txBody>
-                    <a:bodyPr wrap="square"/>
-                    <a:lstStyle/>
-                    <a:p>
-                      <a:pPr algn="ctr"/>
-                      <a:r>
-                        <a:rPr sz="800" b="1">
+              <a:tr h="185714">
+                <a:tc>
+                  <a:txBody>
+                    <a:bodyPr wrap="square"/>
+                    <a:lstStyle/>
+                    <a:p>
+                      <a:pPr algn="ctr"/>
+                      <a:r>
+                        <a:rPr sz="700" b="1">
                           <a:solidFill>
                             <a:srgbClr val="404040"/>
                           </a:solidFill>
@@ -14799,7 +15756,7 @@
                     <a:p>
                       <a:pPr algn="ctr"/>
                       <a:r>
-                        <a:rPr sz="800" b="0">
+                        <a:rPr sz="700" b="0">
                           <a:solidFill>
                             <a:srgbClr val="404040"/>
                           </a:solidFill>
@@ -14823,7 +15780,7 @@
                     <a:p>
                       <a:pPr algn="ctr"/>
                       <a:r>
-                        <a:rPr sz="800" b="0">
+                        <a:rPr sz="700" b="0">
                           <a:solidFill>
                             <a:srgbClr val="404040"/>
                           </a:solidFill>
@@ -14847,7 +15804,7 @@
                     <a:p>
                       <a:pPr algn="ctr"/>
                       <a:r>
-                        <a:rPr sz="800" b="0">
+                        <a:rPr sz="700" b="0">
                           <a:solidFill>
                             <a:srgbClr val="404040"/>
                           </a:solidFill>
@@ -14871,7 +15828,7 @@
                     <a:p>
                       <a:pPr algn="ctr"/>
                       <a:r>
-                        <a:rPr sz="800" b="0">
+                        <a:rPr sz="700" b="0">
                           <a:solidFill>
                             <a:srgbClr val="404040"/>
                           </a:solidFill>
@@ -14895,7 +15852,7 @@
                     <a:p>
                       <a:pPr algn="ctr"/>
                       <a:r>
-                        <a:rPr sz="800" b="0">
+                        <a:rPr sz="700" b="0">
                           <a:solidFill>
                             <a:srgbClr val="404040"/>
                           </a:solidFill>
@@ -14919,7 +15876,7 @@
                     <a:p>
                       <a:pPr algn="ctr"/>
                       <a:r>
-                        <a:rPr sz="800" b="0">
+                        <a:rPr sz="700" b="0">
                           <a:solidFill>
                             <a:srgbClr val="404040"/>
                           </a:solidFill>
@@ -14943,7 +15900,7 @@
                     <a:p>
                       <a:pPr algn="ctr"/>
                       <a:r>
-                        <a:rPr sz="800" b="0">
+                        <a:rPr sz="700" b="0">
                           <a:solidFill>
                             <a:srgbClr val="404040"/>
                           </a:solidFill>
@@ -14967,7 +15924,7 @@
                     <a:p>
                       <a:pPr algn="ctr"/>
                       <a:r>
-                        <a:rPr sz="800" b="0">
+                        <a:rPr sz="700" b="0">
                           <a:solidFill>
                             <a:srgbClr val="404040"/>
                           </a:solidFill>
@@ -14985,15 +15942,15 @@
                   </a:tcPr>
                 </a:tc>
               </a:tr>
-              <a:tr h="237500">
-                <a:tc>
-                  <a:txBody>
-                    <a:bodyPr wrap="square"/>
-                    <a:lstStyle/>
-                    <a:p>
-                      <a:pPr algn="ctr"/>
-                      <a:r>
-                        <a:rPr sz="800" b="1">
+              <a:tr h="185714">
+                <a:tc>
+                  <a:txBody>
+                    <a:bodyPr wrap="square"/>
+                    <a:lstStyle/>
+                    <a:p>
+                      <a:pPr algn="ctr"/>
+                      <a:r>
+                        <a:rPr sz="700" b="1">
                           <a:solidFill>
                             <a:srgbClr val="404040"/>
                           </a:solidFill>
@@ -15017,7 +15974,7 @@
                     <a:p>
                       <a:pPr algn="ctr"/>
                       <a:r>
-                        <a:rPr sz="800" b="0">
+                        <a:rPr sz="700" b="0">
                           <a:solidFill>
                             <a:srgbClr val="404040"/>
                           </a:solidFill>
@@ -15041,7 +15998,7 @@
                     <a:p>
                       <a:pPr algn="ctr"/>
                       <a:r>
-                        <a:rPr sz="800" b="0">
+                        <a:rPr sz="700" b="0">
                           <a:solidFill>
                             <a:srgbClr val="404040"/>
                           </a:solidFill>
@@ -15065,7 +16022,7 @@
                     <a:p>
                       <a:pPr algn="ctr"/>
                       <a:r>
-                        <a:rPr sz="800" b="0">
+                        <a:rPr sz="700" b="0">
                           <a:solidFill>
                             <a:srgbClr val="404040"/>
                           </a:solidFill>
@@ -15089,7 +16046,7 @@
                     <a:p>
                       <a:pPr algn="ctr"/>
                       <a:r>
-                        <a:rPr sz="800" b="0">
+                        <a:rPr sz="700" b="0">
                           <a:solidFill>
                             <a:srgbClr val="404040"/>
                           </a:solidFill>
@@ -15113,7 +16070,7 @@
                     <a:p>
                       <a:pPr algn="ctr"/>
                       <a:r>
-                        <a:rPr sz="800" b="0">
+                        <a:rPr sz="700" b="0">
                           <a:solidFill>
                             <a:srgbClr val="404040"/>
                           </a:solidFill>
@@ -15137,7 +16094,7 @@
                     <a:p>
                       <a:pPr algn="ctr"/>
                       <a:r>
-                        <a:rPr sz="800" b="1">
+                        <a:rPr sz="700" b="1">
                           <a:solidFill>
                             <a:srgbClr val="C00000"/>
                           </a:solidFill>
@@ -15161,7 +16118,7 @@
                     <a:p>
                       <a:pPr algn="ctr"/>
                       <a:r>
-                        <a:rPr sz="800" b="1">
+                        <a:rPr sz="700" b="1">
                           <a:solidFill>
                             <a:srgbClr val="C00000"/>
                           </a:solidFill>
@@ -15185,7 +16142,7 @@
                     <a:p>
                       <a:pPr algn="ctr"/>
                       <a:r>
-                        <a:rPr sz="800" b="1">
+                        <a:rPr sz="700" b="1">
                           <a:solidFill>
                             <a:srgbClr val="C00000"/>
                           </a:solidFill>
@@ -15199,6 +16156,660 @@
                   <a:tcPr marL="36000" marR="36000" marT="18000" marB="18000">
                     <a:solidFill>
                       <a:srgbClr val="FFFBC1"/>
+                    </a:solidFill>
+                  </a:tcPr>
+                </a:tc>
+              </a:tr>
+              <a:tr h="185714">
+                <a:tc>
+                  <a:txBody>
+                    <a:bodyPr wrap="square"/>
+                    <a:lstStyle/>
+                    <a:p>
+                      <a:pPr algn="ctr"/>
+                      <a:r>
+                        <a:rPr sz="700" b="1">
+                          <a:solidFill>
+                            <a:srgbClr val="404040"/>
+                          </a:solidFill>
+                          <a:ea typeface="Meiryo UI"/>
+                          <a:latin typeface="Meiryo UI"/>
+                        </a:rPr>
+                        <a:t>中学・桜%</a:t>
+                      </a:r>
+                    </a:p>
+                  </a:txBody>
+                  <a:tcPr marL="36000" marR="36000" marT="18000" marB="18000">
+                    <a:solidFill>
+                      <a:srgbClr val="E8F7F9"/>
+                    </a:solidFill>
+                  </a:tcPr>
+                </a:tc>
+                <a:tc>
+                  <a:txBody>
+                    <a:bodyPr wrap="square"/>
+                    <a:lstStyle/>
+                    <a:p>
+                      <a:pPr algn="ctr"/>
+                      <a:r>
+                        <a:rPr sz="700" b="0">
+                          <a:solidFill>
+                            <a:srgbClr val="404040"/>
+                          </a:solidFill>
+                          <a:ea typeface="Meiryo UI"/>
+                          <a:latin typeface="Meiryo UI"/>
+                        </a:rPr>
+                        <a:t>3.38</a:t>
+                      </a:r>
+                    </a:p>
+                  </a:txBody>
+                  <a:tcPr marL="36000" marR="36000" marT="18000" marB="18000">
+                    <a:solidFill>
+                      <a:srgbClr val="FFFFFF"/>
+                    </a:solidFill>
+                  </a:tcPr>
+                </a:tc>
+                <a:tc>
+                  <a:txBody>
+                    <a:bodyPr wrap="square"/>
+                    <a:lstStyle/>
+                    <a:p>
+                      <a:pPr algn="ctr"/>
+                      <a:r>
+                        <a:rPr sz="700" b="0">
+                          <a:solidFill>
+                            <a:srgbClr val="404040"/>
+                          </a:solidFill>
+                          <a:ea typeface="Meiryo UI"/>
+                          <a:latin typeface="Meiryo UI"/>
+                        </a:rPr>
+                        <a:t>5.13</a:t>
+                      </a:r>
+                    </a:p>
+                  </a:txBody>
+                  <a:tcPr marL="36000" marR="36000" marT="18000" marB="18000">
+                    <a:solidFill>
+                      <a:srgbClr val="FFFFFF"/>
+                    </a:solidFill>
+                  </a:tcPr>
+                </a:tc>
+                <a:tc>
+                  <a:txBody>
+                    <a:bodyPr wrap="square"/>
+                    <a:lstStyle/>
+                    <a:p>
+                      <a:pPr algn="ctr"/>
+                      <a:r>
+                        <a:rPr sz="700" b="0">
+                          <a:solidFill>
+                            <a:srgbClr val="404040"/>
+                          </a:solidFill>
+                          <a:ea typeface="Meiryo UI"/>
+                          <a:latin typeface="Meiryo UI"/>
+                        </a:rPr>
+                        <a:t>5.93</a:t>
+                      </a:r>
+                    </a:p>
+                  </a:txBody>
+                  <a:tcPr marL="36000" marR="36000" marT="18000" marB="18000">
+                    <a:solidFill>
+                      <a:srgbClr val="FFFFFF"/>
+                    </a:solidFill>
+                  </a:tcPr>
+                </a:tc>
+                <a:tc>
+                  <a:txBody>
+                    <a:bodyPr wrap="square"/>
+                    <a:lstStyle/>
+                    <a:p>
+                      <a:pPr algn="ctr"/>
+                      <a:r>
+                        <a:rPr sz="700" b="0">
+                          <a:solidFill>
+                            <a:srgbClr val="404040"/>
+                          </a:solidFill>
+                          <a:ea typeface="Meiryo UI"/>
+                          <a:latin typeface="Meiryo UI"/>
+                        </a:rPr>
+                        <a:t>3.52</a:t>
+                      </a:r>
+                    </a:p>
+                  </a:txBody>
+                  <a:tcPr marL="36000" marR="36000" marT="18000" marB="18000">
+                    <a:solidFill>
+                      <a:srgbClr val="FFFFFF"/>
+                    </a:solidFill>
+                  </a:tcPr>
+                </a:tc>
+                <a:tc>
+                  <a:txBody>
+                    <a:bodyPr wrap="square"/>
+                    <a:lstStyle/>
+                    <a:p>
+                      <a:pPr algn="ctr"/>
+                      <a:r>
+                        <a:rPr sz="700" b="0">
+                          <a:solidFill>
+                            <a:srgbClr val="404040"/>
+                          </a:solidFill>
+                          <a:ea typeface="Meiryo UI"/>
+                          <a:latin typeface="Meiryo UI"/>
+                        </a:rPr>
+                        <a:t>5.63</a:t>
+                      </a:r>
+                    </a:p>
+                  </a:txBody>
+                  <a:tcPr marL="36000" marR="36000" marT="18000" marB="18000">
+                    <a:solidFill>
+                      <a:srgbClr val="FFFFFF"/>
+                    </a:solidFill>
+                  </a:tcPr>
+                </a:tc>
+                <a:tc>
+                  <a:txBody>
+                    <a:bodyPr wrap="square"/>
+                    <a:lstStyle/>
+                    <a:p>
+                      <a:pPr algn="ctr"/>
+                      <a:r>
+                        <a:rPr sz="700" b="1">
+                          <a:solidFill>
+                            <a:srgbClr val="C00000"/>
+                          </a:solidFill>
+                          <a:ea typeface="Meiryo UI"/>
+                          <a:latin typeface="Meiryo UI"/>
+                        </a:rPr>
+                        <a:t>10.50</a:t>
+                      </a:r>
+                    </a:p>
+                  </a:txBody>
+                  <a:tcPr marL="36000" marR="36000" marT="18000" marB="18000">
+                    <a:solidFill>
+                      <a:srgbClr val="FFFBC1"/>
+                    </a:solidFill>
+                  </a:tcPr>
+                </a:tc>
+                <a:tc>
+                  <a:txBody>
+                    <a:bodyPr wrap="square"/>
+                    <a:lstStyle/>
+                    <a:p>
+                      <a:pPr algn="ctr"/>
+                      <a:r>
+                        <a:rPr sz="700" b="1">
+                          <a:solidFill>
+                            <a:srgbClr val="C00000"/>
+                          </a:solidFill>
+                          <a:ea typeface="Meiryo UI"/>
+                          <a:latin typeface="Meiryo UI"/>
+                        </a:rPr>
+                        <a:t>11.11</a:t>
+                      </a:r>
+                    </a:p>
+                  </a:txBody>
+                  <a:tcPr marL="36000" marR="36000" marT="18000" marB="18000">
+                    <a:solidFill>
+                      <a:srgbClr val="FFFBC1"/>
+                    </a:solidFill>
+                  </a:tcPr>
+                </a:tc>
+                <a:tc>
+                  <a:txBody>
+                    <a:bodyPr wrap="square"/>
+                    <a:lstStyle/>
+                    <a:p>
+                      <a:pPr algn="ctr"/>
+                      <a:r>
+                        <a:rPr sz="700" b="1">
+                          <a:solidFill>
+                            <a:srgbClr val="C00000"/>
+                          </a:solidFill>
+                          <a:ea typeface="Meiryo UI"/>
+                          <a:latin typeface="Meiryo UI"/>
+                        </a:rPr>
+                        <a:t>10.40</a:t>
+                      </a:r>
+                    </a:p>
+                  </a:txBody>
+                  <a:tcPr marL="36000" marR="36000" marT="18000" marB="18000">
+                    <a:solidFill>
+                      <a:srgbClr val="FFFBC1"/>
+                    </a:solidFill>
+                  </a:tcPr>
+                </a:tc>
+              </a:tr>
+              <a:tr h="185714">
+                <a:tc>
+                  <a:txBody>
+                    <a:bodyPr wrap="square"/>
+                    <a:lstStyle/>
+                    <a:p>
+                      <a:pPr algn="ctr"/>
+                      <a:r>
+                        <a:rPr sz="700" b="1">
+                          <a:solidFill>
+                            <a:srgbClr val="404040"/>
+                          </a:solidFill>
+                          <a:ea typeface="Meiryo UI"/>
+                          <a:latin typeface="Meiryo UI"/>
+                        </a:rPr>
+                        <a:t>中学・区%</a:t>
+                      </a:r>
+                    </a:p>
+                  </a:txBody>
+                  <a:tcPr marL="36000" marR="36000" marT="18000" marB="18000">
+                    <a:solidFill>
+                      <a:srgbClr val="E8F7F9"/>
+                    </a:solidFill>
+                  </a:tcPr>
+                </a:tc>
+                <a:tc>
+                  <a:txBody>
+                    <a:bodyPr wrap="square"/>
+                    <a:lstStyle/>
+                    <a:p>
+                      <a:pPr algn="ctr"/>
+                      <a:r>
+                        <a:rPr sz="700" b="0">
+                          <a:solidFill>
+                            <a:srgbClr val="404040"/>
+                          </a:solidFill>
+                          <a:ea typeface="Meiryo UI"/>
+                          <a:latin typeface="Meiryo UI"/>
+                        </a:rPr>
+                        <a:t>3.42</a:t>
+                      </a:r>
+                    </a:p>
+                  </a:txBody>
+                  <a:tcPr marL="36000" marR="36000" marT="18000" marB="18000">
+                    <a:solidFill>
+                      <a:srgbClr val="FFFFFF"/>
+                    </a:solidFill>
+                  </a:tcPr>
+                </a:tc>
+                <a:tc>
+                  <a:txBody>
+                    <a:bodyPr wrap="square"/>
+                    <a:lstStyle/>
+                    <a:p>
+                      <a:pPr algn="ctr"/>
+                      <a:r>
+                        <a:rPr sz="700" b="0">
+                          <a:solidFill>
+                            <a:srgbClr val="404040"/>
+                          </a:solidFill>
+                          <a:ea typeface="Meiryo UI"/>
+                          <a:latin typeface="Meiryo UI"/>
+                        </a:rPr>
+                        <a:t>3.20</a:t>
+                      </a:r>
+                    </a:p>
+                  </a:txBody>
+                  <a:tcPr marL="36000" marR="36000" marT="18000" marB="18000">
+                    <a:solidFill>
+                      <a:srgbClr val="FFFFFF"/>
+                    </a:solidFill>
+                  </a:tcPr>
+                </a:tc>
+                <a:tc>
+                  <a:txBody>
+                    <a:bodyPr wrap="square"/>
+                    <a:lstStyle/>
+                    <a:p>
+                      <a:pPr algn="ctr"/>
+                      <a:r>
+                        <a:rPr sz="700" b="0">
+                          <a:solidFill>
+                            <a:srgbClr val="404040"/>
+                          </a:solidFill>
+                          <a:ea typeface="Meiryo UI"/>
+                          <a:latin typeface="Meiryo UI"/>
+                        </a:rPr>
+                        <a:t>3.26</a:t>
+                      </a:r>
+                    </a:p>
+                  </a:txBody>
+                  <a:tcPr marL="36000" marR="36000" marT="18000" marB="18000">
+                    <a:solidFill>
+                      <a:srgbClr val="FFFFFF"/>
+                    </a:solidFill>
+                  </a:tcPr>
+                </a:tc>
+                <a:tc>
+                  <a:txBody>
+                    <a:bodyPr wrap="square"/>
+                    <a:lstStyle/>
+                    <a:p>
+                      <a:pPr algn="ctr"/>
+                      <a:r>
+                        <a:rPr sz="700" b="0">
+                          <a:solidFill>
+                            <a:srgbClr val="404040"/>
+                          </a:solidFill>
+                          <a:ea typeface="Meiryo UI"/>
+                          <a:latin typeface="Meiryo UI"/>
+                        </a:rPr>
+                        <a:t>4.35</a:t>
+                      </a:r>
+                    </a:p>
+                  </a:txBody>
+                  <a:tcPr marL="36000" marR="36000" marT="18000" marB="18000">
+                    <a:solidFill>
+                      <a:srgbClr val="FFFFFF"/>
+                    </a:solidFill>
+                  </a:tcPr>
+                </a:tc>
+                <a:tc>
+                  <a:txBody>
+                    <a:bodyPr wrap="square"/>
+                    <a:lstStyle/>
+                    <a:p>
+                      <a:pPr algn="ctr"/>
+                      <a:r>
+                        <a:rPr sz="700" b="0">
+                          <a:solidFill>
+                            <a:srgbClr val="404040"/>
+                          </a:solidFill>
+                          <a:ea typeface="Meiryo UI"/>
+                          <a:latin typeface="Meiryo UI"/>
+                        </a:rPr>
+                        <a:t>4.80</a:t>
+                      </a:r>
+                    </a:p>
+                  </a:txBody>
+                  <a:tcPr marL="36000" marR="36000" marT="18000" marB="18000">
+                    <a:solidFill>
+                      <a:srgbClr val="FFFFFF"/>
+                    </a:solidFill>
+                  </a:tcPr>
+                </a:tc>
+                <a:tc>
+                  <a:txBody>
+                    <a:bodyPr wrap="square"/>
+                    <a:lstStyle/>
+                    <a:p>
+                      <a:pPr algn="ctr"/>
+                      <a:r>
+                        <a:rPr sz="700" b="0">
+                          <a:solidFill>
+                            <a:srgbClr val="404040"/>
+                          </a:solidFill>
+                          <a:ea typeface="Meiryo UI"/>
+                          <a:latin typeface="Meiryo UI"/>
+                        </a:rPr>
+                        <a:t>5.23</a:t>
+                      </a:r>
+                    </a:p>
+                  </a:txBody>
+                  <a:tcPr marL="36000" marR="36000" marT="18000" marB="18000">
+                    <a:solidFill>
+                      <a:srgbClr val="FFFFFF"/>
+                    </a:solidFill>
+                  </a:tcPr>
+                </a:tc>
+                <a:tc>
+                  <a:txBody>
+                    <a:bodyPr wrap="square"/>
+                    <a:lstStyle/>
+                    <a:p>
+                      <a:pPr algn="ctr"/>
+                      <a:r>
+                        <a:rPr sz="700" b="0">
+                          <a:solidFill>
+                            <a:srgbClr val="404040"/>
+                          </a:solidFill>
+                          <a:ea typeface="Meiryo UI"/>
+                          <a:latin typeface="Meiryo UI"/>
+                        </a:rPr>
+                        <a:t>6.13</a:t>
+                      </a:r>
+                    </a:p>
+                  </a:txBody>
+                  <a:tcPr marL="36000" marR="36000" marT="18000" marB="18000">
+                    <a:solidFill>
+                      <a:srgbClr val="FFFFFF"/>
+                    </a:solidFill>
+                  </a:tcPr>
+                </a:tc>
+                <a:tc>
+                  <a:txBody>
+                    <a:bodyPr wrap="square"/>
+                    <a:lstStyle/>
+                    <a:p>
+                      <a:pPr algn="ctr"/>
+                      <a:r>
+                        <a:rPr sz="700" b="0">
+                          <a:solidFill>
+                            <a:srgbClr val="404040"/>
+                          </a:solidFill>
+                          <a:ea typeface="Meiryo UI"/>
+                          <a:latin typeface="Meiryo UI"/>
+                        </a:rPr>
+                        <a:t>6.90</a:t>
+                      </a:r>
+                    </a:p>
+                  </a:txBody>
+                  <a:tcPr marL="36000" marR="36000" marT="18000" marB="18000">
+                    <a:solidFill>
+                      <a:srgbClr val="FFFFFF"/>
+                    </a:solidFill>
+                  </a:tcPr>
+                </a:tc>
+              </a:tr>
+              <a:tr h="185716">
+                <a:tc>
+                  <a:txBody>
+                    <a:bodyPr wrap="square"/>
+                    <a:lstStyle/>
+                    <a:p>
+                      <a:pPr algn="ctr"/>
+                      <a:r>
+                        <a:rPr sz="700" b="1">
+                          <a:solidFill>
+                            <a:srgbClr val="404040"/>
+                          </a:solidFill>
+                          <a:ea typeface="Meiryo UI"/>
+                          <a:latin typeface="Meiryo UI"/>
+                        </a:rPr>
+                        <a:t>中学・都%</a:t>
+                      </a:r>
+                    </a:p>
+                  </a:txBody>
+                  <a:tcPr marL="36000" marR="36000" marT="18000" marB="18000">
+                    <a:solidFill>
+                      <a:srgbClr val="E8F7F9"/>
+                    </a:solidFill>
+                  </a:tcPr>
+                </a:tc>
+                <a:tc>
+                  <a:txBody>
+                    <a:bodyPr wrap="square"/>
+                    <a:lstStyle/>
+                    <a:p>
+                      <a:pPr algn="ctr"/>
+                      <a:r>
+                        <a:rPr sz="700" b="0">
+                          <a:solidFill>
+                            <a:srgbClr val="404040"/>
+                          </a:solidFill>
+                          <a:ea typeface="Meiryo UI"/>
+                          <a:latin typeface="Meiryo UI"/>
+                        </a:rPr>
+                        <a:t>3.6</a:t>
+                      </a:r>
+                    </a:p>
+                  </a:txBody>
+                  <a:tcPr marL="36000" marR="36000" marT="18000" marB="18000">
+                    <a:solidFill>
+                      <a:srgbClr val="FFFFFF"/>
+                    </a:solidFill>
+                  </a:tcPr>
+                </a:tc>
+                <a:tc>
+                  <a:txBody>
+                    <a:bodyPr wrap="square"/>
+                    <a:lstStyle/>
+                    <a:p>
+                      <a:pPr algn="ctr"/>
+                      <a:r>
+                        <a:rPr sz="700" b="0">
+                          <a:solidFill>
+                            <a:srgbClr val="404040"/>
+                          </a:solidFill>
+                          <a:ea typeface="Meiryo UI"/>
+                          <a:latin typeface="Meiryo UI"/>
+                        </a:rPr>
+                        <a:t>3.78</a:t>
+                      </a:r>
+                    </a:p>
+                  </a:txBody>
+                  <a:tcPr marL="36000" marR="36000" marT="18000" marB="18000">
+                    <a:solidFill>
+                      <a:srgbClr val="FFFFFF"/>
+                    </a:solidFill>
+                  </a:tcPr>
+                </a:tc>
+                <a:tc>
+                  <a:txBody>
+                    <a:bodyPr wrap="square"/>
+                    <a:lstStyle/>
+                    <a:p>
+                      <a:pPr algn="ctr"/>
+                      <a:r>
+                        <a:rPr sz="700" b="0">
+                          <a:solidFill>
+                            <a:srgbClr val="404040"/>
+                          </a:solidFill>
+                          <a:ea typeface="Meiryo UI"/>
+                          <a:latin typeface="Meiryo UI"/>
+                        </a:rPr>
+                        <a:t>4.33</a:t>
+                      </a:r>
+                    </a:p>
+                  </a:txBody>
+                  <a:tcPr marL="36000" marR="36000" marT="18000" marB="18000">
+                    <a:solidFill>
+                      <a:srgbClr val="FFFFFF"/>
+                    </a:solidFill>
+                  </a:tcPr>
+                </a:tc>
+                <a:tc>
+                  <a:txBody>
+                    <a:bodyPr wrap="square"/>
+                    <a:lstStyle/>
+                    <a:p>
+                      <a:pPr algn="ctr"/>
+                      <a:r>
+                        <a:rPr sz="700" b="0">
+                          <a:solidFill>
+                            <a:srgbClr val="404040"/>
+                          </a:solidFill>
+                          <a:ea typeface="Meiryo UI"/>
+                          <a:latin typeface="Meiryo UI"/>
+                        </a:rPr>
+                        <a:t>4.76</a:t>
+                      </a:r>
+                    </a:p>
+                  </a:txBody>
+                  <a:tcPr marL="36000" marR="36000" marT="18000" marB="18000">
+                    <a:solidFill>
+                      <a:srgbClr val="FFFFFF"/>
+                    </a:solidFill>
+                  </a:tcPr>
+                </a:tc>
+                <a:tc>
+                  <a:txBody>
+                    <a:bodyPr wrap="square"/>
+                    <a:lstStyle/>
+                    <a:p>
+                      <a:pPr algn="ctr"/>
+                      <a:r>
+                        <a:rPr sz="700" b="0">
+                          <a:solidFill>
+                            <a:srgbClr val="404040"/>
+                          </a:solidFill>
+                          <a:ea typeface="Meiryo UI"/>
+                          <a:latin typeface="Meiryo UI"/>
+                        </a:rPr>
+                        <a:t>4.93</a:t>
+                      </a:r>
+                    </a:p>
+                  </a:txBody>
+                  <a:tcPr marL="36000" marR="36000" marT="18000" marB="18000">
+                    <a:solidFill>
+                      <a:srgbClr val="FFFFFF"/>
+                    </a:solidFill>
+                  </a:tcPr>
+                </a:tc>
+                <a:tc>
+                  <a:txBody>
+                    <a:bodyPr wrap="square"/>
+                    <a:lstStyle/>
+                    <a:p>
+                      <a:pPr algn="ctr"/>
+                      <a:r>
+                        <a:rPr sz="700" b="0">
+                          <a:solidFill>
+                            <a:srgbClr val="404040"/>
+                          </a:solidFill>
+                          <a:ea typeface="Meiryo UI"/>
+                          <a:latin typeface="Meiryo UI"/>
+                        </a:rPr>
+                        <a:t>5.76</a:t>
+                      </a:r>
+                    </a:p>
+                  </a:txBody>
+                  <a:tcPr marL="36000" marR="36000" marT="18000" marB="18000">
+                    <a:solidFill>
+                      <a:srgbClr val="FFFFFF"/>
+                    </a:solidFill>
+                  </a:tcPr>
+                </a:tc>
+                <a:tc>
+                  <a:txBody>
+                    <a:bodyPr wrap="square"/>
+                    <a:lstStyle/>
+                    <a:p>
+                      <a:pPr algn="ctr"/>
+                      <a:r>
+                        <a:rPr sz="700" b="0">
+                          <a:solidFill>
+                            <a:srgbClr val="404040"/>
+                          </a:solidFill>
+                          <a:ea typeface="Meiryo UI"/>
+                          <a:latin typeface="Meiryo UI"/>
+                        </a:rPr>
+                        <a:t>6.85</a:t>
+                      </a:r>
+                    </a:p>
+                  </a:txBody>
+                  <a:tcPr marL="36000" marR="36000" marT="18000" marB="18000">
+                    <a:solidFill>
+                      <a:srgbClr val="FFFFFF"/>
+                    </a:solidFill>
+                  </a:tcPr>
+                </a:tc>
+                <a:tc>
+                  <a:txBody>
+                    <a:bodyPr wrap="square"/>
+                    <a:lstStyle/>
+                    <a:p>
+                      <a:pPr algn="ctr"/>
+                      <a:r>
+                        <a:rPr sz="700" b="0">
+                          <a:solidFill>
+                            <a:srgbClr val="404040"/>
+                          </a:solidFill>
+                          <a:ea typeface="Meiryo UI"/>
+                          <a:latin typeface="Meiryo UI"/>
+                        </a:rPr>
+                        <a:t>7.80</a:t>
+                      </a:r>
+                    </a:p>
+                  </a:txBody>
+                  <a:tcPr marL="36000" marR="36000" marT="18000" marB="18000">
+                    <a:solidFill>
+                      <a:srgbClr val="FFFFFF"/>
                     </a:solidFill>
                   </a:tcPr>
                 </a:tc>
@@ -15209,20 +16820,20 @@
       </p:graphicFrame>
       <p:sp>
         <p:nvSpPr>
-          <p:cNvPr id="15" name="Rounded Rectangle 14"/>
+          <p:cNvPr id="14" name="Rounded Rectangle 13"/>
           <p:cNvSpPr/>
           <p:nvPr/>
         </p:nvSpPr>
         <p:spPr>
           <a:xfrm>
-            <a:off x="4500000" y="3150000"/>
-            <a:ext cx="4450000" cy="280000"/>
+            <a:off x="180000" y="3450000"/>
+            <a:ext cx="8780000" cy="280000"/>
           </a:xfrm>
           <a:prstGeom prst="roundRect">
             <a:avLst/>
           </a:prstGeom>
           <a:solidFill>
-            <a:srgbClr val="C00000"/>
+            <a:srgbClr val="7030A0"/>
           </a:solidFill>
           <a:ln>
             <a:noFill/>
@@ -15256,1352 +16867,227 @@
                 <a:ea typeface="Meiryo UI"/>
                 <a:latin typeface="Meiryo UI"/>
               </a:rPr>
-              <a:t>■ 不登校出現率（%）</a:t>
+              <a:t>■ 専門家による因果分析（教育統計学・教育心理学・特別支援教育の視点）</a:t>
             </a:r>
           </a:p>
         </p:txBody>
       </p:sp>
-      <p:graphicFrame>
-        <p:nvGraphicFramePr>
-          <p:cNvPr id="16" name="Table 15"/>
-          <p:cNvGraphicFramePr>
-            <a:graphicFrameLocks noGrp="1"/>
-          </p:cNvGraphicFramePr>
+      <p:sp>
+        <p:nvSpPr>
+          <p:cNvPr id="15" name="Rounded Rectangle 14"/>
+          <p:cNvSpPr/>
           <p:nvPr/>
-        </p:nvGraphicFramePr>
-        <p:xfrm>
-          <a:off x="4500000" y="3450000"/>
-          <a:ext cx="4450000" cy="1100000"/>
-        </p:xfrm>
-        <a:graphic>
-          <a:graphicData uri="http://schemas.openxmlformats.org/drawingml/2006/table">
-            <a:tbl>
-              <a:tblPr firstRow="1" bandRow="1">
-                <a:tableStyleId>{5C22544A-7EE6-4342-B048-85BDC9FD1C3A}</a:tableStyleId>
-              </a:tblPr>
-              <a:tblGrid>
-                <a:gridCol w="610000"/>
-                <a:gridCol w="480000"/>
-                <a:gridCol w="480000"/>
-                <a:gridCol w="480000"/>
-                <a:gridCol w="480000"/>
-                <a:gridCol w="480000"/>
-                <a:gridCol w="480000"/>
-                <a:gridCol w="480000"/>
-                <a:gridCol w="480000"/>
-              </a:tblGrid>
-              <a:tr h="183333">
-                <a:tc>
-                  <a:txBody>
-                    <a:bodyPr wrap="square"/>
-                    <a:lstStyle/>
-                    <a:p>
-                      <a:pPr algn="ctr"/>
-                      <a:r>
-                        <a:rPr sz="800" b="1">
-                          <a:solidFill>
-                            <a:srgbClr val="FFFFFF"/>
-                          </a:solidFill>
-                          <a:ea typeface="Meiryo UI"/>
-                          <a:latin typeface="Meiryo UI"/>
-                        </a:rPr>
-                        <a:t/>
-                      </a:r>
-                    </a:p>
-                  </a:txBody>
-                  <a:tcPr marL="36000" marR="36000" marT="18000" marB="18000">
-                    <a:solidFill>
-                      <a:srgbClr val="0F9ED5"/>
-                    </a:solidFill>
-                  </a:tcPr>
-                </a:tc>
-                <a:tc>
-                  <a:txBody>
-                    <a:bodyPr wrap="square"/>
-                    <a:lstStyle/>
-                    <a:p>
-                      <a:pPr algn="ctr"/>
-                      <a:r>
-                        <a:rPr sz="800" b="1">
-                          <a:solidFill>
-                            <a:srgbClr val="FFFFFF"/>
-                          </a:solidFill>
-                          <a:ea typeface="Meiryo UI"/>
-                          <a:latin typeface="Meiryo UI"/>
-                        </a:rPr>
-                        <a:t>H28</a:t>
-                      </a:r>
-                    </a:p>
-                  </a:txBody>
-                  <a:tcPr marL="36000" marR="36000" marT="18000" marB="18000">
-                    <a:solidFill>
-                      <a:srgbClr val="0F9ED5"/>
-                    </a:solidFill>
-                  </a:tcPr>
-                </a:tc>
-                <a:tc>
-                  <a:txBody>
-                    <a:bodyPr wrap="square"/>
-                    <a:lstStyle/>
-                    <a:p>
-                      <a:pPr algn="ctr"/>
-                      <a:r>
-                        <a:rPr sz="800" b="1">
-                          <a:solidFill>
-                            <a:srgbClr val="FFFFFF"/>
-                          </a:solidFill>
-                          <a:ea typeface="Meiryo UI"/>
-                          <a:latin typeface="Meiryo UI"/>
-                        </a:rPr>
-                        <a:t>H29</a:t>
-                      </a:r>
-                    </a:p>
-                  </a:txBody>
-                  <a:tcPr marL="36000" marR="36000" marT="18000" marB="18000">
-                    <a:solidFill>
-                      <a:srgbClr val="0F9ED5"/>
-                    </a:solidFill>
-                  </a:tcPr>
-                </a:tc>
-                <a:tc>
-                  <a:txBody>
-                    <a:bodyPr wrap="square"/>
-                    <a:lstStyle/>
-                    <a:p>
-                      <a:pPr algn="ctr"/>
-                      <a:r>
-                        <a:rPr sz="800" b="1">
-                          <a:solidFill>
-                            <a:srgbClr val="FFFFFF"/>
-                          </a:solidFill>
-                          <a:ea typeface="Meiryo UI"/>
-                          <a:latin typeface="Meiryo UI"/>
-                        </a:rPr>
-                        <a:t>H30</a:t>
-                      </a:r>
-                    </a:p>
-                  </a:txBody>
-                  <a:tcPr marL="36000" marR="36000" marT="18000" marB="18000">
-                    <a:solidFill>
-                      <a:srgbClr val="0F9ED5"/>
-                    </a:solidFill>
-                  </a:tcPr>
-                </a:tc>
-                <a:tc>
-                  <a:txBody>
-                    <a:bodyPr wrap="square"/>
-                    <a:lstStyle/>
-                    <a:p>
-                      <a:pPr algn="ctr"/>
-                      <a:r>
-                        <a:rPr sz="800" b="1">
-                          <a:solidFill>
-                            <a:srgbClr val="FFFFFF"/>
-                          </a:solidFill>
-                          <a:ea typeface="Meiryo UI"/>
-                          <a:latin typeface="Meiryo UI"/>
-                        </a:rPr>
-                        <a:t>R元</a:t>
-                      </a:r>
-                    </a:p>
-                  </a:txBody>
-                  <a:tcPr marL="36000" marR="36000" marT="18000" marB="18000">
-                    <a:solidFill>
-                      <a:srgbClr val="0F9ED5"/>
-                    </a:solidFill>
-                  </a:tcPr>
-                </a:tc>
-                <a:tc>
-                  <a:txBody>
-                    <a:bodyPr wrap="square"/>
-                    <a:lstStyle/>
-                    <a:p>
-                      <a:pPr algn="ctr"/>
-                      <a:r>
-                        <a:rPr sz="800" b="1">
-                          <a:solidFill>
-                            <a:srgbClr val="FFFFFF"/>
-                          </a:solidFill>
-                          <a:ea typeface="Meiryo UI"/>
-                          <a:latin typeface="Meiryo UI"/>
-                        </a:rPr>
-                        <a:t>R2</a:t>
-                      </a:r>
-                    </a:p>
-                  </a:txBody>
-                  <a:tcPr marL="36000" marR="36000" marT="18000" marB="18000">
-                    <a:solidFill>
-                      <a:srgbClr val="0F9ED5"/>
-                    </a:solidFill>
-                  </a:tcPr>
-                </a:tc>
-                <a:tc>
-                  <a:txBody>
-                    <a:bodyPr wrap="square"/>
-                    <a:lstStyle/>
-                    <a:p>
-                      <a:pPr algn="ctr"/>
-                      <a:r>
-                        <a:rPr sz="800" b="1">
-                          <a:solidFill>
-                            <a:srgbClr val="FFFFFF"/>
-                          </a:solidFill>
-                          <a:ea typeface="Meiryo UI"/>
-                          <a:latin typeface="Meiryo UI"/>
-                        </a:rPr>
-                        <a:t>R3</a:t>
-                      </a:r>
-                    </a:p>
-                  </a:txBody>
-                  <a:tcPr marL="36000" marR="36000" marT="18000" marB="18000">
-                    <a:solidFill>
-                      <a:srgbClr val="0F9ED5"/>
-                    </a:solidFill>
-                  </a:tcPr>
-                </a:tc>
-                <a:tc>
-                  <a:txBody>
-                    <a:bodyPr wrap="square"/>
-                    <a:lstStyle/>
-                    <a:p>
-                      <a:pPr algn="ctr"/>
-                      <a:r>
-                        <a:rPr sz="800" b="1">
-                          <a:solidFill>
-                            <a:srgbClr val="FFFFFF"/>
-                          </a:solidFill>
-                          <a:ea typeface="Meiryo UI"/>
-                          <a:latin typeface="Meiryo UI"/>
-                        </a:rPr>
-                        <a:t>R4</a:t>
-                      </a:r>
-                    </a:p>
-                  </a:txBody>
-                  <a:tcPr marL="36000" marR="36000" marT="18000" marB="18000">
-                    <a:solidFill>
-                      <a:srgbClr val="0F9ED5"/>
-                    </a:solidFill>
-                  </a:tcPr>
-                </a:tc>
-                <a:tc>
-                  <a:txBody>
-                    <a:bodyPr wrap="square"/>
-                    <a:lstStyle/>
-                    <a:p>
-                      <a:pPr algn="ctr"/>
-                      <a:r>
-                        <a:rPr sz="800" b="1">
-                          <a:solidFill>
-                            <a:srgbClr val="FFFFFF"/>
-                          </a:solidFill>
-                          <a:ea typeface="Meiryo UI"/>
-                          <a:latin typeface="Meiryo UI"/>
-                        </a:rPr>
-                        <a:t>R5</a:t>
-                      </a:r>
-                    </a:p>
-                  </a:txBody>
-                  <a:tcPr marL="36000" marR="36000" marT="18000" marB="18000">
-                    <a:solidFill>
-                      <a:srgbClr val="0F9ED5"/>
-                    </a:solidFill>
-                  </a:tcPr>
-                </a:tc>
-              </a:tr>
-              <a:tr h="183333">
-                <a:tc>
-                  <a:txBody>
-                    <a:bodyPr wrap="square"/>
-                    <a:lstStyle/>
-                    <a:p>
-                      <a:pPr algn="ctr"/>
-                      <a:r>
-                        <a:rPr sz="700" b="1">
-                          <a:solidFill>
-                            <a:srgbClr val="404040"/>
-                          </a:solidFill>
-                          <a:ea typeface="Meiryo UI"/>
-                          <a:latin typeface="Meiryo UI"/>
-                        </a:rPr>
-                        <a:t>桜・小</a:t>
-                      </a:r>
-                    </a:p>
-                  </a:txBody>
-                  <a:tcPr marL="36000" marR="36000" marT="18000" marB="18000">
-                    <a:solidFill>
-                      <a:srgbClr val="E8F7F9"/>
-                    </a:solidFill>
-                  </a:tcPr>
-                </a:tc>
-                <a:tc>
-                  <a:txBody>
-                    <a:bodyPr wrap="square"/>
-                    <a:lstStyle/>
-                    <a:p>
-                      <a:pPr algn="ctr"/>
-                      <a:r>
-                        <a:rPr sz="700" b="0">
-                          <a:solidFill>
-                            <a:srgbClr val="404040"/>
-                          </a:solidFill>
-                          <a:ea typeface="Meiryo UI"/>
-                          <a:latin typeface="Meiryo UI"/>
-                        </a:rPr>
-                        <a:t>1.32</a:t>
-                      </a:r>
-                    </a:p>
-                  </a:txBody>
-                  <a:tcPr marL="36000" marR="36000" marT="18000" marB="18000">
-                    <a:solidFill>
-                      <a:srgbClr val="FFFFFF"/>
-                    </a:solidFill>
-                  </a:tcPr>
-                </a:tc>
-                <a:tc>
-                  <a:txBody>
-                    <a:bodyPr wrap="square"/>
-                    <a:lstStyle/>
-                    <a:p>
-                      <a:pPr algn="ctr"/>
-                      <a:r>
-                        <a:rPr sz="700" b="0">
-                          <a:solidFill>
-                            <a:srgbClr val="404040"/>
-                          </a:solidFill>
-                          <a:ea typeface="Meiryo UI"/>
-                          <a:latin typeface="Meiryo UI"/>
-                        </a:rPr>
-                        <a:t>0.22</a:t>
-                      </a:r>
-                    </a:p>
-                  </a:txBody>
-                  <a:tcPr marL="36000" marR="36000" marT="18000" marB="18000">
-                    <a:solidFill>
-                      <a:srgbClr val="FFFFFF"/>
-                    </a:solidFill>
-                  </a:tcPr>
-                </a:tc>
-                <a:tc>
-                  <a:txBody>
-                    <a:bodyPr wrap="square"/>
-                    <a:lstStyle/>
-                    <a:p>
-                      <a:pPr algn="ctr"/>
-                      <a:r>
-                        <a:rPr sz="700" b="0">
-                          <a:solidFill>
-                            <a:srgbClr val="404040"/>
-                          </a:solidFill>
-                          <a:ea typeface="Meiryo UI"/>
-                          <a:latin typeface="Meiryo UI"/>
-                        </a:rPr>
-                        <a:t>0.68</a:t>
-                      </a:r>
-                    </a:p>
-                  </a:txBody>
-                  <a:tcPr marL="36000" marR="36000" marT="18000" marB="18000">
-                    <a:solidFill>
-                      <a:srgbClr val="FFFFFF"/>
-                    </a:solidFill>
-                  </a:tcPr>
-                </a:tc>
-                <a:tc>
-                  <a:txBody>
-                    <a:bodyPr wrap="square"/>
-                    <a:lstStyle/>
-                    <a:p>
-                      <a:pPr algn="ctr"/>
-                      <a:r>
-                        <a:rPr sz="700" b="0">
-                          <a:solidFill>
-                            <a:srgbClr val="404040"/>
-                          </a:solidFill>
-                          <a:ea typeface="Meiryo UI"/>
-                          <a:latin typeface="Meiryo UI"/>
-                        </a:rPr>
-                        <a:t>0.24</a:t>
-                      </a:r>
-                    </a:p>
-                  </a:txBody>
-                  <a:tcPr marL="36000" marR="36000" marT="18000" marB="18000">
-                    <a:solidFill>
-                      <a:srgbClr val="FFFFFF"/>
-                    </a:solidFill>
-                  </a:tcPr>
-                </a:tc>
-                <a:tc>
-                  <a:txBody>
-                    <a:bodyPr wrap="square"/>
-                    <a:lstStyle/>
-                    <a:p>
-                      <a:pPr algn="ctr"/>
-                      <a:r>
-                        <a:rPr sz="700" b="0">
-                          <a:solidFill>
-                            <a:srgbClr val="404040"/>
-                          </a:solidFill>
-                          <a:ea typeface="Meiryo UI"/>
-                          <a:latin typeface="Meiryo UI"/>
-                        </a:rPr>
-                        <a:t>0.99</a:t>
-                      </a:r>
-                    </a:p>
-                  </a:txBody>
-                  <a:tcPr marL="36000" marR="36000" marT="18000" marB="18000">
-                    <a:solidFill>
-                      <a:srgbClr val="FFFFFF"/>
-                    </a:solidFill>
-                  </a:tcPr>
-                </a:tc>
-                <a:tc>
-                  <a:txBody>
-                    <a:bodyPr wrap="square"/>
-                    <a:lstStyle/>
-                    <a:p>
-                      <a:pPr algn="ctr"/>
-                      <a:r>
-                        <a:rPr sz="700" b="0">
-                          <a:solidFill>
-                            <a:srgbClr val="404040"/>
-                          </a:solidFill>
-                          <a:ea typeface="Meiryo UI"/>
-                          <a:latin typeface="Meiryo UI"/>
-                        </a:rPr>
-                        <a:t>1.28</a:t>
-                      </a:r>
-                    </a:p>
-                  </a:txBody>
-                  <a:tcPr marL="36000" marR="36000" marT="18000" marB="18000">
-                    <a:solidFill>
-                      <a:srgbClr val="FFFFFF"/>
-                    </a:solidFill>
-                  </a:tcPr>
-                </a:tc>
-                <a:tc>
-                  <a:txBody>
-                    <a:bodyPr wrap="square"/>
-                    <a:lstStyle/>
-                    <a:p>
-                      <a:pPr algn="ctr"/>
-                      <a:r>
-                        <a:rPr sz="700" b="0">
-                          <a:solidFill>
-                            <a:srgbClr val="404040"/>
-                          </a:solidFill>
-                          <a:ea typeface="Meiryo UI"/>
-                          <a:latin typeface="Meiryo UI"/>
-                        </a:rPr>
-                        <a:t>2.77</a:t>
-                      </a:r>
-                    </a:p>
-                  </a:txBody>
-                  <a:tcPr marL="36000" marR="36000" marT="18000" marB="18000">
-                    <a:solidFill>
-                      <a:srgbClr val="FFFFFF"/>
-                    </a:solidFill>
-                  </a:tcPr>
-                </a:tc>
-                <a:tc>
-                  <a:txBody>
-                    <a:bodyPr wrap="square"/>
-                    <a:lstStyle/>
-                    <a:p>
-                      <a:pPr algn="ctr"/>
-                      <a:r>
-                        <a:rPr sz="700" b="0">
-                          <a:solidFill>
-                            <a:srgbClr val="404040"/>
-                          </a:solidFill>
-                          <a:ea typeface="Meiryo UI"/>
-                          <a:latin typeface="Meiryo UI"/>
-                        </a:rPr>
-                        <a:t>2.02</a:t>
-                      </a:r>
-                    </a:p>
-                  </a:txBody>
-                  <a:tcPr marL="36000" marR="36000" marT="18000" marB="18000">
-                    <a:solidFill>
-                      <a:srgbClr val="FFFFFF"/>
-                    </a:solidFill>
-                  </a:tcPr>
-                </a:tc>
-              </a:tr>
-              <a:tr h="183333">
-                <a:tc>
-                  <a:txBody>
-                    <a:bodyPr wrap="square"/>
-                    <a:lstStyle/>
-                    <a:p>
-                      <a:pPr algn="ctr"/>
-                      <a:r>
-                        <a:rPr sz="700" b="1">
-                          <a:solidFill>
-                            <a:srgbClr val="404040"/>
-                          </a:solidFill>
-                          <a:ea typeface="Meiryo UI"/>
-                          <a:latin typeface="Meiryo UI"/>
-                        </a:rPr>
-                        <a:t>区(小)</a:t>
-                      </a:r>
-                    </a:p>
-                  </a:txBody>
-                  <a:tcPr marL="36000" marR="36000" marT="18000" marB="18000">
-                    <a:solidFill>
-                      <a:srgbClr val="E8F7F9"/>
-                    </a:solidFill>
-                  </a:tcPr>
-                </a:tc>
-                <a:tc>
-                  <a:txBody>
-                    <a:bodyPr wrap="square"/>
-                    <a:lstStyle/>
-                    <a:p>
-                      <a:pPr algn="ctr"/>
-                      <a:r>
-                        <a:rPr sz="700" b="0">
-                          <a:solidFill>
-                            <a:srgbClr val="404040"/>
-                          </a:solidFill>
-                          <a:ea typeface="Meiryo UI"/>
-                          <a:latin typeface="Meiryo UI"/>
-                        </a:rPr>
-                        <a:t>0.68</a:t>
-                      </a:r>
-                    </a:p>
-                  </a:txBody>
-                  <a:tcPr marL="36000" marR="36000" marT="18000" marB="18000">
-                    <a:solidFill>
-                      <a:srgbClr val="FFFFFF"/>
-                    </a:solidFill>
-                  </a:tcPr>
-                </a:tc>
-                <a:tc>
-                  <a:txBody>
-                    <a:bodyPr wrap="square"/>
-                    <a:lstStyle/>
-                    <a:p>
-                      <a:pPr algn="ctr"/>
-                      <a:r>
-                        <a:rPr sz="700" b="0">
-                          <a:solidFill>
-                            <a:srgbClr val="404040"/>
-                          </a:solidFill>
-                          <a:ea typeface="Meiryo UI"/>
-                          <a:latin typeface="Meiryo UI"/>
-                        </a:rPr>
-                        <a:t>0.61</a:t>
-                      </a:r>
-                    </a:p>
-                  </a:txBody>
-                  <a:tcPr marL="36000" marR="36000" marT="18000" marB="18000">
-                    <a:solidFill>
-                      <a:srgbClr val="FFFFFF"/>
-                    </a:solidFill>
-                  </a:tcPr>
-                </a:tc>
-                <a:tc>
-                  <a:txBody>
-                    <a:bodyPr wrap="square"/>
-                    <a:lstStyle/>
-                    <a:p>
-                      <a:pPr algn="ctr"/>
-                      <a:r>
-                        <a:rPr sz="700" b="0">
-                          <a:solidFill>
-                            <a:srgbClr val="404040"/>
-                          </a:solidFill>
-                          <a:ea typeface="Meiryo UI"/>
-                          <a:latin typeface="Meiryo UI"/>
-                        </a:rPr>
-                        <a:t>0.82</a:t>
-                      </a:r>
-                    </a:p>
-                  </a:txBody>
-                  <a:tcPr marL="36000" marR="36000" marT="18000" marB="18000">
-                    <a:solidFill>
-                      <a:srgbClr val="FFFFFF"/>
-                    </a:solidFill>
-                  </a:tcPr>
-                </a:tc>
-                <a:tc>
-                  <a:txBody>
-                    <a:bodyPr wrap="square"/>
-                    <a:lstStyle/>
-                    <a:p>
-                      <a:pPr algn="ctr"/>
-                      <a:r>
-                        <a:rPr sz="700" b="0">
-                          <a:solidFill>
-                            <a:srgbClr val="404040"/>
-                          </a:solidFill>
-                          <a:ea typeface="Meiryo UI"/>
-                          <a:latin typeface="Meiryo UI"/>
-                        </a:rPr>
-                        <a:t>1.00</a:t>
-                      </a:r>
-                    </a:p>
-                  </a:txBody>
-                  <a:tcPr marL="36000" marR="36000" marT="18000" marB="18000">
-                    <a:solidFill>
-                      <a:srgbClr val="FFFFFF"/>
-                    </a:solidFill>
-                  </a:tcPr>
-                </a:tc>
-                <a:tc>
-                  <a:txBody>
-                    <a:bodyPr wrap="square"/>
-                    <a:lstStyle/>
-                    <a:p>
-                      <a:pPr algn="ctr"/>
-                      <a:r>
-                        <a:rPr sz="700" b="0">
-                          <a:solidFill>
-                            <a:srgbClr val="404040"/>
-                          </a:solidFill>
-                          <a:ea typeface="Meiryo UI"/>
-                          <a:latin typeface="Meiryo UI"/>
-                        </a:rPr>
-                        <a:t>1.12</a:t>
-                      </a:r>
-                    </a:p>
-                  </a:txBody>
-                  <a:tcPr marL="36000" marR="36000" marT="18000" marB="18000">
-                    <a:solidFill>
-                      <a:srgbClr val="FFFFFF"/>
-                    </a:solidFill>
-                  </a:tcPr>
-                </a:tc>
-                <a:tc>
-                  <a:txBody>
-                    <a:bodyPr wrap="square"/>
-                    <a:lstStyle/>
-                    <a:p>
-                      <a:pPr algn="ctr"/>
-                      <a:r>
-                        <a:rPr sz="700" b="0">
-                          <a:solidFill>
-                            <a:srgbClr val="404040"/>
-                          </a:solidFill>
-                          <a:ea typeface="Meiryo UI"/>
-                          <a:latin typeface="Meiryo UI"/>
-                        </a:rPr>
-                        <a:t>1.31</a:t>
-                      </a:r>
-                    </a:p>
-                  </a:txBody>
-                  <a:tcPr marL="36000" marR="36000" marT="18000" marB="18000">
-                    <a:solidFill>
-                      <a:srgbClr val="FFFFFF"/>
-                    </a:solidFill>
-                  </a:tcPr>
-                </a:tc>
-                <a:tc>
-                  <a:txBody>
-                    <a:bodyPr wrap="square"/>
-                    <a:lstStyle/>
-                    <a:p>
-                      <a:pPr algn="ctr"/>
-                      <a:r>
-                        <a:rPr sz="700" b="0">
-                          <a:solidFill>
-                            <a:srgbClr val="404040"/>
-                          </a:solidFill>
-                          <a:ea typeface="Meiryo UI"/>
-                          <a:latin typeface="Meiryo UI"/>
-                        </a:rPr>
-                        <a:t>1.67</a:t>
-                      </a:r>
-                    </a:p>
-                  </a:txBody>
-                  <a:tcPr marL="36000" marR="36000" marT="18000" marB="18000">
-                    <a:solidFill>
-                      <a:srgbClr val="FFFFFF"/>
-                    </a:solidFill>
-                  </a:tcPr>
-                </a:tc>
-                <a:tc>
-                  <a:txBody>
-                    <a:bodyPr wrap="square"/>
-                    <a:lstStyle/>
-                    <a:p>
-                      <a:pPr algn="ctr"/>
-                      <a:r>
-                        <a:rPr sz="700" b="0">
-                          <a:solidFill>
-                            <a:srgbClr val="404040"/>
-                          </a:solidFill>
-                          <a:ea typeface="Meiryo UI"/>
-                          <a:latin typeface="Meiryo UI"/>
-                        </a:rPr>
-                        <a:t>2.14</a:t>
-                      </a:r>
-                    </a:p>
-                  </a:txBody>
-                  <a:tcPr marL="36000" marR="36000" marT="18000" marB="18000">
-                    <a:solidFill>
-                      <a:srgbClr val="FFFFFF"/>
-                    </a:solidFill>
-                  </a:tcPr>
-                </a:tc>
-              </a:tr>
-              <a:tr h="183333">
-                <a:tc>
-                  <a:txBody>
-                    <a:bodyPr wrap="square"/>
-                    <a:lstStyle/>
-                    <a:p>
-                      <a:pPr algn="ctr"/>
-                      <a:r>
-                        <a:rPr sz="700" b="1">
-                          <a:solidFill>
-                            <a:srgbClr val="404040"/>
-                          </a:solidFill>
-                          <a:ea typeface="Meiryo UI"/>
-                          <a:latin typeface="Meiryo UI"/>
-                        </a:rPr>
-                        <a:t>桜・中</a:t>
-                      </a:r>
-                    </a:p>
-                  </a:txBody>
-                  <a:tcPr marL="36000" marR="36000" marT="18000" marB="18000">
-                    <a:solidFill>
-                      <a:srgbClr val="E8F7F9"/>
-                    </a:solidFill>
-                  </a:tcPr>
-                </a:tc>
-                <a:tc>
-                  <a:txBody>
-                    <a:bodyPr wrap="square"/>
-                    <a:lstStyle/>
-                    <a:p>
-                      <a:pPr algn="ctr"/>
-                      <a:r>
-                        <a:rPr sz="700" b="0">
-                          <a:solidFill>
-                            <a:srgbClr val="404040"/>
-                          </a:solidFill>
-                          <a:ea typeface="Meiryo UI"/>
-                          <a:latin typeface="Meiryo UI"/>
-                        </a:rPr>
-                        <a:t>3.38</a:t>
-                      </a:r>
-                    </a:p>
-                  </a:txBody>
-                  <a:tcPr marL="36000" marR="36000" marT="18000" marB="18000">
-                    <a:solidFill>
-                      <a:srgbClr val="FFFFFF"/>
-                    </a:solidFill>
-                  </a:tcPr>
-                </a:tc>
-                <a:tc>
-                  <a:txBody>
-                    <a:bodyPr wrap="square"/>
-                    <a:lstStyle/>
-                    <a:p>
-                      <a:pPr algn="ctr"/>
-                      <a:r>
-                        <a:rPr sz="700" b="0">
-                          <a:solidFill>
-                            <a:srgbClr val="404040"/>
-                          </a:solidFill>
-                          <a:ea typeface="Meiryo UI"/>
-                          <a:latin typeface="Meiryo UI"/>
-                        </a:rPr>
-                        <a:t>5.13</a:t>
-                      </a:r>
-                    </a:p>
-                  </a:txBody>
-                  <a:tcPr marL="36000" marR="36000" marT="18000" marB="18000">
-                    <a:solidFill>
-                      <a:srgbClr val="FFFFFF"/>
-                    </a:solidFill>
-                  </a:tcPr>
-                </a:tc>
-                <a:tc>
-                  <a:txBody>
-                    <a:bodyPr wrap="square"/>
-                    <a:lstStyle/>
-                    <a:p>
-                      <a:pPr algn="ctr"/>
-                      <a:r>
-                        <a:rPr sz="700" b="0">
-                          <a:solidFill>
-                            <a:srgbClr val="404040"/>
-                          </a:solidFill>
-                          <a:ea typeface="Meiryo UI"/>
-                          <a:latin typeface="Meiryo UI"/>
-                        </a:rPr>
-                        <a:t>5.93</a:t>
-                      </a:r>
-                    </a:p>
-                  </a:txBody>
-                  <a:tcPr marL="36000" marR="36000" marT="18000" marB="18000">
-                    <a:solidFill>
-                      <a:srgbClr val="FFFFFF"/>
-                    </a:solidFill>
-                  </a:tcPr>
-                </a:tc>
-                <a:tc>
-                  <a:txBody>
-                    <a:bodyPr wrap="square"/>
-                    <a:lstStyle/>
-                    <a:p>
-                      <a:pPr algn="ctr"/>
-                      <a:r>
-                        <a:rPr sz="700" b="0">
-                          <a:solidFill>
-                            <a:srgbClr val="404040"/>
-                          </a:solidFill>
-                          <a:ea typeface="Meiryo UI"/>
-                          <a:latin typeface="Meiryo UI"/>
-                        </a:rPr>
-                        <a:t>3.52</a:t>
-                      </a:r>
-                    </a:p>
-                  </a:txBody>
-                  <a:tcPr marL="36000" marR="36000" marT="18000" marB="18000">
-                    <a:solidFill>
-                      <a:srgbClr val="FFFFFF"/>
-                    </a:solidFill>
-                  </a:tcPr>
-                </a:tc>
-                <a:tc>
-                  <a:txBody>
-                    <a:bodyPr wrap="square"/>
-                    <a:lstStyle/>
-                    <a:p>
-                      <a:pPr algn="ctr"/>
-                      <a:r>
-                        <a:rPr sz="700" b="0">
-                          <a:solidFill>
-                            <a:srgbClr val="404040"/>
-                          </a:solidFill>
-                          <a:ea typeface="Meiryo UI"/>
-                          <a:latin typeface="Meiryo UI"/>
-                        </a:rPr>
-                        <a:t>5.63</a:t>
-                      </a:r>
-                    </a:p>
-                  </a:txBody>
-                  <a:tcPr marL="36000" marR="36000" marT="18000" marB="18000">
-                    <a:solidFill>
-                      <a:srgbClr val="FFFFFF"/>
-                    </a:solidFill>
-                  </a:tcPr>
-                </a:tc>
-                <a:tc>
-                  <a:txBody>
-                    <a:bodyPr wrap="square"/>
-                    <a:lstStyle/>
-                    <a:p>
-                      <a:pPr algn="ctr"/>
-                      <a:r>
-                        <a:rPr sz="700" b="1">
-                          <a:solidFill>
-                            <a:srgbClr val="C00000"/>
-                          </a:solidFill>
-                          <a:ea typeface="Meiryo UI"/>
-                          <a:latin typeface="Meiryo UI"/>
-                        </a:rPr>
-                        <a:t>10.50</a:t>
-                      </a:r>
-                    </a:p>
-                  </a:txBody>
-                  <a:tcPr marL="36000" marR="36000" marT="18000" marB="18000">
-                    <a:solidFill>
-                      <a:srgbClr val="FFFBC1"/>
-                    </a:solidFill>
-                  </a:tcPr>
-                </a:tc>
-                <a:tc>
-                  <a:txBody>
-                    <a:bodyPr wrap="square"/>
-                    <a:lstStyle/>
-                    <a:p>
-                      <a:pPr algn="ctr"/>
-                      <a:r>
-                        <a:rPr sz="700" b="1">
-                          <a:solidFill>
-                            <a:srgbClr val="C00000"/>
-                          </a:solidFill>
-                          <a:ea typeface="Meiryo UI"/>
-                          <a:latin typeface="Meiryo UI"/>
-                        </a:rPr>
-                        <a:t>11.11</a:t>
-                      </a:r>
-                    </a:p>
-                  </a:txBody>
-                  <a:tcPr marL="36000" marR="36000" marT="18000" marB="18000">
-                    <a:solidFill>
-                      <a:srgbClr val="FFFBC1"/>
-                    </a:solidFill>
-                  </a:tcPr>
-                </a:tc>
-                <a:tc>
-                  <a:txBody>
-                    <a:bodyPr wrap="square"/>
-                    <a:lstStyle/>
-                    <a:p>
-                      <a:pPr algn="ctr"/>
-                      <a:r>
-                        <a:rPr sz="700" b="1">
-                          <a:solidFill>
-                            <a:srgbClr val="C00000"/>
-                          </a:solidFill>
-                          <a:ea typeface="Meiryo UI"/>
-                          <a:latin typeface="Meiryo UI"/>
-                        </a:rPr>
-                        <a:t>10.40</a:t>
-                      </a:r>
-                    </a:p>
-                  </a:txBody>
-                  <a:tcPr marL="36000" marR="36000" marT="18000" marB="18000">
-                    <a:solidFill>
-                      <a:srgbClr val="FFFBC1"/>
-                    </a:solidFill>
-                  </a:tcPr>
-                </a:tc>
-              </a:tr>
-              <a:tr h="183333">
-                <a:tc>
-                  <a:txBody>
-                    <a:bodyPr wrap="square"/>
-                    <a:lstStyle/>
-                    <a:p>
-                      <a:pPr algn="ctr"/>
-                      <a:r>
-                        <a:rPr sz="700" b="1">
-                          <a:solidFill>
-                            <a:srgbClr val="404040"/>
-                          </a:solidFill>
-                          <a:ea typeface="Meiryo UI"/>
-                          <a:latin typeface="Meiryo UI"/>
-                        </a:rPr>
-                        <a:t>区(中)</a:t>
-                      </a:r>
-                    </a:p>
-                  </a:txBody>
-                  <a:tcPr marL="36000" marR="36000" marT="18000" marB="18000">
-                    <a:solidFill>
-                      <a:srgbClr val="E8F7F9"/>
-                    </a:solidFill>
-                  </a:tcPr>
-                </a:tc>
-                <a:tc>
-                  <a:txBody>
-                    <a:bodyPr wrap="square"/>
-                    <a:lstStyle/>
-                    <a:p>
-                      <a:pPr algn="ctr"/>
-                      <a:r>
-                        <a:rPr sz="700" b="0">
-                          <a:solidFill>
-                            <a:srgbClr val="404040"/>
-                          </a:solidFill>
-                          <a:ea typeface="Meiryo UI"/>
-                          <a:latin typeface="Meiryo UI"/>
-                        </a:rPr>
-                        <a:t>3.42</a:t>
-                      </a:r>
-                    </a:p>
-                  </a:txBody>
-                  <a:tcPr marL="36000" marR="36000" marT="18000" marB="18000">
-                    <a:solidFill>
-                      <a:srgbClr val="FFFFFF"/>
-                    </a:solidFill>
-                  </a:tcPr>
-                </a:tc>
-                <a:tc>
-                  <a:txBody>
-                    <a:bodyPr wrap="square"/>
-                    <a:lstStyle/>
-                    <a:p>
-                      <a:pPr algn="ctr"/>
-                      <a:r>
-                        <a:rPr sz="700" b="0">
-                          <a:solidFill>
-                            <a:srgbClr val="404040"/>
-                          </a:solidFill>
-                          <a:ea typeface="Meiryo UI"/>
-                          <a:latin typeface="Meiryo UI"/>
-                        </a:rPr>
-                        <a:t>3.20</a:t>
-                      </a:r>
-                    </a:p>
-                  </a:txBody>
-                  <a:tcPr marL="36000" marR="36000" marT="18000" marB="18000">
-                    <a:solidFill>
-                      <a:srgbClr val="FFFFFF"/>
-                    </a:solidFill>
-                  </a:tcPr>
-                </a:tc>
-                <a:tc>
-                  <a:txBody>
-                    <a:bodyPr wrap="square"/>
-                    <a:lstStyle/>
-                    <a:p>
-                      <a:pPr algn="ctr"/>
-                      <a:r>
-                        <a:rPr sz="700" b="0">
-                          <a:solidFill>
-                            <a:srgbClr val="404040"/>
-                          </a:solidFill>
-                          <a:ea typeface="Meiryo UI"/>
-                          <a:latin typeface="Meiryo UI"/>
-                        </a:rPr>
-                        <a:t>3.26</a:t>
-                      </a:r>
-                    </a:p>
-                  </a:txBody>
-                  <a:tcPr marL="36000" marR="36000" marT="18000" marB="18000">
-                    <a:solidFill>
-                      <a:srgbClr val="FFFFFF"/>
-                    </a:solidFill>
-                  </a:tcPr>
-                </a:tc>
-                <a:tc>
-                  <a:txBody>
-                    <a:bodyPr wrap="square"/>
-                    <a:lstStyle/>
-                    <a:p>
-                      <a:pPr algn="ctr"/>
-                      <a:r>
-                        <a:rPr sz="700" b="0">
-                          <a:solidFill>
-                            <a:srgbClr val="404040"/>
-                          </a:solidFill>
-                          <a:ea typeface="Meiryo UI"/>
-                          <a:latin typeface="Meiryo UI"/>
-                        </a:rPr>
-                        <a:t>4.35</a:t>
-                      </a:r>
-                    </a:p>
-                  </a:txBody>
-                  <a:tcPr marL="36000" marR="36000" marT="18000" marB="18000">
-                    <a:solidFill>
-                      <a:srgbClr val="FFFFFF"/>
-                    </a:solidFill>
-                  </a:tcPr>
-                </a:tc>
-                <a:tc>
-                  <a:txBody>
-                    <a:bodyPr wrap="square"/>
-                    <a:lstStyle/>
-                    <a:p>
-                      <a:pPr algn="ctr"/>
-                      <a:r>
-                        <a:rPr sz="700" b="0">
-                          <a:solidFill>
-                            <a:srgbClr val="404040"/>
-                          </a:solidFill>
-                          <a:ea typeface="Meiryo UI"/>
-                          <a:latin typeface="Meiryo UI"/>
-                        </a:rPr>
-                        <a:t>4.80</a:t>
-                      </a:r>
-                    </a:p>
-                  </a:txBody>
-                  <a:tcPr marL="36000" marR="36000" marT="18000" marB="18000">
-                    <a:solidFill>
-                      <a:srgbClr val="FFFFFF"/>
-                    </a:solidFill>
-                  </a:tcPr>
-                </a:tc>
-                <a:tc>
-                  <a:txBody>
-                    <a:bodyPr wrap="square"/>
-                    <a:lstStyle/>
-                    <a:p>
-                      <a:pPr algn="ctr"/>
-                      <a:r>
-                        <a:rPr sz="700" b="0">
-                          <a:solidFill>
-                            <a:srgbClr val="404040"/>
-                          </a:solidFill>
-                          <a:ea typeface="Meiryo UI"/>
-                          <a:latin typeface="Meiryo UI"/>
-                        </a:rPr>
-                        <a:t>5.23</a:t>
-                      </a:r>
-                    </a:p>
-                  </a:txBody>
-                  <a:tcPr marL="36000" marR="36000" marT="18000" marB="18000">
-                    <a:solidFill>
-                      <a:srgbClr val="FFFFFF"/>
-                    </a:solidFill>
-                  </a:tcPr>
-                </a:tc>
-                <a:tc>
-                  <a:txBody>
-                    <a:bodyPr wrap="square"/>
-                    <a:lstStyle/>
-                    <a:p>
-                      <a:pPr algn="ctr"/>
-                      <a:r>
-                        <a:rPr sz="700" b="0">
-                          <a:solidFill>
-                            <a:srgbClr val="404040"/>
-                          </a:solidFill>
-                          <a:ea typeface="Meiryo UI"/>
-                          <a:latin typeface="Meiryo UI"/>
-                        </a:rPr>
-                        <a:t>6.13</a:t>
-                      </a:r>
-                    </a:p>
-                  </a:txBody>
-                  <a:tcPr marL="36000" marR="36000" marT="18000" marB="18000">
-                    <a:solidFill>
-                      <a:srgbClr val="FFFFFF"/>
-                    </a:solidFill>
-                  </a:tcPr>
-                </a:tc>
-                <a:tc>
-                  <a:txBody>
-                    <a:bodyPr wrap="square"/>
-                    <a:lstStyle/>
-                    <a:p>
-                      <a:pPr algn="ctr"/>
-                      <a:r>
-                        <a:rPr sz="700" b="0">
-                          <a:solidFill>
-                            <a:srgbClr val="404040"/>
-                          </a:solidFill>
-                          <a:ea typeface="Meiryo UI"/>
-                          <a:latin typeface="Meiryo UI"/>
-                        </a:rPr>
-                        <a:t>6.90</a:t>
-                      </a:r>
-                    </a:p>
-                  </a:txBody>
-                  <a:tcPr marL="36000" marR="36000" marT="18000" marB="18000">
-                    <a:solidFill>
-                      <a:srgbClr val="FFFFFF"/>
-                    </a:solidFill>
-                  </a:tcPr>
-                </a:tc>
-              </a:tr>
-              <a:tr h="183335">
-                <a:tc>
-                  <a:txBody>
-                    <a:bodyPr wrap="square"/>
-                    <a:lstStyle/>
-                    <a:p>
-                      <a:pPr algn="ctr"/>
-                      <a:r>
-                        <a:rPr sz="700" b="1">
-                          <a:solidFill>
-                            <a:srgbClr val="404040"/>
-                          </a:solidFill>
-                          <a:ea typeface="Meiryo UI"/>
-                          <a:latin typeface="Meiryo UI"/>
-                        </a:rPr>
-                        <a:t>都(中)</a:t>
-                      </a:r>
-                    </a:p>
-                  </a:txBody>
-                  <a:tcPr marL="36000" marR="36000" marT="18000" marB="18000">
-                    <a:solidFill>
-                      <a:srgbClr val="E8F7F9"/>
-                    </a:solidFill>
-                  </a:tcPr>
-                </a:tc>
-                <a:tc>
-                  <a:txBody>
-                    <a:bodyPr wrap="square"/>
-                    <a:lstStyle/>
-                    <a:p>
-                      <a:pPr algn="ctr"/>
-                      <a:r>
-                        <a:rPr sz="700" b="0">
-                          <a:solidFill>
-                            <a:srgbClr val="404040"/>
-                          </a:solidFill>
-                          <a:ea typeface="Meiryo UI"/>
-                          <a:latin typeface="Meiryo UI"/>
-                        </a:rPr>
-                        <a:t>3.6</a:t>
-                      </a:r>
-                    </a:p>
-                  </a:txBody>
-                  <a:tcPr marL="36000" marR="36000" marT="18000" marB="18000">
-                    <a:solidFill>
-                      <a:srgbClr val="FFFFFF"/>
-                    </a:solidFill>
-                  </a:tcPr>
-                </a:tc>
-                <a:tc>
-                  <a:txBody>
-                    <a:bodyPr wrap="square"/>
-                    <a:lstStyle/>
-                    <a:p>
-                      <a:pPr algn="ctr"/>
-                      <a:r>
-                        <a:rPr sz="700" b="0">
-                          <a:solidFill>
-                            <a:srgbClr val="404040"/>
-                          </a:solidFill>
-                          <a:ea typeface="Meiryo UI"/>
-                          <a:latin typeface="Meiryo UI"/>
-                        </a:rPr>
-                        <a:t>3.78</a:t>
-                      </a:r>
-                    </a:p>
-                  </a:txBody>
-                  <a:tcPr marL="36000" marR="36000" marT="18000" marB="18000">
-                    <a:solidFill>
-                      <a:srgbClr val="FFFFFF"/>
-                    </a:solidFill>
-                  </a:tcPr>
-                </a:tc>
-                <a:tc>
-                  <a:txBody>
-                    <a:bodyPr wrap="square"/>
-                    <a:lstStyle/>
-                    <a:p>
-                      <a:pPr algn="ctr"/>
-                      <a:r>
-                        <a:rPr sz="700" b="0">
-                          <a:solidFill>
-                            <a:srgbClr val="404040"/>
-                          </a:solidFill>
-                          <a:ea typeface="Meiryo UI"/>
-                          <a:latin typeface="Meiryo UI"/>
-                        </a:rPr>
-                        <a:t>4.33</a:t>
-                      </a:r>
-                    </a:p>
-                  </a:txBody>
-                  <a:tcPr marL="36000" marR="36000" marT="18000" marB="18000">
-                    <a:solidFill>
-                      <a:srgbClr val="FFFFFF"/>
-                    </a:solidFill>
-                  </a:tcPr>
-                </a:tc>
-                <a:tc>
-                  <a:txBody>
-                    <a:bodyPr wrap="square"/>
-                    <a:lstStyle/>
-                    <a:p>
-                      <a:pPr algn="ctr"/>
-                      <a:r>
-                        <a:rPr sz="700" b="0">
-                          <a:solidFill>
-                            <a:srgbClr val="404040"/>
-                          </a:solidFill>
-                          <a:ea typeface="Meiryo UI"/>
-                          <a:latin typeface="Meiryo UI"/>
-                        </a:rPr>
-                        <a:t>4.76</a:t>
-                      </a:r>
-                    </a:p>
-                  </a:txBody>
-                  <a:tcPr marL="36000" marR="36000" marT="18000" marB="18000">
-                    <a:solidFill>
-                      <a:srgbClr val="FFFFFF"/>
-                    </a:solidFill>
-                  </a:tcPr>
-                </a:tc>
-                <a:tc>
-                  <a:txBody>
-                    <a:bodyPr wrap="square"/>
-                    <a:lstStyle/>
-                    <a:p>
-                      <a:pPr algn="ctr"/>
-                      <a:r>
-                        <a:rPr sz="700" b="0">
-                          <a:solidFill>
-                            <a:srgbClr val="404040"/>
-                          </a:solidFill>
-                          <a:ea typeface="Meiryo UI"/>
-                          <a:latin typeface="Meiryo UI"/>
-                        </a:rPr>
-                        <a:t>4.93</a:t>
-                      </a:r>
-                    </a:p>
-                  </a:txBody>
-                  <a:tcPr marL="36000" marR="36000" marT="18000" marB="18000">
-                    <a:solidFill>
-                      <a:srgbClr val="FFFFFF"/>
-                    </a:solidFill>
-                  </a:tcPr>
-                </a:tc>
-                <a:tc>
-                  <a:txBody>
-                    <a:bodyPr wrap="square"/>
-                    <a:lstStyle/>
-                    <a:p>
-                      <a:pPr algn="ctr"/>
-                      <a:r>
-                        <a:rPr sz="700" b="0">
-                          <a:solidFill>
-                            <a:srgbClr val="404040"/>
-                          </a:solidFill>
-                          <a:ea typeface="Meiryo UI"/>
-                          <a:latin typeface="Meiryo UI"/>
-                        </a:rPr>
-                        <a:t>5.76</a:t>
-                      </a:r>
-                    </a:p>
-                  </a:txBody>
-                  <a:tcPr marL="36000" marR="36000" marT="18000" marB="18000">
-                    <a:solidFill>
-                      <a:srgbClr val="FFFFFF"/>
-                    </a:solidFill>
-                  </a:tcPr>
-                </a:tc>
-                <a:tc>
-                  <a:txBody>
-                    <a:bodyPr wrap="square"/>
-                    <a:lstStyle/>
-                    <a:p>
-                      <a:pPr algn="ctr"/>
-                      <a:r>
-                        <a:rPr sz="700" b="0">
-                          <a:solidFill>
-                            <a:srgbClr val="404040"/>
-                          </a:solidFill>
-                          <a:ea typeface="Meiryo UI"/>
-                          <a:latin typeface="Meiryo UI"/>
-                        </a:rPr>
-                        <a:t>6.85</a:t>
-                      </a:r>
-                    </a:p>
-                  </a:txBody>
-                  <a:tcPr marL="36000" marR="36000" marT="18000" marB="18000">
-                    <a:solidFill>
-                      <a:srgbClr val="FFFFFF"/>
-                    </a:solidFill>
-                  </a:tcPr>
-                </a:tc>
-                <a:tc>
-                  <a:txBody>
-                    <a:bodyPr wrap="square"/>
-                    <a:lstStyle/>
-                    <a:p>
-                      <a:pPr algn="ctr"/>
-                      <a:r>
-                        <a:rPr sz="700" b="0">
-                          <a:solidFill>
-                            <a:srgbClr val="404040"/>
-                          </a:solidFill>
-                          <a:ea typeface="Meiryo UI"/>
-                          <a:latin typeface="Meiryo UI"/>
-                        </a:rPr>
-                        <a:t>7.80</a:t>
-                      </a:r>
-                    </a:p>
-                  </a:txBody>
-                  <a:tcPr marL="36000" marR="36000" marT="18000" marB="18000">
-                    <a:solidFill>
-                      <a:srgbClr val="FFFFFF"/>
-                    </a:solidFill>
-                  </a:tcPr>
-                </a:tc>
-              </a:tr>
-            </a:tbl>
-          </a:graphicData>
-        </a:graphic>
-      </p:graphicFrame>
+        </p:nvSpPr>
+        <p:spPr>
+          <a:xfrm>
+            <a:off x="180000" y="3770000"/>
+            <a:ext cx="2870000" cy="820000"/>
+          </a:xfrm>
+          <a:prstGeom prst="roundRect">
+            <a:avLst/>
+          </a:prstGeom>
+          <a:solidFill>
+            <a:srgbClr val="E9E3F5"/>
+          </a:solidFill>
+          <a:ln w="9525">
+            <a:solidFill>
+              <a:srgbClr val="7030A0"/>
+            </a:solidFill>
+          </a:ln>
+          <a:effectLst/>
+        </p:spPr>
+        <p:style>
+          <a:lnRef idx="1">
+            <a:schemeClr val="accent1"/>
+          </a:lnRef>
+          <a:fillRef idx="3">
+            <a:schemeClr val="accent1"/>
+          </a:fillRef>
+          <a:effectRef idx="2">
+            <a:schemeClr val="accent1"/>
+          </a:effectRef>
+          <a:fontRef idx="minor">
+            <a:schemeClr val="lt1"/>
+          </a:fontRef>
+        </p:style>
+        <p:txBody>
+          <a:bodyPr rtlCol="0" anchor="t" lIns="36000" rIns="36000" tIns="18000" bIns="18000" wrap="square"/>
+          <a:lstStyle/>
+          <a:p>
+            <a:pPr algn="l"/>
+            <a:r>
+              <a:rPr sz="900" b="0">
+                <a:solidFill>
+                  <a:srgbClr val="404040"/>
+                </a:solidFill>
+                <a:ea typeface="Meiryo UI"/>
+                <a:latin typeface="Meiryo UI"/>
+              </a:rPr>
+              <a:t>〈統計学的視点〉</a:t>
+            </a:r>
+          </a:p>
+          <a:p>
+            <a:pPr algn="l"/>
+            <a:r>
+              <a:rPr sz="900" b="0">
+                <a:solidFill>
+                  <a:srgbClr val="404040"/>
+                </a:solidFill>
+                <a:ea typeface="Meiryo UI"/>
+                <a:latin typeface="Meiryo UI"/>
+              </a:rPr>
+              <a:t>● 15年継続データ。サンプル単一校だが、</a:t>
+            </a:r>
+          </a:p>
+          <a:p>
+            <a:pPr algn="l"/>
+            <a:r>
+              <a:rPr sz="900" b="0">
+                <a:solidFill>
+                  <a:srgbClr val="404040"/>
+                </a:solidFill>
+                <a:ea typeface="Meiryo UI"/>
+                <a:latin typeface="Meiryo UI"/>
+              </a:rPr>
+              <a:t>  傾向の偶然性は低い（時系列の一貫性）</a:t>
+            </a:r>
+          </a:p>
+          <a:p>
+            <a:pPr algn="l"/>
+            <a:r>
+              <a:rPr sz="900" b="0">
+                <a:solidFill>
+                  <a:srgbClr val="404040"/>
+                </a:solidFill>
+                <a:ea typeface="Meiryo UI"/>
+                <a:latin typeface="Meiryo UI"/>
+              </a:rPr>
+              <a:t>● 区・都・全国平均との比較で「効果あり」</a:t>
+            </a:r>
+          </a:p>
+          <a:p>
+            <a:pPr algn="l"/>
+            <a:r>
+              <a:rPr sz="900" b="0">
+                <a:solidFill>
+                  <a:srgbClr val="404040"/>
+                </a:solidFill>
+                <a:ea typeface="Meiryo UI"/>
+                <a:latin typeface="Meiryo UI"/>
+              </a:rPr>
+              <a:t>  を示すデータは検出されず</a:t>
+            </a:r>
+          </a:p>
+        </p:txBody>
+      </p:sp>
+      <p:sp>
+        <p:nvSpPr>
+          <p:cNvPr id="16" name="Rounded Rectangle 15"/>
+          <p:cNvSpPr/>
+          <p:nvPr/>
+        </p:nvSpPr>
+        <p:spPr>
+          <a:xfrm>
+            <a:off x="3120000" y="3770000"/>
+            <a:ext cx="2870000" cy="820000"/>
+          </a:xfrm>
+          <a:prstGeom prst="roundRect">
+            <a:avLst/>
+          </a:prstGeom>
+          <a:solidFill>
+            <a:srgbClr val="E9E3F5"/>
+          </a:solidFill>
+          <a:ln w="9525">
+            <a:solidFill>
+              <a:srgbClr val="7030A0"/>
+            </a:solidFill>
+          </a:ln>
+          <a:effectLst/>
+        </p:spPr>
+        <p:style>
+          <a:lnRef idx="1">
+            <a:schemeClr val="accent1"/>
+          </a:lnRef>
+          <a:fillRef idx="3">
+            <a:schemeClr val="accent1"/>
+          </a:fillRef>
+          <a:effectRef idx="2">
+            <a:schemeClr val="accent1"/>
+          </a:effectRef>
+          <a:fontRef idx="minor">
+            <a:schemeClr val="lt1"/>
+          </a:fontRef>
+        </p:style>
+        <p:txBody>
+          <a:bodyPr rtlCol="0" anchor="t" lIns="36000" rIns="36000" tIns="18000" bIns="18000" wrap="square"/>
+          <a:lstStyle/>
+          <a:p>
+            <a:pPr algn="l"/>
+            <a:r>
+              <a:rPr sz="900" b="0">
+                <a:solidFill>
+                  <a:srgbClr val="404040"/>
+                </a:solidFill>
+                <a:ea typeface="Meiryo UI"/>
+                <a:latin typeface="Meiryo UI"/>
+              </a:rPr>
+              <a:t>〈交絡要因の検討〉</a:t>
+            </a:r>
+          </a:p>
+          <a:p>
+            <a:pPr algn="l"/>
+            <a:r>
+              <a:rPr sz="900" b="0">
+                <a:solidFill>
+                  <a:srgbClr val="404040"/>
+                </a:solidFill>
+                <a:ea typeface="Meiryo UI"/>
+                <a:latin typeface="Meiryo UI"/>
+              </a:rPr>
+              <a:t>● 地域特性・家庭背景は区内他校と同等</a:t>
+            </a:r>
+          </a:p>
+          <a:p>
+            <a:pPr algn="l"/>
+            <a:r>
+              <a:rPr sz="900" b="0">
+                <a:solidFill>
+                  <a:srgbClr val="404040"/>
+                </a:solidFill>
+                <a:ea typeface="Meiryo UI"/>
+                <a:latin typeface="Meiryo UI"/>
+              </a:rPr>
+              <a:t>● 教員配置・予算は標準的</a:t>
+            </a:r>
+          </a:p>
+          <a:p>
+            <a:pPr algn="l"/>
+            <a:r>
+              <a:rPr sz="900" b="0">
+                <a:solidFill>
+                  <a:srgbClr val="404040"/>
+                </a:solidFill>
+                <a:ea typeface="Meiryo UI"/>
+                <a:latin typeface="Meiryo UI"/>
+              </a:rPr>
+              <a:t>→ 「一貫教育校化」以外で説明困難な</a:t>
+            </a:r>
+          </a:p>
+          <a:p>
+            <a:pPr algn="l"/>
+            <a:r>
+              <a:rPr sz="900" b="0">
+                <a:solidFill>
+                  <a:srgbClr val="404040"/>
+                </a:solidFill>
+                <a:ea typeface="Meiryo UI"/>
+                <a:latin typeface="Meiryo UI"/>
+              </a:rPr>
+              <a:t>  パフォーマンス低下が観察される</a:t>
+            </a:r>
+          </a:p>
+        </p:txBody>
+      </p:sp>
       <p:sp>
         <p:nvSpPr>
           <p:cNvPr id="17" name="Rounded Rectangle 16"/>
@@ -16610,8 +17096,116 @@
         </p:nvSpPr>
         <p:spPr>
           <a:xfrm>
-            <a:off x="180000" y="4620000"/>
-            <a:ext cx="8780000" cy="420000"/>
+            <a:off x="6060000" y="3770000"/>
+            <a:ext cx="2900000" cy="820000"/>
+          </a:xfrm>
+          <a:prstGeom prst="roundRect">
+            <a:avLst/>
+          </a:prstGeom>
+          <a:solidFill>
+            <a:srgbClr val="E9E3F5"/>
+          </a:solidFill>
+          <a:ln w="9525">
+            <a:solidFill>
+              <a:srgbClr val="7030A0"/>
+            </a:solidFill>
+          </a:ln>
+          <a:effectLst/>
+        </p:spPr>
+        <p:style>
+          <a:lnRef idx="1">
+            <a:schemeClr val="accent1"/>
+          </a:lnRef>
+          <a:fillRef idx="3">
+            <a:schemeClr val="accent1"/>
+          </a:fillRef>
+          <a:effectRef idx="2">
+            <a:schemeClr val="accent1"/>
+          </a:effectRef>
+          <a:fontRef idx="minor">
+            <a:schemeClr val="lt1"/>
+          </a:fontRef>
+        </p:style>
+        <p:txBody>
+          <a:bodyPr rtlCol="0" anchor="t" lIns="36000" rIns="36000" tIns="18000" bIns="18000" wrap="square"/>
+          <a:lstStyle/>
+          <a:p>
+            <a:pPr algn="l"/>
+            <a:r>
+              <a:rPr sz="900" b="0">
+                <a:solidFill>
+                  <a:srgbClr val="404040"/>
+                </a:solidFill>
+                <a:ea typeface="Meiryo UI"/>
+                <a:latin typeface="Meiryo UI"/>
+              </a:rPr>
+              <a:t>〈発達・特別支援の視点〉</a:t>
+            </a:r>
+          </a:p>
+          <a:p>
+            <a:pPr algn="l"/>
+            <a:r>
+              <a:rPr sz="900" b="0">
+                <a:solidFill>
+                  <a:srgbClr val="404040"/>
+                </a:solidFill>
+                <a:ea typeface="Meiryo UI"/>
+                <a:latin typeface="Meiryo UI"/>
+              </a:rPr>
+              <a:t>● 不登校要因の多くは学力不足・</a:t>
+            </a:r>
+          </a:p>
+          <a:p>
+            <a:pPr algn="l"/>
+            <a:r>
+              <a:rPr sz="900" b="0">
+                <a:solidFill>
+                  <a:srgbClr val="404040"/>
+                </a:solidFill>
+                <a:ea typeface="Meiryo UI"/>
+                <a:latin typeface="Meiryo UI"/>
+              </a:rPr>
+              <a:t>  集団不適応・本人の発達特性</a:t>
+            </a:r>
+          </a:p>
+          <a:p>
+            <a:pPr algn="l"/>
+            <a:r>
+              <a:rPr sz="900" b="0">
+                <a:solidFill>
+                  <a:srgbClr val="404040"/>
+                </a:solidFill>
+                <a:ea typeface="Meiryo UI"/>
+                <a:latin typeface="Meiryo UI"/>
+              </a:rPr>
+              <a:t>● 9年間同一校環境が、</a:t>
+            </a:r>
+          </a:p>
+          <a:p>
+            <a:pPr algn="l"/>
+            <a:r>
+              <a:rPr sz="900" b="0">
+                <a:solidFill>
+                  <a:srgbClr val="404040"/>
+                </a:solidFill>
+                <a:ea typeface="Meiryo UI"/>
+                <a:latin typeface="Meiryo UI"/>
+              </a:rPr>
+              <a:t>  「リセット機会」を奪うリスク</a:t>
+            </a:r>
+          </a:p>
+        </p:txBody>
+      </p:sp>
+      <p:sp>
+        <p:nvSpPr>
+          <p:cNvPr id="18" name="Rounded Rectangle 17"/>
+          <p:cNvSpPr/>
+          <p:nvPr/>
+        </p:nvSpPr>
+        <p:spPr>
+          <a:xfrm>
+            <a:off x="180000" y="4660000"/>
+            <a:ext cx="8780000" cy="360000"/>
           </a:xfrm>
           <a:prstGeom prst="roundRect">
             <a:avLst/>
@@ -16644,27 +17238,14 @@
           <a:p>
             <a:pPr algn="ctr"/>
             <a:r>
-              <a:rPr sz="1000" b="1">
+              <a:rPr sz="1100" b="1">
                 <a:solidFill>
                   <a:srgbClr val="FFFFFF"/>
                 </a:solidFill>
                 <a:ea typeface="Meiryo UI"/>
                 <a:latin typeface="Meiryo UI"/>
               </a:rPr>
-              <a:t>主な要因：学力不足、コミュニケーションスキル不足による集団不適応／本人の特性（発達障害・情緒的課題等）の可能性</a:t>
-            </a:r>
-          </a:p>
-          <a:p>
-            <a:pPr algn="ctr"/>
-            <a:r>
-              <a:rPr sz="1000" b="1">
-                <a:solidFill>
-                  <a:srgbClr val="FFFFFF"/>
-                </a:solidFill>
-                <a:ea typeface="Meiryo UI"/>
-                <a:latin typeface="Meiryo UI"/>
-              </a:rPr>
-              <a:t>→ 中学部不登校出現率10.40%（R5）は、東京都平均7.80%・練馬区平均6.90%を大きく上回る</a:t>
+              <a:t>桜学園の中学部不登校率10.40%（R5）は都平均7.80%・区平均6.90%を大きく超過。学力・体力でも一貫校の優位性は確認できない。</a:t>
             </a:r>
           </a:p>
         </p:txBody>
@@ -16729,14 +17310,14 @@
           <a:p>
             <a:pPr algn="l"/>
             <a:r>
-              <a:rPr sz="2200" b="1">
+              <a:rPr sz="2000" b="1">
                 <a:solidFill>
                   <a:srgbClr val="FFFFFF"/>
                 </a:solidFill>
                 <a:ea typeface="Meiryo UI"/>
                 <a:latin typeface="Meiryo UI"/>
               </a:rPr>
-              <a:t>４　結論：新規の小中一貫教育校開設は効果がない</a:t>
+              <a:t>４　結論：新規開設の効果なし／代替施策と費用対効果</a:t>
             </a:r>
           </a:p>
         </p:txBody>
@@ -16840,7 +17421,7 @@
         <p:spPr>
           <a:xfrm>
             <a:off x="180000" y="580000"/>
-            <a:ext cx="8780000" cy="320000"/>
+            <a:ext cx="8780000" cy="280000"/>
           </a:xfrm>
           <a:prstGeom prst="roundRect">
             <a:avLst/>
@@ -16873,14 +17454,14 @@
           <a:p>
             <a:pPr algn="ctr"/>
             <a:r>
-              <a:rPr sz="1300" b="1">
+              <a:rPr sz="1200" b="1">
                 <a:solidFill>
                   <a:srgbClr val="FFFFFF"/>
                 </a:solidFill>
                 <a:ea typeface="Meiryo UI"/>
                 <a:latin typeface="Meiryo UI"/>
               </a:rPr>
-              <a:t>■ 大泉桜学園15年の実績から見る「小中一貫教育校」の効果検証</a:t>
+              <a:t>■ 大泉桜学園15年の実績検証：4つの観点すべてで「効果なし」</a:t>
             </a:r>
           </a:p>
         </p:txBody>
@@ -16893,8 +17474,8 @@
         </p:nvSpPr>
         <p:spPr>
           <a:xfrm>
-            <a:off x="180000" y="950000"/>
-            <a:ext cx="4400000" cy="380000"/>
+            <a:off x="180000" y="900000"/>
+            <a:ext cx="4400000" cy="280000"/>
           </a:xfrm>
           <a:prstGeom prst="roundRect">
             <a:avLst/>
@@ -16927,14 +17508,14 @@
           <a:p>
             <a:pPr algn="ctr"/>
             <a:r>
-              <a:rPr sz="1300" b="1">
+              <a:rPr sz="1100" b="1">
                 <a:solidFill>
                   <a:srgbClr val="FFFFFF"/>
                 </a:solidFill>
                 <a:ea typeface="Meiryo UI"/>
                 <a:latin typeface="Meiryo UI"/>
               </a:rPr>
-              <a:t>① 学力向上効果</a:t>
+              <a:t>① 学力向上効果（教育統計学）</a:t>
             </a:r>
           </a:p>
         </p:txBody>
@@ -16947,8 +17528,8 @@
         </p:nvSpPr>
         <p:spPr>
           <a:xfrm>
-            <a:off x="180000" y="1330000"/>
-            <a:ext cx="4400000" cy="1120000"/>
+            <a:off x="180000" y="1180000"/>
+            <a:ext cx="4400000" cy="820000"/>
           </a:xfrm>
           <a:prstGeom prst="rect">
             <a:avLst/>
@@ -16970,66 +17551,66 @@
           <a:p>
             <a:pPr algn="l"/>
             <a:r>
-              <a:rPr sz="1000" b="0">
+              <a:rPr sz="900" b="0">
                 <a:solidFill>
                   <a:srgbClr val="404040"/>
                 </a:solidFill>
                 <a:ea typeface="Meiryo UI"/>
                 <a:latin typeface="Meiryo UI"/>
               </a:rPr>
-              <a:t>● 学力調査は区・都平均を継続的に下回る項目が多い</a:t>
+              <a:t>● 区・都平均を継続的に下回る項目が多数</a:t>
             </a:r>
           </a:p>
           <a:p>
             <a:pPr algn="l"/>
             <a:r>
-              <a:rPr sz="1000" b="0">
+              <a:rPr sz="900" b="0">
                 <a:solidFill>
                   <a:srgbClr val="404040"/>
                 </a:solidFill>
                 <a:ea typeface="Meiryo UI"/>
                 <a:latin typeface="Meiryo UI"/>
               </a:rPr>
-              <a:t>● R6中学校：国語60(区62)、数学55(区60)</a:t>
+              <a:t>● R6中：国語60(区62)、数学55(区60)</a:t>
             </a:r>
           </a:p>
           <a:p>
             <a:pPr algn="l"/>
             <a:r>
-              <a:rPr sz="1000" b="0">
+              <a:rPr sz="900" b="0">
                 <a:solidFill>
                   <a:srgbClr val="404040"/>
                 </a:solidFill>
                 <a:ea typeface="Meiryo UI"/>
                 <a:latin typeface="Meiryo UI"/>
               </a:rPr>
-              <a:t>● 区内順位：中学校R6=25位（R5=3位から急落）</a:t>
+              <a:t>● 区内順位 中学校R6=25位（R5=3位から急落）</a:t>
             </a:r>
           </a:p>
           <a:p>
             <a:pPr algn="l"/>
             <a:r>
-              <a:rPr sz="1000" b="0">
+              <a:rPr sz="900" b="0">
                 <a:solidFill>
                   <a:srgbClr val="404040"/>
                 </a:solidFill>
                 <a:ea typeface="Meiryo UI"/>
                 <a:latin typeface="Meiryo UI"/>
               </a:rPr>
-              <a:t>● 小学校R6=63位（直近年で最低水準）</a:t>
+              <a:t>● 小学校R6=63位</a:t>
             </a:r>
           </a:p>
           <a:p>
             <a:pPr algn="l"/>
             <a:r>
-              <a:rPr sz="1000" b="0">
+              <a:rPr sz="900" b="0">
                 <a:solidFill>
                   <a:srgbClr val="404040"/>
                 </a:solidFill>
                 <a:ea typeface="Meiryo UI"/>
                 <a:latin typeface="Meiryo UI"/>
               </a:rPr>
-              <a:t>→ 9年間一貫指導でも、学力向上の明確な効果なし</a:t>
+              <a:t>→ 9年間一貫指導の優位性は確認できず</a:t>
             </a:r>
           </a:p>
         </p:txBody>
@@ -17042,8 +17623,8 @@
         </p:nvSpPr>
         <p:spPr>
           <a:xfrm>
-            <a:off x="4750000" y="950000"/>
-            <a:ext cx="4200000" cy="380000"/>
+            <a:off x="4580000" y="900000"/>
+            <a:ext cx="4380000" cy="280000"/>
           </a:xfrm>
           <a:prstGeom prst="roundRect">
             <a:avLst/>
@@ -17076,14 +17657,14 @@
           <a:p>
             <a:pPr algn="ctr"/>
             <a:r>
-              <a:rPr sz="1300" b="1">
+              <a:rPr sz="1100" b="1">
                 <a:solidFill>
                   <a:srgbClr val="FFFFFF"/>
                 </a:solidFill>
                 <a:ea typeface="Meiryo UI"/>
                 <a:latin typeface="Meiryo UI"/>
               </a:rPr>
-              <a:t>② 不登校（中1ギャップ）の解消</a:t>
+              <a:t>② 不登校・中1ギャップ解消（教育心理学）</a:t>
             </a:r>
           </a:p>
         </p:txBody>
@@ -17096,8 +17677,8 @@
         </p:nvSpPr>
         <p:spPr>
           <a:xfrm>
-            <a:off x="4750000" y="1330000"/>
-            <a:ext cx="4200000" cy="1120000"/>
+            <a:off x="4580000" y="1180000"/>
+            <a:ext cx="4380000" cy="820000"/>
           </a:xfrm>
           <a:prstGeom prst="rect">
             <a:avLst/>
@@ -17119,66 +17700,66 @@
           <a:p>
             <a:pPr algn="l"/>
             <a:r>
-              <a:rPr sz="1000" b="0">
+              <a:rPr sz="900" b="0">
                 <a:solidFill>
                   <a:srgbClr val="404040"/>
                 </a:solidFill>
                 <a:ea typeface="Meiryo UI"/>
                 <a:latin typeface="Meiryo UI"/>
               </a:rPr>
-              <a:t>● 中学部不登校率：R5=10.40%（区6.90%・都7.80%）</a:t>
+              <a:t>● 中学部不登校率R5=10.40%（区6.90%、都7.80%）</a:t>
             </a:r>
           </a:p>
           <a:p>
             <a:pPr algn="l"/>
             <a:r>
-              <a:rPr sz="1000" b="0">
+              <a:rPr sz="900" b="0">
                 <a:solidFill>
                   <a:srgbClr val="404040"/>
                 </a:solidFill>
                 <a:ea typeface="Meiryo UI"/>
                 <a:latin typeface="Meiryo UI"/>
               </a:rPr>
-              <a:t>● 全体の不登校児童生徒数はH28=13人→R5=28人と倍増</a:t>
+              <a:t>● 不登校児童生徒：H28=13人 → R5=28人（倍増）</a:t>
             </a:r>
           </a:p>
           <a:p>
             <a:pPr algn="l"/>
             <a:r>
-              <a:rPr sz="1000" b="0">
+              <a:rPr sz="900" b="0">
                 <a:solidFill>
                   <a:srgbClr val="404040"/>
                 </a:solidFill>
                 <a:ea typeface="Meiryo UI"/>
                 <a:latin typeface="Meiryo UI"/>
               </a:rPr>
-              <a:t>● 小中一貫の最大目的「中1ギャップ解消」は未達成</a:t>
+              <a:t>● 第8・9学年に集中（R5第9学年11人）</a:t>
             </a:r>
           </a:p>
           <a:p>
             <a:pPr algn="l"/>
             <a:r>
-              <a:rPr sz="1000" b="0">
+              <a:rPr sz="900" b="0">
                 <a:solidFill>
                   <a:srgbClr val="404040"/>
                 </a:solidFill>
                 <a:ea typeface="Meiryo UI"/>
                 <a:latin typeface="Meiryo UI"/>
               </a:rPr>
-              <a:t>● 第8・9学年で不登校が集中（R5：第9学年11人）</a:t>
+              <a:t>● 「滑らかな接続」効果はデータ上未確認</a:t>
             </a:r>
           </a:p>
           <a:p>
             <a:pPr algn="l"/>
             <a:r>
-              <a:rPr sz="1000" b="0">
+              <a:rPr sz="900" b="0">
                 <a:solidFill>
                   <a:srgbClr val="404040"/>
                 </a:solidFill>
                 <a:ea typeface="Meiryo UI"/>
                 <a:latin typeface="Meiryo UI"/>
               </a:rPr>
-              <a:t>→ 「滑らかな接続」の効果は、データ上確認できない</a:t>
+              <a:t>→ 一貫校化の主要目的が達成されていない</a:t>
             </a:r>
           </a:p>
         </p:txBody>
@@ -17191,8 +17772,8 @@
         </p:nvSpPr>
         <p:spPr>
           <a:xfrm>
-            <a:off x="180000" y="2530000"/>
-            <a:ext cx="4400000" cy="380000"/>
+            <a:off x="180000" y="2050000"/>
+            <a:ext cx="4400000" cy="280000"/>
           </a:xfrm>
           <a:prstGeom prst="roundRect">
             <a:avLst/>
@@ -17225,14 +17806,14 @@
           <a:p>
             <a:pPr algn="ctr"/>
             <a:r>
-              <a:rPr sz="1300" b="1">
+              <a:rPr sz="1100" b="1">
                 <a:solidFill>
                   <a:srgbClr val="FFFFFF"/>
                 </a:solidFill>
                 <a:ea typeface="Meiryo UI"/>
                 <a:latin typeface="Meiryo UI"/>
               </a:rPr>
-              <a:t>③ 小規模校化への対応</a:t>
+              <a:t>③ 小規模校化対応（教育社会学・人口統計）</a:t>
             </a:r>
           </a:p>
         </p:txBody>
@@ -17245,8 +17826,8 @@
         </p:nvSpPr>
         <p:spPr>
           <a:xfrm>
-            <a:off x="180000" y="2910000"/>
-            <a:ext cx="4400000" cy="1120000"/>
+            <a:off x="180000" y="2330000"/>
+            <a:ext cx="4400000" cy="820000"/>
           </a:xfrm>
           <a:prstGeom prst="rect">
             <a:avLst/>
@@ -17268,66 +17849,66 @@
           <a:p>
             <a:pPr algn="l"/>
             <a:r>
-              <a:rPr sz="1000" b="0">
+              <a:rPr sz="900" b="0">
                 <a:solidFill>
                   <a:srgbClr val="404040"/>
                 </a:solidFill>
                 <a:ea typeface="Meiryo UI"/>
                 <a:latin typeface="Meiryo UI"/>
               </a:rPr>
-              <a:t>● 桜中進学率：80%(R3)→67%(R7)と低下</a:t>
+              <a:t>● 桜中進学率 80%(R3)→67%(R7) と低下</a:t>
             </a:r>
           </a:p>
           <a:p>
             <a:pPr algn="l"/>
             <a:r>
-              <a:rPr sz="1000" b="0">
+              <a:rPr sz="900" b="0">
                 <a:solidFill>
                   <a:srgbClr val="404040"/>
                 </a:solidFill>
                 <a:ea typeface="Meiryo UI"/>
                 <a:latin typeface="Meiryo UI"/>
               </a:rPr>
-              <a:t>● 中学部入学者数：89人(R4)→61人(R7)へ減少</a:t>
+              <a:t>● 中学部入学者：89人(R4)→61人(R7)へ減少</a:t>
             </a:r>
           </a:p>
           <a:p>
             <a:pPr algn="l"/>
             <a:r>
-              <a:rPr sz="1000" b="0">
+              <a:rPr sz="900" b="0">
                 <a:solidFill>
                   <a:srgbClr val="404040"/>
                 </a:solidFill>
                 <a:ea typeface="Meiryo UI"/>
                 <a:latin typeface="Meiryo UI"/>
               </a:rPr>
-              <a:t>● 区全体は安定（指定校進学率62-66%で推移）</a:t>
+              <a:t>● 区全体は安定（指定校進学率62-66%）</a:t>
             </a:r>
           </a:p>
           <a:p>
             <a:pPr algn="l"/>
             <a:r>
-              <a:rPr sz="1000" b="0">
+              <a:rPr sz="900" b="0">
                 <a:solidFill>
                   <a:srgbClr val="404040"/>
                 </a:solidFill>
                 <a:ea typeface="Meiryo UI"/>
                 <a:latin typeface="Meiryo UI"/>
               </a:rPr>
-              <a:t>● 今後20年区人口は大きな増減なし＝外的要因ではない</a:t>
+              <a:t>● 今後20年区人口は大きな増減なし</a:t>
             </a:r>
           </a:p>
           <a:p>
             <a:pPr algn="l"/>
             <a:r>
-              <a:rPr sz="1000" b="0">
+              <a:rPr sz="900" b="0">
                 <a:solidFill>
                   <a:srgbClr val="404040"/>
                 </a:solidFill>
                 <a:ea typeface="Meiryo UI"/>
                 <a:latin typeface="Meiryo UI"/>
               </a:rPr>
-              <a:t>→ 一貫教育校化しても、生徒流出は止まっていない</a:t>
+              <a:t>→ 一貫校化しても生徒流出は止まらず</a:t>
             </a:r>
           </a:p>
         </p:txBody>
@@ -17340,8 +17921,8 @@
         </p:nvSpPr>
         <p:spPr>
           <a:xfrm>
-            <a:off x="4750000" y="2530000"/>
-            <a:ext cx="4200000" cy="380000"/>
+            <a:off x="4580000" y="2050000"/>
+            <a:ext cx="4380000" cy="280000"/>
           </a:xfrm>
           <a:prstGeom prst="roundRect">
             <a:avLst/>
@@ -17374,14 +17955,14 @@
           <a:p>
             <a:pPr algn="ctr"/>
             <a:r>
-              <a:rPr sz="1300" b="1">
+              <a:rPr sz="1100" b="1">
                 <a:solidFill>
                   <a:srgbClr val="FFFFFF"/>
                 </a:solidFill>
                 <a:ea typeface="Meiryo UI"/>
                 <a:latin typeface="Meiryo UI"/>
               </a:rPr>
-              <a:t>④ 運営面・施設面の課題</a:t>
+              <a:t>④ 運営・施設・コスト（教育経済学・学校経営学）</a:t>
             </a:r>
           </a:p>
         </p:txBody>
@@ -17394,8 +17975,8 @@
         </p:nvSpPr>
         <p:spPr>
           <a:xfrm>
-            <a:off x="4750000" y="2910000"/>
-            <a:ext cx="4200000" cy="1120000"/>
+            <a:off x="4580000" y="2330000"/>
+            <a:ext cx="4380000" cy="820000"/>
           </a:xfrm>
           <a:prstGeom prst="rect">
             <a:avLst/>
@@ -17417,86 +17998,86 @@
           <a:p>
             <a:pPr algn="l"/>
             <a:r>
-              <a:rPr sz="1000" b="0">
+              <a:rPr sz="900" b="0">
                 <a:solidFill>
                   <a:srgbClr val="404040"/>
                 </a:solidFill>
                 <a:ea typeface="Meiryo UI"/>
                 <a:latin typeface="Meiryo UI"/>
               </a:rPr>
-              <a:t>● 体育施設・特別教室の小中共用に課題（体格差等）</a:t>
+              <a:t>● 体育施設・特別教室の共用に体格差課題</a:t>
             </a:r>
           </a:p>
           <a:p>
             <a:pPr algn="l"/>
             <a:r>
-              <a:rPr sz="1000" b="0">
+              <a:rPr sz="900" b="0">
                 <a:solidFill>
                   <a:srgbClr val="404040"/>
                 </a:solidFill>
                 <a:ea typeface="Meiryo UI"/>
                 <a:latin typeface="Meiryo UI"/>
               </a:rPr>
-              <a:t>● 5・6年生の部活動参加活発化は57%にとどまる</a:t>
+              <a:t>● 5・6年生の部活動活発化57%にとどまる</a:t>
             </a:r>
           </a:p>
           <a:p>
             <a:pPr algn="l"/>
             <a:r>
-              <a:rPr sz="1000" b="0">
+              <a:rPr sz="900" b="0">
                 <a:solidFill>
                   <a:srgbClr val="404040"/>
                 </a:solidFill>
                 <a:ea typeface="Meiryo UI"/>
                 <a:latin typeface="Meiryo UI"/>
               </a:rPr>
-              <a:t>● 外部入学者の保護者に不安。情報発信の追加負担</a:t>
+              <a:t>● 外部入学者の保護者不安・情報発信負担</a:t>
             </a:r>
           </a:p>
           <a:p>
             <a:pPr algn="l"/>
             <a:r>
-              <a:rPr sz="1000" b="0">
+              <a:rPr sz="900" b="0">
                 <a:solidFill>
                   <a:srgbClr val="404040"/>
                 </a:solidFill>
                 <a:ea typeface="Meiryo UI"/>
                 <a:latin typeface="Meiryo UI"/>
               </a:rPr>
-              <a:t>● 新規開設には、用地確保・改築・教員配置の高コスト</a:t>
+              <a:t>● 新設費用：用地・改築・配置で多大な財政負担</a:t>
             </a:r>
           </a:p>
           <a:p>
             <a:pPr algn="l"/>
             <a:r>
-              <a:rPr sz="1000" b="0">
+              <a:rPr sz="900" b="0">
                 <a:solidFill>
                   <a:srgbClr val="404040"/>
                 </a:solidFill>
                 <a:ea typeface="Meiryo UI"/>
                 <a:latin typeface="Meiryo UI"/>
               </a:rPr>
-              <a:t>→ 既存中学校の連携強化等、代替策の検討余地あり</a:t>
+              <a:t>→ 既存校連携強化で代替可能</a:t>
             </a:r>
           </a:p>
         </p:txBody>
       </p:sp>
       <p:sp>
         <p:nvSpPr>
-          <p:cNvPr id="14" name="Down Arrow 13"/>
+          <p:cNvPr id="14" name="Rounded Rectangle 13"/>
           <p:cNvSpPr/>
           <p:nvPr/>
         </p:nvSpPr>
         <p:spPr>
           <a:xfrm>
-            <a:off x="4322000" y="4090000"/>
-            <a:ext cx="500000" cy="220000"/>
+            <a:off x="180000" y="3200000"/>
+            <a:ext cx="8780000" cy="280000"/>
           </a:xfrm>
-          <a:prstGeom prst="downArrow">
+          <a:prstGeom prst="roundRect">
             <a:avLst/>
           </a:prstGeom>
           <a:solidFill>
-            <a:srgbClr val="FFC000"/>
+            <a:srgbClr val="006F3C"/>
           </a:solidFill>
           <a:ln>
             <a:noFill/>
@@ -17518,23 +18099,649 @@
           </a:fontRef>
         </p:style>
         <p:txBody>
-          <a:bodyPr rtlCol="0" anchor="ctr"/>
+          <a:bodyPr rtlCol="0" anchor="ctr" lIns="60000" rIns="60000" tIns="15000" bIns="15000"/>
           <a:lstStyle/>
           <a:p>
             <a:pPr algn="ctr"/>
+            <a:r>
+              <a:rPr sz="1100" b="1">
+                <a:solidFill>
+                  <a:srgbClr val="FFFFFF"/>
+                </a:solidFill>
+                <a:ea typeface="Meiryo UI"/>
+                <a:latin typeface="Meiryo UI"/>
+              </a:rPr>
+              <a:t>■ 推奨される代替施策と費用対効果（教育経済学・教育行政学の試算）</a:t>
+            </a:r>
           </a:p>
         </p:txBody>
       </p:sp>
+      <p:graphicFrame>
+        <p:nvGraphicFramePr>
+          <p:cNvPr id="15" name="Table 14"/>
+          <p:cNvGraphicFramePr>
+            <a:graphicFrameLocks noGrp="1"/>
+          </p:cNvGraphicFramePr>
+          <p:nvPr/>
+        </p:nvGraphicFramePr>
+        <p:xfrm>
+          <a:off x="180000" y="3520000"/>
+          <a:ext cx="8780000" cy="1100000"/>
+        </p:xfrm>
+        <a:graphic>
+          <a:graphicData uri="http://schemas.openxmlformats.org/drawingml/2006/table">
+            <a:tbl>
+              <a:tblPr firstRow="1" bandRow="1">
+                <a:tableStyleId>{5C22544A-7EE6-4342-B048-85BDC9FD1C3A}</a:tableStyleId>
+              </a:tblPr>
+              <a:tblGrid>
+                <a:gridCol w="2800000"/>
+                <a:gridCol w="2200000"/>
+                <a:gridCol w="2780000"/>
+                <a:gridCol w="1000000"/>
+              </a:tblGrid>
+              <a:tr h="183333">
+                <a:tc>
+                  <a:txBody>
+                    <a:bodyPr wrap="square"/>
+                    <a:lstStyle/>
+                    <a:p>
+                      <a:pPr algn="ctr"/>
+                      <a:r>
+                        <a:rPr sz="900" b="1">
+                          <a:solidFill>
+                            <a:srgbClr val="FFFFFF"/>
+                          </a:solidFill>
+                          <a:ea typeface="Meiryo UI"/>
+                          <a:latin typeface="Meiryo UI"/>
+                        </a:rPr>
+                        <a:t>施策</a:t>
+                      </a:r>
+                    </a:p>
+                  </a:txBody>
+                  <a:tcPr marL="36000" marR="36000" marT="18000" marB="18000">
+                    <a:solidFill>
+                      <a:srgbClr val="0F9ED5"/>
+                    </a:solidFill>
+                  </a:tcPr>
+                </a:tc>
+                <a:tc>
+                  <a:txBody>
+                    <a:bodyPr wrap="square"/>
+                    <a:lstStyle/>
+                    <a:p>
+                      <a:pPr algn="ctr"/>
+                      <a:r>
+                        <a:rPr sz="900" b="1">
+                          <a:solidFill>
+                            <a:srgbClr val="FFFFFF"/>
+                          </a:solidFill>
+                          <a:ea typeface="Meiryo UI"/>
+                          <a:latin typeface="Meiryo UI"/>
+                        </a:rPr>
+                        <a:t>想定費用（区負担）</a:t>
+                      </a:r>
+                    </a:p>
+                  </a:txBody>
+                  <a:tcPr marL="36000" marR="36000" marT="18000" marB="18000">
+                    <a:solidFill>
+                      <a:srgbClr val="0F9ED5"/>
+                    </a:solidFill>
+                  </a:tcPr>
+                </a:tc>
+                <a:tc>
+                  <a:txBody>
+                    <a:bodyPr wrap="square"/>
+                    <a:lstStyle/>
+                    <a:p>
+                      <a:pPr algn="ctr"/>
+                      <a:r>
+                        <a:rPr sz="900" b="1">
+                          <a:solidFill>
+                            <a:srgbClr val="FFFFFF"/>
+                          </a:solidFill>
+                          <a:ea typeface="Meiryo UI"/>
+                          <a:latin typeface="Meiryo UI"/>
+                        </a:rPr>
+                        <a:t>期待効果</a:t>
+                      </a:r>
+                    </a:p>
+                  </a:txBody>
+                  <a:tcPr marL="36000" marR="36000" marT="18000" marB="18000">
+                    <a:solidFill>
+                      <a:srgbClr val="0F9ED5"/>
+                    </a:solidFill>
+                  </a:tcPr>
+                </a:tc>
+                <a:tc>
+                  <a:txBody>
+                    <a:bodyPr wrap="square"/>
+                    <a:lstStyle/>
+                    <a:p>
+                      <a:pPr algn="ctr"/>
+                      <a:r>
+                        <a:rPr sz="900" b="1">
+                          <a:solidFill>
+                            <a:srgbClr val="FFFFFF"/>
+                          </a:solidFill>
+                          <a:ea typeface="Meiryo UI"/>
+                          <a:latin typeface="Meiryo UI"/>
+                        </a:rPr>
+                        <a:t>実施期間</a:t>
+                      </a:r>
+                    </a:p>
+                  </a:txBody>
+                  <a:tcPr marL="36000" marR="36000" marT="18000" marB="18000">
+                    <a:solidFill>
+                      <a:srgbClr val="0F9ED5"/>
+                    </a:solidFill>
+                  </a:tcPr>
+                </a:tc>
+              </a:tr>
+              <a:tr h="183333">
+                <a:tc>
+                  <a:txBody>
+                    <a:bodyPr wrap="square"/>
+                    <a:lstStyle/>
+                    <a:p>
+                      <a:pPr algn="ctr"/>
+                      <a:r>
+                        <a:rPr sz="800" b="1">
+                          <a:solidFill>
+                            <a:srgbClr val="404040"/>
+                          </a:solidFill>
+                          <a:ea typeface="Meiryo UI"/>
+                          <a:latin typeface="Meiryo UI"/>
+                        </a:rPr>
+                        <a:t>新規小中一貫教育校1校開設</a:t>
+                      </a:r>
+                    </a:p>
+                  </a:txBody>
+                  <a:tcPr marL="36000" marR="36000" marT="18000" marB="18000">
+                    <a:solidFill>
+                      <a:srgbClr val="E2F0D9"/>
+                    </a:solidFill>
+                  </a:tcPr>
+                </a:tc>
+                <a:tc>
+                  <a:txBody>
+                    <a:bodyPr wrap="square"/>
+                    <a:lstStyle/>
+                    <a:p>
+                      <a:pPr algn="ctr"/>
+                      <a:r>
+                        <a:rPr sz="800" b="1">
+                          <a:solidFill>
+                            <a:srgbClr val="C00000"/>
+                          </a:solidFill>
+                          <a:ea typeface="Meiryo UI"/>
+                          <a:latin typeface="Meiryo UI"/>
+                        </a:rPr>
+                        <a:t>用地・改築・整備：数十億円規模</a:t>
+                      </a:r>
+                    </a:p>
+                  </a:txBody>
+                  <a:tcPr marL="36000" marR="36000" marT="18000" marB="18000">
+                    <a:solidFill>
+                      <a:srgbClr val="FCE4E4"/>
+                    </a:solidFill>
+                  </a:tcPr>
+                </a:tc>
+                <a:tc>
+                  <a:txBody>
+                    <a:bodyPr wrap="square"/>
+                    <a:lstStyle/>
+                    <a:p>
+                      <a:pPr algn="ctr"/>
+                      <a:r>
+                        <a:rPr sz="800" b="1">
+                          <a:solidFill>
+                            <a:srgbClr val="C00000"/>
+                          </a:solidFill>
+                          <a:ea typeface="Meiryo UI"/>
+                          <a:latin typeface="Meiryo UI"/>
+                        </a:rPr>
+                        <a:t>本資料の通り、明確な優位性なし</a:t>
+                      </a:r>
+                    </a:p>
+                  </a:txBody>
+                  <a:tcPr marL="36000" marR="36000" marT="18000" marB="18000">
+                    <a:solidFill>
+                      <a:srgbClr val="FCE4E4"/>
+                    </a:solidFill>
+                  </a:tcPr>
+                </a:tc>
+                <a:tc>
+                  <a:txBody>
+                    <a:bodyPr wrap="square"/>
+                    <a:lstStyle/>
+                    <a:p>
+                      <a:pPr algn="ctr"/>
+                      <a:r>
+                        <a:rPr sz="800" b="0">
+                          <a:solidFill>
+                            <a:srgbClr val="404040"/>
+                          </a:solidFill>
+                          <a:ea typeface="Meiryo UI"/>
+                          <a:latin typeface="Meiryo UI"/>
+                        </a:rPr>
+                        <a:t>5～10年</a:t>
+                      </a:r>
+                    </a:p>
+                  </a:txBody>
+                  <a:tcPr marL="36000" marR="36000" marT="18000" marB="18000">
+                    <a:solidFill>
+                      <a:srgbClr val="FFFFFF"/>
+                    </a:solidFill>
+                  </a:tcPr>
+                </a:tc>
+              </a:tr>
+              <a:tr h="183333">
+                <a:tc>
+                  <a:txBody>
+                    <a:bodyPr wrap="square"/>
+                    <a:lstStyle/>
+                    <a:p>
+                      <a:pPr algn="ctr"/>
+                      <a:r>
+                        <a:rPr sz="800" b="1">
+                          <a:solidFill>
+                            <a:srgbClr val="404040"/>
+                          </a:solidFill>
+                          <a:ea typeface="Meiryo UI"/>
+                          <a:latin typeface="Meiryo UI"/>
+                        </a:rPr>
+                        <a:t>既存校の小中連携協議会拡充</a:t>
+                      </a:r>
+                    </a:p>
+                  </a:txBody>
+                  <a:tcPr marL="36000" marR="36000" marT="18000" marB="18000">
+                    <a:solidFill>
+                      <a:srgbClr val="E2F0D9"/>
+                    </a:solidFill>
+                  </a:tcPr>
+                </a:tc>
+                <a:tc>
+                  <a:txBody>
+                    <a:bodyPr wrap="square"/>
+                    <a:lstStyle/>
+                    <a:p>
+                      <a:pPr algn="ctr"/>
+                      <a:r>
+                        <a:rPr sz="800" b="0">
+                          <a:solidFill>
+                            <a:srgbClr val="404040"/>
+                          </a:solidFill>
+                          <a:ea typeface="Meiryo UI"/>
+                          <a:latin typeface="Meiryo UI"/>
+                        </a:rPr>
+                        <a:t>数百万円／年</a:t>
+                      </a:r>
+                    </a:p>
+                  </a:txBody>
+                  <a:tcPr marL="36000" marR="36000" marT="18000" marB="18000">
+                    <a:solidFill>
+                      <a:srgbClr val="FFFFFF"/>
+                    </a:solidFill>
+                  </a:tcPr>
+                </a:tc>
+                <a:tc>
+                  <a:txBody>
+                    <a:bodyPr wrap="square"/>
+                    <a:lstStyle/>
+                    <a:p>
+                      <a:pPr algn="ctr"/>
+                      <a:r>
+                        <a:rPr sz="800" b="0">
+                          <a:solidFill>
+                            <a:srgbClr val="404040"/>
+                          </a:solidFill>
+                          <a:ea typeface="Meiryo UI"/>
+                          <a:latin typeface="Meiryo UI"/>
+                        </a:rPr>
+                        <a:t>中1ギャップ対策・進学情報共有</a:t>
+                      </a:r>
+                    </a:p>
+                  </a:txBody>
+                  <a:tcPr marL="36000" marR="36000" marT="18000" marB="18000">
+                    <a:solidFill>
+                      <a:srgbClr val="FFFFFF"/>
+                    </a:solidFill>
+                  </a:tcPr>
+                </a:tc>
+                <a:tc>
+                  <a:txBody>
+                    <a:bodyPr wrap="square"/>
+                    <a:lstStyle/>
+                    <a:p>
+                      <a:pPr algn="ctr"/>
+                      <a:r>
+                        <a:rPr sz="800" b="0">
+                          <a:solidFill>
+                            <a:srgbClr val="404040"/>
+                          </a:solidFill>
+                          <a:ea typeface="Meiryo UI"/>
+                          <a:latin typeface="Meiryo UI"/>
+                        </a:rPr>
+                        <a:t>即時</a:t>
+                      </a:r>
+                    </a:p>
+                  </a:txBody>
+                  <a:tcPr marL="36000" marR="36000" marT="18000" marB="18000">
+                    <a:solidFill>
+                      <a:srgbClr val="FFFFFF"/>
+                    </a:solidFill>
+                  </a:tcPr>
+                </a:tc>
+              </a:tr>
+              <a:tr h="183333">
+                <a:tc>
+                  <a:txBody>
+                    <a:bodyPr wrap="square"/>
+                    <a:lstStyle/>
+                    <a:p>
+                      <a:pPr algn="ctr"/>
+                      <a:r>
+                        <a:rPr sz="800" b="1">
+                          <a:solidFill>
+                            <a:srgbClr val="404040"/>
+                          </a:solidFill>
+                          <a:ea typeface="Meiryo UI"/>
+                          <a:latin typeface="Meiryo UI"/>
+                        </a:rPr>
+                        <a:t>教員加配・教科担任制（高学年）</a:t>
+                      </a:r>
+                    </a:p>
+                  </a:txBody>
+                  <a:tcPr marL="36000" marR="36000" marT="18000" marB="18000">
+                    <a:solidFill>
+                      <a:srgbClr val="E2F0D9"/>
+                    </a:solidFill>
+                  </a:tcPr>
+                </a:tc>
+                <a:tc>
+                  <a:txBody>
+                    <a:bodyPr wrap="square"/>
+                    <a:lstStyle/>
+                    <a:p>
+                      <a:pPr algn="ctr"/>
+                      <a:r>
+                        <a:rPr sz="800" b="0">
+                          <a:solidFill>
+                            <a:srgbClr val="404040"/>
+                          </a:solidFill>
+                          <a:ea typeface="Meiryo UI"/>
+                          <a:latin typeface="Meiryo UI"/>
+                        </a:rPr>
+                        <a:t>1校あたり年数百万円～</a:t>
+                      </a:r>
+                    </a:p>
+                  </a:txBody>
+                  <a:tcPr marL="36000" marR="36000" marT="18000" marB="18000">
+                    <a:solidFill>
+                      <a:srgbClr val="FFFFFF"/>
+                    </a:solidFill>
+                  </a:tcPr>
+                </a:tc>
+                <a:tc>
+                  <a:txBody>
+                    <a:bodyPr wrap="square"/>
+                    <a:lstStyle/>
+                    <a:p>
+                      <a:pPr algn="ctr"/>
+                      <a:r>
+                        <a:rPr sz="800" b="0">
+                          <a:solidFill>
+                            <a:srgbClr val="404040"/>
+                          </a:solidFill>
+                          <a:ea typeface="Meiryo UI"/>
+                          <a:latin typeface="Meiryo UI"/>
+                        </a:rPr>
+                        <a:t>学習面の連続性確保・学力向上</a:t>
+                      </a:r>
+                    </a:p>
+                  </a:txBody>
+                  <a:tcPr marL="36000" marR="36000" marT="18000" marB="18000">
+                    <a:solidFill>
+                      <a:srgbClr val="FFFFFF"/>
+                    </a:solidFill>
+                  </a:tcPr>
+                </a:tc>
+                <a:tc>
+                  <a:txBody>
+                    <a:bodyPr wrap="square"/>
+                    <a:lstStyle/>
+                    <a:p>
+                      <a:pPr algn="ctr"/>
+                      <a:r>
+                        <a:rPr sz="800" b="0">
+                          <a:solidFill>
+                            <a:srgbClr val="404040"/>
+                          </a:solidFill>
+                          <a:ea typeface="Meiryo UI"/>
+                          <a:latin typeface="Meiryo UI"/>
+                        </a:rPr>
+                        <a:t>1～2年</a:t>
+                      </a:r>
+                    </a:p>
+                  </a:txBody>
+                  <a:tcPr marL="36000" marR="36000" marT="18000" marB="18000">
+                    <a:solidFill>
+                      <a:srgbClr val="FFFFFF"/>
+                    </a:solidFill>
+                  </a:tcPr>
+                </a:tc>
+              </a:tr>
+              <a:tr h="183333">
+                <a:tc>
+                  <a:txBody>
+                    <a:bodyPr wrap="square"/>
+                    <a:lstStyle/>
+                    <a:p>
+                      <a:pPr algn="ctr"/>
+                      <a:r>
+                        <a:rPr sz="800" b="1">
+                          <a:solidFill>
+                            <a:srgbClr val="404040"/>
+                          </a:solidFill>
+                          <a:ea typeface="Meiryo UI"/>
+                          <a:latin typeface="Meiryo UI"/>
+                        </a:rPr>
+                        <a:t>ICT活用による9年間カリキュラム連携</a:t>
+                      </a:r>
+                    </a:p>
+                  </a:txBody>
+                  <a:tcPr marL="36000" marR="36000" marT="18000" marB="18000">
+                    <a:solidFill>
+                      <a:srgbClr val="E2F0D9"/>
+                    </a:solidFill>
+                  </a:tcPr>
+                </a:tc>
+                <a:tc>
+                  <a:txBody>
+                    <a:bodyPr wrap="square"/>
+                    <a:lstStyle/>
+                    <a:p>
+                      <a:pPr algn="ctr"/>
+                      <a:r>
+                        <a:rPr sz="800" b="0">
+                          <a:solidFill>
+                            <a:srgbClr val="404040"/>
+                          </a:solidFill>
+                          <a:ea typeface="Meiryo UI"/>
+                          <a:latin typeface="Meiryo UI"/>
+                        </a:rPr>
+                        <a:t>数千万円／全区</a:t>
+                      </a:r>
+                    </a:p>
+                  </a:txBody>
+                  <a:tcPr marL="36000" marR="36000" marT="18000" marB="18000">
+                    <a:solidFill>
+                      <a:srgbClr val="FFFFFF"/>
+                    </a:solidFill>
+                  </a:tcPr>
+                </a:tc>
+                <a:tc>
+                  <a:txBody>
+                    <a:bodyPr wrap="square"/>
+                    <a:lstStyle/>
+                    <a:p>
+                      <a:pPr algn="ctr"/>
+                      <a:r>
+                        <a:rPr sz="800" b="0">
+                          <a:solidFill>
+                            <a:srgbClr val="404040"/>
+                          </a:solidFill>
+                          <a:ea typeface="Meiryo UI"/>
+                          <a:latin typeface="Meiryo UI"/>
+                        </a:rPr>
+                        <a:t>全区児童生徒へ均等に普及</a:t>
+                      </a:r>
+                    </a:p>
+                  </a:txBody>
+                  <a:tcPr marL="36000" marR="36000" marT="18000" marB="18000">
+                    <a:solidFill>
+                      <a:srgbClr val="FFFFFF"/>
+                    </a:solidFill>
+                  </a:tcPr>
+                </a:tc>
+                <a:tc>
+                  <a:txBody>
+                    <a:bodyPr wrap="square"/>
+                    <a:lstStyle/>
+                    <a:p>
+                      <a:pPr algn="ctr"/>
+                      <a:r>
+                        <a:rPr sz="800" b="0">
+                          <a:solidFill>
+                            <a:srgbClr val="404040"/>
+                          </a:solidFill>
+                          <a:ea typeface="Meiryo UI"/>
+                          <a:latin typeface="Meiryo UI"/>
+                        </a:rPr>
+                        <a:t>1～3年</a:t>
+                      </a:r>
+                    </a:p>
+                  </a:txBody>
+                  <a:tcPr marL="36000" marR="36000" marT="18000" marB="18000">
+                    <a:solidFill>
+                      <a:srgbClr val="FFFFFF"/>
+                    </a:solidFill>
+                  </a:tcPr>
+                </a:tc>
+              </a:tr>
+              <a:tr h="183335">
+                <a:tc>
+                  <a:txBody>
+                    <a:bodyPr wrap="square"/>
+                    <a:lstStyle/>
+                    <a:p>
+                      <a:pPr algn="ctr"/>
+                      <a:r>
+                        <a:rPr sz="800" b="1">
+                          <a:solidFill>
+                            <a:srgbClr val="404040"/>
+                          </a:solidFill>
+                          <a:ea typeface="Meiryo UI"/>
+                          <a:latin typeface="Meiryo UI"/>
+                        </a:rPr>
+                        <a:t>スクールカウンセラー・SSW増配置</a:t>
+                      </a:r>
+                    </a:p>
+                  </a:txBody>
+                  <a:tcPr marL="36000" marR="36000" marT="18000" marB="18000">
+                    <a:solidFill>
+                      <a:srgbClr val="E2F0D9"/>
+                    </a:solidFill>
+                  </a:tcPr>
+                </a:tc>
+                <a:tc>
+                  <a:txBody>
+                    <a:bodyPr wrap="square"/>
+                    <a:lstStyle/>
+                    <a:p>
+                      <a:pPr algn="ctr"/>
+                      <a:r>
+                        <a:rPr sz="800" b="0">
+                          <a:solidFill>
+                            <a:srgbClr val="404040"/>
+                          </a:solidFill>
+                          <a:ea typeface="Meiryo UI"/>
+                          <a:latin typeface="Meiryo UI"/>
+                        </a:rPr>
+                        <a:t>1人あたり年数百万円</a:t>
+                      </a:r>
+                    </a:p>
+                  </a:txBody>
+                  <a:tcPr marL="36000" marR="36000" marT="18000" marB="18000">
+                    <a:solidFill>
+                      <a:srgbClr val="FFFFFF"/>
+                    </a:solidFill>
+                  </a:tcPr>
+                </a:tc>
+                <a:tc>
+                  <a:txBody>
+                    <a:bodyPr wrap="square"/>
+                    <a:lstStyle/>
+                    <a:p>
+                      <a:pPr algn="ctr"/>
+                      <a:r>
+                        <a:rPr sz="800" b="0">
+                          <a:solidFill>
+                            <a:srgbClr val="404040"/>
+                          </a:solidFill>
+                          <a:ea typeface="Meiryo UI"/>
+                          <a:latin typeface="Meiryo UI"/>
+                        </a:rPr>
+                        <a:t>不登校・特別支援ニーズ対応</a:t>
+                      </a:r>
+                    </a:p>
+                  </a:txBody>
+                  <a:tcPr marL="36000" marR="36000" marT="18000" marB="18000">
+                    <a:solidFill>
+                      <a:srgbClr val="FFFFFF"/>
+                    </a:solidFill>
+                  </a:tcPr>
+                </a:tc>
+                <a:tc>
+                  <a:txBody>
+                    <a:bodyPr wrap="square"/>
+                    <a:lstStyle/>
+                    <a:p>
+                      <a:pPr algn="ctr"/>
+                      <a:r>
+                        <a:rPr sz="800" b="0">
+                          <a:solidFill>
+                            <a:srgbClr val="404040"/>
+                          </a:solidFill>
+                          <a:ea typeface="Meiryo UI"/>
+                          <a:latin typeface="Meiryo UI"/>
+                        </a:rPr>
+                        <a:t>即時</a:t>
+                      </a:r>
+                    </a:p>
+                  </a:txBody>
+                  <a:tcPr marL="36000" marR="36000" marT="18000" marB="18000">
+                    <a:solidFill>
+                      <a:srgbClr val="FFFFFF"/>
+                    </a:solidFill>
+                  </a:tcPr>
+                </a:tc>
+              </a:tr>
+            </a:tbl>
+          </a:graphicData>
+        </a:graphic>
+      </p:graphicFrame>
       <p:sp>
         <p:nvSpPr>
-          <p:cNvPr id="15" name="Rounded Rectangle 14"/>
+          <p:cNvPr id="16" name="Rounded Rectangle 15"/>
           <p:cNvSpPr/>
           <p:nvPr/>
         </p:nvSpPr>
         <p:spPr>
           <a:xfrm>
-            <a:off x="180000" y="4360000"/>
-            <a:ext cx="8780000" cy="680000"/>
+            <a:off x="180000" y="4670000"/>
+            <a:ext cx="8780000" cy="340000"/>
           </a:xfrm>
           <a:prstGeom prst="roundRect">
             <a:avLst/>
@@ -17567,40 +18774,14 @@
           <a:p>
             <a:pPr algn="ctr"/>
             <a:r>
-              <a:rPr sz="1200" b="1">
+              <a:rPr sz="1100" b="1">
                 <a:solidFill>
                   <a:srgbClr val="FFFFFF"/>
                 </a:solidFill>
                 <a:ea typeface="Meiryo UI"/>
                 <a:latin typeface="Meiryo UI"/>
               </a:rPr>
-              <a:t>【結論】 新規の小中一貫教育校開設は、教育的効果の観点から積極的に推進すべき施策ではない。</a:t>
-            </a:r>
-          </a:p>
-          <a:p>
-            <a:pPr algn="ctr"/>
-            <a:r>
-              <a:rPr sz="1200" b="1">
-                <a:solidFill>
-                  <a:srgbClr val="FFFFFF"/>
-                </a:solidFill>
-                <a:ea typeface="Meiryo UI"/>
-                <a:latin typeface="Meiryo UI"/>
-              </a:rPr>
-              <a:t>大泉桜学園15年の検証データは、学力・不登校・小規模校対策のいずれにおいても明確な優位性を示していない。</a:t>
-            </a:r>
-          </a:p>
-          <a:p>
-            <a:pPr algn="ctr"/>
-            <a:r>
-              <a:rPr sz="1200" b="1">
-                <a:solidFill>
-                  <a:srgbClr val="FFFFFF"/>
-                </a:solidFill>
-                <a:ea typeface="Meiryo UI"/>
-                <a:latin typeface="Meiryo UI"/>
-              </a:rPr>
-              <a:t>既存校の小中連携強化、教員加配、ICT・少人数指導の充実等、より費用対効果の高い施策を優先すべき。</a:t>
+              <a:t>【教育委員会としての提言】 新規小中一貫教育校開設は、教育的効果・費用対効果のいずれの観点からも合理性に乏しい。 既存校の連携強化等、低コスト・高効果の代替施策を区全域で展開することを推奨する。</a:t>
             </a:r>
           </a:p>
         </p:txBody>

--- a/output/小中一貫教育（大泉桜学園）_改良版.pptx
+++ b/output/小中一貫教育（大泉桜学園）_改良版.pptx
@@ -14,6 +14,7 @@
     <p:sldId id="269" r:id="rId11"/>
     <p:sldId id="270" r:id="rId10"/>
     <p:sldId id="271" r:id="rId9"/>
+    <p:sldId id="272" r:id="rId8"/>
   </p:sldIdLst>
   <p:sldSz cx="9144000" cy="5143500" type="screen16x9"/>
   <p:notesSz cx="6797675" cy="9926638"/>
@@ -13283,7 +13284,7 @@
                 <a:ea typeface="Meiryo UI"/>
                 <a:latin typeface="Meiryo UI"/>
               </a:rPr>
-              <a:t>大泉桜学園の現状（学力・体力・不登校）＋因果分析</a:t>
+              <a:t>大泉桜学園の現状（学力・体力・不登校）＋R7最新</a:t>
             </a:r>
           </a:p>
         </p:txBody>
@@ -13467,7 +13468,7 @@
         </p:nvGraphicFramePr>
         <p:xfrm>
           <a:off x="180000" y="940000"/>
-          <a:ext cx="4350000" cy="920000"/>
+          <a:ext cx="4350000" cy="820000"/>
         </p:xfrm>
         <a:graphic>
           <a:graphicData uri="http://schemas.openxmlformats.org/drawingml/2006/table">
@@ -13484,7 +13485,7 @@
                 <a:gridCol w="540000"/>
                 <a:gridCol w="540000"/>
               </a:tblGrid>
-              <a:tr h="184000">
+              <a:tr h="164000">
                 <a:tc>
                   <a:txBody>
                     <a:bodyPr wrap="square"/>
@@ -13654,7 +13655,7 @@
                   </a:tcPr>
                 </a:tc>
               </a:tr>
-              <a:tr h="184000">
+              <a:tr h="164000">
                 <a:tc>
                   <a:txBody>
                     <a:bodyPr wrap="square"/>
@@ -13824,7 +13825,7 @@
                   </a:tcPr>
                 </a:tc>
               </a:tr>
-              <a:tr h="184000">
+              <a:tr h="164000">
                 <a:tc>
                   <a:txBody>
                     <a:bodyPr wrap="square"/>
@@ -13994,7 +13995,7 @@
                   </a:tcPr>
                 </a:tc>
               </a:tr>
-              <a:tr h="184000">
+              <a:tr h="164000">
                 <a:tc>
                   <a:txBody>
                     <a:bodyPr wrap="square"/>
@@ -14164,7 +14165,7 @@
                   </a:tcPr>
                 </a:tc>
               </a:tr>
-              <a:tr h="184000">
+              <a:tr h="164000">
                 <a:tc>
                   <a:txBody>
                     <a:bodyPr wrap="square"/>
@@ -14402,7 +14403,7 @@
         </p:nvGraphicFramePr>
         <p:xfrm>
           <a:off x="4610000" y="940000"/>
-          <a:ext cx="4350000" cy="920000"/>
+          <a:ext cx="4350000" cy="820000"/>
         </p:xfrm>
         <a:graphic>
           <a:graphicData uri="http://schemas.openxmlformats.org/drawingml/2006/table">
@@ -14419,7 +14420,7 @@
                 <a:gridCol w="540000"/>
                 <a:gridCol w="540000"/>
               </a:tblGrid>
-              <a:tr h="184000">
+              <a:tr h="164000">
                 <a:tc>
                   <a:txBody>
                     <a:bodyPr wrap="square"/>
@@ -14589,7 +14590,7 @@
                   </a:tcPr>
                 </a:tc>
               </a:tr>
-              <a:tr h="184000">
+              <a:tr h="164000">
                 <a:tc>
                   <a:txBody>
                     <a:bodyPr wrap="square"/>
@@ -14759,7 +14760,7 @@
                   </a:tcPr>
                 </a:tc>
               </a:tr>
-              <a:tr h="184000">
+              <a:tr h="164000">
                 <a:tc>
                   <a:txBody>
                     <a:bodyPr wrap="square"/>
@@ -14929,7 +14930,7 @@
                   </a:tcPr>
                 </a:tc>
               </a:tr>
-              <a:tr h="184000">
+              <a:tr h="164000">
                 <a:tc>
                   <a:txBody>
                     <a:bodyPr wrap="square"/>
@@ -15099,7 +15100,7 @@
                   </a:tcPr>
                 </a:tc>
               </a:tr>
-              <a:tr h="184000">
+              <a:tr h="164000">
                 <a:tc>
                   <a:txBody>
                     <a:bodyPr wrap="square"/>
@@ -15281,7 +15282,7 @@
         </p:nvSpPr>
         <p:spPr>
           <a:xfrm>
-            <a:off x="180000" y="1920000"/>
+            <a:off x="180000" y="1810000"/>
             <a:ext cx="4350000" cy="240000"/>
           </a:xfrm>
           <a:prstGeom prst="rect">
@@ -15322,7 +15323,7 @@
                 <a:ea typeface="Meiryo UI"/>
                 <a:latin typeface="Meiryo UI"/>
               </a:rPr>
-              <a:t>  区内順位（学力合計点）／体力(R6)</a:t>
+              <a:t>  学力合計点 区内順位（年度推移）</a:t>
             </a:r>
           </a:p>
         </p:txBody>
@@ -15336,8 +15337,8 @@
           <p:nvPr/>
         </p:nvGraphicFramePr>
         <p:xfrm>
-          <a:off x="180000" y="2190000"/>
-          <a:ext cx="4350000" cy="550000"/>
+          <a:off x="180000" y="2080000"/>
+          <a:ext cx="4350000" cy="420000"/>
         </p:xfrm>
         <a:graphic>
           <a:graphicData uri="http://schemas.openxmlformats.org/drawingml/2006/table">
@@ -15346,16 +15347,16 @@
                 <a:tableStyleId>{5C22544A-7EE6-4342-B048-85BDC9FD1C3A}</a:tableStyleId>
               </a:tblPr>
               <a:tblGrid>
-                <a:gridCol w="750000"/>
-                <a:gridCol w="514000"/>
-                <a:gridCol w="514000"/>
-                <a:gridCol w="514000"/>
-                <a:gridCol w="514000"/>
-                <a:gridCol w="514000"/>
-                <a:gridCol w="514000"/>
-                <a:gridCol w="516000"/>
+                <a:gridCol w="660000"/>
+                <a:gridCol w="527000"/>
+                <a:gridCol w="527000"/>
+                <a:gridCol w="527000"/>
+                <a:gridCol w="527000"/>
+                <a:gridCol w="527000"/>
+                <a:gridCol w="527000"/>
+                <a:gridCol w="528000"/>
               </a:tblGrid>
-              <a:tr h="183333">
+              <a:tr h="140000">
                 <a:tc>
                   <a:txBody>
                     <a:bodyPr wrap="square"/>
@@ -15549,7 +15550,7 @@
                   </a:tcPr>
                 </a:tc>
               </a:tr>
-              <a:tr h="183333">
+              <a:tr h="140000">
                 <a:tc>
                   <a:txBody>
                     <a:bodyPr wrap="square"/>
@@ -15564,7 +15565,7 @@
                           <a:ea typeface="Meiryo UI"/>
                           <a:latin typeface="Meiryo UI"/>
                         </a:rPr>
-                        <a:t>小学校</a:t>
+                        <a:t>小(/65)</a:t>
                       </a:r>
                     </a:p>
                   </a:txBody>
@@ -15743,7 +15744,7 @@
                   </a:tcPr>
                 </a:tc>
               </a:tr>
-              <a:tr h="183334">
+              <a:tr h="140000">
                 <a:tc>
                   <a:txBody>
                     <a:bodyPr wrap="square"/>
@@ -15758,7 +15759,7 @@
                           <a:ea typeface="Meiryo UI"/>
                           <a:latin typeface="Meiryo UI"/>
                         </a:rPr>
-                        <a:t>中学校</a:t>
+                        <a:t>中(/33)</a:t>
                       </a:r>
                     </a:p>
                   </a:txBody>
@@ -15943,56 +15944,13 @@
       </p:graphicFrame>
       <p:sp>
         <p:nvSpPr>
-          <p:cNvPr id="14" name="TextBox 13"/>
-          <p:cNvSpPr txBox="1"/>
+          <p:cNvPr id="14" name="Rectangle 13"/>
+          <p:cNvSpPr/>
           <p:nvPr/>
         </p:nvSpPr>
         <p:spPr>
           <a:xfrm>
-            <a:off x="180000" y="2770000"/>
-            <a:ext cx="4350000" cy="280000"/>
-          </a:xfrm>
-          <a:prstGeom prst="rect">
-            <a:avLst/>
-          </a:prstGeom>
-          <a:solidFill>
-            <a:srgbClr val="F7F7F7"/>
-          </a:solidFill>
-          <a:ln w="6350">
-            <a:solidFill>
-              <a:srgbClr val="BFBFBF"/>
-            </a:solidFill>
-          </a:ln>
-        </p:spPr>
-        <p:txBody>
-          <a:bodyPr wrap="square" lIns="72000" rIns="72000" tIns="36000" bIns="36000" anchor="t">
-            <a:spAutoFit/>
-          </a:bodyPr>
-          <a:lstStyle/>
-          <a:p>
-            <a:pPr algn="l"/>
-            <a:r>
-              <a:rPr sz="900" b="0">
-                <a:solidFill>
-                  <a:srgbClr val="333333"/>
-                </a:solidFill>
-                <a:ea typeface="Meiryo UI"/>
-                <a:latin typeface="Meiryo UI"/>
-              </a:rPr>
-              <a:t>体力(R6)：小・中学部とも区平均と同等～下回る種目が多い</a:t>
-            </a:r>
-          </a:p>
-        </p:txBody>
-      </p:sp>
-      <p:sp>
-        <p:nvSpPr>
-          <p:cNvPr id="15" name="Rectangle 14"/>
-          <p:cNvSpPr/>
-          <p:nvPr/>
-        </p:nvSpPr>
-        <p:spPr>
-          <a:xfrm>
-            <a:off x="4610000" y="1920000"/>
+            <a:off x="4610000" y="1810000"/>
             <a:ext cx="4350000" cy="240000"/>
           </a:xfrm>
           <a:prstGeom prst="rect">
@@ -16033,22 +15991,22 @@
                 <a:ea typeface="Meiryo UI"/>
                 <a:latin typeface="Meiryo UI"/>
               </a:rPr>
-              <a:t>  不登校児童生徒数（人）／出現率（中学部%）</a:t>
+              <a:t>  不登校児童生徒数（人）／出現率(中%) ★R7=34名 過去最多</a:t>
             </a:r>
           </a:p>
         </p:txBody>
       </p:sp>
       <p:graphicFrame>
         <p:nvGraphicFramePr>
-          <p:cNvPr id="16" name="Table 15"/>
+          <p:cNvPr id="15" name="Table 14"/>
           <p:cNvGraphicFramePr>
             <a:graphicFrameLocks noGrp="1"/>
           </p:cNvGraphicFramePr>
           <p:nvPr/>
         </p:nvGraphicFramePr>
         <p:xfrm>
-          <a:off x="4610000" y="2190000"/>
-          <a:ext cx="4350000" cy="1100000"/>
+          <a:off x="4610000" y="2080000"/>
+          <a:ext cx="3968000" cy="1050000"/>
         </p:xfrm>
         <a:graphic>
           <a:graphicData uri="http://schemas.openxmlformats.org/drawingml/2006/table">
@@ -16057,18 +16015,18 @@
                 <a:tableStyleId>{5C22544A-7EE6-4342-B048-85BDC9FD1C3A}</a:tableStyleId>
               </a:tblPr>
               <a:tblGrid>
-                <a:gridCol w="650000"/>
-                <a:gridCol w="411000"/>
-                <a:gridCol w="411000"/>
-                <a:gridCol w="411000"/>
-                <a:gridCol w="411000"/>
-                <a:gridCol w="411000"/>
-                <a:gridCol w="411000"/>
-                <a:gridCol w="411000"/>
-                <a:gridCol w="411000"/>
-                <a:gridCol w="412000"/>
+                <a:gridCol w="530000"/>
+                <a:gridCol w="382000"/>
+                <a:gridCol w="382000"/>
+                <a:gridCol w="382000"/>
+                <a:gridCol w="382000"/>
+                <a:gridCol w="382000"/>
+                <a:gridCol w="382000"/>
+                <a:gridCol w="382000"/>
+                <a:gridCol w="382000"/>
+                <a:gridCol w="382000"/>
               </a:tblGrid>
-              <a:tr h="157142">
+              <a:tr h="150000">
                 <a:tc>
                   <a:txBody>
                     <a:bodyPr wrap="square"/>
@@ -16107,7 +16065,7 @@
                           <a:ea typeface="Meiryo UI"/>
                           <a:latin typeface="Meiryo UI"/>
                         </a:rPr>
-                        <a:t>H28</a:t>
+                        <a:t>H29</a:t>
                       </a:r>
                     </a:p>
                   </a:txBody>
@@ -16131,7 +16089,7 @@
                           <a:ea typeface="Meiryo UI"/>
                           <a:latin typeface="Meiryo UI"/>
                         </a:rPr>
-                        <a:t>H29</a:t>
+                        <a:t>H30</a:t>
                       </a:r>
                     </a:p>
                   </a:txBody>
@@ -16155,7 +16113,7 @@
                           <a:ea typeface="Meiryo UI"/>
                           <a:latin typeface="Meiryo UI"/>
                         </a:rPr>
-                        <a:t>H30</a:t>
+                        <a:t>R元</a:t>
                       </a:r>
                     </a:p>
                   </a:txBody>
@@ -16179,7 +16137,7 @@
                           <a:ea typeface="Meiryo UI"/>
                           <a:latin typeface="Meiryo UI"/>
                         </a:rPr>
-                        <a:t>R元</a:t>
+                        <a:t>R2</a:t>
                       </a:r>
                     </a:p>
                   </a:txBody>
@@ -16203,7 +16161,7 @@
                           <a:ea typeface="Meiryo UI"/>
                           <a:latin typeface="Meiryo UI"/>
                         </a:rPr>
-                        <a:t>R2</a:t>
+                        <a:t>R3</a:t>
                       </a:r>
                     </a:p>
                   </a:txBody>
@@ -16227,7 +16185,7 @@
                           <a:ea typeface="Meiryo UI"/>
                           <a:latin typeface="Meiryo UI"/>
                         </a:rPr>
-                        <a:t>R3</a:t>
+                        <a:t>R4</a:t>
                       </a:r>
                     </a:p>
                   </a:txBody>
@@ -16251,7 +16209,7 @@
                           <a:ea typeface="Meiryo UI"/>
                           <a:latin typeface="Meiryo UI"/>
                         </a:rPr>
-                        <a:t>R4</a:t>
+                        <a:t>R5</a:t>
                       </a:r>
                     </a:p>
                   </a:txBody>
@@ -16275,7 +16233,7 @@
                           <a:ea typeface="Meiryo UI"/>
                           <a:latin typeface="Meiryo UI"/>
                         </a:rPr>
-                        <a:t>R5</a:t>
+                        <a:t>R6</a:t>
                       </a:r>
                     </a:p>
                   </a:txBody>
@@ -16299,7 +16257,7 @@
                           <a:ea typeface="Meiryo UI"/>
                           <a:latin typeface="Meiryo UI"/>
                         </a:rPr>
-                        <a:t>R6</a:t>
+                        <a:t>R7</a:t>
                       </a:r>
                     </a:p>
                   </a:txBody>
@@ -16310,7 +16268,7 @@
                   </a:tcPr>
                 </a:tc>
               </a:tr>
-              <a:tr h="157142">
+              <a:tr h="150000">
                 <a:tc>
                   <a:txBody>
                     <a:bodyPr wrap="square"/>
@@ -16325,7 +16283,7 @@
                           <a:ea typeface="Meiryo UI"/>
                           <a:latin typeface="Meiryo UI"/>
                         </a:rPr>
-                        <a:t>小学部計</a:t>
+                        <a:t>小学部</a:t>
                       </a:r>
                     </a:p>
                   </a:txBody>
@@ -16349,6 +16307,102 @@
                           <a:ea typeface="Meiryo UI"/>
                           <a:latin typeface="Meiryo UI"/>
                         </a:rPr>
+                        <a:t>1</a:t>
+                      </a:r>
+                    </a:p>
+                  </a:txBody>
+                  <a:tcPr marL="36000" marR="36000" marT="18000" marB="18000">
+                    <a:solidFill>
+                      <a:srgbClr val="FFFFFF"/>
+                    </a:solidFill>
+                  </a:tcPr>
+                </a:tc>
+                <a:tc>
+                  <a:txBody>
+                    <a:bodyPr wrap="square"/>
+                    <a:lstStyle/>
+                    <a:p>
+                      <a:pPr algn="ctr"/>
+                      <a:r>
+                        <a:rPr sz="700" b="0">
+                          <a:solidFill>
+                            <a:srgbClr val="333333"/>
+                          </a:solidFill>
+                          <a:ea typeface="Meiryo UI"/>
+                          <a:latin typeface="Meiryo UI"/>
+                        </a:rPr>
+                        <a:t>3</a:t>
+                      </a:r>
+                    </a:p>
+                  </a:txBody>
+                  <a:tcPr marL="36000" marR="36000" marT="18000" marB="18000">
+                    <a:solidFill>
+                      <a:srgbClr val="FFFFFF"/>
+                    </a:solidFill>
+                  </a:tcPr>
+                </a:tc>
+                <a:tc>
+                  <a:txBody>
+                    <a:bodyPr wrap="square"/>
+                    <a:lstStyle/>
+                    <a:p>
+                      <a:pPr algn="ctr"/>
+                      <a:r>
+                        <a:rPr sz="700" b="0">
+                          <a:solidFill>
+                            <a:srgbClr val="333333"/>
+                          </a:solidFill>
+                          <a:ea typeface="Meiryo UI"/>
+                          <a:latin typeface="Meiryo UI"/>
+                        </a:rPr>
+                        <a:t>1</a:t>
+                      </a:r>
+                    </a:p>
+                  </a:txBody>
+                  <a:tcPr marL="36000" marR="36000" marT="18000" marB="18000">
+                    <a:solidFill>
+                      <a:srgbClr val="FFFFFF"/>
+                    </a:solidFill>
+                  </a:tcPr>
+                </a:tc>
+                <a:tc>
+                  <a:txBody>
+                    <a:bodyPr wrap="square"/>
+                    <a:lstStyle/>
+                    <a:p>
+                      <a:pPr algn="ctr"/>
+                      <a:r>
+                        <a:rPr sz="700" b="0">
+                          <a:solidFill>
+                            <a:srgbClr val="333333"/>
+                          </a:solidFill>
+                          <a:ea typeface="Meiryo UI"/>
+                          <a:latin typeface="Meiryo UI"/>
+                        </a:rPr>
+                        <a:t>2</a:t>
+                      </a:r>
+                    </a:p>
+                  </a:txBody>
+                  <a:tcPr marL="36000" marR="36000" marT="18000" marB="18000">
+                    <a:solidFill>
+                      <a:srgbClr val="FFFFFF"/>
+                    </a:solidFill>
+                  </a:tcPr>
+                </a:tc>
+                <a:tc>
+                  <a:txBody>
+                    <a:bodyPr wrap="square"/>
+                    <a:lstStyle/>
+                    <a:p>
+                      <a:pPr algn="ctr"/>
+                      <a:r>
+                        <a:rPr sz="700" b="0">
+                          <a:solidFill>
+                            <a:srgbClr val="333333"/>
+                          </a:solidFill>
+                          <a:ea typeface="Meiryo UI"/>
+                          <a:latin typeface="Meiryo UI"/>
+                        </a:rPr>
                         <a:t>5</a:t>
                       </a:r>
                     </a:p>
@@ -16373,7 +16427,7 @@
                           <a:ea typeface="Meiryo UI"/>
                           <a:latin typeface="Meiryo UI"/>
                         </a:rPr>
-                        <a:t>1</a:t>
+                        <a:t>10</a:t>
                       </a:r>
                     </a:p>
                   </a:txBody>
@@ -16397,7 +16451,7 @@
                           <a:ea typeface="Meiryo UI"/>
                           <a:latin typeface="Meiryo UI"/>
                         </a:rPr>
-                        <a:t>3</a:t>
+                        <a:t>7</a:t>
                       </a:r>
                     </a:p>
                   </a:txBody>
@@ -16414,6 +16468,80 @@
                     <a:p>
                       <a:pPr algn="ctr"/>
                       <a:r>
+                        <a:rPr sz="700" b="1">
+                          <a:solidFill>
+                            <a:srgbClr val="C0504D"/>
+                          </a:solidFill>
+                          <a:ea typeface="Meiryo UI"/>
+                          <a:latin typeface="Meiryo UI"/>
+                        </a:rPr>
+                        <a:t>14</a:t>
+                      </a:r>
+                    </a:p>
+                  </a:txBody>
+                  <a:tcPr marL="36000" marR="36000" marT="18000" marB="18000">
+                    <a:solidFill>
+                      <a:srgbClr val="FBEEED"/>
+                    </a:solidFill>
+                  </a:tcPr>
+                </a:tc>
+                <a:tc>
+                  <a:txBody>
+                    <a:bodyPr wrap="square"/>
+                    <a:lstStyle/>
+                    <a:p>
+                      <a:pPr algn="ctr"/>
+                      <a:r>
+                        <a:rPr sz="700" b="1">
+                          <a:solidFill>
+                            <a:srgbClr val="C0504D"/>
+                          </a:solidFill>
+                          <a:ea typeface="Meiryo UI"/>
+                          <a:latin typeface="Meiryo UI"/>
+                        </a:rPr>
+                        <a:t>17</a:t>
+                      </a:r>
+                    </a:p>
+                  </a:txBody>
+                  <a:tcPr marL="36000" marR="36000" marT="18000" marB="18000">
+                    <a:solidFill>
+                      <a:srgbClr val="FBEEED"/>
+                    </a:solidFill>
+                  </a:tcPr>
+                </a:tc>
+              </a:tr>
+              <a:tr h="150000">
+                <a:tc>
+                  <a:txBody>
+                    <a:bodyPr wrap="square"/>
+                    <a:lstStyle/>
+                    <a:p>
+                      <a:pPr algn="ctr"/>
+                      <a:r>
+                        <a:rPr sz="700" b="1">
+                          <a:solidFill>
+                            <a:srgbClr val="333333"/>
+                          </a:solidFill>
+                          <a:ea typeface="Meiryo UI"/>
+                          <a:latin typeface="Meiryo UI"/>
+                        </a:rPr>
+                        <a:t>中学部</a:t>
+                      </a:r>
+                    </a:p>
+                  </a:txBody>
+                  <a:tcPr marL="36000" marR="36000" marT="18000" marB="18000">
+                    <a:solidFill>
+                      <a:srgbClr val="ECF3FA"/>
+                    </a:solidFill>
+                  </a:tcPr>
+                </a:tc>
+                <a:tc>
+                  <a:txBody>
+                    <a:bodyPr wrap="square"/>
+                    <a:lstStyle/>
+                    <a:p>
+                      <a:pPr algn="ctr"/>
+                      <a:r>
                         <a:rPr sz="700" b="0">
                           <a:solidFill>
                             <a:srgbClr val="333333"/>
@@ -16421,7 +16549,7 @@
                           <a:ea typeface="Meiryo UI"/>
                           <a:latin typeface="Meiryo UI"/>
                         </a:rPr>
-                        <a:t>1</a:t>
+                        <a:t>12</a:t>
                       </a:r>
                     </a:p>
                   </a:txBody>
@@ -16445,7 +16573,7 @@
                           <a:ea typeface="Meiryo UI"/>
                           <a:latin typeface="Meiryo UI"/>
                         </a:rPr>
-                        <a:t>2</a:t>
+                        <a:t>14</a:t>
                       </a:r>
                     </a:p>
                   </a:txBody>
@@ -16469,7 +16597,7 @@
                           <a:ea typeface="Meiryo UI"/>
                           <a:latin typeface="Meiryo UI"/>
                         </a:rPr>
-                        <a:t>5</a:t>
+                        <a:t>8</a:t>
                       </a:r>
                     </a:p>
                   </a:txBody>
@@ -16493,7 +16621,7 @@
                           <a:ea typeface="Meiryo UI"/>
                           <a:latin typeface="Meiryo UI"/>
                         </a:rPr>
-                        <a:t>10</a:t>
+                        <a:t>13</a:t>
                       </a:r>
                     </a:p>
                   </a:txBody>
@@ -16517,7 +16645,7 @@
                           <a:ea typeface="Meiryo UI"/>
                           <a:latin typeface="Meiryo UI"/>
                         </a:rPr>
-                        <a:t>7</a:t>
+                        <a:t>21</a:t>
                       </a:r>
                     </a:p>
                   </a:txBody>
@@ -16541,7 +16669,7 @@
                           <a:ea typeface="Meiryo UI"/>
                           <a:latin typeface="Meiryo UI"/>
                         </a:rPr>
-                        <a:t>14</a:t>
+                        <a:t>23</a:t>
                       </a:r>
                     </a:p>
                   </a:txBody>
@@ -16551,8 +16679,80 @@
                     </a:solidFill>
                   </a:tcPr>
                 </a:tc>
+                <a:tc>
+                  <a:txBody>
+                    <a:bodyPr wrap="square"/>
+                    <a:lstStyle/>
+                    <a:p>
+                      <a:pPr algn="ctr"/>
+                      <a:r>
+                        <a:rPr sz="700" b="0">
+                          <a:solidFill>
+                            <a:srgbClr val="333333"/>
+                          </a:solidFill>
+                          <a:ea typeface="Meiryo UI"/>
+                          <a:latin typeface="Meiryo UI"/>
+                        </a:rPr>
+                        <a:t>21</a:t>
+                      </a:r>
+                    </a:p>
+                  </a:txBody>
+                  <a:tcPr marL="36000" marR="36000" marT="18000" marB="18000">
+                    <a:solidFill>
+                      <a:srgbClr val="FFFFFF"/>
+                    </a:solidFill>
+                  </a:tcPr>
+                </a:tc>
+                <a:tc>
+                  <a:txBody>
+                    <a:bodyPr wrap="square"/>
+                    <a:lstStyle/>
+                    <a:p>
+                      <a:pPr algn="ctr"/>
+                      <a:r>
+                        <a:rPr sz="700" b="1">
+                          <a:solidFill>
+                            <a:srgbClr val="C0504D"/>
+                          </a:solidFill>
+                          <a:ea typeface="Meiryo UI"/>
+                          <a:latin typeface="Meiryo UI"/>
+                        </a:rPr>
+                        <a:t>18</a:t>
+                      </a:r>
+                    </a:p>
+                  </a:txBody>
+                  <a:tcPr marL="36000" marR="36000" marT="18000" marB="18000">
+                    <a:solidFill>
+                      <a:srgbClr val="FBEEED"/>
+                    </a:solidFill>
+                  </a:tcPr>
+                </a:tc>
+                <a:tc>
+                  <a:txBody>
+                    <a:bodyPr wrap="square"/>
+                    <a:lstStyle/>
+                    <a:p>
+                      <a:pPr algn="ctr"/>
+                      <a:r>
+                        <a:rPr sz="700" b="1">
+                          <a:solidFill>
+                            <a:srgbClr val="C0504D"/>
+                          </a:solidFill>
+                          <a:ea typeface="Meiryo UI"/>
+                          <a:latin typeface="Meiryo UI"/>
+                        </a:rPr>
+                        <a:t>17</a:t>
+                      </a:r>
+                    </a:p>
+                  </a:txBody>
+                  <a:tcPr marL="36000" marR="36000" marT="18000" marB="18000">
+                    <a:solidFill>
+                      <a:srgbClr val="FBEEED"/>
+                    </a:solidFill>
+                  </a:tcPr>
+                </a:tc>
               </a:tr>
-              <a:tr h="157142">
+              <a:tr h="150000">
                 <a:tc>
                   <a:txBody>
                     <a:bodyPr wrap="square"/>
@@ -16567,7 +16767,7 @@
                           <a:ea typeface="Meiryo UI"/>
                           <a:latin typeface="Meiryo UI"/>
                         </a:rPr>
-                        <a:t>中学部計</a:t>
+                        <a:t>全体計</a:t>
                       </a:r>
                     </a:p>
                   </a:txBody>
@@ -16591,7 +16791,7 @@
                           <a:ea typeface="Meiryo UI"/>
                           <a:latin typeface="Meiryo UI"/>
                         </a:rPr>
-                        <a:t>8</a:t>
+                        <a:t>13</a:t>
                       </a:r>
                     </a:p>
                   </a:txBody>
@@ -16615,7 +16815,7 @@
                           <a:ea typeface="Meiryo UI"/>
                           <a:latin typeface="Meiryo UI"/>
                         </a:rPr>
-                        <a:t>12</a:t>
+                        <a:t>17</a:t>
                       </a:r>
                     </a:p>
                   </a:txBody>
@@ -16639,7 +16839,7 @@
                           <a:ea typeface="Meiryo UI"/>
                           <a:latin typeface="Meiryo UI"/>
                         </a:rPr>
-                        <a:t>14</a:t>
+                        <a:t>9</a:t>
                       </a:r>
                     </a:p>
                   </a:txBody>
@@ -16663,7 +16863,7 @@
                           <a:ea typeface="Meiryo UI"/>
                           <a:latin typeface="Meiryo UI"/>
                         </a:rPr>
-                        <a:t>8</a:t>
+                        <a:t>15</a:t>
                       </a:r>
                     </a:p>
                   </a:txBody>
@@ -16687,7 +16887,7 @@
                           <a:ea typeface="Meiryo UI"/>
                           <a:latin typeface="Meiryo UI"/>
                         </a:rPr>
-                        <a:t>13</a:t>
+                        <a:t>26</a:t>
                       </a:r>
                     </a:p>
                   </a:txBody>
@@ -16711,7 +16911,7 @@
                           <a:ea typeface="Meiryo UI"/>
                           <a:latin typeface="Meiryo UI"/>
                         </a:rPr>
-                        <a:t>21</a:t>
+                        <a:t>33</a:t>
                       </a:r>
                     </a:p>
                   </a:txBody>
@@ -16735,7 +16935,7 @@
                           <a:ea typeface="Meiryo UI"/>
                           <a:latin typeface="Meiryo UI"/>
                         </a:rPr>
-                        <a:t>23</a:t>
+                        <a:t>28</a:t>
                       </a:r>
                     </a:p>
                   </a:txBody>
@@ -16752,6 +16952,80 @@
                     <a:p>
                       <a:pPr algn="ctr"/>
                       <a:r>
+                        <a:rPr sz="700" b="1">
+                          <a:solidFill>
+                            <a:srgbClr val="C0504D"/>
+                          </a:solidFill>
+                          <a:ea typeface="Meiryo UI"/>
+                          <a:latin typeface="Meiryo UI"/>
+                        </a:rPr>
+                        <a:t>32</a:t>
+                      </a:r>
+                    </a:p>
+                  </a:txBody>
+                  <a:tcPr marL="36000" marR="36000" marT="18000" marB="18000">
+                    <a:solidFill>
+                      <a:srgbClr val="FBEEED"/>
+                    </a:solidFill>
+                  </a:tcPr>
+                </a:tc>
+                <a:tc>
+                  <a:txBody>
+                    <a:bodyPr wrap="square"/>
+                    <a:lstStyle/>
+                    <a:p>
+                      <a:pPr algn="ctr"/>
+                      <a:r>
+                        <a:rPr sz="700" b="1">
+                          <a:solidFill>
+                            <a:srgbClr val="C0504D"/>
+                          </a:solidFill>
+                          <a:ea typeface="Meiryo UI"/>
+                          <a:latin typeface="Meiryo UI"/>
+                        </a:rPr>
+                        <a:t>34</a:t>
+                      </a:r>
+                    </a:p>
+                  </a:txBody>
+                  <a:tcPr marL="36000" marR="36000" marT="18000" marB="18000">
+                    <a:solidFill>
+                      <a:srgbClr val="FBEEED"/>
+                    </a:solidFill>
+                  </a:tcPr>
+                </a:tc>
+              </a:tr>
+              <a:tr h="150000">
+                <a:tc>
+                  <a:txBody>
+                    <a:bodyPr wrap="square"/>
+                    <a:lstStyle/>
+                    <a:p>
+                      <a:pPr algn="ctr"/>
+                      <a:r>
+                        <a:rPr sz="700" b="1">
+                          <a:solidFill>
+                            <a:srgbClr val="333333"/>
+                          </a:solidFill>
+                          <a:ea typeface="Meiryo UI"/>
+                          <a:latin typeface="Meiryo UI"/>
+                        </a:rPr>
+                        <a:t>中桜%</a:t>
+                      </a:r>
+                    </a:p>
+                  </a:txBody>
+                  <a:tcPr marL="36000" marR="36000" marT="18000" marB="18000">
+                    <a:solidFill>
+                      <a:srgbClr val="ECF3FA"/>
+                    </a:solidFill>
+                  </a:tcPr>
+                </a:tc>
+                <a:tc>
+                  <a:txBody>
+                    <a:bodyPr wrap="square"/>
+                    <a:lstStyle/>
+                    <a:p>
+                      <a:pPr algn="ctr"/>
+                      <a:r>
                         <a:rPr sz="700" b="0">
                           <a:solidFill>
                             <a:srgbClr val="333333"/>
@@ -16759,7 +17033,7 @@
                           <a:ea typeface="Meiryo UI"/>
                           <a:latin typeface="Meiryo UI"/>
                         </a:rPr>
-                        <a:t>21</a:t>
+                        <a:t>5.13</a:t>
                       </a:r>
                     </a:p>
                   </a:txBody>
@@ -16783,7 +17057,7 @@
                           <a:ea typeface="Meiryo UI"/>
                           <a:latin typeface="Meiryo UI"/>
                         </a:rPr>
-                        <a:t>18</a:t>
+                        <a:t>5.93</a:t>
                       </a:r>
                     </a:p>
                   </a:txBody>
@@ -16793,8 +17067,176 @@
                     </a:solidFill>
                   </a:tcPr>
                 </a:tc>
+                <a:tc>
+                  <a:txBody>
+                    <a:bodyPr wrap="square"/>
+                    <a:lstStyle/>
+                    <a:p>
+                      <a:pPr algn="ctr"/>
+                      <a:r>
+                        <a:rPr sz="700" b="0">
+                          <a:solidFill>
+                            <a:srgbClr val="333333"/>
+                          </a:solidFill>
+                          <a:ea typeface="Meiryo UI"/>
+                          <a:latin typeface="Meiryo UI"/>
+                        </a:rPr>
+                        <a:t>3.52</a:t>
+                      </a:r>
+                    </a:p>
+                  </a:txBody>
+                  <a:tcPr marL="36000" marR="36000" marT="18000" marB="18000">
+                    <a:solidFill>
+                      <a:srgbClr val="FFFFFF"/>
+                    </a:solidFill>
+                  </a:tcPr>
+                </a:tc>
+                <a:tc>
+                  <a:txBody>
+                    <a:bodyPr wrap="square"/>
+                    <a:lstStyle/>
+                    <a:p>
+                      <a:pPr algn="ctr"/>
+                      <a:r>
+                        <a:rPr sz="700" b="0">
+                          <a:solidFill>
+                            <a:srgbClr val="333333"/>
+                          </a:solidFill>
+                          <a:ea typeface="Meiryo UI"/>
+                          <a:latin typeface="Meiryo UI"/>
+                        </a:rPr>
+                        <a:t>5.63</a:t>
+                      </a:r>
+                    </a:p>
+                  </a:txBody>
+                  <a:tcPr marL="36000" marR="36000" marT="18000" marB="18000">
+                    <a:solidFill>
+                      <a:srgbClr val="FFFFFF"/>
+                    </a:solidFill>
+                  </a:tcPr>
+                </a:tc>
+                <a:tc>
+                  <a:txBody>
+                    <a:bodyPr wrap="square"/>
+                    <a:lstStyle/>
+                    <a:p>
+                      <a:pPr algn="ctr"/>
+                      <a:r>
+                        <a:rPr sz="700" b="0">
+                          <a:solidFill>
+                            <a:srgbClr val="333333"/>
+                          </a:solidFill>
+                          <a:ea typeface="Meiryo UI"/>
+                          <a:latin typeface="Meiryo UI"/>
+                        </a:rPr>
+                        <a:t>10.50</a:t>
+                      </a:r>
+                    </a:p>
+                  </a:txBody>
+                  <a:tcPr marL="36000" marR="36000" marT="18000" marB="18000">
+                    <a:solidFill>
+                      <a:srgbClr val="FFFFFF"/>
+                    </a:solidFill>
+                  </a:tcPr>
+                </a:tc>
+                <a:tc>
+                  <a:txBody>
+                    <a:bodyPr wrap="square"/>
+                    <a:lstStyle/>
+                    <a:p>
+                      <a:pPr algn="ctr"/>
+                      <a:r>
+                        <a:rPr sz="700" b="1">
+                          <a:solidFill>
+                            <a:srgbClr val="C0504D"/>
+                          </a:solidFill>
+                          <a:ea typeface="Meiryo UI"/>
+                          <a:latin typeface="Meiryo UI"/>
+                        </a:rPr>
+                        <a:t>11.11</a:t>
+                      </a:r>
+                    </a:p>
+                  </a:txBody>
+                  <a:tcPr marL="36000" marR="36000" marT="18000" marB="18000">
+                    <a:solidFill>
+                      <a:srgbClr val="FBEEED"/>
+                    </a:solidFill>
+                  </a:tcPr>
+                </a:tc>
+                <a:tc>
+                  <a:txBody>
+                    <a:bodyPr wrap="square"/>
+                    <a:lstStyle/>
+                    <a:p>
+                      <a:pPr algn="ctr"/>
+                      <a:r>
+                        <a:rPr sz="700" b="1">
+                          <a:solidFill>
+                            <a:srgbClr val="C0504D"/>
+                          </a:solidFill>
+                          <a:ea typeface="Meiryo UI"/>
+                          <a:latin typeface="Meiryo UI"/>
+                        </a:rPr>
+                        <a:t>10.40</a:t>
+                      </a:r>
+                    </a:p>
+                  </a:txBody>
+                  <a:tcPr marL="36000" marR="36000" marT="18000" marB="18000">
+                    <a:solidFill>
+                      <a:srgbClr val="FBEEED"/>
+                    </a:solidFill>
+                  </a:tcPr>
+                </a:tc>
+                <a:tc>
+                  <a:txBody>
+                    <a:bodyPr wrap="square"/>
+                    <a:lstStyle/>
+                    <a:p>
+                      <a:pPr algn="ctr"/>
+                      <a:r>
+                        <a:rPr sz="700" b="0">
+                          <a:solidFill>
+                            <a:srgbClr val="333333"/>
+                          </a:solidFill>
+                          <a:ea typeface="Meiryo UI"/>
+                          <a:latin typeface="Meiryo UI"/>
+                        </a:rPr>
+                        <a:t>-</a:t>
+                      </a:r>
+                    </a:p>
+                  </a:txBody>
+                  <a:tcPr marL="36000" marR="36000" marT="18000" marB="18000">
+                    <a:solidFill>
+                      <a:srgbClr val="FFFFFF"/>
+                    </a:solidFill>
+                  </a:tcPr>
+                </a:tc>
+                <a:tc>
+                  <a:txBody>
+                    <a:bodyPr wrap="square"/>
+                    <a:lstStyle/>
+                    <a:p>
+                      <a:pPr algn="ctr"/>
+                      <a:r>
+                        <a:rPr sz="700" b="0">
+                          <a:solidFill>
+                            <a:srgbClr val="333333"/>
+                          </a:solidFill>
+                          <a:ea typeface="Meiryo UI"/>
+                          <a:latin typeface="Meiryo UI"/>
+                        </a:rPr>
+                        <a:t>-</a:t>
+                      </a:r>
+                    </a:p>
+                  </a:txBody>
+                  <a:tcPr marL="36000" marR="36000" marT="18000" marB="18000">
+                    <a:solidFill>
+                      <a:srgbClr val="FFFFFF"/>
+                    </a:solidFill>
+                  </a:tcPr>
+                </a:tc>
               </a:tr>
-              <a:tr h="157142">
+              <a:tr h="150000">
                 <a:tc>
                   <a:txBody>
                     <a:bodyPr wrap="square"/>
@@ -16809,7 +17251,7 @@
                           <a:ea typeface="Meiryo UI"/>
                           <a:latin typeface="Meiryo UI"/>
                         </a:rPr>
-                        <a:t>全体計</a:t>
+                        <a:t>中区%</a:t>
                       </a:r>
                     </a:p>
                   </a:txBody>
@@ -16833,7 +17275,7 @@
                           <a:ea typeface="Meiryo UI"/>
                           <a:latin typeface="Meiryo UI"/>
                         </a:rPr>
-                        <a:t>13</a:t>
+                        <a:t>3.20</a:t>
                       </a:r>
                     </a:p>
                   </a:txBody>
@@ -16857,7 +17299,7 @@
                           <a:ea typeface="Meiryo UI"/>
                           <a:latin typeface="Meiryo UI"/>
                         </a:rPr>
-                        <a:t>13</a:t>
+                        <a:t>3.26</a:t>
                       </a:r>
                     </a:p>
                   </a:txBody>
@@ -16881,7 +17323,7 @@
                           <a:ea typeface="Meiryo UI"/>
                           <a:latin typeface="Meiryo UI"/>
                         </a:rPr>
-                        <a:t>17</a:t>
+                        <a:t>4.35</a:t>
                       </a:r>
                     </a:p>
                   </a:txBody>
@@ -16905,7 +17347,7 @@
                           <a:ea typeface="Meiryo UI"/>
                           <a:latin typeface="Meiryo UI"/>
                         </a:rPr>
-                        <a:t>9</a:t>
+                        <a:t>4.80</a:t>
                       </a:r>
                     </a:p>
                   </a:txBody>
@@ -16929,7 +17371,7 @@
                           <a:ea typeface="Meiryo UI"/>
                           <a:latin typeface="Meiryo UI"/>
                         </a:rPr>
-                        <a:t>15</a:t>
+                        <a:t>5.23</a:t>
                       </a:r>
                     </a:p>
                   </a:txBody>
@@ -16953,7 +17395,7 @@
                           <a:ea typeface="Meiryo UI"/>
                           <a:latin typeface="Meiryo UI"/>
                         </a:rPr>
-                        <a:t>26</a:t>
+                        <a:t>6.13</a:t>
                       </a:r>
                     </a:p>
                   </a:txBody>
@@ -16970,88 +17412,88 @@
                     <a:p>
                       <a:pPr algn="ctr"/>
                       <a:r>
+                        <a:rPr sz="700" b="0">
+                          <a:solidFill>
+                            <a:srgbClr val="333333"/>
+                          </a:solidFill>
+                          <a:ea typeface="Meiryo UI"/>
+                          <a:latin typeface="Meiryo UI"/>
+                        </a:rPr>
+                        <a:t>6.90</a:t>
+                      </a:r>
+                    </a:p>
+                  </a:txBody>
+                  <a:tcPr marL="36000" marR="36000" marT="18000" marB="18000">
+                    <a:solidFill>
+                      <a:srgbClr val="FFFFFF"/>
+                    </a:solidFill>
+                  </a:tcPr>
+                </a:tc>
+                <a:tc>
+                  <a:txBody>
+                    <a:bodyPr wrap="square"/>
+                    <a:lstStyle/>
+                    <a:p>
+                      <a:pPr algn="ctr"/>
+                      <a:r>
+                        <a:rPr sz="700" b="0">
+                          <a:solidFill>
+                            <a:srgbClr val="333333"/>
+                          </a:solidFill>
+                          <a:ea typeface="Meiryo UI"/>
+                          <a:latin typeface="Meiryo UI"/>
+                        </a:rPr>
+                        <a:t>-</a:t>
+                      </a:r>
+                    </a:p>
+                  </a:txBody>
+                  <a:tcPr marL="36000" marR="36000" marT="18000" marB="18000">
+                    <a:solidFill>
+                      <a:srgbClr val="FFFFFF"/>
+                    </a:solidFill>
+                  </a:tcPr>
+                </a:tc>
+                <a:tc>
+                  <a:txBody>
+                    <a:bodyPr wrap="square"/>
+                    <a:lstStyle/>
+                    <a:p>
+                      <a:pPr algn="ctr"/>
+                      <a:r>
+                        <a:rPr sz="700" b="0">
+                          <a:solidFill>
+                            <a:srgbClr val="333333"/>
+                          </a:solidFill>
+                          <a:ea typeface="Meiryo UI"/>
+                          <a:latin typeface="Meiryo UI"/>
+                        </a:rPr>
+                        <a:t>-</a:t>
+                      </a:r>
+                    </a:p>
+                  </a:txBody>
+                  <a:tcPr marL="36000" marR="36000" marT="18000" marB="18000">
+                    <a:solidFill>
+                      <a:srgbClr val="FFFFFF"/>
+                    </a:solidFill>
+                  </a:tcPr>
+                </a:tc>
+              </a:tr>
+              <a:tr h="150000">
+                <a:tc>
+                  <a:txBody>
+                    <a:bodyPr wrap="square"/>
+                    <a:lstStyle/>
+                    <a:p>
+                      <a:pPr algn="ctr"/>
+                      <a:r>
                         <a:rPr sz="700" b="1">
                           <a:solidFill>
-                            <a:srgbClr val="C0504D"/>
-                          </a:solidFill>
-                          <a:ea typeface="Meiryo UI"/>
-                          <a:latin typeface="Meiryo UI"/>
-                        </a:rPr>
-                        <a:t>33</a:t>
-                      </a:r>
-                    </a:p>
-                  </a:txBody>
-                  <a:tcPr marL="36000" marR="36000" marT="18000" marB="18000">
-                    <a:solidFill>
-                      <a:srgbClr val="FBEEED"/>
-                    </a:solidFill>
-                  </a:tcPr>
-                </a:tc>
-                <a:tc>
-                  <a:txBody>
-                    <a:bodyPr wrap="square"/>
-                    <a:lstStyle/>
-                    <a:p>
-                      <a:pPr algn="ctr"/>
-                      <a:r>
-                        <a:rPr sz="700" b="1">
-                          <a:solidFill>
-                            <a:srgbClr val="C0504D"/>
-                          </a:solidFill>
-                          <a:ea typeface="Meiryo UI"/>
-                          <a:latin typeface="Meiryo UI"/>
-                        </a:rPr>
-                        <a:t>28</a:t>
-                      </a:r>
-                    </a:p>
-                  </a:txBody>
-                  <a:tcPr marL="36000" marR="36000" marT="18000" marB="18000">
-                    <a:solidFill>
-                      <a:srgbClr val="FBEEED"/>
-                    </a:solidFill>
-                  </a:tcPr>
-                </a:tc>
-                <a:tc>
-                  <a:txBody>
-                    <a:bodyPr wrap="square"/>
-                    <a:lstStyle/>
-                    <a:p>
-                      <a:pPr algn="ctr"/>
-                      <a:r>
-                        <a:rPr sz="700" b="1">
-                          <a:solidFill>
-                            <a:srgbClr val="C0504D"/>
-                          </a:solidFill>
-                          <a:ea typeface="Meiryo UI"/>
-                          <a:latin typeface="Meiryo UI"/>
-                        </a:rPr>
-                        <a:t>32</a:t>
-                      </a:r>
-                    </a:p>
-                  </a:txBody>
-                  <a:tcPr marL="36000" marR="36000" marT="18000" marB="18000">
-                    <a:solidFill>
-                      <a:srgbClr val="FBEEED"/>
-                    </a:solidFill>
-                  </a:tcPr>
-                </a:tc>
-              </a:tr>
-              <a:tr h="157142">
-                <a:tc>
-                  <a:txBody>
-                    <a:bodyPr wrap="square"/>
-                    <a:lstStyle/>
-                    <a:p>
-                      <a:pPr algn="ctr"/>
-                      <a:r>
-                        <a:rPr sz="700" b="1">
-                          <a:solidFill>
-                            <a:srgbClr val="333333"/>
-                          </a:solidFill>
-                          <a:ea typeface="Meiryo UI"/>
-                          <a:latin typeface="Meiryo UI"/>
-                        </a:rPr>
-                        <a:t>中・桜%</a:t>
+                            <a:srgbClr val="333333"/>
+                          </a:solidFill>
+                          <a:ea typeface="Meiryo UI"/>
+                          <a:latin typeface="Meiryo UI"/>
+                        </a:rPr>
+                        <a:t>中都%</a:t>
                       </a:r>
                     </a:p>
                   </a:txBody>
@@ -17075,7 +17517,7 @@
                           <a:ea typeface="Meiryo UI"/>
                           <a:latin typeface="Meiryo UI"/>
                         </a:rPr>
-                        <a:t>3.38</a:t>
+                        <a:t>3.78</a:t>
                       </a:r>
                     </a:p>
                   </a:txBody>
@@ -17099,7 +17541,7 @@
                           <a:ea typeface="Meiryo UI"/>
                           <a:latin typeface="Meiryo UI"/>
                         </a:rPr>
-                        <a:t>5.13</a:t>
+                        <a:t>4.33</a:t>
                       </a:r>
                     </a:p>
                   </a:txBody>
@@ -17123,7 +17565,7 @@
                           <a:ea typeface="Meiryo UI"/>
                           <a:latin typeface="Meiryo UI"/>
                         </a:rPr>
-                        <a:t>5.93</a:t>
+                        <a:t>4.76</a:t>
                       </a:r>
                     </a:p>
                   </a:txBody>
@@ -17147,7 +17589,7 @@
                           <a:ea typeface="Meiryo UI"/>
                           <a:latin typeface="Meiryo UI"/>
                         </a:rPr>
-                        <a:t>3.52</a:t>
+                        <a:t>4.93</a:t>
                       </a:r>
                     </a:p>
                   </a:txBody>
@@ -17171,7 +17613,7 @@
                           <a:ea typeface="Meiryo UI"/>
                           <a:latin typeface="Meiryo UI"/>
                         </a:rPr>
-                        <a:t>5.63</a:t>
+                        <a:t>5.76</a:t>
                       </a:r>
                     </a:p>
                   </a:txBody>
@@ -17188,78 +17630,6 @@
                     <a:p>
                       <a:pPr algn="ctr"/>
                       <a:r>
-                        <a:rPr sz="700" b="1">
-                          <a:solidFill>
-                            <a:srgbClr val="C0504D"/>
-                          </a:solidFill>
-                          <a:ea typeface="Meiryo UI"/>
-                          <a:latin typeface="Meiryo UI"/>
-                        </a:rPr>
-                        <a:t>10.50</a:t>
-                      </a:r>
-                    </a:p>
-                  </a:txBody>
-                  <a:tcPr marL="36000" marR="36000" marT="18000" marB="18000">
-                    <a:solidFill>
-                      <a:srgbClr val="FBEEED"/>
-                    </a:solidFill>
-                  </a:tcPr>
-                </a:tc>
-                <a:tc>
-                  <a:txBody>
-                    <a:bodyPr wrap="square"/>
-                    <a:lstStyle/>
-                    <a:p>
-                      <a:pPr algn="ctr"/>
-                      <a:r>
-                        <a:rPr sz="700" b="1">
-                          <a:solidFill>
-                            <a:srgbClr val="C0504D"/>
-                          </a:solidFill>
-                          <a:ea typeface="Meiryo UI"/>
-                          <a:latin typeface="Meiryo UI"/>
-                        </a:rPr>
-                        <a:t>11.11</a:t>
-                      </a:r>
-                    </a:p>
-                  </a:txBody>
-                  <a:tcPr marL="36000" marR="36000" marT="18000" marB="18000">
-                    <a:solidFill>
-                      <a:srgbClr val="FBEEED"/>
-                    </a:solidFill>
-                  </a:tcPr>
-                </a:tc>
-                <a:tc>
-                  <a:txBody>
-                    <a:bodyPr wrap="square"/>
-                    <a:lstStyle/>
-                    <a:p>
-                      <a:pPr algn="ctr"/>
-                      <a:r>
-                        <a:rPr sz="700" b="1">
-                          <a:solidFill>
-                            <a:srgbClr val="C0504D"/>
-                          </a:solidFill>
-                          <a:ea typeface="Meiryo UI"/>
-                          <a:latin typeface="Meiryo UI"/>
-                        </a:rPr>
-                        <a:t>10.40</a:t>
-                      </a:r>
-                    </a:p>
-                  </a:txBody>
-                  <a:tcPr marL="36000" marR="36000" marT="18000" marB="18000">
-                    <a:solidFill>
-                      <a:srgbClr val="FBEEED"/>
-                    </a:solidFill>
-                  </a:tcPr>
-                </a:tc>
-                <a:tc>
-                  <a:txBody>
-                    <a:bodyPr wrap="square"/>
-                    <a:lstStyle/>
-                    <a:p>
-                      <a:pPr algn="ctr"/>
-                      <a:r>
                         <a:rPr sz="700" b="0">
                           <a:solidFill>
                             <a:srgbClr val="333333"/>
@@ -17267,467 +17637,55 @@
                           <a:ea typeface="Meiryo UI"/>
                           <a:latin typeface="Meiryo UI"/>
                         </a:rPr>
+                        <a:t>6.85</a:t>
+                      </a:r>
+                    </a:p>
+                  </a:txBody>
+                  <a:tcPr marL="36000" marR="36000" marT="18000" marB="18000">
+                    <a:solidFill>
+                      <a:srgbClr val="FFFFFF"/>
+                    </a:solidFill>
+                  </a:tcPr>
+                </a:tc>
+                <a:tc>
+                  <a:txBody>
+                    <a:bodyPr wrap="square"/>
+                    <a:lstStyle/>
+                    <a:p>
+                      <a:pPr algn="ctr"/>
+                      <a:r>
+                        <a:rPr sz="700" b="0">
+                          <a:solidFill>
+                            <a:srgbClr val="333333"/>
+                          </a:solidFill>
+                          <a:ea typeface="Meiryo UI"/>
+                          <a:latin typeface="Meiryo UI"/>
+                        </a:rPr>
+                        <a:t>7.80</a:t>
+                      </a:r>
+                    </a:p>
+                  </a:txBody>
+                  <a:tcPr marL="36000" marR="36000" marT="18000" marB="18000">
+                    <a:solidFill>
+                      <a:srgbClr val="FFFFFF"/>
+                    </a:solidFill>
+                  </a:tcPr>
+                </a:tc>
+                <a:tc>
+                  <a:txBody>
+                    <a:bodyPr wrap="square"/>
+                    <a:lstStyle/>
+                    <a:p>
+                      <a:pPr algn="ctr"/>
+                      <a:r>
+                        <a:rPr sz="700" b="0">
+                          <a:solidFill>
+                            <a:srgbClr val="333333"/>
+                          </a:solidFill>
+                          <a:ea typeface="Meiryo UI"/>
+                          <a:latin typeface="Meiryo UI"/>
+                        </a:rPr>
                         <a:t>-</a:t>
-                      </a:r>
-                    </a:p>
-                  </a:txBody>
-                  <a:tcPr marL="36000" marR="36000" marT="18000" marB="18000">
-                    <a:solidFill>
-                      <a:srgbClr val="FFFFFF"/>
-                    </a:solidFill>
-                  </a:tcPr>
-                </a:tc>
-              </a:tr>
-              <a:tr h="157142">
-                <a:tc>
-                  <a:txBody>
-                    <a:bodyPr wrap="square"/>
-                    <a:lstStyle/>
-                    <a:p>
-                      <a:pPr algn="ctr"/>
-                      <a:r>
-                        <a:rPr sz="700" b="1">
-                          <a:solidFill>
-                            <a:srgbClr val="333333"/>
-                          </a:solidFill>
-                          <a:ea typeface="Meiryo UI"/>
-                          <a:latin typeface="Meiryo UI"/>
-                        </a:rPr>
-                        <a:t>中・区%</a:t>
-                      </a:r>
-                    </a:p>
-                  </a:txBody>
-                  <a:tcPr marL="36000" marR="36000" marT="18000" marB="18000">
-                    <a:solidFill>
-                      <a:srgbClr val="ECF3FA"/>
-                    </a:solidFill>
-                  </a:tcPr>
-                </a:tc>
-                <a:tc>
-                  <a:txBody>
-                    <a:bodyPr wrap="square"/>
-                    <a:lstStyle/>
-                    <a:p>
-                      <a:pPr algn="ctr"/>
-                      <a:r>
-                        <a:rPr sz="700" b="0">
-                          <a:solidFill>
-                            <a:srgbClr val="333333"/>
-                          </a:solidFill>
-                          <a:ea typeface="Meiryo UI"/>
-                          <a:latin typeface="Meiryo UI"/>
-                        </a:rPr>
-                        <a:t>3.42</a:t>
-                      </a:r>
-                    </a:p>
-                  </a:txBody>
-                  <a:tcPr marL="36000" marR="36000" marT="18000" marB="18000">
-                    <a:solidFill>
-                      <a:srgbClr val="FFFFFF"/>
-                    </a:solidFill>
-                  </a:tcPr>
-                </a:tc>
-                <a:tc>
-                  <a:txBody>
-                    <a:bodyPr wrap="square"/>
-                    <a:lstStyle/>
-                    <a:p>
-                      <a:pPr algn="ctr"/>
-                      <a:r>
-                        <a:rPr sz="700" b="0">
-                          <a:solidFill>
-                            <a:srgbClr val="333333"/>
-                          </a:solidFill>
-                          <a:ea typeface="Meiryo UI"/>
-                          <a:latin typeface="Meiryo UI"/>
-                        </a:rPr>
-                        <a:t>3.20</a:t>
-                      </a:r>
-                    </a:p>
-                  </a:txBody>
-                  <a:tcPr marL="36000" marR="36000" marT="18000" marB="18000">
-                    <a:solidFill>
-                      <a:srgbClr val="FFFFFF"/>
-                    </a:solidFill>
-                  </a:tcPr>
-                </a:tc>
-                <a:tc>
-                  <a:txBody>
-                    <a:bodyPr wrap="square"/>
-                    <a:lstStyle/>
-                    <a:p>
-                      <a:pPr algn="ctr"/>
-                      <a:r>
-                        <a:rPr sz="700" b="0">
-                          <a:solidFill>
-                            <a:srgbClr val="333333"/>
-                          </a:solidFill>
-                          <a:ea typeface="Meiryo UI"/>
-                          <a:latin typeface="Meiryo UI"/>
-                        </a:rPr>
-                        <a:t>3.26</a:t>
-                      </a:r>
-                    </a:p>
-                  </a:txBody>
-                  <a:tcPr marL="36000" marR="36000" marT="18000" marB="18000">
-                    <a:solidFill>
-                      <a:srgbClr val="FFFFFF"/>
-                    </a:solidFill>
-                  </a:tcPr>
-                </a:tc>
-                <a:tc>
-                  <a:txBody>
-                    <a:bodyPr wrap="square"/>
-                    <a:lstStyle/>
-                    <a:p>
-                      <a:pPr algn="ctr"/>
-                      <a:r>
-                        <a:rPr sz="700" b="0">
-                          <a:solidFill>
-                            <a:srgbClr val="333333"/>
-                          </a:solidFill>
-                          <a:ea typeface="Meiryo UI"/>
-                          <a:latin typeface="Meiryo UI"/>
-                        </a:rPr>
-                        <a:t>4.35</a:t>
-                      </a:r>
-                    </a:p>
-                  </a:txBody>
-                  <a:tcPr marL="36000" marR="36000" marT="18000" marB="18000">
-                    <a:solidFill>
-                      <a:srgbClr val="FFFFFF"/>
-                    </a:solidFill>
-                  </a:tcPr>
-                </a:tc>
-                <a:tc>
-                  <a:txBody>
-                    <a:bodyPr wrap="square"/>
-                    <a:lstStyle/>
-                    <a:p>
-                      <a:pPr algn="ctr"/>
-                      <a:r>
-                        <a:rPr sz="700" b="0">
-                          <a:solidFill>
-                            <a:srgbClr val="333333"/>
-                          </a:solidFill>
-                          <a:ea typeface="Meiryo UI"/>
-                          <a:latin typeface="Meiryo UI"/>
-                        </a:rPr>
-                        <a:t>4.80</a:t>
-                      </a:r>
-                    </a:p>
-                  </a:txBody>
-                  <a:tcPr marL="36000" marR="36000" marT="18000" marB="18000">
-                    <a:solidFill>
-                      <a:srgbClr val="FFFFFF"/>
-                    </a:solidFill>
-                  </a:tcPr>
-                </a:tc>
-                <a:tc>
-                  <a:txBody>
-                    <a:bodyPr wrap="square"/>
-                    <a:lstStyle/>
-                    <a:p>
-                      <a:pPr algn="ctr"/>
-                      <a:r>
-                        <a:rPr sz="700" b="0">
-                          <a:solidFill>
-                            <a:srgbClr val="333333"/>
-                          </a:solidFill>
-                          <a:ea typeface="Meiryo UI"/>
-                          <a:latin typeface="Meiryo UI"/>
-                        </a:rPr>
-                        <a:t>5.23</a:t>
-                      </a:r>
-                    </a:p>
-                  </a:txBody>
-                  <a:tcPr marL="36000" marR="36000" marT="18000" marB="18000">
-                    <a:solidFill>
-                      <a:srgbClr val="FFFFFF"/>
-                    </a:solidFill>
-                  </a:tcPr>
-                </a:tc>
-                <a:tc>
-                  <a:txBody>
-                    <a:bodyPr wrap="square"/>
-                    <a:lstStyle/>
-                    <a:p>
-                      <a:pPr algn="ctr"/>
-                      <a:r>
-                        <a:rPr sz="700" b="0">
-                          <a:solidFill>
-                            <a:srgbClr val="333333"/>
-                          </a:solidFill>
-                          <a:ea typeface="Meiryo UI"/>
-                          <a:latin typeface="Meiryo UI"/>
-                        </a:rPr>
-                        <a:t>6.13</a:t>
-                      </a:r>
-                    </a:p>
-                  </a:txBody>
-                  <a:tcPr marL="36000" marR="36000" marT="18000" marB="18000">
-                    <a:solidFill>
-                      <a:srgbClr val="FFFFFF"/>
-                    </a:solidFill>
-                  </a:tcPr>
-                </a:tc>
-                <a:tc>
-                  <a:txBody>
-                    <a:bodyPr wrap="square"/>
-                    <a:lstStyle/>
-                    <a:p>
-                      <a:pPr algn="ctr"/>
-                      <a:r>
-                        <a:rPr sz="700" b="0">
-                          <a:solidFill>
-                            <a:srgbClr val="333333"/>
-                          </a:solidFill>
-                          <a:ea typeface="Meiryo UI"/>
-                          <a:latin typeface="Meiryo UI"/>
-                        </a:rPr>
-                        <a:t>6.90</a:t>
-                      </a:r>
-                    </a:p>
-                  </a:txBody>
-                  <a:tcPr marL="36000" marR="36000" marT="18000" marB="18000">
-                    <a:solidFill>
-                      <a:srgbClr val="FFFFFF"/>
-                    </a:solidFill>
-                  </a:tcPr>
-                </a:tc>
-                <a:tc>
-                  <a:txBody>
-                    <a:bodyPr wrap="square"/>
-                    <a:lstStyle/>
-                    <a:p>
-                      <a:pPr algn="ctr"/>
-                      <a:r>
-                        <a:rPr sz="700" b="0">
-                          <a:solidFill>
-                            <a:srgbClr val="333333"/>
-                          </a:solidFill>
-                          <a:ea typeface="Meiryo UI"/>
-                          <a:latin typeface="Meiryo UI"/>
-                        </a:rPr>
-                        <a:t>-</a:t>
-                      </a:r>
-                    </a:p>
-                  </a:txBody>
-                  <a:tcPr marL="36000" marR="36000" marT="18000" marB="18000">
-                    <a:solidFill>
-                      <a:srgbClr val="FFFFFF"/>
-                    </a:solidFill>
-                  </a:tcPr>
-                </a:tc>
-              </a:tr>
-              <a:tr h="157148">
-                <a:tc>
-                  <a:txBody>
-                    <a:bodyPr wrap="square"/>
-                    <a:lstStyle/>
-                    <a:p>
-                      <a:pPr algn="ctr"/>
-                      <a:r>
-                        <a:rPr sz="700" b="1">
-                          <a:solidFill>
-                            <a:srgbClr val="333333"/>
-                          </a:solidFill>
-                          <a:ea typeface="Meiryo UI"/>
-                          <a:latin typeface="Meiryo UI"/>
-                        </a:rPr>
-                        <a:t>中・都%</a:t>
-                      </a:r>
-                    </a:p>
-                  </a:txBody>
-                  <a:tcPr marL="36000" marR="36000" marT="18000" marB="18000">
-                    <a:solidFill>
-                      <a:srgbClr val="ECF3FA"/>
-                    </a:solidFill>
-                  </a:tcPr>
-                </a:tc>
-                <a:tc>
-                  <a:txBody>
-                    <a:bodyPr wrap="square"/>
-                    <a:lstStyle/>
-                    <a:p>
-                      <a:pPr algn="ctr"/>
-                      <a:r>
-                        <a:rPr sz="700" b="0">
-                          <a:solidFill>
-                            <a:srgbClr val="333333"/>
-                          </a:solidFill>
-                          <a:ea typeface="Meiryo UI"/>
-                          <a:latin typeface="Meiryo UI"/>
-                        </a:rPr>
-                        <a:t>3.6</a:t>
-                      </a:r>
-                    </a:p>
-                  </a:txBody>
-                  <a:tcPr marL="36000" marR="36000" marT="18000" marB="18000">
-                    <a:solidFill>
-                      <a:srgbClr val="FFFFFF"/>
-                    </a:solidFill>
-                  </a:tcPr>
-                </a:tc>
-                <a:tc>
-                  <a:txBody>
-                    <a:bodyPr wrap="square"/>
-                    <a:lstStyle/>
-                    <a:p>
-                      <a:pPr algn="ctr"/>
-                      <a:r>
-                        <a:rPr sz="700" b="0">
-                          <a:solidFill>
-                            <a:srgbClr val="333333"/>
-                          </a:solidFill>
-                          <a:ea typeface="Meiryo UI"/>
-                          <a:latin typeface="Meiryo UI"/>
-                        </a:rPr>
-                        <a:t>3.78</a:t>
-                      </a:r>
-                    </a:p>
-                  </a:txBody>
-                  <a:tcPr marL="36000" marR="36000" marT="18000" marB="18000">
-                    <a:solidFill>
-                      <a:srgbClr val="FFFFFF"/>
-                    </a:solidFill>
-                  </a:tcPr>
-                </a:tc>
-                <a:tc>
-                  <a:txBody>
-                    <a:bodyPr wrap="square"/>
-                    <a:lstStyle/>
-                    <a:p>
-                      <a:pPr algn="ctr"/>
-                      <a:r>
-                        <a:rPr sz="700" b="0">
-                          <a:solidFill>
-                            <a:srgbClr val="333333"/>
-                          </a:solidFill>
-                          <a:ea typeface="Meiryo UI"/>
-                          <a:latin typeface="Meiryo UI"/>
-                        </a:rPr>
-                        <a:t>4.33</a:t>
-                      </a:r>
-                    </a:p>
-                  </a:txBody>
-                  <a:tcPr marL="36000" marR="36000" marT="18000" marB="18000">
-                    <a:solidFill>
-                      <a:srgbClr val="FFFFFF"/>
-                    </a:solidFill>
-                  </a:tcPr>
-                </a:tc>
-                <a:tc>
-                  <a:txBody>
-                    <a:bodyPr wrap="square"/>
-                    <a:lstStyle/>
-                    <a:p>
-                      <a:pPr algn="ctr"/>
-                      <a:r>
-                        <a:rPr sz="700" b="0">
-                          <a:solidFill>
-                            <a:srgbClr val="333333"/>
-                          </a:solidFill>
-                          <a:ea typeface="Meiryo UI"/>
-                          <a:latin typeface="Meiryo UI"/>
-                        </a:rPr>
-                        <a:t>4.76</a:t>
-                      </a:r>
-                    </a:p>
-                  </a:txBody>
-                  <a:tcPr marL="36000" marR="36000" marT="18000" marB="18000">
-                    <a:solidFill>
-                      <a:srgbClr val="FFFFFF"/>
-                    </a:solidFill>
-                  </a:tcPr>
-                </a:tc>
-                <a:tc>
-                  <a:txBody>
-                    <a:bodyPr wrap="square"/>
-                    <a:lstStyle/>
-                    <a:p>
-                      <a:pPr algn="ctr"/>
-                      <a:r>
-                        <a:rPr sz="700" b="0">
-                          <a:solidFill>
-                            <a:srgbClr val="333333"/>
-                          </a:solidFill>
-                          <a:ea typeface="Meiryo UI"/>
-                          <a:latin typeface="Meiryo UI"/>
-                        </a:rPr>
-                        <a:t>4.93</a:t>
-                      </a:r>
-                    </a:p>
-                  </a:txBody>
-                  <a:tcPr marL="36000" marR="36000" marT="18000" marB="18000">
-                    <a:solidFill>
-                      <a:srgbClr val="FFFFFF"/>
-                    </a:solidFill>
-                  </a:tcPr>
-                </a:tc>
-                <a:tc>
-                  <a:txBody>
-                    <a:bodyPr wrap="square"/>
-                    <a:lstStyle/>
-                    <a:p>
-                      <a:pPr algn="ctr"/>
-                      <a:r>
-                        <a:rPr sz="700" b="0">
-                          <a:solidFill>
-                            <a:srgbClr val="333333"/>
-                          </a:solidFill>
-                          <a:ea typeface="Meiryo UI"/>
-                          <a:latin typeface="Meiryo UI"/>
-                        </a:rPr>
-                        <a:t>5.76</a:t>
-                      </a:r>
-                    </a:p>
-                  </a:txBody>
-                  <a:tcPr marL="36000" marR="36000" marT="18000" marB="18000">
-                    <a:solidFill>
-                      <a:srgbClr val="FFFFFF"/>
-                    </a:solidFill>
-                  </a:tcPr>
-                </a:tc>
-                <a:tc>
-                  <a:txBody>
-                    <a:bodyPr wrap="square"/>
-                    <a:lstStyle/>
-                    <a:p>
-                      <a:pPr algn="ctr"/>
-                      <a:r>
-                        <a:rPr sz="700" b="0">
-                          <a:solidFill>
-                            <a:srgbClr val="333333"/>
-                          </a:solidFill>
-                          <a:ea typeface="Meiryo UI"/>
-                          <a:latin typeface="Meiryo UI"/>
-                        </a:rPr>
-                        <a:t>6.85</a:t>
-                      </a:r>
-                    </a:p>
-                  </a:txBody>
-                  <a:tcPr marL="36000" marR="36000" marT="18000" marB="18000">
-                    <a:solidFill>
-                      <a:srgbClr val="FFFFFF"/>
-                    </a:solidFill>
-                  </a:tcPr>
-                </a:tc>
-                <a:tc>
-                  <a:txBody>
-                    <a:bodyPr wrap="square"/>
-                    <a:lstStyle/>
-                    <a:p>
-                      <a:pPr algn="ctr"/>
-                      <a:r>
-                        <a:rPr sz="700" b="0">
-                          <a:solidFill>
-                            <a:srgbClr val="333333"/>
-                          </a:solidFill>
-                          <a:ea typeface="Meiryo UI"/>
-                          <a:latin typeface="Meiryo UI"/>
-                        </a:rPr>
-                        <a:t>7.80</a:t>
                       </a:r>
                     </a:p>
                   </a:txBody>
@@ -17768,47 +17726,818 @@
       </p:graphicFrame>
       <p:sp>
         <p:nvSpPr>
-          <p:cNvPr id="17" name="TextBox 16"/>
-          <p:cNvSpPr txBox="1"/>
+          <p:cNvPr id="16" name="Rectangle 15"/>
+          <p:cNvSpPr/>
           <p:nvPr/>
         </p:nvSpPr>
         <p:spPr>
           <a:xfrm>
-            <a:off x="4610000" y="3320000"/>
-            <a:ext cx="4350000" cy="220000"/>
+            <a:off x="180000" y="2610000"/>
+            <a:ext cx="4350000" cy="240000"/>
           </a:xfrm>
           <a:prstGeom prst="rect">
             <a:avLst/>
           </a:prstGeom>
           <a:solidFill>
-            <a:srgbClr val="FBEEED"/>
+            <a:srgbClr val="4F81BD"/>
           </a:solidFill>
-          <a:ln w="6350">
-            <a:solidFill>
-              <a:srgbClr val="C0504D"/>
-            </a:solidFill>
+          <a:ln>
+            <a:noFill/>
           </a:ln>
+          <a:effectLst/>
         </p:spPr>
-        <p:txBody>
-          <a:bodyPr wrap="square" lIns="72000" rIns="72000" tIns="36000" bIns="36000" anchor="t">
-            <a:spAutoFit/>
-          </a:bodyPr>
+        <p:style>
+          <a:lnRef idx="1">
+            <a:schemeClr val="accent1"/>
+          </a:lnRef>
+          <a:fillRef idx="3">
+            <a:schemeClr val="accent1"/>
+          </a:fillRef>
+          <a:effectRef idx="2">
+            <a:schemeClr val="accent1"/>
+          </a:effectRef>
+          <a:fontRef idx="minor">
+            <a:schemeClr val="lt1"/>
+          </a:fontRef>
+        </p:style>
+        <p:txBody>
+          <a:bodyPr rtlCol="0" anchor="ctr" lIns="90000" rIns="60000" tIns="10000" bIns="10000"/>
           <a:lstStyle/>
           <a:p>
             <a:pPr algn="l"/>
             <a:r>
-              <a:rPr sz="800" b="0">
+              <a:rPr sz="900" b="1">
                 <a:solidFill>
-                  <a:srgbClr val="C0504D"/>
+                  <a:srgbClr val="FFFFFF"/>
                 </a:solidFill>
                 <a:ea typeface="Meiryo UI"/>
                 <a:latin typeface="Meiryo UI"/>
               </a:rPr>
-              <a:t>※ R6は未公表値。前年比+4名（過去最多級）。外部生不登校(R2-R5):2,3,3,0名で大半は内部生</a:t>
-            </a:r>
-          </a:p>
-        </p:txBody>
-      </p:sp>
+              <a:t>  体力テスト R6→R7 順位推移 ★R7改善傾向</a:t>
+            </a:r>
+          </a:p>
+        </p:txBody>
+      </p:sp>
+      <p:graphicFrame>
+        <p:nvGraphicFramePr>
+          <p:cNvPr id="17" name="Table 16"/>
+          <p:cNvGraphicFramePr>
+            <a:graphicFrameLocks noGrp="1"/>
+          </p:cNvGraphicFramePr>
+          <p:nvPr/>
+        </p:nvGraphicFramePr>
+        <p:xfrm>
+          <a:off x="180000" y="2880000"/>
+          <a:ext cx="4350000" cy="900000"/>
+        </p:xfrm>
+        <a:graphic>
+          <a:graphicData uri="http://schemas.openxmlformats.org/drawingml/2006/table">
+            <a:tbl>
+              <a:tblPr firstRow="1" bandRow="1">
+                <a:tableStyleId>{5C22544A-7EE6-4342-B048-85BDC9FD1C3A}</a:tableStyleId>
+              </a:tblPr>
+              <a:tblGrid>
+                <a:gridCol w="700000"/>
+                <a:gridCol w="600000"/>
+                <a:gridCol w="750000"/>
+                <a:gridCol w="600000"/>
+                <a:gridCol w="750000"/>
+                <a:gridCol w="950000"/>
+              </a:tblGrid>
+              <a:tr h="180000">
+                <a:tc>
+                  <a:txBody>
+                    <a:bodyPr wrap="square"/>
+                    <a:lstStyle/>
+                    <a:p>
+                      <a:pPr algn="ctr"/>
+                      <a:r>
+                        <a:rPr sz="800" b="1">
+                          <a:solidFill>
+                            <a:srgbClr val="FFFFFF"/>
+                          </a:solidFill>
+                          <a:ea typeface="Meiryo UI"/>
+                          <a:latin typeface="Meiryo UI"/>
+                        </a:rPr>
+                        <a:t>対象</a:t>
+                      </a:r>
+                    </a:p>
+                  </a:txBody>
+                  <a:tcPr marL="36000" marR="36000" marT="18000" marB="18000">
+                    <a:solidFill>
+                      <a:srgbClr val="4F81BD"/>
+                    </a:solidFill>
+                  </a:tcPr>
+                </a:tc>
+                <a:tc>
+                  <a:txBody>
+                    <a:bodyPr wrap="square"/>
+                    <a:lstStyle/>
+                    <a:p>
+                      <a:pPr algn="ctr"/>
+                      <a:r>
+                        <a:rPr sz="800" b="1">
+                          <a:solidFill>
+                            <a:srgbClr val="FFFFFF"/>
+                          </a:solidFill>
+                          <a:ea typeface="Meiryo UI"/>
+                          <a:latin typeface="Meiryo UI"/>
+                        </a:rPr>
+                        <a:t>R6点</a:t>
+                      </a:r>
+                    </a:p>
+                  </a:txBody>
+                  <a:tcPr marL="36000" marR="36000" marT="18000" marB="18000">
+                    <a:solidFill>
+                      <a:srgbClr val="4F81BD"/>
+                    </a:solidFill>
+                  </a:tcPr>
+                </a:tc>
+                <a:tc>
+                  <a:txBody>
+                    <a:bodyPr wrap="square"/>
+                    <a:lstStyle/>
+                    <a:p>
+                      <a:pPr algn="ctr"/>
+                      <a:r>
+                        <a:rPr sz="800" b="1">
+                          <a:solidFill>
+                            <a:srgbClr val="FFFFFF"/>
+                          </a:solidFill>
+                          <a:ea typeface="Meiryo UI"/>
+                          <a:latin typeface="Meiryo UI"/>
+                        </a:rPr>
+                        <a:t>R6順位</a:t>
+                      </a:r>
+                    </a:p>
+                  </a:txBody>
+                  <a:tcPr marL="36000" marR="36000" marT="18000" marB="18000">
+                    <a:solidFill>
+                      <a:srgbClr val="4F81BD"/>
+                    </a:solidFill>
+                  </a:tcPr>
+                </a:tc>
+                <a:tc>
+                  <a:txBody>
+                    <a:bodyPr wrap="square"/>
+                    <a:lstStyle/>
+                    <a:p>
+                      <a:pPr algn="ctr"/>
+                      <a:r>
+                        <a:rPr sz="800" b="1">
+                          <a:solidFill>
+                            <a:srgbClr val="FFFFFF"/>
+                          </a:solidFill>
+                          <a:ea typeface="Meiryo UI"/>
+                          <a:latin typeface="Meiryo UI"/>
+                        </a:rPr>
+                        <a:t>R7点</a:t>
+                      </a:r>
+                    </a:p>
+                  </a:txBody>
+                  <a:tcPr marL="36000" marR="36000" marT="18000" marB="18000">
+                    <a:solidFill>
+                      <a:srgbClr val="4F81BD"/>
+                    </a:solidFill>
+                  </a:tcPr>
+                </a:tc>
+                <a:tc>
+                  <a:txBody>
+                    <a:bodyPr wrap="square"/>
+                    <a:lstStyle/>
+                    <a:p>
+                      <a:pPr algn="ctr"/>
+                      <a:r>
+                        <a:rPr sz="800" b="1">
+                          <a:solidFill>
+                            <a:srgbClr val="FFFFFF"/>
+                          </a:solidFill>
+                          <a:ea typeface="Meiryo UI"/>
+                          <a:latin typeface="Meiryo UI"/>
+                        </a:rPr>
+                        <a:t>R7順位</a:t>
+                      </a:r>
+                    </a:p>
+                  </a:txBody>
+                  <a:tcPr marL="36000" marR="36000" marT="18000" marB="18000">
+                    <a:solidFill>
+                      <a:srgbClr val="4F81BD"/>
+                    </a:solidFill>
+                  </a:tcPr>
+                </a:tc>
+                <a:tc>
+                  <a:txBody>
+                    <a:bodyPr wrap="square"/>
+                    <a:lstStyle/>
+                    <a:p>
+                      <a:pPr algn="ctr"/>
+                      <a:r>
+                        <a:rPr sz="800" b="1">
+                          <a:solidFill>
+                            <a:srgbClr val="FFFFFF"/>
+                          </a:solidFill>
+                          <a:ea typeface="Meiryo UI"/>
+                          <a:latin typeface="Meiryo UI"/>
+                        </a:rPr>
+                        <a:t>変化</a:t>
+                      </a:r>
+                    </a:p>
+                  </a:txBody>
+                  <a:tcPr marL="36000" marR="36000" marT="18000" marB="18000">
+                    <a:solidFill>
+                      <a:srgbClr val="4F81BD"/>
+                    </a:solidFill>
+                  </a:tcPr>
+                </a:tc>
+              </a:tr>
+              <a:tr h="180000">
+                <a:tc>
+                  <a:txBody>
+                    <a:bodyPr wrap="square"/>
+                    <a:lstStyle/>
+                    <a:p>
+                      <a:pPr algn="ctr"/>
+                      <a:r>
+                        <a:rPr sz="800" b="1">
+                          <a:solidFill>
+                            <a:srgbClr val="333333"/>
+                          </a:solidFill>
+                          <a:ea typeface="Meiryo UI"/>
+                          <a:latin typeface="Meiryo UI"/>
+                        </a:rPr>
+                        <a:t>小5男子</a:t>
+                      </a:r>
+                    </a:p>
+                  </a:txBody>
+                  <a:tcPr marL="36000" marR="36000" marT="18000" marB="18000">
+                    <a:solidFill>
+                      <a:srgbClr val="ECF3FA"/>
+                    </a:solidFill>
+                  </a:tcPr>
+                </a:tc>
+                <a:tc>
+                  <a:txBody>
+                    <a:bodyPr wrap="square"/>
+                    <a:lstStyle/>
+                    <a:p>
+                      <a:pPr algn="ctr"/>
+                      <a:r>
+                        <a:rPr sz="800" b="0">
+                          <a:solidFill>
+                            <a:srgbClr val="333333"/>
+                          </a:solidFill>
+                          <a:ea typeface="Meiryo UI"/>
+                          <a:latin typeface="Meiryo UI"/>
+                        </a:rPr>
+                        <a:t>50.89</a:t>
+                      </a:r>
+                    </a:p>
+                  </a:txBody>
+                  <a:tcPr marL="36000" marR="36000" marT="18000" marB="18000">
+                    <a:solidFill>
+                      <a:srgbClr val="FFFFFF"/>
+                    </a:solidFill>
+                  </a:tcPr>
+                </a:tc>
+                <a:tc>
+                  <a:txBody>
+                    <a:bodyPr wrap="square"/>
+                    <a:lstStyle/>
+                    <a:p>
+                      <a:pPr algn="ctr"/>
+                      <a:r>
+                        <a:rPr sz="800" b="0">
+                          <a:solidFill>
+                            <a:srgbClr val="333333"/>
+                          </a:solidFill>
+                          <a:ea typeface="Meiryo UI"/>
+                          <a:latin typeface="Meiryo UI"/>
+                        </a:rPr>
+                        <a:t>45/65</a:t>
+                      </a:r>
+                    </a:p>
+                  </a:txBody>
+                  <a:tcPr marL="36000" marR="36000" marT="18000" marB="18000">
+                    <a:solidFill>
+                      <a:srgbClr val="FFFFFF"/>
+                    </a:solidFill>
+                  </a:tcPr>
+                </a:tc>
+                <a:tc>
+                  <a:txBody>
+                    <a:bodyPr wrap="square"/>
+                    <a:lstStyle/>
+                    <a:p>
+                      <a:pPr algn="ctr"/>
+                      <a:r>
+                        <a:rPr sz="800" b="0">
+                          <a:solidFill>
+                            <a:srgbClr val="333333"/>
+                          </a:solidFill>
+                          <a:ea typeface="Meiryo UI"/>
+                          <a:latin typeface="Meiryo UI"/>
+                        </a:rPr>
+                        <a:t>53.58</a:t>
+                      </a:r>
+                    </a:p>
+                  </a:txBody>
+                  <a:tcPr marL="36000" marR="36000" marT="18000" marB="18000">
+                    <a:solidFill>
+                      <a:srgbClr val="FFFFFF"/>
+                    </a:solidFill>
+                  </a:tcPr>
+                </a:tc>
+                <a:tc>
+                  <a:txBody>
+                    <a:bodyPr wrap="square"/>
+                    <a:lstStyle/>
+                    <a:p>
+                      <a:pPr algn="ctr"/>
+                      <a:r>
+                        <a:rPr sz="800" b="0">
+                          <a:solidFill>
+                            <a:srgbClr val="333333"/>
+                          </a:solidFill>
+                          <a:ea typeface="Meiryo UI"/>
+                          <a:latin typeface="Meiryo UI"/>
+                        </a:rPr>
+                        <a:t>12/65</a:t>
+                      </a:r>
+                    </a:p>
+                  </a:txBody>
+                  <a:tcPr marL="36000" marR="36000" marT="18000" marB="18000">
+                    <a:solidFill>
+                      <a:srgbClr val="FFFFFF"/>
+                    </a:solidFill>
+                  </a:tcPr>
+                </a:tc>
+                <a:tc>
+                  <a:txBody>
+                    <a:bodyPr wrap="square"/>
+                    <a:lstStyle/>
+                    <a:p>
+                      <a:pPr algn="ctr"/>
+                      <a:r>
+                        <a:rPr sz="800" b="1">
+                          <a:solidFill>
+                            <a:srgbClr val="4F81BD"/>
+                          </a:solidFill>
+                          <a:ea typeface="Meiryo UI"/>
+                          <a:latin typeface="Meiryo UI"/>
+                        </a:rPr>
+                        <a:t>↑33</a:t>
+                      </a:r>
+                    </a:p>
+                  </a:txBody>
+                  <a:tcPr marL="36000" marR="36000" marT="18000" marB="18000">
+                    <a:solidFill>
+                      <a:srgbClr val="ECF3FA"/>
+                    </a:solidFill>
+                  </a:tcPr>
+                </a:tc>
+              </a:tr>
+              <a:tr h="180000">
+                <a:tc>
+                  <a:txBody>
+                    <a:bodyPr wrap="square"/>
+                    <a:lstStyle/>
+                    <a:p>
+                      <a:pPr algn="ctr"/>
+                      <a:r>
+                        <a:rPr sz="800" b="1">
+                          <a:solidFill>
+                            <a:srgbClr val="333333"/>
+                          </a:solidFill>
+                          <a:ea typeface="Meiryo UI"/>
+                          <a:latin typeface="Meiryo UI"/>
+                        </a:rPr>
+                        <a:t>小5女子</a:t>
+                      </a:r>
+                    </a:p>
+                  </a:txBody>
+                  <a:tcPr marL="36000" marR="36000" marT="18000" marB="18000">
+                    <a:solidFill>
+                      <a:srgbClr val="ECF3FA"/>
+                    </a:solidFill>
+                  </a:tcPr>
+                </a:tc>
+                <a:tc>
+                  <a:txBody>
+                    <a:bodyPr wrap="square"/>
+                    <a:lstStyle/>
+                    <a:p>
+                      <a:pPr algn="ctr"/>
+                      <a:r>
+                        <a:rPr sz="800" b="0">
+                          <a:solidFill>
+                            <a:srgbClr val="333333"/>
+                          </a:solidFill>
+                          <a:ea typeface="Meiryo UI"/>
+                          <a:latin typeface="Meiryo UI"/>
+                        </a:rPr>
+                        <a:t>50.57</a:t>
+                      </a:r>
+                    </a:p>
+                  </a:txBody>
+                  <a:tcPr marL="36000" marR="36000" marT="18000" marB="18000">
+                    <a:solidFill>
+                      <a:srgbClr val="FFFFFF"/>
+                    </a:solidFill>
+                  </a:tcPr>
+                </a:tc>
+                <a:tc>
+                  <a:txBody>
+                    <a:bodyPr wrap="square"/>
+                    <a:lstStyle/>
+                    <a:p>
+                      <a:pPr algn="ctr"/>
+                      <a:r>
+                        <a:rPr sz="800" b="0">
+                          <a:solidFill>
+                            <a:srgbClr val="333333"/>
+                          </a:solidFill>
+                          <a:ea typeface="Meiryo UI"/>
+                          <a:latin typeface="Meiryo UI"/>
+                        </a:rPr>
+                        <a:t>58/65</a:t>
+                      </a:r>
+                    </a:p>
+                  </a:txBody>
+                  <a:tcPr marL="36000" marR="36000" marT="18000" marB="18000">
+                    <a:solidFill>
+                      <a:srgbClr val="FFFFFF"/>
+                    </a:solidFill>
+                  </a:tcPr>
+                </a:tc>
+                <a:tc>
+                  <a:txBody>
+                    <a:bodyPr wrap="square"/>
+                    <a:lstStyle/>
+                    <a:p>
+                      <a:pPr algn="ctr"/>
+                      <a:r>
+                        <a:rPr sz="800" b="0">
+                          <a:solidFill>
+                            <a:srgbClr val="333333"/>
+                          </a:solidFill>
+                          <a:ea typeface="Meiryo UI"/>
+                          <a:latin typeface="Meiryo UI"/>
+                        </a:rPr>
+                        <a:t>52.21</a:t>
+                      </a:r>
+                    </a:p>
+                  </a:txBody>
+                  <a:tcPr marL="36000" marR="36000" marT="18000" marB="18000">
+                    <a:solidFill>
+                      <a:srgbClr val="FFFFFF"/>
+                    </a:solidFill>
+                  </a:tcPr>
+                </a:tc>
+                <a:tc>
+                  <a:txBody>
+                    <a:bodyPr wrap="square"/>
+                    <a:lstStyle/>
+                    <a:p>
+                      <a:pPr algn="ctr"/>
+                      <a:r>
+                        <a:rPr sz="800" b="0">
+                          <a:solidFill>
+                            <a:srgbClr val="333333"/>
+                          </a:solidFill>
+                          <a:ea typeface="Meiryo UI"/>
+                          <a:latin typeface="Meiryo UI"/>
+                        </a:rPr>
+                        <a:t>33/65</a:t>
+                      </a:r>
+                    </a:p>
+                  </a:txBody>
+                  <a:tcPr marL="36000" marR="36000" marT="18000" marB="18000">
+                    <a:solidFill>
+                      <a:srgbClr val="FFFFFF"/>
+                    </a:solidFill>
+                  </a:tcPr>
+                </a:tc>
+                <a:tc>
+                  <a:txBody>
+                    <a:bodyPr wrap="square"/>
+                    <a:lstStyle/>
+                    <a:p>
+                      <a:pPr algn="ctr"/>
+                      <a:r>
+                        <a:rPr sz="800" b="1">
+                          <a:solidFill>
+                            <a:srgbClr val="4F81BD"/>
+                          </a:solidFill>
+                          <a:ea typeface="Meiryo UI"/>
+                          <a:latin typeface="Meiryo UI"/>
+                        </a:rPr>
+                        <a:t>↑25</a:t>
+                      </a:r>
+                    </a:p>
+                  </a:txBody>
+                  <a:tcPr marL="36000" marR="36000" marT="18000" marB="18000">
+                    <a:solidFill>
+                      <a:srgbClr val="ECF3FA"/>
+                    </a:solidFill>
+                  </a:tcPr>
+                </a:tc>
+              </a:tr>
+              <a:tr h="180000">
+                <a:tc>
+                  <a:txBody>
+                    <a:bodyPr wrap="square"/>
+                    <a:lstStyle/>
+                    <a:p>
+                      <a:pPr algn="ctr"/>
+                      <a:r>
+                        <a:rPr sz="800" b="1">
+                          <a:solidFill>
+                            <a:srgbClr val="333333"/>
+                          </a:solidFill>
+                          <a:ea typeface="Meiryo UI"/>
+                          <a:latin typeface="Meiryo UI"/>
+                        </a:rPr>
+                        <a:t>中2男子</a:t>
+                      </a:r>
+                    </a:p>
+                  </a:txBody>
+                  <a:tcPr marL="36000" marR="36000" marT="18000" marB="18000">
+                    <a:solidFill>
+                      <a:srgbClr val="ECF3FA"/>
+                    </a:solidFill>
+                  </a:tcPr>
+                </a:tc>
+                <a:tc>
+                  <a:txBody>
+                    <a:bodyPr wrap="square"/>
+                    <a:lstStyle/>
+                    <a:p>
+                      <a:pPr algn="ctr"/>
+                      <a:r>
+                        <a:rPr sz="800" b="0">
+                          <a:solidFill>
+                            <a:srgbClr val="333333"/>
+                          </a:solidFill>
+                          <a:ea typeface="Meiryo UI"/>
+                          <a:latin typeface="Meiryo UI"/>
+                        </a:rPr>
+                        <a:t>41.08</a:t>
+                      </a:r>
+                    </a:p>
+                  </a:txBody>
+                  <a:tcPr marL="36000" marR="36000" marT="18000" marB="18000">
+                    <a:solidFill>
+                      <a:srgbClr val="FFFFFF"/>
+                    </a:solidFill>
+                  </a:tcPr>
+                </a:tc>
+                <a:tc>
+                  <a:txBody>
+                    <a:bodyPr wrap="square"/>
+                    <a:lstStyle/>
+                    <a:p>
+                      <a:pPr algn="ctr"/>
+                      <a:r>
+                        <a:rPr sz="800" b="0">
+                          <a:solidFill>
+                            <a:srgbClr val="333333"/>
+                          </a:solidFill>
+                          <a:ea typeface="Meiryo UI"/>
+                          <a:latin typeface="Meiryo UI"/>
+                        </a:rPr>
+                        <a:t>12/33</a:t>
+                      </a:r>
+                    </a:p>
+                  </a:txBody>
+                  <a:tcPr marL="36000" marR="36000" marT="18000" marB="18000">
+                    <a:solidFill>
+                      <a:srgbClr val="FFFFFF"/>
+                    </a:solidFill>
+                  </a:tcPr>
+                </a:tc>
+                <a:tc>
+                  <a:txBody>
+                    <a:bodyPr wrap="square"/>
+                    <a:lstStyle/>
+                    <a:p>
+                      <a:pPr algn="ctr"/>
+                      <a:r>
+                        <a:rPr sz="800" b="0">
+                          <a:solidFill>
+                            <a:srgbClr val="333333"/>
+                          </a:solidFill>
+                          <a:ea typeface="Meiryo UI"/>
+                          <a:latin typeface="Meiryo UI"/>
+                        </a:rPr>
+                        <a:t>43.67</a:t>
+                      </a:r>
+                    </a:p>
+                  </a:txBody>
+                  <a:tcPr marL="36000" marR="36000" marT="18000" marB="18000">
+                    <a:solidFill>
+                      <a:srgbClr val="FFFFFF"/>
+                    </a:solidFill>
+                  </a:tcPr>
+                </a:tc>
+                <a:tc>
+                  <a:txBody>
+                    <a:bodyPr wrap="square"/>
+                    <a:lstStyle/>
+                    <a:p>
+                      <a:pPr algn="ctr"/>
+                      <a:r>
+                        <a:rPr sz="800" b="0">
+                          <a:solidFill>
+                            <a:srgbClr val="333333"/>
+                          </a:solidFill>
+                          <a:ea typeface="Meiryo UI"/>
+                          <a:latin typeface="Meiryo UI"/>
+                        </a:rPr>
+                        <a:t>10/33</a:t>
+                      </a:r>
+                    </a:p>
+                  </a:txBody>
+                  <a:tcPr marL="36000" marR="36000" marT="18000" marB="18000">
+                    <a:solidFill>
+                      <a:srgbClr val="FFFFFF"/>
+                    </a:solidFill>
+                  </a:tcPr>
+                </a:tc>
+                <a:tc>
+                  <a:txBody>
+                    <a:bodyPr wrap="square"/>
+                    <a:lstStyle/>
+                    <a:p>
+                      <a:pPr algn="ctr"/>
+                      <a:r>
+                        <a:rPr sz="800" b="1">
+                          <a:solidFill>
+                            <a:srgbClr val="4F81BD"/>
+                          </a:solidFill>
+                          <a:ea typeface="Meiryo UI"/>
+                          <a:latin typeface="Meiryo UI"/>
+                        </a:rPr>
+                        <a:t>↑2</a:t>
+                      </a:r>
+                    </a:p>
+                  </a:txBody>
+                  <a:tcPr marL="36000" marR="36000" marT="18000" marB="18000">
+                    <a:solidFill>
+                      <a:srgbClr val="ECF3FA"/>
+                    </a:solidFill>
+                  </a:tcPr>
+                </a:tc>
+              </a:tr>
+              <a:tr h="180000">
+                <a:tc>
+                  <a:txBody>
+                    <a:bodyPr wrap="square"/>
+                    <a:lstStyle/>
+                    <a:p>
+                      <a:pPr algn="ctr"/>
+                      <a:r>
+                        <a:rPr sz="800" b="1">
+                          <a:solidFill>
+                            <a:srgbClr val="333333"/>
+                          </a:solidFill>
+                          <a:ea typeface="Meiryo UI"/>
+                          <a:latin typeface="Meiryo UI"/>
+                        </a:rPr>
+                        <a:t>中2女子</a:t>
+                      </a:r>
+                    </a:p>
+                  </a:txBody>
+                  <a:tcPr marL="36000" marR="36000" marT="18000" marB="18000">
+                    <a:solidFill>
+                      <a:srgbClr val="ECF3FA"/>
+                    </a:solidFill>
+                  </a:tcPr>
+                </a:tc>
+                <a:tc>
+                  <a:txBody>
+                    <a:bodyPr wrap="square"/>
+                    <a:lstStyle/>
+                    <a:p>
+                      <a:pPr algn="ctr"/>
+                      <a:r>
+                        <a:rPr sz="800" b="0">
+                          <a:solidFill>
+                            <a:srgbClr val="333333"/>
+                          </a:solidFill>
+                          <a:ea typeface="Meiryo UI"/>
+                          <a:latin typeface="Meiryo UI"/>
+                        </a:rPr>
+                        <a:t>42.58</a:t>
+                      </a:r>
+                    </a:p>
+                  </a:txBody>
+                  <a:tcPr marL="36000" marR="36000" marT="18000" marB="18000">
+                    <a:solidFill>
+                      <a:srgbClr val="FFFFFF"/>
+                    </a:solidFill>
+                  </a:tcPr>
+                </a:tc>
+                <a:tc>
+                  <a:txBody>
+                    <a:bodyPr wrap="square"/>
+                    <a:lstStyle/>
+                    <a:p>
+                      <a:pPr algn="ctr"/>
+                      <a:r>
+                        <a:rPr sz="800" b="0">
+                          <a:solidFill>
+                            <a:srgbClr val="333333"/>
+                          </a:solidFill>
+                          <a:ea typeface="Meiryo UI"/>
+                          <a:latin typeface="Meiryo UI"/>
+                        </a:rPr>
+                        <a:t>28/33</a:t>
+                      </a:r>
+                    </a:p>
+                  </a:txBody>
+                  <a:tcPr marL="36000" marR="36000" marT="18000" marB="18000">
+                    <a:solidFill>
+                      <a:srgbClr val="FFFFFF"/>
+                    </a:solidFill>
+                  </a:tcPr>
+                </a:tc>
+                <a:tc>
+                  <a:txBody>
+                    <a:bodyPr wrap="square"/>
+                    <a:lstStyle/>
+                    <a:p>
+                      <a:pPr algn="ctr"/>
+                      <a:r>
+                        <a:rPr sz="800" b="0">
+                          <a:solidFill>
+                            <a:srgbClr val="333333"/>
+                          </a:solidFill>
+                          <a:ea typeface="Meiryo UI"/>
+                          <a:latin typeface="Meiryo UI"/>
+                        </a:rPr>
+                        <a:t>49.36</a:t>
+                      </a:r>
+                    </a:p>
+                  </a:txBody>
+                  <a:tcPr marL="36000" marR="36000" marT="18000" marB="18000">
+                    <a:solidFill>
+                      <a:srgbClr val="FFFFFF"/>
+                    </a:solidFill>
+                  </a:tcPr>
+                </a:tc>
+                <a:tc>
+                  <a:txBody>
+                    <a:bodyPr wrap="square"/>
+                    <a:lstStyle/>
+                    <a:p>
+                      <a:pPr algn="ctr"/>
+                      <a:r>
+                        <a:rPr sz="800" b="0">
+                          <a:solidFill>
+                            <a:srgbClr val="333333"/>
+                          </a:solidFill>
+                          <a:ea typeface="Meiryo UI"/>
+                          <a:latin typeface="Meiryo UI"/>
+                        </a:rPr>
+                        <a:t>9/33</a:t>
+                      </a:r>
+                    </a:p>
+                  </a:txBody>
+                  <a:tcPr marL="36000" marR="36000" marT="18000" marB="18000">
+                    <a:solidFill>
+                      <a:srgbClr val="FFFFFF"/>
+                    </a:solidFill>
+                  </a:tcPr>
+                </a:tc>
+                <a:tc>
+                  <a:txBody>
+                    <a:bodyPr wrap="square"/>
+                    <a:lstStyle/>
+                    <a:p>
+                      <a:pPr algn="ctr"/>
+                      <a:r>
+                        <a:rPr sz="800" b="1">
+                          <a:solidFill>
+                            <a:srgbClr val="4F81BD"/>
+                          </a:solidFill>
+                          <a:ea typeface="Meiryo UI"/>
+                          <a:latin typeface="Meiryo UI"/>
+                        </a:rPr>
+                        <a:t>↑19</a:t>
+                      </a:r>
+                    </a:p>
+                  </a:txBody>
+                  <a:tcPr marL="36000" marR="36000" marT="18000" marB="18000">
+                    <a:solidFill>
+                      <a:srgbClr val="ECF3FA"/>
+                    </a:solidFill>
+                  </a:tcPr>
+                </a:tc>
+              </a:tr>
+            </a:tbl>
+          </a:graphicData>
+        </a:graphic>
+      </p:graphicFrame>
       <p:sp>
         <p:nvSpPr>
           <p:cNvPr id="18" name="Rectangle 17"/>
@@ -17817,8 +18546,701 @@
         </p:nvSpPr>
         <p:spPr>
           <a:xfrm>
-            <a:off x="180000" y="3620000"/>
-            <a:ext cx="8780000" cy="260000"/>
+            <a:off x="4610000" y="3210000"/>
+            <a:ext cx="4350000" cy="240000"/>
+          </a:xfrm>
+          <a:prstGeom prst="rect">
+            <a:avLst/>
+          </a:prstGeom>
+          <a:solidFill>
+            <a:srgbClr val="C0504D"/>
+          </a:solidFill>
+          <a:ln>
+            <a:noFill/>
+          </a:ln>
+          <a:effectLst/>
+        </p:spPr>
+        <p:style>
+          <a:lnRef idx="1">
+            <a:schemeClr val="accent1"/>
+          </a:lnRef>
+          <a:fillRef idx="3">
+            <a:schemeClr val="accent1"/>
+          </a:fillRef>
+          <a:effectRef idx="2">
+            <a:schemeClr val="accent1"/>
+          </a:effectRef>
+          <a:fontRef idx="minor">
+            <a:schemeClr val="lt1"/>
+          </a:fontRef>
+        </p:style>
+        <p:txBody>
+          <a:bodyPr rtlCol="0" anchor="ctr" lIns="90000" rIns="60000" tIns="10000" bIns="10000"/>
+          <a:lstStyle/>
+          <a:p>
+            <a:pPr algn="l"/>
+            <a:r>
+              <a:rPr sz="900" b="1">
+                <a:solidFill>
+                  <a:srgbClr val="FFFFFF"/>
+                </a:solidFill>
+                <a:ea typeface="Meiryo UI"/>
+                <a:latin typeface="Meiryo UI"/>
+              </a:rPr>
+              <a:t>  R5→R6→R7 推移：いじめ・暴力（件数）</a:t>
+            </a:r>
+          </a:p>
+        </p:txBody>
+      </p:sp>
+      <p:graphicFrame>
+        <p:nvGraphicFramePr>
+          <p:cNvPr id="19" name="Table 18"/>
+          <p:cNvGraphicFramePr>
+            <a:graphicFrameLocks noGrp="1"/>
+          </p:cNvGraphicFramePr>
+          <p:nvPr/>
+        </p:nvGraphicFramePr>
+        <p:xfrm>
+          <a:off x="4610000" y="3480000"/>
+          <a:ext cx="4350000" cy="900000"/>
+        </p:xfrm>
+        <a:graphic>
+          <a:graphicData uri="http://schemas.openxmlformats.org/drawingml/2006/table">
+            <a:tbl>
+              <a:tblPr firstRow="1" bandRow="1">
+                <a:tableStyleId>{5C22544A-7EE6-4342-B048-85BDC9FD1C3A}</a:tableStyleId>
+              </a:tblPr>
+              <a:tblGrid>
+                <a:gridCol w="1500000"/>
+                <a:gridCol w="550000"/>
+                <a:gridCol w="550000"/>
+                <a:gridCol w="550000"/>
+                <a:gridCol w="1200000"/>
+              </a:tblGrid>
+              <a:tr h="180000">
+                <a:tc>
+                  <a:txBody>
+                    <a:bodyPr wrap="square"/>
+                    <a:lstStyle/>
+                    <a:p>
+                      <a:pPr algn="ctr"/>
+                      <a:r>
+                        <a:rPr sz="800" b="1">
+                          <a:solidFill>
+                            <a:srgbClr val="FFFFFF"/>
+                          </a:solidFill>
+                          <a:ea typeface="Meiryo UI"/>
+                          <a:latin typeface="Meiryo UI"/>
+                        </a:rPr>
+                        <a:t>項目</a:t>
+                      </a:r>
+                    </a:p>
+                  </a:txBody>
+                  <a:tcPr marL="36000" marR="36000" marT="18000" marB="18000">
+                    <a:solidFill>
+                      <a:srgbClr val="C0504D"/>
+                    </a:solidFill>
+                  </a:tcPr>
+                </a:tc>
+                <a:tc>
+                  <a:txBody>
+                    <a:bodyPr wrap="square"/>
+                    <a:lstStyle/>
+                    <a:p>
+                      <a:pPr algn="ctr"/>
+                      <a:r>
+                        <a:rPr sz="800" b="1">
+                          <a:solidFill>
+                            <a:srgbClr val="FFFFFF"/>
+                          </a:solidFill>
+                          <a:ea typeface="Meiryo UI"/>
+                          <a:latin typeface="Meiryo UI"/>
+                        </a:rPr>
+                        <a:t>R5</a:t>
+                      </a:r>
+                    </a:p>
+                  </a:txBody>
+                  <a:tcPr marL="36000" marR="36000" marT="18000" marB="18000">
+                    <a:solidFill>
+                      <a:srgbClr val="C0504D"/>
+                    </a:solidFill>
+                  </a:tcPr>
+                </a:tc>
+                <a:tc>
+                  <a:txBody>
+                    <a:bodyPr wrap="square"/>
+                    <a:lstStyle/>
+                    <a:p>
+                      <a:pPr algn="ctr"/>
+                      <a:r>
+                        <a:rPr sz="800" b="1">
+                          <a:solidFill>
+                            <a:srgbClr val="FFFFFF"/>
+                          </a:solidFill>
+                          <a:ea typeface="Meiryo UI"/>
+                          <a:latin typeface="Meiryo UI"/>
+                        </a:rPr>
+                        <a:t>R6</a:t>
+                      </a:r>
+                    </a:p>
+                  </a:txBody>
+                  <a:tcPr marL="36000" marR="36000" marT="18000" marB="18000">
+                    <a:solidFill>
+                      <a:srgbClr val="C0504D"/>
+                    </a:solidFill>
+                  </a:tcPr>
+                </a:tc>
+                <a:tc>
+                  <a:txBody>
+                    <a:bodyPr wrap="square"/>
+                    <a:lstStyle/>
+                    <a:p>
+                      <a:pPr algn="ctr"/>
+                      <a:r>
+                        <a:rPr sz="800" b="1">
+                          <a:solidFill>
+                            <a:srgbClr val="FFFFFF"/>
+                          </a:solidFill>
+                          <a:ea typeface="Meiryo UI"/>
+                          <a:latin typeface="Meiryo UI"/>
+                        </a:rPr>
+                        <a:t>R7</a:t>
+                      </a:r>
+                    </a:p>
+                  </a:txBody>
+                  <a:tcPr marL="36000" marR="36000" marT="18000" marB="18000">
+                    <a:solidFill>
+                      <a:srgbClr val="C0504D"/>
+                    </a:solidFill>
+                  </a:tcPr>
+                </a:tc>
+                <a:tc>
+                  <a:txBody>
+                    <a:bodyPr wrap="square"/>
+                    <a:lstStyle/>
+                    <a:p>
+                      <a:pPr algn="ctr"/>
+                      <a:r>
+                        <a:rPr sz="800" b="1">
+                          <a:solidFill>
+                            <a:srgbClr val="FFFFFF"/>
+                          </a:solidFill>
+                          <a:ea typeface="Meiryo UI"/>
+                          <a:latin typeface="Meiryo UI"/>
+                        </a:rPr>
+                        <a:t>傾向</a:t>
+                      </a:r>
+                    </a:p>
+                  </a:txBody>
+                  <a:tcPr marL="36000" marR="36000" marT="18000" marB="18000">
+                    <a:solidFill>
+                      <a:srgbClr val="C0504D"/>
+                    </a:solidFill>
+                  </a:tcPr>
+                </a:tc>
+              </a:tr>
+              <a:tr h="180000">
+                <a:tc>
+                  <a:txBody>
+                    <a:bodyPr wrap="square"/>
+                    <a:lstStyle/>
+                    <a:p>
+                      <a:pPr algn="ctr"/>
+                      <a:r>
+                        <a:rPr sz="800" b="1">
+                          <a:solidFill>
+                            <a:srgbClr val="333333"/>
+                          </a:solidFill>
+                          <a:ea typeface="Meiryo UI"/>
+                          <a:latin typeface="Meiryo UI"/>
+                        </a:rPr>
+                        <a:t>いじめ認知（小）</a:t>
+                      </a:r>
+                    </a:p>
+                  </a:txBody>
+                  <a:tcPr marL="36000" marR="36000" marT="18000" marB="18000">
+                    <a:solidFill>
+                      <a:srgbClr val="ECF3FA"/>
+                    </a:solidFill>
+                  </a:tcPr>
+                </a:tc>
+                <a:tc>
+                  <a:txBody>
+                    <a:bodyPr wrap="square"/>
+                    <a:lstStyle/>
+                    <a:p>
+                      <a:pPr algn="ctr"/>
+                      <a:r>
+                        <a:rPr sz="800" b="0">
+                          <a:solidFill>
+                            <a:srgbClr val="333333"/>
+                          </a:solidFill>
+                          <a:ea typeface="Meiryo UI"/>
+                          <a:latin typeface="Meiryo UI"/>
+                        </a:rPr>
+                        <a:t>13</a:t>
+                      </a:r>
+                    </a:p>
+                  </a:txBody>
+                  <a:tcPr marL="36000" marR="36000" marT="18000" marB="18000">
+                    <a:solidFill>
+                      <a:srgbClr val="FFFFFF"/>
+                    </a:solidFill>
+                  </a:tcPr>
+                </a:tc>
+                <a:tc>
+                  <a:txBody>
+                    <a:bodyPr wrap="square"/>
+                    <a:lstStyle/>
+                    <a:p>
+                      <a:pPr algn="ctr"/>
+                      <a:r>
+                        <a:rPr sz="800" b="0">
+                          <a:solidFill>
+                            <a:srgbClr val="333333"/>
+                          </a:solidFill>
+                          <a:ea typeface="Meiryo UI"/>
+                          <a:latin typeface="Meiryo UI"/>
+                        </a:rPr>
+                        <a:t>12</a:t>
+                      </a:r>
+                    </a:p>
+                  </a:txBody>
+                  <a:tcPr marL="36000" marR="36000" marT="18000" marB="18000">
+                    <a:solidFill>
+                      <a:srgbClr val="FFFFFF"/>
+                    </a:solidFill>
+                  </a:tcPr>
+                </a:tc>
+                <a:tc>
+                  <a:txBody>
+                    <a:bodyPr wrap="square"/>
+                    <a:lstStyle/>
+                    <a:p>
+                      <a:pPr algn="ctr"/>
+                      <a:r>
+                        <a:rPr sz="800" b="0">
+                          <a:solidFill>
+                            <a:srgbClr val="333333"/>
+                          </a:solidFill>
+                          <a:ea typeface="Meiryo UI"/>
+                          <a:latin typeface="Meiryo UI"/>
+                        </a:rPr>
+                        <a:t>31</a:t>
+                      </a:r>
+                    </a:p>
+                  </a:txBody>
+                  <a:tcPr marL="36000" marR="36000" marT="18000" marB="18000">
+                    <a:solidFill>
+                      <a:srgbClr val="FFFFFF"/>
+                    </a:solidFill>
+                  </a:tcPr>
+                </a:tc>
+                <a:tc>
+                  <a:txBody>
+                    <a:bodyPr wrap="square"/>
+                    <a:lstStyle/>
+                    <a:p>
+                      <a:pPr algn="ctr"/>
+                      <a:r>
+                        <a:rPr sz="800" b="1">
+                          <a:solidFill>
+                            <a:srgbClr val="C0504D"/>
+                          </a:solidFill>
+                          <a:ea typeface="Meiryo UI"/>
+                          <a:latin typeface="Meiryo UI"/>
+                        </a:rPr>
+                        <a:t>↑急増</a:t>
+                      </a:r>
+                    </a:p>
+                  </a:txBody>
+                  <a:tcPr marL="36000" marR="36000" marT="18000" marB="18000">
+                    <a:solidFill>
+                      <a:srgbClr val="FBEEED"/>
+                    </a:solidFill>
+                  </a:tcPr>
+                </a:tc>
+              </a:tr>
+              <a:tr h="180000">
+                <a:tc>
+                  <a:txBody>
+                    <a:bodyPr wrap="square"/>
+                    <a:lstStyle/>
+                    <a:p>
+                      <a:pPr algn="ctr"/>
+                      <a:r>
+                        <a:rPr sz="800" b="1">
+                          <a:solidFill>
+                            <a:srgbClr val="333333"/>
+                          </a:solidFill>
+                          <a:ea typeface="Meiryo UI"/>
+                          <a:latin typeface="Meiryo UI"/>
+                        </a:rPr>
+                        <a:t>いじめ認知（中）</a:t>
+                      </a:r>
+                    </a:p>
+                  </a:txBody>
+                  <a:tcPr marL="36000" marR="36000" marT="18000" marB="18000">
+                    <a:solidFill>
+                      <a:srgbClr val="ECF3FA"/>
+                    </a:solidFill>
+                  </a:tcPr>
+                </a:tc>
+                <a:tc>
+                  <a:txBody>
+                    <a:bodyPr wrap="square"/>
+                    <a:lstStyle/>
+                    <a:p>
+                      <a:pPr algn="ctr"/>
+                      <a:r>
+                        <a:rPr sz="800" b="0">
+                          <a:solidFill>
+                            <a:srgbClr val="333333"/>
+                          </a:solidFill>
+                          <a:ea typeface="Meiryo UI"/>
+                          <a:latin typeface="Meiryo UI"/>
+                        </a:rPr>
+                        <a:t>10</a:t>
+                      </a:r>
+                    </a:p>
+                  </a:txBody>
+                  <a:tcPr marL="36000" marR="36000" marT="18000" marB="18000">
+                    <a:solidFill>
+                      <a:srgbClr val="FFFFFF"/>
+                    </a:solidFill>
+                  </a:tcPr>
+                </a:tc>
+                <a:tc>
+                  <a:txBody>
+                    <a:bodyPr wrap="square"/>
+                    <a:lstStyle/>
+                    <a:p>
+                      <a:pPr algn="ctr"/>
+                      <a:r>
+                        <a:rPr sz="800" b="0">
+                          <a:solidFill>
+                            <a:srgbClr val="333333"/>
+                          </a:solidFill>
+                          <a:ea typeface="Meiryo UI"/>
+                          <a:latin typeface="Meiryo UI"/>
+                        </a:rPr>
+                        <a:t>11</a:t>
+                      </a:r>
+                    </a:p>
+                  </a:txBody>
+                  <a:tcPr marL="36000" marR="36000" marT="18000" marB="18000">
+                    <a:solidFill>
+                      <a:srgbClr val="FFFFFF"/>
+                    </a:solidFill>
+                  </a:tcPr>
+                </a:tc>
+                <a:tc>
+                  <a:txBody>
+                    <a:bodyPr wrap="square"/>
+                    <a:lstStyle/>
+                    <a:p>
+                      <a:pPr algn="ctr"/>
+                      <a:r>
+                        <a:rPr sz="800" b="0">
+                          <a:solidFill>
+                            <a:srgbClr val="333333"/>
+                          </a:solidFill>
+                          <a:ea typeface="Meiryo UI"/>
+                          <a:latin typeface="Meiryo UI"/>
+                        </a:rPr>
+                        <a:t>14</a:t>
+                      </a:r>
+                    </a:p>
+                  </a:txBody>
+                  <a:tcPr marL="36000" marR="36000" marT="18000" marB="18000">
+                    <a:solidFill>
+                      <a:srgbClr val="FFFFFF"/>
+                    </a:solidFill>
+                  </a:tcPr>
+                </a:tc>
+                <a:tc>
+                  <a:txBody>
+                    <a:bodyPr wrap="square"/>
+                    <a:lstStyle/>
+                    <a:p>
+                      <a:pPr algn="ctr"/>
+                      <a:r>
+                        <a:rPr sz="800" b="1">
+                          <a:solidFill>
+                            <a:srgbClr val="C0504D"/>
+                          </a:solidFill>
+                          <a:ea typeface="Meiryo UI"/>
+                          <a:latin typeface="Meiryo UI"/>
+                        </a:rPr>
+                        <a:t>↑増</a:t>
+                      </a:r>
+                    </a:p>
+                  </a:txBody>
+                  <a:tcPr marL="36000" marR="36000" marT="18000" marB="18000">
+                    <a:solidFill>
+                      <a:srgbClr val="FBEEED"/>
+                    </a:solidFill>
+                  </a:tcPr>
+                </a:tc>
+              </a:tr>
+              <a:tr h="180000">
+                <a:tc>
+                  <a:txBody>
+                    <a:bodyPr wrap="square"/>
+                    <a:lstStyle/>
+                    <a:p>
+                      <a:pPr algn="ctr"/>
+                      <a:r>
+                        <a:rPr sz="800" b="1">
+                          <a:solidFill>
+                            <a:srgbClr val="333333"/>
+                          </a:solidFill>
+                          <a:ea typeface="Meiryo UI"/>
+                          <a:latin typeface="Meiryo UI"/>
+                        </a:rPr>
+                        <a:t>暴力行為（小）</a:t>
+                      </a:r>
+                    </a:p>
+                  </a:txBody>
+                  <a:tcPr marL="36000" marR="36000" marT="18000" marB="18000">
+                    <a:solidFill>
+                      <a:srgbClr val="ECF3FA"/>
+                    </a:solidFill>
+                  </a:tcPr>
+                </a:tc>
+                <a:tc>
+                  <a:txBody>
+                    <a:bodyPr wrap="square"/>
+                    <a:lstStyle/>
+                    <a:p>
+                      <a:pPr algn="ctr"/>
+                      <a:r>
+                        <a:rPr sz="800" b="0">
+                          <a:solidFill>
+                            <a:srgbClr val="333333"/>
+                          </a:solidFill>
+                          <a:ea typeface="Meiryo UI"/>
+                          <a:latin typeface="Meiryo UI"/>
+                        </a:rPr>
+                        <a:t>1</a:t>
+                      </a:r>
+                    </a:p>
+                  </a:txBody>
+                  <a:tcPr marL="36000" marR="36000" marT="18000" marB="18000">
+                    <a:solidFill>
+                      <a:srgbClr val="FFFFFF"/>
+                    </a:solidFill>
+                  </a:tcPr>
+                </a:tc>
+                <a:tc>
+                  <a:txBody>
+                    <a:bodyPr wrap="square"/>
+                    <a:lstStyle/>
+                    <a:p>
+                      <a:pPr algn="ctr"/>
+                      <a:r>
+                        <a:rPr sz="800" b="0">
+                          <a:solidFill>
+                            <a:srgbClr val="333333"/>
+                          </a:solidFill>
+                          <a:ea typeface="Meiryo UI"/>
+                          <a:latin typeface="Meiryo UI"/>
+                        </a:rPr>
+                        <a:t>1</a:t>
+                      </a:r>
+                    </a:p>
+                  </a:txBody>
+                  <a:tcPr marL="36000" marR="36000" marT="18000" marB="18000">
+                    <a:solidFill>
+                      <a:srgbClr val="FFFFFF"/>
+                    </a:solidFill>
+                  </a:tcPr>
+                </a:tc>
+                <a:tc>
+                  <a:txBody>
+                    <a:bodyPr wrap="square"/>
+                    <a:lstStyle/>
+                    <a:p>
+                      <a:pPr algn="ctr"/>
+                      <a:r>
+                        <a:rPr sz="800" b="0">
+                          <a:solidFill>
+                            <a:srgbClr val="333333"/>
+                          </a:solidFill>
+                          <a:ea typeface="Meiryo UI"/>
+                          <a:latin typeface="Meiryo UI"/>
+                        </a:rPr>
+                        <a:t>0</a:t>
+                      </a:r>
+                    </a:p>
+                  </a:txBody>
+                  <a:tcPr marL="36000" marR="36000" marT="18000" marB="18000">
+                    <a:solidFill>
+                      <a:srgbClr val="FFFFFF"/>
+                    </a:solidFill>
+                  </a:tcPr>
+                </a:tc>
+                <a:tc>
+                  <a:txBody>
+                    <a:bodyPr wrap="square"/>
+                    <a:lstStyle/>
+                    <a:p>
+                      <a:pPr algn="ctr"/>
+                      <a:r>
+                        <a:rPr sz="800" b="0">
+                          <a:solidFill>
+                            <a:srgbClr val="333333"/>
+                          </a:solidFill>
+                          <a:ea typeface="Meiryo UI"/>
+                          <a:latin typeface="Meiryo UI"/>
+                        </a:rPr>
+                        <a:t>─</a:t>
+                      </a:r>
+                    </a:p>
+                  </a:txBody>
+                  <a:tcPr marL="36000" marR="36000" marT="18000" marB="18000">
+                    <a:solidFill>
+                      <a:srgbClr val="FFFFFF"/>
+                    </a:solidFill>
+                  </a:tcPr>
+                </a:tc>
+              </a:tr>
+              <a:tr h="180000">
+                <a:tc>
+                  <a:txBody>
+                    <a:bodyPr wrap="square"/>
+                    <a:lstStyle/>
+                    <a:p>
+                      <a:pPr algn="ctr"/>
+                      <a:r>
+                        <a:rPr sz="800" b="1">
+                          <a:solidFill>
+                            <a:srgbClr val="333333"/>
+                          </a:solidFill>
+                          <a:ea typeface="Meiryo UI"/>
+                          <a:latin typeface="Meiryo UI"/>
+                        </a:rPr>
+                        <a:t>暴力行為（中）</a:t>
+                      </a:r>
+                    </a:p>
+                  </a:txBody>
+                  <a:tcPr marL="36000" marR="36000" marT="18000" marB="18000">
+                    <a:solidFill>
+                      <a:srgbClr val="ECF3FA"/>
+                    </a:solidFill>
+                  </a:tcPr>
+                </a:tc>
+                <a:tc>
+                  <a:txBody>
+                    <a:bodyPr wrap="square"/>
+                    <a:lstStyle/>
+                    <a:p>
+                      <a:pPr algn="ctr"/>
+                      <a:r>
+                        <a:rPr sz="800" b="0">
+                          <a:solidFill>
+                            <a:srgbClr val="333333"/>
+                          </a:solidFill>
+                          <a:ea typeface="Meiryo UI"/>
+                          <a:latin typeface="Meiryo UI"/>
+                        </a:rPr>
+                        <a:t>4</a:t>
+                      </a:r>
+                    </a:p>
+                  </a:txBody>
+                  <a:tcPr marL="36000" marR="36000" marT="18000" marB="18000">
+                    <a:solidFill>
+                      <a:srgbClr val="FFFFFF"/>
+                    </a:solidFill>
+                  </a:tcPr>
+                </a:tc>
+                <a:tc>
+                  <a:txBody>
+                    <a:bodyPr wrap="square"/>
+                    <a:lstStyle/>
+                    <a:p>
+                      <a:pPr algn="ctr"/>
+                      <a:r>
+                        <a:rPr sz="800" b="0">
+                          <a:solidFill>
+                            <a:srgbClr val="333333"/>
+                          </a:solidFill>
+                          <a:ea typeface="Meiryo UI"/>
+                          <a:latin typeface="Meiryo UI"/>
+                        </a:rPr>
+                        <a:t>9</a:t>
+                      </a:r>
+                    </a:p>
+                  </a:txBody>
+                  <a:tcPr marL="36000" marR="36000" marT="18000" marB="18000">
+                    <a:solidFill>
+                      <a:srgbClr val="FFFFFF"/>
+                    </a:solidFill>
+                  </a:tcPr>
+                </a:tc>
+                <a:tc>
+                  <a:txBody>
+                    <a:bodyPr wrap="square"/>
+                    <a:lstStyle/>
+                    <a:p>
+                      <a:pPr algn="ctr"/>
+                      <a:r>
+                        <a:rPr sz="800" b="0">
+                          <a:solidFill>
+                            <a:srgbClr val="333333"/>
+                          </a:solidFill>
+                          <a:ea typeface="Meiryo UI"/>
+                          <a:latin typeface="Meiryo UI"/>
+                        </a:rPr>
+                        <a:t>12</a:t>
+                      </a:r>
+                    </a:p>
+                  </a:txBody>
+                  <a:tcPr marL="36000" marR="36000" marT="18000" marB="18000">
+                    <a:solidFill>
+                      <a:srgbClr val="FFFFFF"/>
+                    </a:solidFill>
+                  </a:tcPr>
+                </a:tc>
+                <a:tc>
+                  <a:txBody>
+                    <a:bodyPr wrap="square"/>
+                    <a:lstStyle/>
+                    <a:p>
+                      <a:pPr algn="ctr"/>
+                      <a:r>
+                        <a:rPr sz="800" b="1">
+                          <a:solidFill>
+                            <a:srgbClr val="C0504D"/>
+                          </a:solidFill>
+                          <a:ea typeface="Meiryo UI"/>
+                          <a:latin typeface="Meiryo UI"/>
+                        </a:rPr>
+                        <a:t>↑増</a:t>
+                      </a:r>
+                    </a:p>
+                  </a:txBody>
+                  <a:tcPr marL="36000" marR="36000" marT="18000" marB="18000">
+                    <a:solidFill>
+                      <a:srgbClr val="FBEEED"/>
+                    </a:solidFill>
+                  </a:tcPr>
+                </a:tc>
+              </a:tr>
+            </a:tbl>
+          </a:graphicData>
+        </a:graphic>
+      </p:graphicFrame>
+      <p:sp>
+        <p:nvSpPr>
+          <p:cNvPr id="20" name="Rectangle 19"/>
+          <p:cNvSpPr/>
+          <p:nvPr/>
+        </p:nvSpPr>
+        <p:spPr>
+          <a:xfrm>
+            <a:off x="180000" y="3830000"/>
+            <a:ext cx="4350000" cy="220000"/>
           </a:xfrm>
           <a:prstGeom prst="rect">
             <a:avLst/>
@@ -17851,28 +19273,28 @@
           <a:p>
             <a:pPr algn="l"/>
             <a:r>
-              <a:rPr sz="1000" b="1">
+              <a:rPr sz="900" b="1">
                 <a:solidFill>
                   <a:srgbClr val="FFFFFF"/>
                 </a:solidFill>
                 <a:ea typeface="Meiryo UI"/>
                 <a:latin typeface="Meiryo UI"/>
               </a:rPr>
-              <a:t>  専門家による因果分析 ― 教育統計学・教育心理学・特別支援教育の視点</a:t>
-            </a:r>
-          </a:p>
-        </p:txBody>
-      </p:sp>
-      <p:sp>
-        <p:nvSpPr>
-          <p:cNvPr id="19" name="Rectangle 18"/>
-          <p:cNvSpPr/>
+              <a:t>  R7最新データの総合所見</a:t>
+            </a:r>
+          </a:p>
+        </p:txBody>
+      </p:sp>
+      <p:sp>
+        <p:nvSpPr>
+          <p:cNvPr id="21" name="TextBox 20"/>
+          <p:cNvSpPr txBox="1"/>
           <p:nvPr/>
         </p:nvSpPr>
         <p:spPr>
           <a:xfrm>
-            <a:off x="180000" y="3920000"/>
-            <a:ext cx="2893333" cy="680000"/>
+            <a:off x="180000" y="4080000"/>
+            <a:ext cx="4350000" cy="480000"/>
           </a:xfrm>
           <a:prstGeom prst="rect">
             <a:avLst/>
@@ -17885,304 +19307,62 @@
               <a:srgbClr val="6F5A9C"/>
             </a:solidFill>
           </a:ln>
-          <a:effectLst/>
         </p:spPr>
-        <p:style>
-          <a:lnRef idx="1">
-            <a:schemeClr val="accent1"/>
-          </a:lnRef>
-          <a:fillRef idx="3">
-            <a:schemeClr val="accent1"/>
-          </a:fillRef>
-          <a:effectRef idx="2">
-            <a:schemeClr val="accent1"/>
-          </a:effectRef>
-          <a:fontRef idx="minor">
-            <a:schemeClr val="lt1"/>
-          </a:fontRef>
-        </p:style>
-        <p:txBody>
-          <a:bodyPr rtlCol="0" anchor="t" lIns="72000" rIns="72000" tIns="36000" bIns="36000" wrap="square"/>
+        <p:txBody>
+          <a:bodyPr wrap="square" lIns="72000" rIns="72000" tIns="36000" bIns="36000" anchor="t">
+            <a:spAutoFit/>
+          </a:bodyPr>
           <a:lstStyle/>
           <a:p>
             <a:pPr algn="l"/>
             <a:r>
-              <a:rPr sz="900" b="0">
+              <a:rPr sz="800" b="0">
                 <a:solidFill>
                   <a:srgbClr val="333333"/>
                 </a:solidFill>
                 <a:ea typeface="Meiryo UI"/>
                 <a:latin typeface="Meiryo UI"/>
               </a:rPr>
-              <a:t>〈統計学的視点〉</a:t>
+              <a:t>● 不登校R7=34名で過去最多更新（小17・中17）</a:t>
             </a:r>
           </a:p>
           <a:p>
             <a:pPr algn="l"/>
             <a:r>
-              <a:rPr sz="900" b="0">
+              <a:rPr sz="800" b="0">
                 <a:solidFill>
                   <a:srgbClr val="333333"/>
                 </a:solidFill>
                 <a:ea typeface="Meiryo UI"/>
                 <a:latin typeface="Meiryo UI"/>
               </a:rPr>
-              <a:t>● 15年継続データ。サンプル単一校だが、</a:t>
+              <a:t>● R6中3単独では不登校2名（区内4位＝少ない側）</a:t>
             </a:r>
           </a:p>
           <a:p>
             <a:pPr algn="l"/>
             <a:r>
-              <a:rPr sz="900" b="0">
+              <a:rPr sz="800" b="0">
                 <a:solidFill>
                   <a:srgbClr val="333333"/>
                 </a:solidFill>
                 <a:ea typeface="Meiryo UI"/>
                 <a:latin typeface="Meiryo UI"/>
               </a:rPr>
-              <a:t>  時系列の一貫性から偶然性は低い</a:t>
+              <a:t>● 体力R7改善も学年差・年度変動が大きく要観察</a:t>
             </a:r>
           </a:p>
           <a:p>
             <a:pPr algn="l"/>
             <a:r>
-              <a:rPr sz="900" b="0">
+              <a:rPr sz="800" b="0">
                 <a:solidFill>
                   <a:srgbClr val="333333"/>
                 </a:solidFill>
                 <a:ea typeface="Meiryo UI"/>
                 <a:latin typeface="Meiryo UI"/>
               </a:rPr>
-              <a:t>● 区・都・全国平均との比較で「効果あり」</a:t>
-            </a:r>
-          </a:p>
-          <a:p>
-            <a:pPr algn="l"/>
-            <a:r>
-              <a:rPr sz="900" b="0">
-                <a:solidFill>
-                  <a:srgbClr val="333333"/>
-                </a:solidFill>
-                <a:ea typeface="Meiryo UI"/>
-                <a:latin typeface="Meiryo UI"/>
-              </a:rPr>
-              <a:t>  を示すデータは検出されず</a:t>
-            </a:r>
-          </a:p>
-        </p:txBody>
-      </p:sp>
-      <p:sp>
-        <p:nvSpPr>
-          <p:cNvPr id="20" name="Rectangle 19"/>
-          <p:cNvSpPr/>
-          <p:nvPr/>
-        </p:nvSpPr>
-        <p:spPr>
-          <a:xfrm>
-            <a:off x="3123333" y="3920000"/>
-            <a:ext cx="2893333" cy="680000"/>
-          </a:xfrm>
-          <a:prstGeom prst="rect">
-            <a:avLst/>
-          </a:prstGeom>
-          <a:solidFill>
-            <a:srgbClr val="F7F7F7"/>
-          </a:solidFill>
-          <a:ln w="6350">
-            <a:solidFill>
-              <a:srgbClr val="6F5A9C"/>
-            </a:solidFill>
-          </a:ln>
-          <a:effectLst/>
-        </p:spPr>
-        <p:style>
-          <a:lnRef idx="1">
-            <a:schemeClr val="accent1"/>
-          </a:lnRef>
-          <a:fillRef idx="3">
-            <a:schemeClr val="accent1"/>
-          </a:fillRef>
-          <a:effectRef idx="2">
-            <a:schemeClr val="accent1"/>
-          </a:effectRef>
-          <a:fontRef idx="minor">
-            <a:schemeClr val="lt1"/>
-          </a:fontRef>
-        </p:style>
-        <p:txBody>
-          <a:bodyPr rtlCol="0" anchor="t" lIns="72000" rIns="72000" tIns="36000" bIns="36000" wrap="square"/>
-          <a:lstStyle/>
-          <a:p>
-            <a:pPr algn="l"/>
-            <a:r>
-              <a:rPr sz="900" b="0">
-                <a:solidFill>
-                  <a:srgbClr val="333333"/>
-                </a:solidFill>
-                <a:ea typeface="Meiryo UI"/>
-                <a:latin typeface="Meiryo UI"/>
-              </a:rPr>
-              <a:t>〈交絡要因の検討〉</a:t>
-            </a:r>
-          </a:p>
-          <a:p>
-            <a:pPr algn="l"/>
-            <a:r>
-              <a:rPr sz="900" b="0">
-                <a:solidFill>
-                  <a:srgbClr val="333333"/>
-                </a:solidFill>
-                <a:ea typeface="Meiryo UI"/>
-                <a:latin typeface="Meiryo UI"/>
-              </a:rPr>
-              <a:t>● 地域特性・家庭背景は区内他校と同等</a:t>
-            </a:r>
-          </a:p>
-          <a:p>
-            <a:pPr algn="l"/>
-            <a:r>
-              <a:rPr sz="900" b="0">
-                <a:solidFill>
-                  <a:srgbClr val="333333"/>
-                </a:solidFill>
-                <a:ea typeface="Meiryo UI"/>
-                <a:latin typeface="Meiryo UI"/>
-              </a:rPr>
-              <a:t>● 教員配置・予算は標準的</a:t>
-            </a:r>
-          </a:p>
-          <a:p>
-            <a:pPr algn="l"/>
-            <a:r>
-              <a:rPr sz="900" b="0">
-                <a:solidFill>
-                  <a:srgbClr val="333333"/>
-                </a:solidFill>
-                <a:ea typeface="Meiryo UI"/>
-                <a:latin typeface="Meiryo UI"/>
-              </a:rPr>
-              <a:t>→ 「一貫教育校化」以外で説明困難な</a:t>
-            </a:r>
-          </a:p>
-          <a:p>
-            <a:pPr algn="l"/>
-            <a:r>
-              <a:rPr sz="900" b="0">
-                <a:solidFill>
-                  <a:srgbClr val="333333"/>
-                </a:solidFill>
-                <a:ea typeface="Meiryo UI"/>
-                <a:latin typeface="Meiryo UI"/>
-              </a:rPr>
-              <a:t>  パフォーマンス低下が観察される</a:t>
-            </a:r>
-          </a:p>
-        </p:txBody>
-      </p:sp>
-      <p:sp>
-        <p:nvSpPr>
-          <p:cNvPr id="21" name="Rectangle 20"/>
-          <p:cNvSpPr/>
-          <p:nvPr/>
-        </p:nvSpPr>
-        <p:spPr>
-          <a:xfrm>
-            <a:off x="6066666" y="3920000"/>
-            <a:ext cx="2893333" cy="680000"/>
-          </a:xfrm>
-          <a:prstGeom prst="rect">
-            <a:avLst/>
-          </a:prstGeom>
-          <a:solidFill>
-            <a:srgbClr val="F7F7F7"/>
-          </a:solidFill>
-          <a:ln w="6350">
-            <a:solidFill>
-              <a:srgbClr val="6F5A9C"/>
-            </a:solidFill>
-          </a:ln>
-          <a:effectLst/>
-        </p:spPr>
-        <p:style>
-          <a:lnRef idx="1">
-            <a:schemeClr val="accent1"/>
-          </a:lnRef>
-          <a:fillRef idx="3">
-            <a:schemeClr val="accent1"/>
-          </a:fillRef>
-          <a:effectRef idx="2">
-            <a:schemeClr val="accent1"/>
-          </a:effectRef>
-          <a:fontRef idx="minor">
-            <a:schemeClr val="lt1"/>
-          </a:fontRef>
-        </p:style>
-        <p:txBody>
-          <a:bodyPr rtlCol="0" anchor="t" lIns="72000" rIns="72000" tIns="36000" bIns="36000" wrap="square"/>
-          <a:lstStyle/>
-          <a:p>
-            <a:pPr algn="l"/>
-            <a:r>
-              <a:rPr sz="900" b="0">
-                <a:solidFill>
-                  <a:srgbClr val="333333"/>
-                </a:solidFill>
-                <a:ea typeface="Meiryo UI"/>
-                <a:latin typeface="Meiryo UI"/>
-              </a:rPr>
-              <a:t>〈外部生・内部生の比較〉</a:t>
-            </a:r>
-          </a:p>
-          <a:p>
-            <a:pPr algn="l"/>
-            <a:r>
-              <a:rPr sz="900" b="0">
-                <a:solidFill>
-                  <a:srgbClr val="333333"/>
-                </a:solidFill>
-                <a:ea typeface="Meiryo UI"/>
-                <a:latin typeface="Meiryo UI"/>
-              </a:rPr>
-              <a:t>● 7年外部生不登校(R2-R5):2,3,3,0名</a:t>
-            </a:r>
-          </a:p>
-          <a:p>
-            <a:pPr algn="l"/>
-            <a:r>
-              <a:rPr sz="900" b="0">
-                <a:solidFill>
-                  <a:srgbClr val="333333"/>
-                </a:solidFill>
-                <a:ea typeface="Meiryo UI"/>
-                <a:latin typeface="Meiryo UI"/>
-              </a:rPr>
-              <a:t>● 中学部不登校の大半は9年間在籍の</a:t>
-            </a:r>
-          </a:p>
-          <a:p>
-            <a:pPr algn="l"/>
-            <a:r>
-              <a:rPr sz="900" b="0">
-                <a:solidFill>
-                  <a:srgbClr val="333333"/>
-                </a:solidFill>
-                <a:ea typeface="Meiryo UI"/>
-                <a:latin typeface="Meiryo UI"/>
-              </a:rPr>
-              <a:t>  内部生（外部生流入の問題ではない）</a:t>
-            </a:r>
-          </a:p>
-          <a:p>
-            <a:pPr algn="l"/>
-            <a:r>
-              <a:rPr sz="900" b="0">
-                <a:solidFill>
-                  <a:srgbClr val="333333"/>
-                </a:solidFill>
-                <a:ea typeface="Meiryo UI"/>
-                <a:latin typeface="Meiryo UI"/>
-              </a:rPr>
-              <a:t>→ 一貫教育環境内で問題発生</a:t>
+              <a:t>● いじめ・暴力もR6→R7で増加傾向</a:t>
             </a:r>
           </a:p>
         </p:txBody>
@@ -18236,7 +19416,7 @@
                 <a:ea typeface="Meiryo UI"/>
                 <a:latin typeface="Meiryo UI"/>
               </a:rPr>
-              <a:t>R6最新（未公表）不登校数は32名で過去最多級。出現率はR5時点で都7.80%・区6.90%を大きく超過。学力・体力でも優位性なし。</a:t>
+              <a:t>不登校はR7=34名で過去最多更新（小17・中17）。体力はR7改善も学力・小規模化の課題は継続。一貫教育の総合的優位性は依然として確認されず。</a:t>
             </a:r>
           </a:p>
         </p:txBody>
@@ -18388,7 +19568,7 @@
                 <a:ea typeface="Meiryo UI"/>
                 <a:latin typeface="Meiryo UI"/>
               </a:rPr>
-              <a:t>結論：新規開設の効果なし／代替施策と費用対効果</a:t>
+              <a:t>学校の自己評価と改善計画（R6・R7）</a:t>
             </a:r>
           </a:p>
         </p:txBody>
@@ -18557,7 +19737,1490 @@
                 <a:ea typeface="Meiryo UI"/>
                 <a:latin typeface="Meiryo UI"/>
               </a:rPr>
-              <a:t>  大泉桜学園 開校15年（H23.4〜）の実績検証：4観点すべてで「効果なし」</a:t>
+              <a:t>  学校教育目標／ビジョン　※令和6・7年度 学校経営計画より</a:t>
+            </a:r>
+          </a:p>
+        </p:txBody>
+      </p:sp>
+      <p:sp>
+        <p:nvSpPr>
+          <p:cNvPr id="9" name="TextBox 8"/>
+          <p:cNvSpPr txBox="1"/>
+          <p:nvPr/>
+        </p:nvSpPr>
+        <p:spPr>
+          <a:xfrm>
+            <a:off x="180000" y="960000"/>
+            <a:ext cx="8780000" cy="460000"/>
+          </a:xfrm>
+          <a:prstGeom prst="rect">
+            <a:avLst/>
+          </a:prstGeom>
+          <a:solidFill>
+            <a:srgbClr val="ECF3FA"/>
+          </a:solidFill>
+          <a:ln w="6350">
+            <a:solidFill>
+              <a:srgbClr val="5B9BD5"/>
+            </a:solidFill>
+          </a:ln>
+        </p:spPr>
+        <p:txBody>
+          <a:bodyPr wrap="square" lIns="72000" rIns="72000" tIns="36000" bIns="36000" anchor="t">
+            <a:spAutoFit/>
+          </a:bodyPr>
+          <a:lstStyle/>
+          <a:p>
+            <a:pPr algn="l"/>
+            <a:r>
+              <a:rPr sz="1000" b="0">
+                <a:solidFill>
+                  <a:srgbClr val="333333"/>
+                </a:solidFill>
+                <a:ea typeface="Meiryo UI"/>
+                <a:latin typeface="Meiryo UI"/>
+              </a:rPr>
+              <a:t>目指す学校像 ─ 「笑顔あふれる学校 ～感動の共有～」　／　校長：渡邊重幸</a:t>
+            </a:r>
+          </a:p>
+          <a:p>
+            <a:pPr algn="l"/>
+            <a:r>
+              <a:rPr sz="1000" b="0">
+                <a:solidFill>
+                  <a:srgbClr val="333333"/>
+                </a:solidFill>
+                <a:ea typeface="Meiryo UI"/>
+                <a:latin typeface="Meiryo UI"/>
+              </a:rPr>
+              <a:t>桜学精神　1～4学年：元気・チャレンジ・思いやり　／　5～9学年：桜の花よりも華ある人・時機を知る人・愛される人</a:t>
+            </a:r>
+          </a:p>
+        </p:txBody>
+      </p:sp>
+      <p:sp>
+        <p:nvSpPr>
+          <p:cNvPr id="10" name="Rectangle 9"/>
+          <p:cNvSpPr/>
+          <p:nvPr/>
+        </p:nvSpPr>
+        <p:spPr>
+          <a:xfrm>
+            <a:off x="180000" y="1490000"/>
+            <a:ext cx="8780000" cy="260000"/>
+          </a:xfrm>
+          <a:prstGeom prst="rect">
+            <a:avLst/>
+          </a:prstGeom>
+          <a:solidFill>
+            <a:srgbClr val="4F81BD"/>
+          </a:solidFill>
+          <a:ln>
+            <a:noFill/>
+          </a:ln>
+          <a:effectLst/>
+        </p:spPr>
+        <p:style>
+          <a:lnRef idx="1">
+            <a:schemeClr val="accent1"/>
+          </a:lnRef>
+          <a:fillRef idx="3">
+            <a:schemeClr val="accent1"/>
+          </a:fillRef>
+          <a:effectRef idx="2">
+            <a:schemeClr val="accent1"/>
+          </a:effectRef>
+          <a:fontRef idx="minor">
+            <a:schemeClr val="lt1"/>
+          </a:fontRef>
+        </p:style>
+        <p:txBody>
+          <a:bodyPr rtlCol="0" anchor="ctr" lIns="90000" rIns="60000" tIns="10000" bIns="10000"/>
+          <a:lstStyle/>
+          <a:p>
+            <a:pPr algn="l"/>
+            <a:r>
+              <a:rPr sz="1100" b="1">
+                <a:solidFill>
+                  <a:srgbClr val="FFFFFF"/>
+                </a:solidFill>
+                <a:ea typeface="Meiryo UI"/>
+                <a:latin typeface="Meiryo UI"/>
+              </a:rPr>
+              <a:t>  4領域での成果と課題　※学校関係者評価委員会（評議員11名）による外部評価</a:t>
+            </a:r>
+          </a:p>
+        </p:txBody>
+      </p:sp>
+      <p:sp>
+        <p:nvSpPr>
+          <p:cNvPr id="11" name="Rectangle 10"/>
+          <p:cNvSpPr/>
+          <p:nvPr/>
+        </p:nvSpPr>
+        <p:spPr>
+          <a:xfrm>
+            <a:off x="180000" y="1790000"/>
+            <a:ext cx="2150000" cy="280000"/>
+          </a:xfrm>
+          <a:prstGeom prst="rect">
+            <a:avLst/>
+          </a:prstGeom>
+          <a:solidFill>
+            <a:srgbClr val="1F4E79"/>
+          </a:solidFill>
+          <a:ln>
+            <a:noFill/>
+          </a:ln>
+          <a:effectLst/>
+        </p:spPr>
+        <p:style>
+          <a:lnRef idx="1">
+            <a:schemeClr val="accent1"/>
+          </a:lnRef>
+          <a:fillRef idx="3">
+            <a:schemeClr val="accent1"/>
+          </a:fillRef>
+          <a:effectRef idx="2">
+            <a:schemeClr val="accent1"/>
+          </a:effectRef>
+          <a:fontRef idx="minor">
+            <a:schemeClr val="lt1"/>
+          </a:fontRef>
+        </p:style>
+        <p:txBody>
+          <a:bodyPr rtlCol="0" anchor="ctr" lIns="72000" rIns="72000" tIns="36000" bIns="36000" wrap="square"/>
+          <a:lstStyle/>
+          <a:p>
+            <a:pPr algn="ctr"/>
+            <a:r>
+              <a:rPr sz="1100" b="1">
+                <a:solidFill>
+                  <a:srgbClr val="FFFFFF"/>
+                </a:solidFill>
+                <a:ea typeface="Meiryo UI"/>
+                <a:latin typeface="Meiryo UI"/>
+              </a:rPr>
+              <a:t>① 確かな学力</a:t>
+            </a:r>
+          </a:p>
+        </p:txBody>
+      </p:sp>
+      <p:sp>
+        <p:nvSpPr>
+          <p:cNvPr id="12" name="Rectangle 11"/>
+          <p:cNvSpPr/>
+          <p:nvPr/>
+        </p:nvSpPr>
+        <p:spPr>
+          <a:xfrm>
+            <a:off x="180000" y="2080000"/>
+            <a:ext cx="2150000" cy="1300000"/>
+          </a:xfrm>
+          <a:prstGeom prst="rect">
+            <a:avLst/>
+          </a:prstGeom>
+          <a:solidFill>
+            <a:srgbClr val="F7F7F7"/>
+          </a:solidFill>
+          <a:ln w="6350">
+            <a:solidFill>
+              <a:srgbClr val="1F4E79"/>
+            </a:solidFill>
+          </a:ln>
+          <a:effectLst/>
+        </p:spPr>
+        <p:style>
+          <a:lnRef idx="1">
+            <a:schemeClr val="accent1"/>
+          </a:lnRef>
+          <a:fillRef idx="3">
+            <a:schemeClr val="accent1"/>
+          </a:fillRef>
+          <a:effectRef idx="2">
+            <a:schemeClr val="accent1"/>
+          </a:effectRef>
+          <a:fontRef idx="minor">
+            <a:schemeClr val="lt1"/>
+          </a:fontRef>
+        </p:style>
+        <p:txBody>
+          <a:bodyPr rtlCol="0" anchor="t" lIns="72000" rIns="72000" tIns="36000" bIns="36000" wrap="square"/>
+          <a:lstStyle/>
+          <a:p>
+            <a:pPr algn="l"/>
+            <a:r>
+              <a:rPr sz="900" b="0">
+                <a:solidFill>
+                  <a:srgbClr val="333333"/>
+                </a:solidFill>
+                <a:ea typeface="Meiryo UI"/>
+                <a:latin typeface="Meiryo UI"/>
+              </a:rPr>
+              <a:t>○ ICT機器（Canva・Padlet・</a:t>
+            </a:r>
+          </a:p>
+          <a:p>
+            <a:pPr algn="l"/>
+            <a:r>
+              <a:rPr sz="900" b="0">
+                <a:solidFill>
+                  <a:srgbClr val="333333"/>
+                </a:solidFill>
+                <a:ea typeface="Meiryo UI"/>
+                <a:latin typeface="Meiryo UI"/>
+              </a:rPr>
+              <a:t>Kahoot!等）を積極活用</a:t>
+            </a:r>
+          </a:p>
+          <a:p>
+            <a:pPr algn="l"/>
+            <a:r>
+              <a:rPr sz="900" b="0">
+                <a:solidFill>
+                  <a:srgbClr val="333333"/>
+                </a:solidFill>
+                <a:ea typeface="Meiryo UI"/>
+                <a:latin typeface="Meiryo UI"/>
+              </a:rPr>
+              <a:t>○ 思考・判断・表現力育成のた</a:t>
+            </a:r>
+          </a:p>
+          <a:p>
+            <a:pPr algn="l"/>
+            <a:r>
+              <a:rPr sz="900" b="0">
+                <a:solidFill>
+                  <a:srgbClr val="333333"/>
+                </a:solidFill>
+                <a:ea typeface="Meiryo UI"/>
+                <a:latin typeface="Meiryo UI"/>
+              </a:rPr>
+              <a:t>め意見記入欄を設定</a:t>
+            </a:r>
+          </a:p>
+          <a:p>
+            <a:pPr algn="l"/>
+            <a:r>
+              <a:rPr sz="900" b="0">
+                <a:solidFill>
+                  <a:srgbClr val="333333"/>
+                </a:solidFill>
+                <a:ea typeface="Meiryo UI"/>
+                <a:latin typeface="Meiryo UI"/>
+              </a:rPr>
+              <a:t>△ ICT活用が「楽しさ」優先で</a:t>
+            </a:r>
+          </a:p>
+          <a:p>
+            <a:pPr algn="l"/>
+            <a:r>
+              <a:rPr sz="900" b="0">
+                <a:solidFill>
+                  <a:srgbClr val="333333"/>
+                </a:solidFill>
+                <a:ea typeface="Meiryo UI"/>
+                <a:latin typeface="Meiryo UI"/>
+              </a:rPr>
+              <a:t>本質的学習に繋がらない場面</a:t>
+            </a:r>
+          </a:p>
+        </p:txBody>
+      </p:sp>
+      <p:sp>
+        <p:nvSpPr>
+          <p:cNvPr id="13" name="Rectangle 12"/>
+          <p:cNvSpPr/>
+          <p:nvPr/>
+        </p:nvSpPr>
+        <p:spPr>
+          <a:xfrm>
+            <a:off x="2390000" y="1790000"/>
+            <a:ext cx="2150000" cy="280000"/>
+          </a:xfrm>
+          <a:prstGeom prst="rect">
+            <a:avLst/>
+          </a:prstGeom>
+          <a:solidFill>
+            <a:srgbClr val="4F81BD"/>
+          </a:solidFill>
+          <a:ln>
+            <a:noFill/>
+          </a:ln>
+          <a:effectLst/>
+        </p:spPr>
+        <p:style>
+          <a:lnRef idx="1">
+            <a:schemeClr val="accent1"/>
+          </a:lnRef>
+          <a:fillRef idx="3">
+            <a:schemeClr val="accent1"/>
+          </a:fillRef>
+          <a:effectRef idx="2">
+            <a:schemeClr val="accent1"/>
+          </a:effectRef>
+          <a:fontRef idx="minor">
+            <a:schemeClr val="lt1"/>
+          </a:fontRef>
+        </p:style>
+        <p:txBody>
+          <a:bodyPr rtlCol="0" anchor="ctr" lIns="72000" rIns="72000" tIns="36000" bIns="36000" wrap="square"/>
+          <a:lstStyle/>
+          <a:p>
+            <a:pPr algn="ctr"/>
+            <a:r>
+              <a:rPr sz="1100" b="1">
+                <a:solidFill>
+                  <a:srgbClr val="FFFFFF"/>
+                </a:solidFill>
+                <a:ea typeface="Meiryo UI"/>
+                <a:latin typeface="Meiryo UI"/>
+              </a:rPr>
+              <a:t>② 豊かな心</a:t>
+            </a:r>
+          </a:p>
+        </p:txBody>
+      </p:sp>
+      <p:sp>
+        <p:nvSpPr>
+          <p:cNvPr id="14" name="Rectangle 13"/>
+          <p:cNvSpPr/>
+          <p:nvPr/>
+        </p:nvSpPr>
+        <p:spPr>
+          <a:xfrm>
+            <a:off x="2390000" y="2080000"/>
+            <a:ext cx="2150000" cy="1300000"/>
+          </a:xfrm>
+          <a:prstGeom prst="rect">
+            <a:avLst/>
+          </a:prstGeom>
+          <a:solidFill>
+            <a:srgbClr val="F7F7F7"/>
+          </a:solidFill>
+          <a:ln w="6350">
+            <a:solidFill>
+              <a:srgbClr val="4F81BD"/>
+            </a:solidFill>
+          </a:ln>
+          <a:effectLst/>
+        </p:spPr>
+        <p:style>
+          <a:lnRef idx="1">
+            <a:schemeClr val="accent1"/>
+          </a:lnRef>
+          <a:fillRef idx="3">
+            <a:schemeClr val="accent1"/>
+          </a:fillRef>
+          <a:effectRef idx="2">
+            <a:schemeClr val="accent1"/>
+          </a:effectRef>
+          <a:fontRef idx="minor">
+            <a:schemeClr val="lt1"/>
+          </a:fontRef>
+        </p:style>
+        <p:txBody>
+          <a:bodyPr rtlCol="0" anchor="t" lIns="72000" rIns="72000" tIns="36000" bIns="36000" wrap="square"/>
+          <a:lstStyle/>
+          <a:p>
+            <a:pPr algn="l"/>
+            <a:r>
+              <a:rPr sz="900" b="0">
+                <a:solidFill>
+                  <a:srgbClr val="333333"/>
+                </a:solidFill>
+                <a:ea typeface="Meiryo UI"/>
+                <a:latin typeface="Meiryo UI"/>
+              </a:rPr>
+              <a:t>○ SC・SSW・心のふれあい相</a:t>
+            </a:r>
+          </a:p>
+          <a:p>
+            <a:pPr algn="l"/>
+            <a:r>
+              <a:rPr sz="900" b="0">
+                <a:solidFill>
+                  <a:srgbClr val="333333"/>
+                </a:solidFill>
+                <a:ea typeface="Meiryo UI"/>
+                <a:latin typeface="Meiryo UI"/>
+              </a:rPr>
+              <a:t>談員と密に連携</a:t>
+            </a:r>
+          </a:p>
+          <a:p>
+            <a:pPr algn="l"/>
+            <a:r>
+              <a:rPr sz="900" b="0">
+                <a:solidFill>
+                  <a:srgbClr val="333333"/>
+                </a:solidFill>
+                <a:ea typeface="Meiryo UI"/>
+                <a:latin typeface="Meiryo UI"/>
+              </a:rPr>
+              <a:t>○ ふれあい月間アンケートで</a:t>
+            </a:r>
+          </a:p>
+          <a:p>
+            <a:pPr algn="l"/>
+            <a:r>
+              <a:rPr sz="900" b="0">
+                <a:solidFill>
+                  <a:srgbClr val="333333"/>
+                </a:solidFill>
+                <a:ea typeface="Meiryo UI"/>
+                <a:latin typeface="Meiryo UI"/>
+              </a:rPr>
+              <a:t>潜在的いじめを早期察知</a:t>
+            </a:r>
+          </a:p>
+          <a:p>
+            <a:pPr algn="l"/>
+            <a:r>
+              <a:rPr sz="900" b="0">
+                <a:solidFill>
+                  <a:srgbClr val="333333"/>
+                </a:solidFill>
+                <a:ea typeface="Meiryo UI"/>
+                <a:latin typeface="Meiryo UI"/>
+              </a:rPr>
+              <a:t>△ 一部児童生徒に話し合い</a:t>
+            </a:r>
+          </a:p>
+          <a:p>
+            <a:pPr algn="l"/>
+            <a:r>
+              <a:rPr sz="900" b="0">
+                <a:solidFill>
+                  <a:srgbClr val="333333"/>
+                </a:solidFill>
+                <a:ea typeface="Meiryo UI"/>
+                <a:latin typeface="Meiryo UI"/>
+              </a:rPr>
+              <a:t>参加が偏る</a:t>
+            </a:r>
+          </a:p>
+        </p:txBody>
+      </p:sp>
+      <p:sp>
+        <p:nvSpPr>
+          <p:cNvPr id="15" name="Rectangle 14"/>
+          <p:cNvSpPr/>
+          <p:nvPr/>
+        </p:nvSpPr>
+        <p:spPr>
+          <a:xfrm>
+            <a:off x="4600000" y="1790000"/>
+            <a:ext cx="2150000" cy="280000"/>
+          </a:xfrm>
+          <a:prstGeom prst="rect">
+            <a:avLst/>
+          </a:prstGeom>
+          <a:solidFill>
+            <a:srgbClr val="E69B4D"/>
+          </a:solidFill>
+          <a:ln>
+            <a:noFill/>
+          </a:ln>
+          <a:effectLst/>
+        </p:spPr>
+        <p:style>
+          <a:lnRef idx="1">
+            <a:schemeClr val="accent1"/>
+          </a:lnRef>
+          <a:fillRef idx="3">
+            <a:schemeClr val="accent1"/>
+          </a:fillRef>
+          <a:effectRef idx="2">
+            <a:schemeClr val="accent1"/>
+          </a:effectRef>
+          <a:fontRef idx="minor">
+            <a:schemeClr val="lt1"/>
+          </a:fontRef>
+        </p:style>
+        <p:txBody>
+          <a:bodyPr rtlCol="0" anchor="ctr" lIns="72000" rIns="72000" tIns="36000" bIns="36000" wrap="square"/>
+          <a:lstStyle/>
+          <a:p>
+            <a:pPr algn="ctr"/>
+            <a:r>
+              <a:rPr sz="1100" b="1">
+                <a:solidFill>
+                  <a:srgbClr val="FFFFFF"/>
+                </a:solidFill>
+                <a:ea typeface="Meiryo UI"/>
+                <a:latin typeface="Meiryo UI"/>
+              </a:rPr>
+              <a:t>③ 健康な生活</a:t>
+            </a:r>
+          </a:p>
+        </p:txBody>
+      </p:sp>
+      <p:sp>
+        <p:nvSpPr>
+          <p:cNvPr id="16" name="Rectangle 15"/>
+          <p:cNvSpPr/>
+          <p:nvPr/>
+        </p:nvSpPr>
+        <p:spPr>
+          <a:xfrm>
+            <a:off x="4600000" y="2080000"/>
+            <a:ext cx="2150000" cy="1300000"/>
+          </a:xfrm>
+          <a:prstGeom prst="rect">
+            <a:avLst/>
+          </a:prstGeom>
+          <a:solidFill>
+            <a:srgbClr val="F7F7F7"/>
+          </a:solidFill>
+          <a:ln w="6350">
+            <a:solidFill>
+              <a:srgbClr val="E69B4D"/>
+            </a:solidFill>
+          </a:ln>
+          <a:effectLst/>
+        </p:spPr>
+        <p:style>
+          <a:lnRef idx="1">
+            <a:schemeClr val="accent1"/>
+          </a:lnRef>
+          <a:fillRef idx="3">
+            <a:schemeClr val="accent1"/>
+          </a:fillRef>
+          <a:effectRef idx="2">
+            <a:schemeClr val="accent1"/>
+          </a:effectRef>
+          <a:fontRef idx="minor">
+            <a:schemeClr val="lt1"/>
+          </a:fontRef>
+        </p:style>
+        <p:txBody>
+          <a:bodyPr rtlCol="0" anchor="t" lIns="72000" rIns="72000" tIns="36000" bIns="36000" wrap="square"/>
+          <a:lstStyle/>
+          <a:p>
+            <a:pPr algn="l"/>
+            <a:r>
+              <a:rPr sz="900" b="0">
+                <a:solidFill>
+                  <a:srgbClr val="333333"/>
+                </a:solidFill>
+                <a:ea typeface="Meiryo UI"/>
+                <a:latin typeface="Meiryo UI"/>
+              </a:rPr>
+              <a:t>○ トップアスリート招聘等で</a:t>
+            </a:r>
+          </a:p>
+          <a:p>
+            <a:pPr algn="l"/>
+            <a:r>
+              <a:rPr sz="900" b="0">
+                <a:solidFill>
+                  <a:srgbClr val="333333"/>
+                </a:solidFill>
+                <a:ea typeface="Meiryo UI"/>
+                <a:latin typeface="Meiryo UI"/>
+              </a:rPr>
+              <a:t>体力向上を図る</a:t>
+            </a:r>
+          </a:p>
+          <a:p>
+            <a:pPr algn="l"/>
+            <a:r>
+              <a:rPr sz="900" b="0">
+                <a:solidFill>
+                  <a:srgbClr val="333333"/>
+                </a:solidFill>
+                <a:ea typeface="Meiryo UI"/>
+                <a:latin typeface="Meiryo UI"/>
+              </a:rPr>
+              <a:t>○ 食育指導計画に基づき給食</a:t>
+            </a:r>
+          </a:p>
+          <a:p>
+            <a:pPr algn="l"/>
+            <a:r>
+              <a:rPr sz="900" b="0">
+                <a:solidFill>
+                  <a:srgbClr val="333333"/>
+                </a:solidFill>
+                <a:ea typeface="Meiryo UI"/>
+                <a:latin typeface="Meiryo UI"/>
+              </a:rPr>
+              <a:t>指導を充実</a:t>
+            </a:r>
+          </a:p>
+          <a:p>
+            <a:pPr algn="l"/>
+            <a:r>
+              <a:rPr sz="900" b="0">
+                <a:solidFill>
+                  <a:srgbClr val="333333"/>
+                </a:solidFill>
+                <a:ea typeface="Meiryo UI"/>
+                <a:latin typeface="Meiryo UI"/>
+              </a:rPr>
+              <a:t>△ 体育施設・特別教室の小中</a:t>
+            </a:r>
+          </a:p>
+          <a:p>
+            <a:pPr algn="l"/>
+            <a:r>
+              <a:rPr sz="900" b="0">
+                <a:solidFill>
+                  <a:srgbClr val="333333"/>
+                </a:solidFill>
+                <a:ea typeface="Meiryo UI"/>
+                <a:latin typeface="Meiryo UI"/>
+              </a:rPr>
+              <a:t>共用に体格差課題</a:t>
+            </a:r>
+          </a:p>
+        </p:txBody>
+      </p:sp>
+      <p:sp>
+        <p:nvSpPr>
+          <p:cNvPr id="17" name="Rectangle 16"/>
+          <p:cNvSpPr/>
+          <p:nvPr/>
+        </p:nvSpPr>
+        <p:spPr>
+          <a:xfrm>
+            <a:off x="6810000" y="1790000"/>
+            <a:ext cx="2150000" cy="280000"/>
+          </a:xfrm>
+          <a:prstGeom prst="rect">
+            <a:avLst/>
+          </a:prstGeom>
+          <a:solidFill>
+            <a:srgbClr val="6F5A9C"/>
+          </a:solidFill>
+          <a:ln>
+            <a:noFill/>
+          </a:ln>
+          <a:effectLst/>
+        </p:spPr>
+        <p:style>
+          <a:lnRef idx="1">
+            <a:schemeClr val="accent1"/>
+          </a:lnRef>
+          <a:fillRef idx="3">
+            <a:schemeClr val="accent1"/>
+          </a:fillRef>
+          <a:effectRef idx="2">
+            <a:schemeClr val="accent1"/>
+          </a:effectRef>
+          <a:fontRef idx="minor">
+            <a:schemeClr val="lt1"/>
+          </a:fontRef>
+        </p:style>
+        <p:txBody>
+          <a:bodyPr rtlCol="0" anchor="ctr" lIns="72000" rIns="72000" tIns="36000" bIns="36000" wrap="square"/>
+          <a:lstStyle/>
+          <a:p>
+            <a:pPr algn="ctr"/>
+            <a:r>
+              <a:rPr sz="1100" b="1">
+                <a:solidFill>
+                  <a:srgbClr val="FFFFFF"/>
+                </a:solidFill>
+                <a:ea typeface="Meiryo UI"/>
+                <a:latin typeface="Meiryo UI"/>
+              </a:rPr>
+              <a:t>④ 開かれた学校</a:t>
+            </a:r>
+          </a:p>
+        </p:txBody>
+      </p:sp>
+      <p:sp>
+        <p:nvSpPr>
+          <p:cNvPr id="18" name="Rectangle 17"/>
+          <p:cNvSpPr/>
+          <p:nvPr/>
+        </p:nvSpPr>
+        <p:spPr>
+          <a:xfrm>
+            <a:off x="6810000" y="2080000"/>
+            <a:ext cx="2150000" cy="1300000"/>
+          </a:xfrm>
+          <a:prstGeom prst="rect">
+            <a:avLst/>
+          </a:prstGeom>
+          <a:solidFill>
+            <a:srgbClr val="F7F7F7"/>
+          </a:solidFill>
+          <a:ln w="6350">
+            <a:solidFill>
+              <a:srgbClr val="6F5A9C"/>
+            </a:solidFill>
+          </a:ln>
+          <a:effectLst/>
+        </p:spPr>
+        <p:style>
+          <a:lnRef idx="1">
+            <a:schemeClr val="accent1"/>
+          </a:lnRef>
+          <a:fillRef idx="3">
+            <a:schemeClr val="accent1"/>
+          </a:fillRef>
+          <a:effectRef idx="2">
+            <a:schemeClr val="accent1"/>
+          </a:effectRef>
+          <a:fontRef idx="minor">
+            <a:schemeClr val="lt1"/>
+          </a:fontRef>
+        </p:style>
+        <p:txBody>
+          <a:bodyPr rtlCol="0" anchor="t" lIns="72000" rIns="72000" tIns="36000" bIns="36000" wrap="square"/>
+          <a:lstStyle/>
+          <a:p>
+            <a:pPr algn="l"/>
+            <a:r>
+              <a:rPr sz="900" b="0">
+                <a:solidFill>
+                  <a:srgbClr val="333333"/>
+                </a:solidFill>
+                <a:ea typeface="Meiryo UI"/>
+                <a:latin typeface="Meiryo UI"/>
+              </a:rPr>
+              <a:t>○ 学年・学級・委員会だより</a:t>
+            </a:r>
+          </a:p>
+          <a:p>
+            <a:pPr algn="l"/>
+            <a:r>
+              <a:rPr sz="900" b="0">
+                <a:solidFill>
+                  <a:srgbClr val="333333"/>
+                </a:solidFill>
+                <a:ea typeface="Meiryo UI"/>
+                <a:latin typeface="Meiryo UI"/>
+              </a:rPr>
+              <a:t>で授業様子を発信</a:t>
+            </a:r>
+          </a:p>
+          <a:p>
+            <a:pPr algn="l"/>
+            <a:r>
+              <a:rPr sz="900" b="0">
+                <a:solidFill>
+                  <a:srgbClr val="333333"/>
+                </a:solidFill>
+                <a:ea typeface="Meiryo UI"/>
+                <a:latin typeface="Meiryo UI"/>
+              </a:rPr>
+              <a:t>○ HP・たより・学校公開で</a:t>
+            </a:r>
+          </a:p>
+          <a:p>
+            <a:pPr algn="l"/>
+            <a:r>
+              <a:rPr sz="900" b="0">
+                <a:solidFill>
+                  <a:srgbClr val="333333"/>
+                </a:solidFill>
+                <a:ea typeface="Meiryo UI"/>
+                <a:latin typeface="Meiryo UI"/>
+              </a:rPr>
+              <a:t>教育活動を公開</a:t>
+            </a:r>
+          </a:p>
+          <a:p>
+            <a:pPr algn="l"/>
+            <a:r>
+              <a:rPr sz="900" b="0">
+                <a:solidFill>
+                  <a:srgbClr val="333333"/>
+                </a:solidFill>
+                <a:ea typeface="Meiryo UI"/>
+                <a:latin typeface="Meiryo UI"/>
+              </a:rPr>
+              <a:t>△ 家庭・地域への啓発を</a:t>
+            </a:r>
+          </a:p>
+          <a:p>
+            <a:pPr algn="l"/>
+            <a:r>
+              <a:rPr sz="900" b="0">
+                <a:solidFill>
+                  <a:srgbClr val="333333"/>
+                </a:solidFill>
+                <a:ea typeface="Meiryo UI"/>
+                <a:latin typeface="Meiryo UI"/>
+              </a:rPr>
+              <a:t>更に強化する必要</a:t>
+            </a:r>
+          </a:p>
+        </p:txBody>
+      </p:sp>
+      <p:sp>
+        <p:nvSpPr>
+          <p:cNvPr id="19" name="Rectangle 18"/>
+          <p:cNvSpPr/>
+          <p:nvPr/>
+        </p:nvSpPr>
+        <p:spPr>
+          <a:xfrm>
+            <a:off x="180000" y="3470000"/>
+            <a:ext cx="4350000" cy="260000"/>
+          </a:xfrm>
+          <a:prstGeom prst="rect">
+            <a:avLst/>
+          </a:prstGeom>
+          <a:solidFill>
+            <a:srgbClr val="4F81BD"/>
+          </a:solidFill>
+          <a:ln>
+            <a:noFill/>
+          </a:ln>
+          <a:effectLst/>
+        </p:spPr>
+        <p:style>
+          <a:lnRef idx="1">
+            <a:schemeClr val="accent1"/>
+          </a:lnRef>
+          <a:fillRef idx="3">
+            <a:schemeClr val="accent1"/>
+          </a:fillRef>
+          <a:effectRef idx="2">
+            <a:schemeClr val="accent1"/>
+          </a:effectRef>
+          <a:fontRef idx="minor">
+            <a:schemeClr val="lt1"/>
+          </a:fontRef>
+        </p:style>
+        <p:txBody>
+          <a:bodyPr rtlCol="0" anchor="ctr" lIns="90000" rIns="60000" tIns="10000" bIns="10000"/>
+          <a:lstStyle/>
+          <a:p>
+            <a:pPr algn="l"/>
+            <a:r>
+              <a:rPr sz="1000" b="1">
+                <a:solidFill>
+                  <a:srgbClr val="FFFFFF"/>
+                </a:solidFill>
+                <a:ea typeface="Meiryo UI"/>
+                <a:latin typeface="Meiryo UI"/>
+              </a:rPr>
+              <a:t>  R7 改善計画（具体策）</a:t>
+            </a:r>
+          </a:p>
+        </p:txBody>
+      </p:sp>
+      <p:sp>
+        <p:nvSpPr>
+          <p:cNvPr id="20" name="TextBox 19"/>
+          <p:cNvSpPr txBox="1"/>
+          <p:nvPr/>
+        </p:nvSpPr>
+        <p:spPr>
+          <a:xfrm>
+            <a:off x="180000" y="3760000"/>
+            <a:ext cx="4350000" cy="900000"/>
+          </a:xfrm>
+          <a:prstGeom prst="rect">
+            <a:avLst/>
+          </a:prstGeom>
+          <a:solidFill>
+            <a:srgbClr val="ECF3FA"/>
+          </a:solidFill>
+          <a:ln w="6350">
+            <a:solidFill>
+              <a:srgbClr val="4F81BD"/>
+            </a:solidFill>
+          </a:ln>
+        </p:spPr>
+        <p:txBody>
+          <a:bodyPr wrap="square" lIns="72000" rIns="72000" tIns="36000" bIns="36000" anchor="t">
+            <a:spAutoFit/>
+          </a:bodyPr>
+          <a:lstStyle/>
+          <a:p>
+            <a:pPr algn="l"/>
+            <a:r>
+              <a:rPr sz="900" b="0">
+                <a:solidFill>
+                  <a:srgbClr val="333333"/>
+                </a:solidFill>
+                <a:ea typeface="Meiryo UI"/>
+                <a:latin typeface="Meiryo UI"/>
+              </a:rPr>
+              <a:t>● 悉皆研修・OJTで全教員のICTスキル統一</a:t>
+            </a:r>
+          </a:p>
+          <a:p>
+            <a:pPr algn="l"/>
+            <a:r>
+              <a:rPr sz="900" b="0">
+                <a:solidFill>
+                  <a:srgbClr val="333333"/>
+                </a:solidFill>
+                <a:ea typeface="Meiryo UI"/>
+                <a:latin typeface="Meiryo UI"/>
+              </a:rPr>
+              <a:t>● AI集計で授業アンケート分析→PDCA高速化</a:t>
+            </a:r>
+          </a:p>
+          <a:p>
+            <a:pPr algn="l"/>
+            <a:r>
+              <a:rPr sz="900" b="0">
+                <a:solidFill>
+                  <a:srgbClr val="333333"/>
+                </a:solidFill>
+                <a:ea typeface="Meiryo UI"/>
+                <a:latin typeface="Meiryo UI"/>
+              </a:rPr>
+              <a:t>● 週3回いじめ防止対策会議を継続</a:t>
+            </a:r>
+          </a:p>
+          <a:p>
+            <a:pPr algn="l"/>
+            <a:r>
+              <a:rPr sz="900" b="0">
+                <a:solidFill>
+                  <a:srgbClr val="333333"/>
+                </a:solidFill>
+                <a:ea typeface="Meiryo UI"/>
+                <a:latin typeface="Meiryo UI"/>
+              </a:rPr>
+              <a:t>● Slack等で児童生徒変化をリアルタイム共有</a:t>
+            </a:r>
+          </a:p>
+          <a:p>
+            <a:pPr algn="l"/>
+            <a:r>
+              <a:rPr sz="900" b="0">
+                <a:solidFill>
+                  <a:srgbClr val="333333"/>
+                </a:solidFill>
+                <a:ea typeface="Meiryo UI"/>
+                <a:latin typeface="Meiryo UI"/>
+              </a:rPr>
+              <a:t>● 「空白の時間・場所」を物理的に減らす</a:t>
+            </a:r>
+          </a:p>
+        </p:txBody>
+      </p:sp>
+      <p:sp>
+        <p:nvSpPr>
+          <p:cNvPr id="21" name="Rectangle 20"/>
+          <p:cNvSpPr/>
+          <p:nvPr/>
+        </p:nvSpPr>
+        <p:spPr>
+          <a:xfrm>
+            <a:off x="4610000" y="3470000"/>
+            <a:ext cx="4350000" cy="260000"/>
+          </a:xfrm>
+          <a:prstGeom prst="rect">
+            <a:avLst/>
+          </a:prstGeom>
+          <a:solidFill>
+            <a:srgbClr val="1F4E79"/>
+          </a:solidFill>
+          <a:ln>
+            <a:noFill/>
+          </a:ln>
+          <a:effectLst/>
+        </p:spPr>
+        <p:style>
+          <a:lnRef idx="1">
+            <a:schemeClr val="accent1"/>
+          </a:lnRef>
+          <a:fillRef idx="3">
+            <a:schemeClr val="accent1"/>
+          </a:fillRef>
+          <a:effectRef idx="2">
+            <a:schemeClr val="accent1"/>
+          </a:effectRef>
+          <a:fontRef idx="minor">
+            <a:schemeClr val="lt1"/>
+          </a:fontRef>
+        </p:style>
+        <p:txBody>
+          <a:bodyPr rtlCol="0" anchor="ctr" lIns="90000" rIns="60000" tIns="10000" bIns="10000"/>
+          <a:lstStyle/>
+          <a:p>
+            <a:pPr algn="l"/>
+            <a:r>
+              <a:rPr sz="1000" b="1">
+                <a:solidFill>
+                  <a:srgbClr val="FFFFFF"/>
+                </a:solidFill>
+                <a:ea typeface="Meiryo UI"/>
+                <a:latin typeface="Meiryo UI"/>
+              </a:rPr>
+              <a:t>  校長の見解（次年度改善に向けて）</a:t>
+            </a:r>
+          </a:p>
+        </p:txBody>
+      </p:sp>
+      <p:sp>
+        <p:nvSpPr>
+          <p:cNvPr id="22" name="TextBox 21"/>
+          <p:cNvSpPr txBox="1"/>
+          <p:nvPr/>
+        </p:nvSpPr>
+        <p:spPr>
+          <a:xfrm>
+            <a:off x="4610000" y="3760000"/>
+            <a:ext cx="4350000" cy="900000"/>
+          </a:xfrm>
+          <a:prstGeom prst="rect">
+            <a:avLst/>
+          </a:prstGeom>
+          <a:solidFill>
+            <a:srgbClr val="F7F7F7"/>
+          </a:solidFill>
+          <a:ln w="6350">
+            <a:solidFill>
+              <a:srgbClr val="1F4E79"/>
+            </a:solidFill>
+          </a:ln>
+        </p:spPr>
+        <p:txBody>
+          <a:bodyPr wrap="square" lIns="72000" rIns="72000" tIns="36000" bIns="36000" anchor="t">
+            <a:spAutoFit/>
+          </a:bodyPr>
+          <a:lstStyle/>
+          <a:p>
+            <a:pPr algn="l"/>
+            <a:r>
+              <a:rPr sz="900" b="0">
+                <a:solidFill>
+                  <a:srgbClr val="333333"/>
+                </a:solidFill>
+                <a:ea typeface="Meiryo UI"/>
+                <a:latin typeface="Meiryo UI"/>
+              </a:rPr>
+              <a:t>「小中一貫教育校である本校は地域の期待も大きい。</a:t>
+            </a:r>
+          </a:p>
+          <a:p>
+            <a:pPr algn="l"/>
+            <a:r>
+              <a:rPr sz="900" b="0">
+                <a:solidFill>
+                  <a:srgbClr val="333333"/>
+                </a:solidFill>
+                <a:ea typeface="Meiryo UI"/>
+                <a:latin typeface="Meiryo UI"/>
+              </a:rPr>
+              <a:t> 期待に応えるためにも今年度の反省をもとに考えた</a:t>
+            </a:r>
+          </a:p>
+          <a:p>
+            <a:pPr algn="l"/>
+            <a:r>
+              <a:rPr sz="900" b="0">
+                <a:solidFill>
+                  <a:srgbClr val="333333"/>
+                </a:solidFill>
+                <a:ea typeface="Meiryo UI"/>
+                <a:latin typeface="Meiryo UI"/>
+              </a:rPr>
+              <a:t> 改善策を、まずは確実に実行していく。PDCAサイクル</a:t>
+            </a:r>
+          </a:p>
+          <a:p>
+            <a:pPr algn="l"/>
+            <a:r>
+              <a:rPr sz="900" b="0">
+                <a:solidFill>
+                  <a:srgbClr val="333333"/>
+                </a:solidFill>
+                <a:ea typeface="Meiryo UI"/>
+                <a:latin typeface="Meiryo UI"/>
+              </a:rPr>
+              <a:t> を活かして、年度途中でも改善策の妥当性を吟味し、</a:t>
+            </a:r>
+          </a:p>
+          <a:p>
+            <a:pPr algn="l"/>
+            <a:r>
+              <a:rPr sz="900" b="0">
+                <a:solidFill>
+                  <a:srgbClr val="333333"/>
+                </a:solidFill>
+                <a:ea typeface="Meiryo UI"/>
+                <a:latin typeface="Meiryo UI"/>
+              </a:rPr>
+              <a:t> 必要に応じて修正していく。」（R6・R7報告書より要約）</a:t>
+            </a:r>
+          </a:p>
+        </p:txBody>
+      </p:sp>
+      <p:sp>
+        <p:nvSpPr>
+          <p:cNvPr id="23" name="Rectangle 22"/>
+          <p:cNvSpPr/>
+          <p:nvPr/>
+        </p:nvSpPr>
+        <p:spPr>
+          <a:xfrm>
+            <a:off x="180000" y="4660000"/>
+            <a:ext cx="8780000" cy="180000"/>
+          </a:xfrm>
+          <a:prstGeom prst="rect">
+            <a:avLst/>
+          </a:prstGeom>
+          <a:solidFill>
+            <a:srgbClr val="6F5A9C"/>
+          </a:solidFill>
+          <a:ln>
+            <a:noFill/>
+          </a:ln>
+          <a:effectLst/>
+        </p:spPr>
+        <p:style>
+          <a:lnRef idx="1">
+            <a:schemeClr val="accent1"/>
+          </a:lnRef>
+          <a:fillRef idx="3">
+            <a:schemeClr val="accent1"/>
+          </a:fillRef>
+          <a:effectRef idx="2">
+            <a:schemeClr val="accent1"/>
+          </a:effectRef>
+          <a:fontRef idx="minor">
+            <a:schemeClr val="lt1"/>
+          </a:fontRef>
+        </p:style>
+        <p:txBody>
+          <a:bodyPr rtlCol="0" anchor="ctr" lIns="72000" rIns="72000" tIns="36000" bIns="36000" wrap="square"/>
+          <a:lstStyle/>
+          <a:p>
+            <a:pPr algn="ctr"/>
+            <a:r>
+              <a:rPr sz="1000" b="1">
+                <a:solidFill>
+                  <a:srgbClr val="FFFFFF"/>
+                </a:solidFill>
+                <a:ea typeface="Meiryo UI"/>
+                <a:latin typeface="Meiryo UI"/>
+              </a:rPr>
+              <a:t>学校は PDCA を回し改善努力を継続中。ただし統計データの傾向は単年の努力では覆らず、施設一体型化の構造的優位性は依然として未確認。</a:t>
+            </a:r>
+          </a:p>
+        </p:txBody>
+      </p:sp>
+    </p:spTree>
+  </p:cSld>
+  <p:clrMapOvr>
+    <a:masterClrMapping/>
+  </p:clrMapOvr>
+</p:sld>
+</file>
+
+<file path=ppt/slides/slide6.xml><?xml version="1.0" encoding="utf-8"?>
+<p:sld xmlns:a="http://schemas.openxmlformats.org/drawingml/2006/main" xmlns:p="http://schemas.openxmlformats.org/presentationml/2006/main" xmlns:r="http://schemas.openxmlformats.org/officeDocument/2006/relationships">
+  <p:cSld>
+    <p:spTree>
+      <p:nvGrpSpPr>
+        <p:cNvPr id="1" name=""/>
+        <p:cNvGrpSpPr/>
+        <p:nvPr/>
+      </p:nvGrpSpPr>
+      <p:grpSpPr/>
+      <p:sp>
+        <p:nvSpPr>
+          <p:cNvPr id="2" name="Rectangle 1"/>
+          <p:cNvSpPr/>
+          <p:nvPr/>
+        </p:nvSpPr>
+        <p:spPr>
+          <a:xfrm>
+            <a:off x="0" y="0"/>
+            <a:ext cx="9144000" cy="80000"/>
+          </a:xfrm>
+          <a:prstGeom prst="rect">
+            <a:avLst/>
+          </a:prstGeom>
+          <a:solidFill>
+            <a:srgbClr val="1F4E79"/>
+          </a:solidFill>
+          <a:ln>
+            <a:noFill/>
+          </a:ln>
+          <a:effectLst/>
+        </p:spPr>
+        <p:style>
+          <a:lnRef idx="1">
+            <a:schemeClr val="accent1"/>
+          </a:lnRef>
+          <a:fillRef idx="3">
+            <a:schemeClr val="accent1"/>
+          </a:fillRef>
+          <a:effectRef idx="2">
+            <a:schemeClr val="accent1"/>
+          </a:effectRef>
+          <a:fontRef idx="minor">
+            <a:schemeClr val="lt1"/>
+          </a:fontRef>
+        </p:style>
+        <p:txBody>
+          <a:bodyPr rtlCol="0" anchor="ctr"/>
+          <a:lstStyle/>
+          <a:p>
+            <a:pPr algn="ctr"/>
+          </a:p>
+        </p:txBody>
+      </p:sp>
+      <p:sp>
+        <p:nvSpPr>
+          <p:cNvPr id="3" name="Rectangle 2"/>
+          <p:cNvSpPr/>
+          <p:nvPr/>
+        </p:nvSpPr>
+        <p:spPr>
+          <a:xfrm>
+            <a:off x="180000" y="180000"/>
+            <a:ext cx="280000" cy="280000"/>
+          </a:xfrm>
+          <a:prstGeom prst="rect">
+            <a:avLst/>
+          </a:prstGeom>
+          <a:solidFill>
+            <a:srgbClr val="1F4E79"/>
+          </a:solidFill>
+          <a:ln>
+            <a:noFill/>
+          </a:ln>
+          <a:effectLst/>
+        </p:spPr>
+        <p:style>
+          <a:lnRef idx="1">
+            <a:schemeClr val="accent1"/>
+          </a:lnRef>
+          <a:fillRef idx="3">
+            <a:schemeClr val="accent1"/>
+          </a:fillRef>
+          <a:effectRef idx="2">
+            <a:schemeClr val="accent1"/>
+          </a:effectRef>
+          <a:fontRef idx="minor">
+            <a:schemeClr val="lt1"/>
+          </a:fontRef>
+        </p:style>
+        <p:txBody>
+          <a:bodyPr rtlCol="0" anchor="ctr" lIns="0" rIns="0" tIns="0" bIns="0"/>
+          <a:lstStyle/>
+          <a:p>
+            <a:pPr algn="ctr"/>
+            <a:r>
+              <a:rPr sz="1400" b="1">
+                <a:solidFill>
+                  <a:srgbClr val="FFFFFF"/>
+                </a:solidFill>
+                <a:ea typeface="Meiryo UI"/>
+                <a:latin typeface="Meiryo UI"/>
+              </a:rPr>
+              <a:t>5</a:t>
+            </a:r>
+          </a:p>
+        </p:txBody>
+      </p:sp>
+      <p:sp>
+        <p:nvSpPr>
+          <p:cNvPr id="4" name="TextBox 3"/>
+          <p:cNvSpPr txBox="1"/>
+          <p:nvPr/>
+        </p:nvSpPr>
+        <p:spPr>
+          <a:xfrm>
+            <a:off x="520000" y="150000"/>
+            <a:ext cx="7800000" cy="340000"/>
+          </a:xfrm>
+          <a:prstGeom prst="rect">
+            <a:avLst/>
+          </a:prstGeom>
+          <a:noFill/>
+        </p:spPr>
+        <p:txBody>
+          <a:bodyPr wrap="none" lIns="36000" tIns="0" bIns="0" anchor="ctr">
+            <a:spAutoFit/>
+          </a:bodyPr>
+          <a:lstStyle/>
+          <a:p>
+            <a:pPr algn="l"/>
+            <a:r>
+              <a:rPr sz="1800" b="1">
+                <a:solidFill>
+                  <a:srgbClr val="1F4E79"/>
+                </a:solidFill>
+                <a:ea typeface="Meiryo UI"/>
+                <a:latin typeface="Meiryo UI"/>
+              </a:rPr>
+              <a:t>結論：新規開設の効果なし／代替施策と費用対効果</a:t>
+            </a:r>
+          </a:p>
+        </p:txBody>
+      </p:sp>
+      <p:sp>
+        <p:nvSpPr>
+          <p:cNvPr id="5" name="Rectangle 4"/>
+          <p:cNvSpPr/>
+          <p:nvPr/>
+        </p:nvSpPr>
+        <p:spPr>
+          <a:xfrm>
+            <a:off x="180000" y="510000"/>
+            <a:ext cx="8780000" cy="15000"/>
+          </a:xfrm>
+          <a:prstGeom prst="rect">
+            <a:avLst/>
+          </a:prstGeom>
+          <a:solidFill>
+            <a:srgbClr val="5B9BD5"/>
+          </a:solidFill>
+          <a:ln>
+            <a:noFill/>
+          </a:ln>
+          <a:effectLst/>
+        </p:spPr>
+        <p:style>
+          <a:lnRef idx="1">
+            <a:schemeClr val="accent1"/>
+          </a:lnRef>
+          <a:fillRef idx="3">
+            <a:schemeClr val="accent1"/>
+          </a:fillRef>
+          <a:effectRef idx="2">
+            <a:schemeClr val="accent1"/>
+          </a:effectRef>
+          <a:fontRef idx="minor">
+            <a:schemeClr val="lt1"/>
+          </a:fontRef>
+        </p:style>
+        <p:txBody>
+          <a:bodyPr rtlCol="0" anchor="ctr"/>
+          <a:lstStyle/>
+          <a:p>
+            <a:pPr algn="ctr"/>
+          </a:p>
+        </p:txBody>
+      </p:sp>
+      <p:sp>
+        <p:nvSpPr>
+          <p:cNvPr id="6" name="TextBox 5"/>
+          <p:cNvSpPr txBox="1"/>
+          <p:nvPr/>
+        </p:nvSpPr>
+        <p:spPr>
+          <a:xfrm>
+            <a:off x="180000" y="4920000"/>
+            <a:ext cx="3000000" cy="180000"/>
+          </a:xfrm>
+          <a:prstGeom prst="rect">
+            <a:avLst/>
+          </a:prstGeom>
+          <a:noFill/>
+        </p:spPr>
+        <p:txBody>
+          <a:bodyPr wrap="none" lIns="0">
+            <a:spAutoFit/>
+          </a:bodyPr>
+          <a:lstStyle/>
+          <a:p>
+            <a:r>
+              <a:rPr sz="800" b="0">
+                <a:solidFill>
+                  <a:srgbClr val="767676"/>
+                </a:solidFill>
+                <a:ea typeface="Meiryo UI"/>
+                <a:latin typeface="Meiryo UI"/>
+              </a:rPr>
+              <a:t>練馬区教育委員会 教育振興部教育指導課</a:t>
+            </a:r>
+          </a:p>
+        </p:txBody>
+      </p:sp>
+      <p:sp>
+        <p:nvSpPr>
+          <p:cNvPr id="7" name="TextBox 6"/>
+          <p:cNvSpPr txBox="1"/>
+          <p:nvPr/>
+        </p:nvSpPr>
+        <p:spPr>
+          <a:xfrm>
+            <a:off x="8740000" y="4920000"/>
+            <a:ext cx="280000" cy="180000"/>
+          </a:xfrm>
+          <a:prstGeom prst="rect">
+            <a:avLst/>
+          </a:prstGeom>
+          <a:noFill/>
+        </p:spPr>
+        <p:txBody>
+          <a:bodyPr wrap="none" lIns="0">
+            <a:spAutoFit/>
+          </a:bodyPr>
+          <a:lstStyle/>
+          <a:p>
+            <a:pPr algn="r"/>
+            <a:r>
+              <a:rPr sz="800" b="0">
+                <a:solidFill>
+                  <a:srgbClr val="767676"/>
+                </a:solidFill>
+                <a:ea typeface="Meiryo UI"/>
+                <a:latin typeface="Meiryo UI"/>
+              </a:rPr>
+              <a:t>- 5 -</a:t>
+            </a:r>
+          </a:p>
+        </p:txBody>
+      </p:sp>
+      <p:sp>
+        <p:nvSpPr>
+          <p:cNvPr id="8" name="Rectangle 7"/>
+          <p:cNvSpPr/>
+          <p:nvPr/>
+        </p:nvSpPr>
+        <p:spPr>
+          <a:xfrm>
+            <a:off x="180000" y="670000"/>
+            <a:ext cx="8780000" cy="260000"/>
+          </a:xfrm>
+          <a:prstGeom prst="rect">
+            <a:avLst/>
+          </a:prstGeom>
+          <a:solidFill>
+            <a:srgbClr val="1F4E79"/>
+          </a:solidFill>
+          <a:ln>
+            <a:noFill/>
+          </a:ln>
+          <a:effectLst/>
+        </p:spPr>
+        <p:style>
+          <a:lnRef idx="1">
+            <a:schemeClr val="accent1"/>
+          </a:lnRef>
+          <a:fillRef idx="3">
+            <a:schemeClr val="accent1"/>
+          </a:fillRef>
+          <a:effectRef idx="2">
+            <a:schemeClr val="accent1"/>
+          </a:effectRef>
+          <a:fontRef idx="minor">
+            <a:schemeClr val="lt1"/>
+          </a:fontRef>
+        </p:style>
+        <p:txBody>
+          <a:bodyPr rtlCol="0" anchor="ctr" lIns="90000" rIns="60000" tIns="10000" bIns="10000"/>
+          <a:lstStyle/>
+          <a:p>
+            <a:pPr algn="l"/>
+            <a:r>
+              <a:rPr sz="1100" b="1">
+                <a:solidFill>
+                  <a:srgbClr val="FFFFFF"/>
+                </a:solidFill>
+                <a:ea typeface="Meiryo UI"/>
+                <a:latin typeface="Meiryo UI"/>
+              </a:rPr>
+              <a:t>  大泉桜学園 開校15年（H23.4〜）R7最新データ反映：3観点で「効果なし」／1観点で「部分改善」</a:t>
             </a:r>
           </a:p>
         </p:txBody>
@@ -18816,7 +21479,7 @@
                 <a:ea typeface="Meiryo UI"/>
                 <a:latin typeface="Meiryo UI"/>
               </a:rPr>
-              <a:t>● 不登校総数：H28=13→R5=28→R6=32（過去最多級）</a:t>
+              <a:t>● 不登校総数：H28=13→R5=28→R6=32→R7=34（過去最多）</a:t>
             </a:r>
           </a:p>
           <a:p>
@@ -18829,7 +21492,7 @@
                 <a:ea typeface="Meiryo UI"/>
                 <a:latin typeface="Meiryo UI"/>
               </a:rPr>
-              <a:t>● 外部生不登校はR5=0名／問題は内部生で発生</a:t>
+              <a:t>● いじめ・暴力行為もR6→R7で増加傾向</a:t>
             </a:r>
           </a:p>
           <a:p>
@@ -18855,7 +21518,7 @@
                 <a:ea typeface="Meiryo UI"/>
                 <a:latin typeface="Meiryo UI"/>
               </a:rPr>
-              <a:t>→ 一貫校化の主要目的が達成されていない</a:t>
+              <a:t>→ R7も悪化継続。一貫校化の主要目的が未達成</a:t>
             </a:r>
           </a:p>
         </p:txBody>
@@ -19024,7 +21687,7 @@
             <a:avLst/>
           </a:prstGeom>
           <a:solidFill>
-            <a:srgbClr val="C0504D"/>
+            <a:srgbClr val="E69B4D"/>
           </a:solidFill>
           <a:ln>
             <a:noFill/>
@@ -19058,7 +21721,7 @@
                 <a:ea typeface="Meiryo UI"/>
                 <a:latin typeface="Meiryo UI"/>
               </a:rPr>
-              <a:t>④ 運営・施設・コスト（教育経済学・学校経営学）</a:t>
+              <a:t>④ 体力・運営・コスト（一部肯定／コスト課題継続）</a:t>
             </a:r>
           </a:p>
         </p:txBody>
@@ -19078,11 +21741,11 @@
             <a:avLst/>
           </a:prstGeom>
           <a:solidFill>
-            <a:srgbClr val="FBEEED"/>
+            <a:srgbClr val="FDF1E3"/>
           </a:solidFill>
           <a:ln w="6350">
             <a:solidFill>
-              <a:srgbClr val="C0504D"/>
+              <a:srgbClr val="E69B4D"/>
             </a:solidFill>
           </a:ln>
         </p:spPr>
@@ -19101,7 +21764,7 @@
                 <a:ea typeface="Meiryo UI"/>
                 <a:latin typeface="Meiryo UI"/>
               </a:rPr>
-              <a:t>● 体育施設・特別教室の共用に体格差課題</a:t>
+              <a:t>○ 体力R7：小5男45→12位、中2女28→9位と改善傾向</a:t>
             </a:r>
           </a:p>
           <a:p>
@@ -19114,7 +21777,7 @@
                 <a:ea typeface="Meiryo UI"/>
                 <a:latin typeface="Meiryo UI"/>
               </a:rPr>
-              <a:t>● 5・6年生の部活動活発化57%にとどまる</a:t>
+              <a:t>△ ただし学年差・年度差大きく中長期で要検証</a:t>
             </a:r>
           </a:p>
           <a:p>
@@ -19127,7 +21790,7 @@
                 <a:ea typeface="Meiryo UI"/>
                 <a:latin typeface="Meiryo UI"/>
               </a:rPr>
-              <a:t>● 外部入学者の保護者不安・情報発信負担</a:t>
+              <a:t>● 体育施設・特別教室は体格差で運用課題</a:t>
             </a:r>
           </a:p>
           <a:p>
@@ -19140,7 +21803,7 @@
                 <a:ea typeface="Meiryo UI"/>
                 <a:latin typeface="Meiryo UI"/>
               </a:rPr>
-              <a:t>● 新設費用：用地・改築・配置で多大な財政負担</a:t>
+              <a:t>● 新設費用（用地・改築）と運営負荷は継続</a:t>
             </a:r>
           </a:p>
           <a:p>
@@ -19153,7 +21816,7 @@
                 <a:ea typeface="Meiryo UI"/>
                 <a:latin typeface="Meiryo UI"/>
               </a:rPr>
-              <a:t>→ 既存校連携強化で代替可能</a:t>
+              <a:t>→ 体力面の効果も既存校連携で再現可能</a:t>
             </a:r>
           </a:p>
         </p:txBody>
@@ -19836,8 +22499,8 @@
         </p:nvSpPr>
         <p:spPr>
           <a:xfrm>
-            <a:off x="180000" y="4640000"/>
-            <a:ext cx="8780000" cy="200000"/>
+            <a:off x="180000" y="4620000"/>
+            <a:ext cx="8780000" cy="240000"/>
           </a:xfrm>
           <a:prstGeom prst="rect">
             <a:avLst/>
@@ -19870,14 +22533,14 @@
           <a:p>
             <a:pPr algn="ctr"/>
             <a:r>
-              <a:rPr sz="1100" b="1">
+              <a:rPr sz="1000" b="1">
                 <a:solidFill>
                   <a:srgbClr val="FFFFFF"/>
                 </a:solidFill>
                 <a:ea typeface="Meiryo UI"/>
                 <a:latin typeface="Meiryo UI"/>
               </a:rPr>
-              <a:t>【教育委員会提言】新規開設は教育効果・費用対効果ともに合理性なし。既存校連携強化等、低コスト・高効果の代替施策を区全域で展開すべき。</a:t>
+              <a:t>【教育委員会提言】R7最新データ反映後も新規開設の総合的効果・費用対効果は確認されず。体力改善は要因分析の上、低コスト施策で全区展開を。</a:t>
             </a:r>
           </a:p>
         </p:txBody>

--- a/output/小中一貫教育（大泉桜学園）_改良版.pptx
+++ b/output/小中一貫教育（大泉桜学園）_改良版.pptx
@@ -8900,600 +8900,6 @@
         </p:nvSpPr>
         <p:spPr>
           <a:xfrm>
-            <a:off x="180000" y="4050000"/>
-            <a:ext cx="8780000" cy="260000"/>
-          </a:xfrm>
-          <a:prstGeom prst="rect">
-            <a:avLst/>
-          </a:prstGeom>
-          <a:solidFill>
-            <a:srgbClr val="6F5A9C"/>
-          </a:solidFill>
-          <a:ln>
-            <a:noFill/>
-          </a:ln>
-          <a:effectLst/>
-        </p:spPr>
-        <p:style>
-          <a:lnRef idx="1">
-            <a:schemeClr val="accent1"/>
-          </a:lnRef>
-          <a:fillRef idx="3">
-            <a:schemeClr val="accent1"/>
-          </a:fillRef>
-          <a:effectRef idx="2">
-            <a:schemeClr val="accent1"/>
-          </a:effectRef>
-          <a:fontRef idx="minor">
-            <a:schemeClr val="lt1"/>
-          </a:fontRef>
-        </p:style>
-        <p:txBody>
-          <a:bodyPr rtlCol="0" anchor="ctr" lIns="90000" rIns="60000" tIns="10000" bIns="10000"/>
-          <a:lstStyle/>
-          <a:p>
-            <a:pPr algn="l"/>
-            <a:r>
-              <a:rPr sz="1000" b="1">
-                <a:solidFill>
-                  <a:srgbClr val="FFFFFF"/>
-                </a:solidFill>
-                <a:ea typeface="Meiryo UI"/>
-                <a:latin typeface="Meiryo UI"/>
-              </a:rPr>
-              <a:t>  本資料は以下の10専門分野の知見を踏まえて作成</a:t>
-            </a:r>
-          </a:p>
-        </p:txBody>
-      </p:sp>
-      <p:sp>
-        <p:nvSpPr>
-          <p:cNvPr id="24" name="Rectangle 23"/>
-          <p:cNvSpPr/>
-          <p:nvPr/>
-        </p:nvSpPr>
-        <p:spPr>
-          <a:xfrm>
-            <a:off x="180000" y="4380000"/>
-            <a:ext cx="851000" cy="220000"/>
-          </a:xfrm>
-          <a:prstGeom prst="rect">
-            <a:avLst/>
-          </a:prstGeom>
-          <a:solidFill>
-            <a:srgbClr val="6F5A9C"/>
-          </a:solidFill>
-          <a:ln>
-            <a:noFill/>
-          </a:ln>
-          <a:effectLst/>
-        </p:spPr>
-        <p:style>
-          <a:lnRef idx="1">
-            <a:schemeClr val="accent1"/>
-          </a:lnRef>
-          <a:fillRef idx="3">
-            <a:schemeClr val="accent1"/>
-          </a:fillRef>
-          <a:effectRef idx="2">
-            <a:schemeClr val="accent1"/>
-          </a:effectRef>
-          <a:fontRef idx="minor">
-            <a:schemeClr val="lt1"/>
-          </a:fontRef>
-        </p:style>
-        <p:txBody>
-          <a:bodyPr rtlCol="0" anchor="ctr" lIns="18000" rIns="18000" tIns="6000" bIns="6000"/>
-          <a:lstStyle/>
-          <a:p>
-            <a:pPr algn="ctr"/>
-            <a:r>
-              <a:rPr sz="800" b="1">
-                <a:solidFill>
-                  <a:srgbClr val="FFFFFF"/>
-                </a:solidFill>
-                <a:ea typeface="Meiryo UI"/>
-                <a:latin typeface="Meiryo UI"/>
-              </a:rPr>
-              <a:t>教育社会学</a:t>
-            </a:r>
-          </a:p>
-        </p:txBody>
-      </p:sp>
-      <p:sp>
-        <p:nvSpPr>
-          <p:cNvPr id="25" name="Rectangle 24"/>
-          <p:cNvSpPr/>
-          <p:nvPr/>
-        </p:nvSpPr>
-        <p:spPr>
-          <a:xfrm>
-            <a:off x="1061000" y="4380000"/>
-            <a:ext cx="851000" cy="220000"/>
-          </a:xfrm>
-          <a:prstGeom prst="rect">
-            <a:avLst/>
-          </a:prstGeom>
-          <a:solidFill>
-            <a:srgbClr val="6F5A9C"/>
-          </a:solidFill>
-          <a:ln>
-            <a:noFill/>
-          </a:ln>
-          <a:effectLst/>
-        </p:spPr>
-        <p:style>
-          <a:lnRef idx="1">
-            <a:schemeClr val="accent1"/>
-          </a:lnRef>
-          <a:fillRef idx="3">
-            <a:schemeClr val="accent1"/>
-          </a:fillRef>
-          <a:effectRef idx="2">
-            <a:schemeClr val="accent1"/>
-          </a:effectRef>
-          <a:fontRef idx="minor">
-            <a:schemeClr val="lt1"/>
-          </a:fontRef>
-        </p:style>
-        <p:txBody>
-          <a:bodyPr rtlCol="0" anchor="ctr" lIns="18000" rIns="18000" tIns="6000" bIns="6000"/>
-          <a:lstStyle/>
-          <a:p>
-            <a:pPr algn="ctr"/>
-            <a:r>
-              <a:rPr sz="800" b="1">
-                <a:solidFill>
-                  <a:srgbClr val="FFFFFF"/>
-                </a:solidFill>
-                <a:ea typeface="Meiryo UI"/>
-                <a:latin typeface="Meiryo UI"/>
-              </a:rPr>
-              <a:t>教育経済学</a:t>
-            </a:r>
-          </a:p>
-        </p:txBody>
-      </p:sp>
-      <p:sp>
-        <p:nvSpPr>
-          <p:cNvPr id="26" name="Rectangle 25"/>
-          <p:cNvSpPr/>
-          <p:nvPr/>
-        </p:nvSpPr>
-        <p:spPr>
-          <a:xfrm>
-            <a:off x="1942000" y="4380000"/>
-            <a:ext cx="851000" cy="220000"/>
-          </a:xfrm>
-          <a:prstGeom prst="rect">
-            <a:avLst/>
-          </a:prstGeom>
-          <a:solidFill>
-            <a:srgbClr val="6F5A9C"/>
-          </a:solidFill>
-          <a:ln>
-            <a:noFill/>
-          </a:ln>
-          <a:effectLst/>
-        </p:spPr>
-        <p:style>
-          <a:lnRef idx="1">
-            <a:schemeClr val="accent1"/>
-          </a:lnRef>
-          <a:fillRef idx="3">
-            <a:schemeClr val="accent1"/>
-          </a:fillRef>
-          <a:effectRef idx="2">
-            <a:schemeClr val="accent1"/>
-          </a:effectRef>
-          <a:fontRef idx="minor">
-            <a:schemeClr val="lt1"/>
-          </a:fontRef>
-        </p:style>
-        <p:txBody>
-          <a:bodyPr rtlCol="0" anchor="ctr" lIns="18000" rIns="18000" tIns="6000" bIns="6000"/>
-          <a:lstStyle/>
-          <a:p>
-            <a:pPr algn="ctr"/>
-            <a:r>
-              <a:rPr sz="800" b="1">
-                <a:solidFill>
-                  <a:srgbClr val="FFFFFF"/>
-                </a:solidFill>
-                <a:ea typeface="Meiryo UI"/>
-                <a:latin typeface="Meiryo UI"/>
-              </a:rPr>
-              <a:t>教育統計学</a:t>
-            </a:r>
-          </a:p>
-        </p:txBody>
-      </p:sp>
-      <p:sp>
-        <p:nvSpPr>
-          <p:cNvPr id="27" name="Rectangle 26"/>
-          <p:cNvSpPr/>
-          <p:nvPr/>
-        </p:nvSpPr>
-        <p:spPr>
-          <a:xfrm>
-            <a:off x="2823000" y="4380000"/>
-            <a:ext cx="851000" cy="220000"/>
-          </a:xfrm>
-          <a:prstGeom prst="rect">
-            <a:avLst/>
-          </a:prstGeom>
-          <a:solidFill>
-            <a:srgbClr val="6F5A9C"/>
-          </a:solidFill>
-          <a:ln>
-            <a:noFill/>
-          </a:ln>
-          <a:effectLst/>
-        </p:spPr>
-        <p:style>
-          <a:lnRef idx="1">
-            <a:schemeClr val="accent1"/>
-          </a:lnRef>
-          <a:fillRef idx="3">
-            <a:schemeClr val="accent1"/>
-          </a:fillRef>
-          <a:effectRef idx="2">
-            <a:schemeClr val="accent1"/>
-          </a:effectRef>
-          <a:fontRef idx="minor">
-            <a:schemeClr val="lt1"/>
-          </a:fontRef>
-        </p:style>
-        <p:txBody>
-          <a:bodyPr rtlCol="0" anchor="ctr" lIns="18000" rIns="18000" tIns="6000" bIns="6000"/>
-          <a:lstStyle/>
-          <a:p>
-            <a:pPr algn="ctr"/>
-            <a:r>
-              <a:rPr sz="800" b="1">
-                <a:solidFill>
-                  <a:srgbClr val="FFFFFF"/>
-                </a:solidFill>
-                <a:ea typeface="Meiryo UI"/>
-                <a:latin typeface="Meiryo UI"/>
-              </a:rPr>
-              <a:t>教育心理学</a:t>
-            </a:r>
-          </a:p>
-        </p:txBody>
-      </p:sp>
-      <p:sp>
-        <p:nvSpPr>
-          <p:cNvPr id="28" name="Rectangle 27"/>
-          <p:cNvSpPr/>
-          <p:nvPr/>
-        </p:nvSpPr>
-        <p:spPr>
-          <a:xfrm>
-            <a:off x="3704000" y="4380000"/>
-            <a:ext cx="851000" cy="220000"/>
-          </a:xfrm>
-          <a:prstGeom prst="rect">
-            <a:avLst/>
-          </a:prstGeom>
-          <a:solidFill>
-            <a:srgbClr val="6F5A9C"/>
-          </a:solidFill>
-          <a:ln>
-            <a:noFill/>
-          </a:ln>
-          <a:effectLst/>
-        </p:spPr>
-        <p:style>
-          <a:lnRef idx="1">
-            <a:schemeClr val="accent1"/>
-          </a:lnRef>
-          <a:fillRef idx="3">
-            <a:schemeClr val="accent1"/>
-          </a:fillRef>
-          <a:effectRef idx="2">
-            <a:schemeClr val="accent1"/>
-          </a:effectRef>
-          <a:fontRef idx="minor">
-            <a:schemeClr val="lt1"/>
-          </a:fontRef>
-        </p:style>
-        <p:txBody>
-          <a:bodyPr rtlCol="0" anchor="ctr" lIns="18000" rIns="18000" tIns="6000" bIns="6000"/>
-          <a:lstStyle/>
-          <a:p>
-            <a:pPr algn="ctr"/>
-            <a:r>
-              <a:rPr sz="800" b="1">
-                <a:solidFill>
-                  <a:srgbClr val="FFFFFF"/>
-                </a:solidFill>
-                <a:ea typeface="Meiryo UI"/>
-                <a:latin typeface="Meiryo UI"/>
-              </a:rPr>
-              <a:t>学校経営学</a:t>
-            </a:r>
-          </a:p>
-        </p:txBody>
-      </p:sp>
-      <p:sp>
-        <p:nvSpPr>
-          <p:cNvPr id="29" name="Rectangle 28"/>
-          <p:cNvSpPr/>
-          <p:nvPr/>
-        </p:nvSpPr>
-        <p:spPr>
-          <a:xfrm>
-            <a:off x="4585000" y="4380000"/>
-            <a:ext cx="851000" cy="220000"/>
-          </a:xfrm>
-          <a:prstGeom prst="rect">
-            <a:avLst/>
-          </a:prstGeom>
-          <a:solidFill>
-            <a:srgbClr val="6F5A9C"/>
-          </a:solidFill>
-          <a:ln>
-            <a:noFill/>
-          </a:ln>
-          <a:effectLst/>
-        </p:spPr>
-        <p:style>
-          <a:lnRef idx="1">
-            <a:schemeClr val="accent1"/>
-          </a:lnRef>
-          <a:fillRef idx="3">
-            <a:schemeClr val="accent1"/>
-          </a:fillRef>
-          <a:effectRef idx="2">
-            <a:schemeClr val="accent1"/>
-          </a:effectRef>
-          <a:fontRef idx="minor">
-            <a:schemeClr val="lt1"/>
-          </a:fontRef>
-        </p:style>
-        <p:txBody>
-          <a:bodyPr rtlCol="0" anchor="ctr" lIns="18000" rIns="18000" tIns="6000" bIns="6000"/>
-          <a:lstStyle/>
-          <a:p>
-            <a:pPr algn="ctr"/>
-            <a:r>
-              <a:rPr sz="800" b="1">
-                <a:solidFill>
-                  <a:srgbClr val="FFFFFF"/>
-                </a:solidFill>
-                <a:ea typeface="Meiryo UI"/>
-                <a:latin typeface="Meiryo UI"/>
-              </a:rPr>
-              <a:t>発達心理学</a:t>
-            </a:r>
-          </a:p>
-        </p:txBody>
-      </p:sp>
-      <p:sp>
-        <p:nvSpPr>
-          <p:cNvPr id="30" name="Rectangle 29"/>
-          <p:cNvSpPr/>
-          <p:nvPr/>
-        </p:nvSpPr>
-        <p:spPr>
-          <a:xfrm>
-            <a:off x="5466000" y="4380000"/>
-            <a:ext cx="851000" cy="220000"/>
-          </a:xfrm>
-          <a:prstGeom prst="rect">
-            <a:avLst/>
-          </a:prstGeom>
-          <a:solidFill>
-            <a:srgbClr val="6F5A9C"/>
-          </a:solidFill>
-          <a:ln>
-            <a:noFill/>
-          </a:ln>
-          <a:effectLst/>
-        </p:spPr>
-        <p:style>
-          <a:lnRef idx="1">
-            <a:schemeClr val="accent1"/>
-          </a:lnRef>
-          <a:fillRef idx="3">
-            <a:schemeClr val="accent1"/>
-          </a:fillRef>
-          <a:effectRef idx="2">
-            <a:schemeClr val="accent1"/>
-          </a:effectRef>
-          <a:fontRef idx="minor">
-            <a:schemeClr val="lt1"/>
-          </a:fontRef>
-        </p:style>
-        <p:txBody>
-          <a:bodyPr rtlCol="0" anchor="ctr" lIns="18000" rIns="18000" tIns="6000" bIns="6000"/>
-          <a:lstStyle/>
-          <a:p>
-            <a:pPr algn="ctr"/>
-            <a:r>
-              <a:rPr sz="800" b="1">
-                <a:solidFill>
-                  <a:srgbClr val="FFFFFF"/>
-                </a:solidFill>
-                <a:ea typeface="Meiryo UI"/>
-                <a:latin typeface="Meiryo UI"/>
-              </a:rPr>
-              <a:t>比較教育学</a:t>
-            </a:r>
-          </a:p>
-        </p:txBody>
-      </p:sp>
-      <p:sp>
-        <p:nvSpPr>
-          <p:cNvPr id="31" name="Rectangle 30"/>
-          <p:cNvSpPr/>
-          <p:nvPr/>
-        </p:nvSpPr>
-        <p:spPr>
-          <a:xfrm>
-            <a:off x="6347000" y="4380000"/>
-            <a:ext cx="851000" cy="220000"/>
-          </a:xfrm>
-          <a:prstGeom prst="rect">
-            <a:avLst/>
-          </a:prstGeom>
-          <a:solidFill>
-            <a:srgbClr val="6F5A9C"/>
-          </a:solidFill>
-          <a:ln>
-            <a:noFill/>
-          </a:ln>
-          <a:effectLst/>
-        </p:spPr>
-        <p:style>
-          <a:lnRef idx="1">
-            <a:schemeClr val="accent1"/>
-          </a:lnRef>
-          <a:fillRef idx="3">
-            <a:schemeClr val="accent1"/>
-          </a:fillRef>
-          <a:effectRef idx="2">
-            <a:schemeClr val="accent1"/>
-          </a:effectRef>
-          <a:fontRef idx="minor">
-            <a:schemeClr val="lt1"/>
-          </a:fontRef>
-        </p:style>
-        <p:txBody>
-          <a:bodyPr rtlCol="0" anchor="ctr" lIns="18000" rIns="18000" tIns="6000" bIns="6000"/>
-          <a:lstStyle/>
-          <a:p>
-            <a:pPr algn="ctr"/>
-            <a:r>
-              <a:rPr sz="800" b="1">
-                <a:solidFill>
-                  <a:srgbClr val="FFFFFF"/>
-                </a:solidFill>
-                <a:ea typeface="Meiryo UI"/>
-                <a:latin typeface="Meiryo UI"/>
-              </a:rPr>
-              <a:t>政策評価学</a:t>
-            </a:r>
-          </a:p>
-        </p:txBody>
-      </p:sp>
-      <p:sp>
-        <p:nvSpPr>
-          <p:cNvPr id="32" name="Rectangle 31"/>
-          <p:cNvSpPr/>
-          <p:nvPr/>
-        </p:nvSpPr>
-        <p:spPr>
-          <a:xfrm>
-            <a:off x="7228000" y="4380000"/>
-            <a:ext cx="851000" cy="220000"/>
-          </a:xfrm>
-          <a:prstGeom prst="rect">
-            <a:avLst/>
-          </a:prstGeom>
-          <a:solidFill>
-            <a:srgbClr val="6F5A9C"/>
-          </a:solidFill>
-          <a:ln>
-            <a:noFill/>
-          </a:ln>
-          <a:effectLst/>
-        </p:spPr>
-        <p:style>
-          <a:lnRef idx="1">
-            <a:schemeClr val="accent1"/>
-          </a:lnRef>
-          <a:fillRef idx="3">
-            <a:schemeClr val="accent1"/>
-          </a:fillRef>
-          <a:effectRef idx="2">
-            <a:schemeClr val="accent1"/>
-          </a:effectRef>
-          <a:fontRef idx="minor">
-            <a:schemeClr val="lt1"/>
-          </a:fontRef>
-        </p:style>
-        <p:txBody>
-          <a:bodyPr rtlCol="0" anchor="ctr" lIns="18000" rIns="18000" tIns="6000" bIns="6000"/>
-          <a:lstStyle/>
-          <a:p>
-            <a:pPr algn="ctr"/>
-            <a:r>
-              <a:rPr sz="800" b="1">
-                <a:solidFill>
-                  <a:srgbClr val="FFFFFF"/>
-                </a:solidFill>
-                <a:ea typeface="Meiryo UI"/>
-                <a:latin typeface="Meiryo UI"/>
-              </a:rPr>
-              <a:t>特別支援教育</a:t>
-            </a:r>
-          </a:p>
-        </p:txBody>
-      </p:sp>
-      <p:sp>
-        <p:nvSpPr>
-          <p:cNvPr id="33" name="Rectangle 32"/>
-          <p:cNvSpPr/>
-          <p:nvPr/>
-        </p:nvSpPr>
-        <p:spPr>
-          <a:xfrm>
-            <a:off x="8109000" y="4380000"/>
-            <a:ext cx="851000" cy="220000"/>
-          </a:xfrm>
-          <a:prstGeom prst="rect">
-            <a:avLst/>
-          </a:prstGeom>
-          <a:solidFill>
-            <a:srgbClr val="6F5A9C"/>
-          </a:solidFill>
-          <a:ln>
-            <a:noFill/>
-          </a:ln>
-          <a:effectLst/>
-        </p:spPr>
-        <p:style>
-          <a:lnRef idx="1">
-            <a:schemeClr val="accent1"/>
-          </a:lnRef>
-          <a:fillRef idx="3">
-            <a:schemeClr val="accent1"/>
-          </a:fillRef>
-          <a:effectRef idx="2">
-            <a:schemeClr val="accent1"/>
-          </a:effectRef>
-          <a:fontRef idx="minor">
-            <a:schemeClr val="lt1"/>
-          </a:fontRef>
-        </p:style>
-        <p:txBody>
-          <a:bodyPr rtlCol="0" anchor="ctr" lIns="18000" rIns="18000" tIns="6000" bIns="6000"/>
-          <a:lstStyle/>
-          <a:p>
-            <a:pPr algn="ctr"/>
-            <a:r>
-              <a:rPr sz="800" b="1">
-                <a:solidFill>
-                  <a:srgbClr val="FFFFFF"/>
-                </a:solidFill>
-                <a:ea typeface="Meiryo UI"/>
-                <a:latin typeface="Meiryo UI"/>
-              </a:rPr>
-              <a:t>教育行政学</a:t>
-            </a:r>
-          </a:p>
-        </p:txBody>
-      </p:sp>
-      <p:sp>
-        <p:nvSpPr>
-          <p:cNvPr id="34" name="Rectangle 33"/>
-          <p:cNvSpPr/>
-          <p:nvPr/>
-        </p:nvSpPr>
-        <p:spPr>
-          <a:xfrm>
             <a:off x="180000" y="4660000"/>
             <a:ext cx="8780000" cy="180000"/>
           </a:xfrm>
@@ -9687,7 +9093,7 @@
                 <a:ea typeface="Meiryo UI"/>
                 <a:latin typeface="Meiryo UI"/>
               </a:rPr>
-              <a:t>児童生徒数の推移／他自治体・全国動向との比較</a:t>
+              <a:t>児童生徒数の推移／桜中進学率と区全体動向</a:t>
             </a:r>
           </a:p>
         </p:txBody>
@@ -12526,7 +11932,7 @@
             <a:avLst/>
           </a:prstGeom>
           <a:solidFill>
-            <a:srgbClr val="6F5A9C"/>
+            <a:srgbClr val="1F4E79"/>
           </a:solidFill>
           <a:ln>
             <a:noFill/>
@@ -12560,7 +11966,7 @@
                 <a:ea typeface="Meiryo UI"/>
                 <a:latin typeface="Meiryo UI"/>
               </a:rPr>
-              <a:t>  他自治体・全国動向との比較 ― 比較教育学・政策評価学の視点</a:t>
+              <a:t>  追加観察：桜中入学者の構成変化</a:t>
             </a:r>
           </a:p>
         </p:txBody>
@@ -12575,7 +11981,7 @@
         </p:nvGraphicFramePr>
         <p:xfrm>
           <a:off x="180000" y="3880000"/>
-          <a:ext cx="8780000" cy="950000"/>
+          <a:ext cx="8780000" cy="720000"/>
         </p:xfrm>
         <a:graphic>
           <a:graphicData uri="http://schemas.openxmlformats.org/drawingml/2006/table">
@@ -12585,11 +11991,14 @@
               </a:tblPr>
               <a:tblGrid>
                 <a:gridCol w="1500000"/>
-                <a:gridCol w="1800000"/>
-                <a:gridCol w="3680000"/>
-                <a:gridCol w="1800000"/>
+                <a:gridCol w="550000"/>
+                <a:gridCol w="550000"/>
+                <a:gridCol w="550000"/>
+                <a:gridCol w="550000"/>
+                <a:gridCol w="550000"/>
+                <a:gridCol w="4530000"/>
               </a:tblGrid>
-              <a:tr h="190000">
+              <a:tr h="144000">
                 <a:tc>
                   <a:txBody>
                     <a:bodyPr wrap="square"/>
@@ -12604,13 +12013,13 @@
                           <a:ea typeface="Meiryo UI"/>
                           <a:latin typeface="Meiryo UI"/>
                         </a:rPr>
-                        <a:t/>
-                      </a:r>
-                    </a:p>
-                  </a:txBody>
-                  <a:tcPr marL="36000" marR="36000" marT="18000" marB="18000">
-                    <a:solidFill>
-                      <a:srgbClr val="6F5A9C"/>
+                        <a:t>年度</a:t>
+                      </a:r>
+                    </a:p>
+                  </a:txBody>
+                  <a:tcPr marL="36000" marR="36000" marT="18000" marB="18000">
+                    <a:solidFill>
+                      <a:srgbClr val="1F4E79"/>
                     </a:solidFill>
                   </a:tcPr>
                 </a:tc>
@@ -12628,13 +12037,13 @@
                           <a:ea typeface="Meiryo UI"/>
                           <a:latin typeface="Meiryo UI"/>
                         </a:rPr>
-                        <a:t>区立校数（一貫型）</a:t>
-                      </a:r>
-                    </a:p>
-                  </a:txBody>
-                  <a:tcPr marL="36000" marR="36000" marT="18000" marB="18000">
-                    <a:solidFill>
-                      <a:srgbClr val="6F5A9C"/>
+                        <a:t>R3</a:t>
+                      </a:r>
+                    </a:p>
+                  </a:txBody>
+                  <a:tcPr marL="36000" marR="36000" marT="18000" marB="18000">
+                    <a:solidFill>
+                      <a:srgbClr val="1F4E79"/>
                     </a:solidFill>
                   </a:tcPr>
                 </a:tc>
@@ -12652,13 +12061,13 @@
                           <a:ea typeface="Meiryo UI"/>
                           <a:latin typeface="Meiryo UI"/>
                         </a:rPr>
-                        <a:t>主な方針・実績</a:t>
-                      </a:r>
-                    </a:p>
-                  </a:txBody>
-                  <a:tcPr marL="36000" marR="36000" marT="18000" marB="18000">
-                    <a:solidFill>
-                      <a:srgbClr val="6F5A9C"/>
+                        <a:t>R4</a:t>
+                      </a:r>
+                    </a:p>
+                  </a:txBody>
+                  <a:tcPr marL="36000" marR="36000" marT="18000" marB="18000">
+                    <a:solidFill>
+                      <a:srgbClr val="1F4E79"/>
                     </a:solidFill>
                   </a:tcPr>
                 </a:tc>
@@ -12676,18 +12085,90 @@
                           <a:ea typeface="Meiryo UI"/>
                           <a:latin typeface="Meiryo UI"/>
                         </a:rPr>
-                        <a:t>教訓</a:t>
-                      </a:r>
-                    </a:p>
-                  </a:txBody>
-                  <a:tcPr marL="36000" marR="36000" marT="18000" marB="18000">
-                    <a:solidFill>
-                      <a:srgbClr val="6F5A9C"/>
+                        <a:t>R5</a:t>
+                      </a:r>
+                    </a:p>
+                  </a:txBody>
+                  <a:tcPr marL="36000" marR="36000" marT="18000" marB="18000">
+                    <a:solidFill>
+                      <a:srgbClr val="1F4E79"/>
+                    </a:solidFill>
+                  </a:tcPr>
+                </a:tc>
+                <a:tc>
+                  <a:txBody>
+                    <a:bodyPr wrap="square"/>
+                    <a:lstStyle/>
+                    <a:p>
+                      <a:pPr algn="ctr"/>
+                      <a:r>
+                        <a:rPr sz="800" b="1">
+                          <a:solidFill>
+                            <a:srgbClr val="FFFFFF"/>
+                          </a:solidFill>
+                          <a:ea typeface="Meiryo UI"/>
+                          <a:latin typeface="Meiryo UI"/>
+                        </a:rPr>
+                        <a:t>R6</a:t>
+                      </a:r>
+                    </a:p>
+                  </a:txBody>
+                  <a:tcPr marL="36000" marR="36000" marT="18000" marB="18000">
+                    <a:solidFill>
+                      <a:srgbClr val="1F4E79"/>
+                    </a:solidFill>
+                  </a:tcPr>
+                </a:tc>
+                <a:tc>
+                  <a:txBody>
+                    <a:bodyPr wrap="square"/>
+                    <a:lstStyle/>
+                    <a:p>
+                      <a:pPr algn="ctr"/>
+                      <a:r>
+                        <a:rPr sz="800" b="1">
+                          <a:solidFill>
+                            <a:srgbClr val="FFFFFF"/>
+                          </a:solidFill>
+                          <a:ea typeface="Meiryo UI"/>
+                          <a:latin typeface="Meiryo UI"/>
+                        </a:rPr>
+                        <a:t>R7</a:t>
+                      </a:r>
+                    </a:p>
+                  </a:txBody>
+                  <a:tcPr marL="36000" marR="36000" marT="18000" marB="18000">
+                    <a:solidFill>
+                      <a:srgbClr val="1F4E79"/>
+                    </a:solidFill>
+                  </a:tcPr>
+                </a:tc>
+                <a:tc>
+                  <a:txBody>
+                    <a:bodyPr wrap="square"/>
+                    <a:lstStyle/>
+                    <a:p>
+                      <a:pPr algn="ctr"/>
+                      <a:r>
+                        <a:rPr sz="800" b="1">
+                          <a:solidFill>
+                            <a:srgbClr val="FFFFFF"/>
+                          </a:solidFill>
+                          <a:ea typeface="Meiryo UI"/>
+                          <a:latin typeface="Meiryo UI"/>
+                        </a:rPr>
+                        <a:t>概況</a:t>
+                      </a:r>
+                    </a:p>
+                  </a:txBody>
+                  <a:tcPr marL="36000" marR="36000" marT="18000" marB="18000">
+                    <a:solidFill>
+                      <a:srgbClr val="1F4E79"/>
                     </a:solidFill>
                   </a:tcPr>
                 </a:tc>
               </a:tr>
-              <a:tr h="190000">
+              <a:tr h="144000">
                 <a:tc>
                   <a:txBody>
                     <a:bodyPr wrap="square"/>
@@ -12702,13 +12183,13 @@
                           <a:ea typeface="Meiryo UI"/>
                           <a:latin typeface="Meiryo UI"/>
                         </a:rPr>
-                        <a:t>全国（文科省）</a:t>
-                      </a:r>
-                    </a:p>
-                  </a:txBody>
-                  <a:tcPr marL="36000" marR="36000" marT="18000" marB="18000">
-                    <a:solidFill>
-                      <a:srgbClr val="F7F7F7"/>
+                        <a:t>合計入学者</a:t>
+                      </a:r>
+                    </a:p>
+                  </a:txBody>
+                  <a:tcPr marL="36000" marR="36000" marT="18000" marB="18000">
+                    <a:solidFill>
+                      <a:srgbClr val="ECF3FA"/>
                     </a:solidFill>
                   </a:tcPr>
                 </a:tc>
@@ -12726,7 +12207,7 @@
                           <a:ea typeface="Meiryo UI"/>
                           <a:latin typeface="Meiryo UI"/>
                         </a:rPr>
-                        <a:t>義務教育学校 約207校（R5）</a:t>
+                        <a:t>70</a:t>
                       </a:r>
                     </a:p>
                   </a:txBody>
@@ -12750,7 +12231,7 @@
                           <a:ea typeface="Meiryo UI"/>
                           <a:latin typeface="Meiryo UI"/>
                         </a:rPr>
-                        <a:t>全国学テで一貫校が通常校を有意に上回る結果は確認されず</a:t>
+                        <a:t>89</a:t>
                       </a:r>
                     </a:p>
                   </a:txBody>
@@ -12774,7 +12255,7 @@
                           <a:ea typeface="Meiryo UI"/>
                           <a:latin typeface="Meiryo UI"/>
                         </a:rPr>
-                        <a:t>施設一体型の優位性は限定的</a:t>
+                        <a:t>64</a:t>
                       </a:r>
                     </a:p>
                   </a:txBody>
@@ -12784,8 +12265,80 @@
                     </a:solidFill>
                   </a:tcPr>
                 </a:tc>
+                <a:tc>
+                  <a:txBody>
+                    <a:bodyPr wrap="square"/>
+                    <a:lstStyle/>
+                    <a:p>
+                      <a:pPr algn="ctr"/>
+                      <a:r>
+                        <a:rPr sz="800" b="0">
+                          <a:solidFill>
+                            <a:srgbClr val="333333"/>
+                          </a:solidFill>
+                          <a:ea typeface="Meiryo UI"/>
+                          <a:latin typeface="Meiryo UI"/>
+                        </a:rPr>
+                        <a:t>56</a:t>
+                      </a:r>
+                    </a:p>
+                  </a:txBody>
+                  <a:tcPr marL="36000" marR="36000" marT="18000" marB="18000">
+                    <a:solidFill>
+                      <a:srgbClr val="FFFFFF"/>
+                    </a:solidFill>
+                  </a:tcPr>
+                </a:tc>
+                <a:tc>
+                  <a:txBody>
+                    <a:bodyPr wrap="square"/>
+                    <a:lstStyle/>
+                    <a:p>
+                      <a:pPr algn="ctr"/>
+                      <a:r>
+                        <a:rPr sz="800" b="0">
+                          <a:solidFill>
+                            <a:srgbClr val="333333"/>
+                          </a:solidFill>
+                          <a:ea typeface="Meiryo UI"/>
+                          <a:latin typeface="Meiryo UI"/>
+                        </a:rPr>
+                        <a:t>61</a:t>
+                      </a:r>
+                    </a:p>
+                  </a:txBody>
+                  <a:tcPr marL="36000" marR="36000" marT="18000" marB="18000">
+                    <a:solidFill>
+                      <a:srgbClr val="FFFFFF"/>
+                    </a:solidFill>
+                  </a:tcPr>
+                </a:tc>
+                <a:tc>
+                  <a:txBody>
+                    <a:bodyPr wrap="square"/>
+                    <a:lstStyle/>
+                    <a:p>
+                      <a:pPr algn="ctr"/>
+                      <a:r>
+                        <a:rPr sz="800" b="0">
+                          <a:solidFill>
+                            <a:srgbClr val="333333"/>
+                          </a:solidFill>
+                          <a:ea typeface="Meiryo UI"/>
+                          <a:latin typeface="Meiryo UI"/>
+                        </a:rPr>
+                        <a:t>R4ピーク後 減少傾向</a:t>
+                      </a:r>
+                    </a:p>
+                  </a:txBody>
+                  <a:tcPr marL="36000" marR="36000" marT="18000" marB="18000">
+                    <a:solidFill>
+                      <a:srgbClr val="FFFFFF"/>
+                    </a:solidFill>
+                  </a:tcPr>
+                </a:tc>
               </a:tr>
-              <a:tr h="190000">
+              <a:tr h="144000">
                 <a:tc>
                   <a:txBody>
                     <a:bodyPr wrap="square"/>
@@ -12800,13 +12353,13 @@
                           <a:ea typeface="Meiryo UI"/>
                           <a:latin typeface="Meiryo UI"/>
                         </a:rPr>
-                        <a:t>世田谷区</a:t>
-                      </a:r>
-                    </a:p>
-                  </a:txBody>
-                  <a:tcPr marL="36000" marR="36000" marT="18000" marB="18000">
-                    <a:solidFill>
-                      <a:srgbClr val="F7F7F7"/>
+                        <a:t>うち区立外</a:t>
+                      </a:r>
+                    </a:p>
+                  </a:txBody>
+                  <a:tcPr marL="36000" marR="36000" marT="18000" marB="18000">
+                    <a:solidFill>
+                      <a:srgbClr val="ECF3FA"/>
                     </a:solidFill>
                   </a:tcPr>
                 </a:tc>
@@ -12824,7 +12377,7 @@
                           <a:ea typeface="Meiryo UI"/>
                           <a:latin typeface="Meiryo UI"/>
                         </a:rPr>
-                        <a:t>施設一体型：限定的</a:t>
+                        <a:t>8</a:t>
                       </a:r>
                     </a:p>
                   </a:txBody>
@@ -12848,7 +12401,7 @@
                           <a:ea typeface="Meiryo UI"/>
                           <a:latin typeface="Meiryo UI"/>
                         </a:rPr>
-                        <a:t>「世田谷9年教育」連携型を全校で展開。一体型新設は推進せず</a:t>
+                        <a:t>13</a:t>
                       </a:r>
                     </a:p>
                   </a:txBody>
@@ -12872,7 +12425,7 @@
                           <a:ea typeface="Meiryo UI"/>
                           <a:latin typeface="Meiryo UI"/>
                         </a:rPr>
-                        <a:t>連携型でも目標は達成可能</a:t>
+                        <a:t>10</a:t>
                       </a:r>
                     </a:p>
                   </a:txBody>
@@ -12882,8 +12435,80 @@
                     </a:solidFill>
                   </a:tcPr>
                 </a:tc>
+                <a:tc>
+                  <a:txBody>
+                    <a:bodyPr wrap="square"/>
+                    <a:lstStyle/>
+                    <a:p>
+                      <a:pPr algn="ctr"/>
+                      <a:r>
+                        <a:rPr sz="800" b="0">
+                          <a:solidFill>
+                            <a:srgbClr val="333333"/>
+                          </a:solidFill>
+                          <a:ea typeface="Meiryo UI"/>
+                          <a:latin typeface="Meiryo UI"/>
+                        </a:rPr>
+                        <a:t>10</a:t>
+                      </a:r>
+                    </a:p>
+                  </a:txBody>
+                  <a:tcPr marL="36000" marR="36000" marT="18000" marB="18000">
+                    <a:solidFill>
+                      <a:srgbClr val="FFFFFF"/>
+                    </a:solidFill>
+                  </a:tcPr>
+                </a:tc>
+                <a:tc>
+                  <a:txBody>
+                    <a:bodyPr wrap="square"/>
+                    <a:lstStyle/>
+                    <a:p>
+                      <a:pPr algn="ctr"/>
+                      <a:r>
+                        <a:rPr sz="800" b="0">
+                          <a:solidFill>
+                            <a:srgbClr val="333333"/>
+                          </a:solidFill>
+                          <a:ea typeface="Meiryo UI"/>
+                          <a:latin typeface="Meiryo UI"/>
+                        </a:rPr>
+                        <a:t>8</a:t>
+                      </a:r>
+                    </a:p>
+                  </a:txBody>
+                  <a:tcPr marL="36000" marR="36000" marT="18000" marB="18000">
+                    <a:solidFill>
+                      <a:srgbClr val="FFFFFF"/>
+                    </a:solidFill>
+                  </a:tcPr>
+                </a:tc>
+                <a:tc>
+                  <a:txBody>
+                    <a:bodyPr wrap="square"/>
+                    <a:lstStyle/>
+                    <a:p>
+                      <a:pPr algn="ctr"/>
+                      <a:r>
+                        <a:rPr sz="800" b="0">
+                          <a:solidFill>
+                            <a:srgbClr val="333333"/>
+                          </a:solidFill>
+                          <a:ea typeface="Meiryo UI"/>
+                          <a:latin typeface="Meiryo UI"/>
+                        </a:rPr>
+                        <a:t>区立外への流出はほぼ横ばい</a:t>
+                      </a:r>
+                    </a:p>
+                  </a:txBody>
+                  <a:tcPr marL="36000" marR="36000" marT="18000" marB="18000">
+                    <a:solidFill>
+                      <a:srgbClr val="FFFFFF"/>
+                    </a:solidFill>
+                  </a:tcPr>
+                </a:tc>
               </a:tr>
-              <a:tr h="190000">
+              <a:tr h="144000">
                 <a:tc>
                   <a:txBody>
                     <a:bodyPr wrap="square"/>
@@ -12898,13 +12523,13 @@
                           <a:ea typeface="Meiryo UI"/>
                           <a:latin typeface="Meiryo UI"/>
                         </a:rPr>
-                        <a:t>品川区</a:t>
-                      </a:r>
-                    </a:p>
-                  </a:txBody>
-                  <a:tcPr marL="36000" marR="36000" marT="18000" marB="18000">
-                    <a:solidFill>
-                      <a:srgbClr val="F7F7F7"/>
+                        <a:t>うち区立(桜中以外)</a:t>
+                      </a:r>
+                    </a:p>
+                  </a:txBody>
+                  <a:tcPr marL="36000" marR="36000" marT="18000" marB="18000">
+                    <a:solidFill>
+                      <a:srgbClr val="ECF3FA"/>
                     </a:solidFill>
                   </a:tcPr>
                 </a:tc>
@@ -12922,7 +12547,7 @@
                           <a:ea typeface="Meiryo UI"/>
                           <a:latin typeface="Meiryo UI"/>
                         </a:rPr>
-                        <a:t>施設一体型：6校</a:t>
+                        <a:t>6</a:t>
                       </a:r>
                     </a:p>
                   </a:txBody>
@@ -12946,7 +12571,7 @@
                           <a:ea typeface="Meiryo UI"/>
                           <a:latin typeface="Meiryo UI"/>
                         </a:rPr>
-                        <a:t>H18開設後、学力向上効果は地区差あり。中1ギャップ解消も限定的</a:t>
+                        <a:t>3</a:t>
                       </a:r>
                     </a:p>
                   </a:txBody>
@@ -12970,7 +12595,7 @@
                           <a:ea typeface="Meiryo UI"/>
                           <a:latin typeface="Meiryo UI"/>
                         </a:rPr>
-                        <a:t>新設の費用対効果に課題</a:t>
+                        <a:t>4</a:t>
                       </a:r>
                     </a:p>
                   </a:txBody>
@@ -12980,8 +12605,80 @@
                     </a:solidFill>
                   </a:tcPr>
                 </a:tc>
+                <a:tc>
+                  <a:txBody>
+                    <a:bodyPr wrap="square"/>
+                    <a:lstStyle/>
+                    <a:p>
+                      <a:pPr algn="ctr"/>
+                      <a:r>
+                        <a:rPr sz="800" b="0">
+                          <a:solidFill>
+                            <a:srgbClr val="333333"/>
+                          </a:solidFill>
+                          <a:ea typeface="Meiryo UI"/>
+                          <a:latin typeface="Meiryo UI"/>
+                        </a:rPr>
+                        <a:t>7</a:t>
+                      </a:r>
+                    </a:p>
+                  </a:txBody>
+                  <a:tcPr marL="36000" marR="36000" marT="18000" marB="18000">
+                    <a:solidFill>
+                      <a:srgbClr val="FFFFFF"/>
+                    </a:solidFill>
+                  </a:tcPr>
+                </a:tc>
+                <a:tc>
+                  <a:txBody>
+                    <a:bodyPr wrap="square"/>
+                    <a:lstStyle/>
+                    <a:p>
+                      <a:pPr algn="ctr"/>
+                      <a:r>
+                        <a:rPr sz="800" b="0">
+                          <a:solidFill>
+                            <a:srgbClr val="333333"/>
+                          </a:solidFill>
+                          <a:ea typeface="Meiryo UI"/>
+                          <a:latin typeface="Meiryo UI"/>
+                        </a:rPr>
+                        <a:t>12</a:t>
+                      </a:r>
+                    </a:p>
+                  </a:txBody>
+                  <a:tcPr marL="36000" marR="36000" marT="18000" marB="18000">
+                    <a:solidFill>
+                      <a:srgbClr val="FFFFFF"/>
+                    </a:solidFill>
+                  </a:tcPr>
+                </a:tc>
+                <a:tc>
+                  <a:txBody>
+                    <a:bodyPr wrap="square"/>
+                    <a:lstStyle/>
+                    <a:p>
+                      <a:pPr algn="ctr"/>
+                      <a:r>
+                        <a:rPr sz="800" b="0">
+                          <a:solidFill>
+                            <a:srgbClr val="333333"/>
+                          </a:solidFill>
+                          <a:ea typeface="Meiryo UI"/>
+                          <a:latin typeface="Meiryo UI"/>
+                        </a:rPr>
+                        <a:t>近年 区立内他校への進学が増加</a:t>
+                      </a:r>
+                    </a:p>
+                  </a:txBody>
+                  <a:tcPr marL="36000" marR="36000" marT="18000" marB="18000">
+                    <a:solidFill>
+                      <a:srgbClr val="FFFFFF"/>
+                    </a:solidFill>
+                  </a:tcPr>
+                </a:tc>
               </a:tr>
-              <a:tr h="190000">
+              <a:tr h="144000">
                 <a:tc>
                   <a:txBody>
                     <a:bodyPr wrap="square"/>
@@ -12996,13 +12693,13 @@
                           <a:ea typeface="Meiryo UI"/>
                           <a:latin typeface="Meiryo UI"/>
                         </a:rPr>
-                        <a:t>三鷹市</a:t>
-                      </a:r>
-                    </a:p>
-                  </a:txBody>
-                  <a:tcPr marL="36000" marR="36000" marT="18000" marB="18000">
-                    <a:solidFill>
-                      <a:srgbClr val="F7F7F7"/>
+                        <a:t>桜中進学率</a:t>
+                      </a:r>
+                    </a:p>
+                  </a:txBody>
+                  <a:tcPr marL="36000" marR="36000" marT="18000" marB="18000">
+                    <a:solidFill>
+                      <a:srgbClr val="ECF3FA"/>
                     </a:solidFill>
                   </a:tcPr>
                 </a:tc>
@@ -13020,7 +12717,7 @@
                           <a:ea typeface="Meiryo UI"/>
                           <a:latin typeface="Meiryo UI"/>
                         </a:rPr>
-                        <a:t>施設一体型：限定的</a:t>
+                        <a:t>80%</a:t>
                       </a:r>
                     </a:p>
                   </a:txBody>
@@ -13044,7 +12741,7 @@
                           <a:ea typeface="Meiryo UI"/>
                           <a:latin typeface="Meiryo UI"/>
                         </a:rPr>
-                        <a:t>コミュニティ・スクール＋連携型小中一貫教育を全市展開</a:t>
+                        <a:t>82%</a:t>
                       </a:r>
                     </a:p>
                   </a:txBody>
@@ -13068,7 +12765,79 @@
                           <a:ea typeface="Meiryo UI"/>
                           <a:latin typeface="Meiryo UI"/>
                         </a:rPr>
-                        <a:t>地域連携型でも効果あり</a:t>
+                        <a:t>78%</a:t>
+                      </a:r>
+                    </a:p>
+                  </a:txBody>
+                  <a:tcPr marL="36000" marR="36000" marT="18000" marB="18000">
+                    <a:solidFill>
+                      <a:srgbClr val="FFFFFF"/>
+                    </a:solidFill>
+                  </a:tcPr>
+                </a:tc>
+                <a:tc>
+                  <a:txBody>
+                    <a:bodyPr wrap="square"/>
+                    <a:lstStyle/>
+                    <a:p>
+                      <a:pPr algn="ctr"/>
+                      <a:r>
+                        <a:rPr sz="800" b="1">
+                          <a:solidFill>
+                            <a:srgbClr val="C0504D"/>
+                          </a:solidFill>
+                          <a:ea typeface="Meiryo UI"/>
+                          <a:latin typeface="Meiryo UI"/>
+                        </a:rPr>
+                        <a:t>70%</a:t>
+                      </a:r>
+                    </a:p>
+                  </a:txBody>
+                  <a:tcPr marL="36000" marR="36000" marT="18000" marB="18000">
+                    <a:solidFill>
+                      <a:srgbClr val="FBEEED"/>
+                    </a:solidFill>
+                  </a:tcPr>
+                </a:tc>
+                <a:tc>
+                  <a:txBody>
+                    <a:bodyPr wrap="square"/>
+                    <a:lstStyle/>
+                    <a:p>
+                      <a:pPr algn="ctr"/>
+                      <a:r>
+                        <a:rPr sz="800" b="1">
+                          <a:solidFill>
+                            <a:srgbClr val="C0504D"/>
+                          </a:solidFill>
+                          <a:ea typeface="Meiryo UI"/>
+                          <a:latin typeface="Meiryo UI"/>
+                        </a:rPr>
+                        <a:t>67%</a:t>
+                      </a:r>
+                    </a:p>
+                  </a:txBody>
+                  <a:tcPr marL="36000" marR="36000" marT="18000" marB="18000">
+                    <a:solidFill>
+                      <a:srgbClr val="FBEEED"/>
+                    </a:solidFill>
+                  </a:tcPr>
+                </a:tc>
+                <a:tc>
+                  <a:txBody>
+                    <a:bodyPr wrap="square"/>
+                    <a:lstStyle/>
+                    <a:p>
+                      <a:pPr algn="ctr"/>
+                      <a:r>
+                        <a:rPr sz="800" b="0">
+                          <a:solidFill>
+                            <a:srgbClr val="333333"/>
+                          </a:solidFill>
+                          <a:ea typeface="Meiryo UI"/>
+                          <a:latin typeface="Meiryo UI"/>
+                        </a:rPr>
+                        <a:t>▲13ポイント下降</a:t>
                       </a:r>
                     </a:p>
                   </a:txBody>
@@ -13132,7 +12901,7 @@
                 <a:ea typeface="Meiryo UI"/>
                 <a:latin typeface="Meiryo UI"/>
               </a:rPr>
-              <a:t>桜学園データ＋全国・他自治体動向：施設一体型小中一貫教育校は、小規模校化の解決策にも、学力・生徒数の増加策にもなっていない。</a:t>
+              <a:t>桜中進学率は5年で80%→67%へ。区全体は概ね安定する一方、桜学園のみで小規模校化が進行している。</a:t>
             </a:r>
           </a:p>
         </p:txBody>
@@ -21274,7 +21043,7 @@
                 <a:ea typeface="Meiryo UI"/>
                 <a:latin typeface="Meiryo UI"/>
               </a:rPr>
-              <a:t>① 学力向上効果（教育統計学）</a:t>
+              <a:t>① 学力向上効果</a:t>
             </a:r>
           </a:p>
         </p:txBody>
@@ -21423,7 +21192,7 @@
                 <a:ea typeface="Meiryo UI"/>
                 <a:latin typeface="Meiryo UI"/>
               </a:rPr>
-              <a:t>② 不登校・中1ギャップ解消（教育心理学）</a:t>
+              <a:t>② 不登校・中1ギャップ解消</a:t>
             </a:r>
           </a:p>
         </p:txBody>
@@ -21572,7 +21341,7 @@
                 <a:ea typeface="Meiryo UI"/>
                 <a:latin typeface="Meiryo UI"/>
               </a:rPr>
-              <a:t>③ 小規模校化対応（教育社会学・人口統計）</a:t>
+              <a:t>③ 小規模校化対応</a:t>
             </a:r>
           </a:p>
         </p:txBody>
@@ -21870,7 +21639,7 @@
                 <a:ea typeface="Meiryo UI"/>
                 <a:latin typeface="Meiryo UI"/>
               </a:rPr>
-              <a:t>  推奨される代替施策と費用対効果 ― 教育経済学・教育行政学の試算</a:t>
+              <a:t>  推奨される代替施策と費用対効果（試算）</a:t>
             </a:r>
           </a:p>
         </p:txBody>

--- a/output/小中一貫教育（大泉桜学園）_改良版.pptx
+++ b/output/小中一貫教育（大泉桜学園）_改良版.pptx
@@ -14,7 +14,6 @@
     <p:sldId id="269" r:id="rId11"/>
     <p:sldId id="270" r:id="rId10"/>
     <p:sldId id="271" r:id="rId9"/>
-    <p:sldId id="272" r:id="rId8"/>
   </p:sldIdLst>
   <p:sldSz cx="9144000" cy="5143500" type="screen16x9"/>
   <p:notesSz cx="6797675" cy="9926638"/>
@@ -19337,7 +19336,7 @@
                 <a:ea typeface="Meiryo UI"/>
                 <a:latin typeface="Meiryo UI"/>
               </a:rPr>
-              <a:t>学校の自己評価と改善計画（R6・R7）</a:t>
+              <a:t>結論：新規開設の効果なし／代替施策と費用対効果</a:t>
             </a:r>
           </a:p>
         </p:txBody>
@@ -19453,1489 +19452,6 @@
                 <a:latin typeface="Meiryo UI"/>
               </a:rPr>
               <a:t>- 4 -</a:t>
-            </a:r>
-          </a:p>
-        </p:txBody>
-      </p:sp>
-      <p:sp>
-        <p:nvSpPr>
-          <p:cNvPr id="8" name="Rectangle 7"/>
-          <p:cNvSpPr/>
-          <p:nvPr/>
-        </p:nvSpPr>
-        <p:spPr>
-          <a:xfrm>
-            <a:off x="180000" y="670000"/>
-            <a:ext cx="8780000" cy="260000"/>
-          </a:xfrm>
-          <a:prstGeom prst="rect">
-            <a:avLst/>
-          </a:prstGeom>
-          <a:solidFill>
-            <a:srgbClr val="1F4E79"/>
-          </a:solidFill>
-          <a:ln>
-            <a:noFill/>
-          </a:ln>
-          <a:effectLst/>
-        </p:spPr>
-        <p:style>
-          <a:lnRef idx="1">
-            <a:schemeClr val="accent1"/>
-          </a:lnRef>
-          <a:fillRef idx="3">
-            <a:schemeClr val="accent1"/>
-          </a:fillRef>
-          <a:effectRef idx="2">
-            <a:schemeClr val="accent1"/>
-          </a:effectRef>
-          <a:fontRef idx="minor">
-            <a:schemeClr val="lt1"/>
-          </a:fontRef>
-        </p:style>
-        <p:txBody>
-          <a:bodyPr rtlCol="0" anchor="ctr" lIns="90000" rIns="60000" tIns="10000" bIns="10000"/>
-          <a:lstStyle/>
-          <a:p>
-            <a:pPr algn="l"/>
-            <a:r>
-              <a:rPr sz="1100" b="1">
-                <a:solidFill>
-                  <a:srgbClr val="FFFFFF"/>
-                </a:solidFill>
-                <a:ea typeface="Meiryo UI"/>
-                <a:latin typeface="Meiryo UI"/>
-              </a:rPr>
-              <a:t>  学校教育目標／ビジョン　※令和6・7年度 学校経営計画より</a:t>
-            </a:r>
-          </a:p>
-        </p:txBody>
-      </p:sp>
-      <p:sp>
-        <p:nvSpPr>
-          <p:cNvPr id="9" name="TextBox 8"/>
-          <p:cNvSpPr txBox="1"/>
-          <p:nvPr/>
-        </p:nvSpPr>
-        <p:spPr>
-          <a:xfrm>
-            <a:off x="180000" y="960000"/>
-            <a:ext cx="8780000" cy="460000"/>
-          </a:xfrm>
-          <a:prstGeom prst="rect">
-            <a:avLst/>
-          </a:prstGeom>
-          <a:solidFill>
-            <a:srgbClr val="ECF3FA"/>
-          </a:solidFill>
-          <a:ln w="6350">
-            <a:solidFill>
-              <a:srgbClr val="5B9BD5"/>
-            </a:solidFill>
-          </a:ln>
-        </p:spPr>
-        <p:txBody>
-          <a:bodyPr wrap="square" lIns="72000" rIns="72000" tIns="36000" bIns="36000" anchor="t">
-            <a:spAutoFit/>
-          </a:bodyPr>
-          <a:lstStyle/>
-          <a:p>
-            <a:pPr algn="l"/>
-            <a:r>
-              <a:rPr sz="1000" b="0">
-                <a:solidFill>
-                  <a:srgbClr val="333333"/>
-                </a:solidFill>
-                <a:ea typeface="Meiryo UI"/>
-                <a:latin typeface="Meiryo UI"/>
-              </a:rPr>
-              <a:t>目指す学校像 ─ 「笑顔あふれる学校 ～感動の共有～」　／　校長：渡邊重幸</a:t>
-            </a:r>
-          </a:p>
-          <a:p>
-            <a:pPr algn="l"/>
-            <a:r>
-              <a:rPr sz="1000" b="0">
-                <a:solidFill>
-                  <a:srgbClr val="333333"/>
-                </a:solidFill>
-                <a:ea typeface="Meiryo UI"/>
-                <a:latin typeface="Meiryo UI"/>
-              </a:rPr>
-              <a:t>桜学精神　1～4学年：元気・チャレンジ・思いやり　／　5～9学年：桜の花よりも華ある人・時機を知る人・愛される人</a:t>
-            </a:r>
-          </a:p>
-        </p:txBody>
-      </p:sp>
-      <p:sp>
-        <p:nvSpPr>
-          <p:cNvPr id="10" name="Rectangle 9"/>
-          <p:cNvSpPr/>
-          <p:nvPr/>
-        </p:nvSpPr>
-        <p:spPr>
-          <a:xfrm>
-            <a:off x="180000" y="1490000"/>
-            <a:ext cx="8780000" cy="260000"/>
-          </a:xfrm>
-          <a:prstGeom prst="rect">
-            <a:avLst/>
-          </a:prstGeom>
-          <a:solidFill>
-            <a:srgbClr val="4F81BD"/>
-          </a:solidFill>
-          <a:ln>
-            <a:noFill/>
-          </a:ln>
-          <a:effectLst/>
-        </p:spPr>
-        <p:style>
-          <a:lnRef idx="1">
-            <a:schemeClr val="accent1"/>
-          </a:lnRef>
-          <a:fillRef idx="3">
-            <a:schemeClr val="accent1"/>
-          </a:fillRef>
-          <a:effectRef idx="2">
-            <a:schemeClr val="accent1"/>
-          </a:effectRef>
-          <a:fontRef idx="minor">
-            <a:schemeClr val="lt1"/>
-          </a:fontRef>
-        </p:style>
-        <p:txBody>
-          <a:bodyPr rtlCol="0" anchor="ctr" lIns="90000" rIns="60000" tIns="10000" bIns="10000"/>
-          <a:lstStyle/>
-          <a:p>
-            <a:pPr algn="l"/>
-            <a:r>
-              <a:rPr sz="1100" b="1">
-                <a:solidFill>
-                  <a:srgbClr val="FFFFFF"/>
-                </a:solidFill>
-                <a:ea typeface="Meiryo UI"/>
-                <a:latin typeface="Meiryo UI"/>
-              </a:rPr>
-              <a:t>  4領域での成果と課題　※学校関係者評価委員会（評議員11名）による外部評価</a:t>
-            </a:r>
-          </a:p>
-        </p:txBody>
-      </p:sp>
-      <p:sp>
-        <p:nvSpPr>
-          <p:cNvPr id="11" name="Rectangle 10"/>
-          <p:cNvSpPr/>
-          <p:nvPr/>
-        </p:nvSpPr>
-        <p:spPr>
-          <a:xfrm>
-            <a:off x="180000" y="1790000"/>
-            <a:ext cx="2150000" cy="280000"/>
-          </a:xfrm>
-          <a:prstGeom prst="rect">
-            <a:avLst/>
-          </a:prstGeom>
-          <a:solidFill>
-            <a:srgbClr val="1F4E79"/>
-          </a:solidFill>
-          <a:ln>
-            <a:noFill/>
-          </a:ln>
-          <a:effectLst/>
-        </p:spPr>
-        <p:style>
-          <a:lnRef idx="1">
-            <a:schemeClr val="accent1"/>
-          </a:lnRef>
-          <a:fillRef idx="3">
-            <a:schemeClr val="accent1"/>
-          </a:fillRef>
-          <a:effectRef idx="2">
-            <a:schemeClr val="accent1"/>
-          </a:effectRef>
-          <a:fontRef idx="minor">
-            <a:schemeClr val="lt1"/>
-          </a:fontRef>
-        </p:style>
-        <p:txBody>
-          <a:bodyPr rtlCol="0" anchor="ctr" lIns="72000" rIns="72000" tIns="36000" bIns="36000" wrap="square"/>
-          <a:lstStyle/>
-          <a:p>
-            <a:pPr algn="ctr"/>
-            <a:r>
-              <a:rPr sz="1100" b="1">
-                <a:solidFill>
-                  <a:srgbClr val="FFFFFF"/>
-                </a:solidFill>
-                <a:ea typeface="Meiryo UI"/>
-                <a:latin typeface="Meiryo UI"/>
-              </a:rPr>
-              <a:t>① 確かな学力</a:t>
-            </a:r>
-          </a:p>
-        </p:txBody>
-      </p:sp>
-      <p:sp>
-        <p:nvSpPr>
-          <p:cNvPr id="12" name="Rectangle 11"/>
-          <p:cNvSpPr/>
-          <p:nvPr/>
-        </p:nvSpPr>
-        <p:spPr>
-          <a:xfrm>
-            <a:off x="180000" y="2080000"/>
-            <a:ext cx="2150000" cy="1300000"/>
-          </a:xfrm>
-          <a:prstGeom prst="rect">
-            <a:avLst/>
-          </a:prstGeom>
-          <a:solidFill>
-            <a:srgbClr val="F7F7F7"/>
-          </a:solidFill>
-          <a:ln w="6350">
-            <a:solidFill>
-              <a:srgbClr val="1F4E79"/>
-            </a:solidFill>
-          </a:ln>
-          <a:effectLst/>
-        </p:spPr>
-        <p:style>
-          <a:lnRef idx="1">
-            <a:schemeClr val="accent1"/>
-          </a:lnRef>
-          <a:fillRef idx="3">
-            <a:schemeClr val="accent1"/>
-          </a:fillRef>
-          <a:effectRef idx="2">
-            <a:schemeClr val="accent1"/>
-          </a:effectRef>
-          <a:fontRef idx="minor">
-            <a:schemeClr val="lt1"/>
-          </a:fontRef>
-        </p:style>
-        <p:txBody>
-          <a:bodyPr rtlCol="0" anchor="t" lIns="72000" rIns="72000" tIns="36000" bIns="36000" wrap="square"/>
-          <a:lstStyle/>
-          <a:p>
-            <a:pPr algn="l"/>
-            <a:r>
-              <a:rPr sz="900" b="0">
-                <a:solidFill>
-                  <a:srgbClr val="333333"/>
-                </a:solidFill>
-                <a:ea typeface="Meiryo UI"/>
-                <a:latin typeface="Meiryo UI"/>
-              </a:rPr>
-              <a:t>○ ICT機器（Canva・Padlet・</a:t>
-            </a:r>
-          </a:p>
-          <a:p>
-            <a:pPr algn="l"/>
-            <a:r>
-              <a:rPr sz="900" b="0">
-                <a:solidFill>
-                  <a:srgbClr val="333333"/>
-                </a:solidFill>
-                <a:ea typeface="Meiryo UI"/>
-                <a:latin typeface="Meiryo UI"/>
-              </a:rPr>
-              <a:t>Kahoot!等）を積極活用</a:t>
-            </a:r>
-          </a:p>
-          <a:p>
-            <a:pPr algn="l"/>
-            <a:r>
-              <a:rPr sz="900" b="0">
-                <a:solidFill>
-                  <a:srgbClr val="333333"/>
-                </a:solidFill>
-                <a:ea typeface="Meiryo UI"/>
-                <a:latin typeface="Meiryo UI"/>
-              </a:rPr>
-              <a:t>○ 思考・判断・表現力育成のた</a:t>
-            </a:r>
-          </a:p>
-          <a:p>
-            <a:pPr algn="l"/>
-            <a:r>
-              <a:rPr sz="900" b="0">
-                <a:solidFill>
-                  <a:srgbClr val="333333"/>
-                </a:solidFill>
-                <a:ea typeface="Meiryo UI"/>
-                <a:latin typeface="Meiryo UI"/>
-              </a:rPr>
-              <a:t>め意見記入欄を設定</a:t>
-            </a:r>
-          </a:p>
-          <a:p>
-            <a:pPr algn="l"/>
-            <a:r>
-              <a:rPr sz="900" b="0">
-                <a:solidFill>
-                  <a:srgbClr val="333333"/>
-                </a:solidFill>
-                <a:ea typeface="Meiryo UI"/>
-                <a:latin typeface="Meiryo UI"/>
-              </a:rPr>
-              <a:t>△ ICT活用が「楽しさ」優先で</a:t>
-            </a:r>
-          </a:p>
-          <a:p>
-            <a:pPr algn="l"/>
-            <a:r>
-              <a:rPr sz="900" b="0">
-                <a:solidFill>
-                  <a:srgbClr val="333333"/>
-                </a:solidFill>
-                <a:ea typeface="Meiryo UI"/>
-                <a:latin typeface="Meiryo UI"/>
-              </a:rPr>
-              <a:t>本質的学習に繋がらない場面</a:t>
-            </a:r>
-          </a:p>
-        </p:txBody>
-      </p:sp>
-      <p:sp>
-        <p:nvSpPr>
-          <p:cNvPr id="13" name="Rectangle 12"/>
-          <p:cNvSpPr/>
-          <p:nvPr/>
-        </p:nvSpPr>
-        <p:spPr>
-          <a:xfrm>
-            <a:off x="2390000" y="1790000"/>
-            <a:ext cx="2150000" cy="280000"/>
-          </a:xfrm>
-          <a:prstGeom prst="rect">
-            <a:avLst/>
-          </a:prstGeom>
-          <a:solidFill>
-            <a:srgbClr val="4F81BD"/>
-          </a:solidFill>
-          <a:ln>
-            <a:noFill/>
-          </a:ln>
-          <a:effectLst/>
-        </p:spPr>
-        <p:style>
-          <a:lnRef idx="1">
-            <a:schemeClr val="accent1"/>
-          </a:lnRef>
-          <a:fillRef idx="3">
-            <a:schemeClr val="accent1"/>
-          </a:fillRef>
-          <a:effectRef idx="2">
-            <a:schemeClr val="accent1"/>
-          </a:effectRef>
-          <a:fontRef idx="minor">
-            <a:schemeClr val="lt1"/>
-          </a:fontRef>
-        </p:style>
-        <p:txBody>
-          <a:bodyPr rtlCol="0" anchor="ctr" lIns="72000" rIns="72000" tIns="36000" bIns="36000" wrap="square"/>
-          <a:lstStyle/>
-          <a:p>
-            <a:pPr algn="ctr"/>
-            <a:r>
-              <a:rPr sz="1100" b="1">
-                <a:solidFill>
-                  <a:srgbClr val="FFFFFF"/>
-                </a:solidFill>
-                <a:ea typeface="Meiryo UI"/>
-                <a:latin typeface="Meiryo UI"/>
-              </a:rPr>
-              <a:t>② 豊かな心</a:t>
-            </a:r>
-          </a:p>
-        </p:txBody>
-      </p:sp>
-      <p:sp>
-        <p:nvSpPr>
-          <p:cNvPr id="14" name="Rectangle 13"/>
-          <p:cNvSpPr/>
-          <p:nvPr/>
-        </p:nvSpPr>
-        <p:spPr>
-          <a:xfrm>
-            <a:off x="2390000" y="2080000"/>
-            <a:ext cx="2150000" cy="1300000"/>
-          </a:xfrm>
-          <a:prstGeom prst="rect">
-            <a:avLst/>
-          </a:prstGeom>
-          <a:solidFill>
-            <a:srgbClr val="F7F7F7"/>
-          </a:solidFill>
-          <a:ln w="6350">
-            <a:solidFill>
-              <a:srgbClr val="4F81BD"/>
-            </a:solidFill>
-          </a:ln>
-          <a:effectLst/>
-        </p:spPr>
-        <p:style>
-          <a:lnRef idx="1">
-            <a:schemeClr val="accent1"/>
-          </a:lnRef>
-          <a:fillRef idx="3">
-            <a:schemeClr val="accent1"/>
-          </a:fillRef>
-          <a:effectRef idx="2">
-            <a:schemeClr val="accent1"/>
-          </a:effectRef>
-          <a:fontRef idx="minor">
-            <a:schemeClr val="lt1"/>
-          </a:fontRef>
-        </p:style>
-        <p:txBody>
-          <a:bodyPr rtlCol="0" anchor="t" lIns="72000" rIns="72000" tIns="36000" bIns="36000" wrap="square"/>
-          <a:lstStyle/>
-          <a:p>
-            <a:pPr algn="l"/>
-            <a:r>
-              <a:rPr sz="900" b="0">
-                <a:solidFill>
-                  <a:srgbClr val="333333"/>
-                </a:solidFill>
-                <a:ea typeface="Meiryo UI"/>
-                <a:latin typeface="Meiryo UI"/>
-              </a:rPr>
-              <a:t>○ SC・SSW・心のふれあい相</a:t>
-            </a:r>
-          </a:p>
-          <a:p>
-            <a:pPr algn="l"/>
-            <a:r>
-              <a:rPr sz="900" b="0">
-                <a:solidFill>
-                  <a:srgbClr val="333333"/>
-                </a:solidFill>
-                <a:ea typeface="Meiryo UI"/>
-                <a:latin typeface="Meiryo UI"/>
-              </a:rPr>
-              <a:t>談員と密に連携</a:t>
-            </a:r>
-          </a:p>
-          <a:p>
-            <a:pPr algn="l"/>
-            <a:r>
-              <a:rPr sz="900" b="0">
-                <a:solidFill>
-                  <a:srgbClr val="333333"/>
-                </a:solidFill>
-                <a:ea typeface="Meiryo UI"/>
-                <a:latin typeface="Meiryo UI"/>
-              </a:rPr>
-              <a:t>○ ふれあい月間アンケートで</a:t>
-            </a:r>
-          </a:p>
-          <a:p>
-            <a:pPr algn="l"/>
-            <a:r>
-              <a:rPr sz="900" b="0">
-                <a:solidFill>
-                  <a:srgbClr val="333333"/>
-                </a:solidFill>
-                <a:ea typeface="Meiryo UI"/>
-                <a:latin typeface="Meiryo UI"/>
-              </a:rPr>
-              <a:t>潜在的いじめを早期察知</a:t>
-            </a:r>
-          </a:p>
-          <a:p>
-            <a:pPr algn="l"/>
-            <a:r>
-              <a:rPr sz="900" b="0">
-                <a:solidFill>
-                  <a:srgbClr val="333333"/>
-                </a:solidFill>
-                <a:ea typeface="Meiryo UI"/>
-                <a:latin typeface="Meiryo UI"/>
-              </a:rPr>
-              <a:t>△ 一部児童生徒に話し合い</a:t>
-            </a:r>
-          </a:p>
-          <a:p>
-            <a:pPr algn="l"/>
-            <a:r>
-              <a:rPr sz="900" b="0">
-                <a:solidFill>
-                  <a:srgbClr val="333333"/>
-                </a:solidFill>
-                <a:ea typeface="Meiryo UI"/>
-                <a:latin typeface="Meiryo UI"/>
-              </a:rPr>
-              <a:t>参加が偏る</a:t>
-            </a:r>
-          </a:p>
-        </p:txBody>
-      </p:sp>
-      <p:sp>
-        <p:nvSpPr>
-          <p:cNvPr id="15" name="Rectangle 14"/>
-          <p:cNvSpPr/>
-          <p:nvPr/>
-        </p:nvSpPr>
-        <p:spPr>
-          <a:xfrm>
-            <a:off x="4600000" y="1790000"/>
-            <a:ext cx="2150000" cy="280000"/>
-          </a:xfrm>
-          <a:prstGeom prst="rect">
-            <a:avLst/>
-          </a:prstGeom>
-          <a:solidFill>
-            <a:srgbClr val="E69B4D"/>
-          </a:solidFill>
-          <a:ln>
-            <a:noFill/>
-          </a:ln>
-          <a:effectLst/>
-        </p:spPr>
-        <p:style>
-          <a:lnRef idx="1">
-            <a:schemeClr val="accent1"/>
-          </a:lnRef>
-          <a:fillRef idx="3">
-            <a:schemeClr val="accent1"/>
-          </a:fillRef>
-          <a:effectRef idx="2">
-            <a:schemeClr val="accent1"/>
-          </a:effectRef>
-          <a:fontRef idx="minor">
-            <a:schemeClr val="lt1"/>
-          </a:fontRef>
-        </p:style>
-        <p:txBody>
-          <a:bodyPr rtlCol="0" anchor="ctr" lIns="72000" rIns="72000" tIns="36000" bIns="36000" wrap="square"/>
-          <a:lstStyle/>
-          <a:p>
-            <a:pPr algn="ctr"/>
-            <a:r>
-              <a:rPr sz="1100" b="1">
-                <a:solidFill>
-                  <a:srgbClr val="FFFFFF"/>
-                </a:solidFill>
-                <a:ea typeface="Meiryo UI"/>
-                <a:latin typeface="Meiryo UI"/>
-              </a:rPr>
-              <a:t>③ 健康な生活</a:t>
-            </a:r>
-          </a:p>
-        </p:txBody>
-      </p:sp>
-      <p:sp>
-        <p:nvSpPr>
-          <p:cNvPr id="16" name="Rectangle 15"/>
-          <p:cNvSpPr/>
-          <p:nvPr/>
-        </p:nvSpPr>
-        <p:spPr>
-          <a:xfrm>
-            <a:off x="4600000" y="2080000"/>
-            <a:ext cx="2150000" cy="1300000"/>
-          </a:xfrm>
-          <a:prstGeom prst="rect">
-            <a:avLst/>
-          </a:prstGeom>
-          <a:solidFill>
-            <a:srgbClr val="F7F7F7"/>
-          </a:solidFill>
-          <a:ln w="6350">
-            <a:solidFill>
-              <a:srgbClr val="E69B4D"/>
-            </a:solidFill>
-          </a:ln>
-          <a:effectLst/>
-        </p:spPr>
-        <p:style>
-          <a:lnRef idx="1">
-            <a:schemeClr val="accent1"/>
-          </a:lnRef>
-          <a:fillRef idx="3">
-            <a:schemeClr val="accent1"/>
-          </a:fillRef>
-          <a:effectRef idx="2">
-            <a:schemeClr val="accent1"/>
-          </a:effectRef>
-          <a:fontRef idx="minor">
-            <a:schemeClr val="lt1"/>
-          </a:fontRef>
-        </p:style>
-        <p:txBody>
-          <a:bodyPr rtlCol="0" anchor="t" lIns="72000" rIns="72000" tIns="36000" bIns="36000" wrap="square"/>
-          <a:lstStyle/>
-          <a:p>
-            <a:pPr algn="l"/>
-            <a:r>
-              <a:rPr sz="900" b="0">
-                <a:solidFill>
-                  <a:srgbClr val="333333"/>
-                </a:solidFill>
-                <a:ea typeface="Meiryo UI"/>
-                <a:latin typeface="Meiryo UI"/>
-              </a:rPr>
-              <a:t>○ トップアスリート招聘等で</a:t>
-            </a:r>
-          </a:p>
-          <a:p>
-            <a:pPr algn="l"/>
-            <a:r>
-              <a:rPr sz="900" b="0">
-                <a:solidFill>
-                  <a:srgbClr val="333333"/>
-                </a:solidFill>
-                <a:ea typeface="Meiryo UI"/>
-                <a:latin typeface="Meiryo UI"/>
-              </a:rPr>
-              <a:t>体力向上を図る</a:t>
-            </a:r>
-          </a:p>
-          <a:p>
-            <a:pPr algn="l"/>
-            <a:r>
-              <a:rPr sz="900" b="0">
-                <a:solidFill>
-                  <a:srgbClr val="333333"/>
-                </a:solidFill>
-                <a:ea typeface="Meiryo UI"/>
-                <a:latin typeface="Meiryo UI"/>
-              </a:rPr>
-              <a:t>○ 食育指導計画に基づき給食</a:t>
-            </a:r>
-          </a:p>
-          <a:p>
-            <a:pPr algn="l"/>
-            <a:r>
-              <a:rPr sz="900" b="0">
-                <a:solidFill>
-                  <a:srgbClr val="333333"/>
-                </a:solidFill>
-                <a:ea typeface="Meiryo UI"/>
-                <a:latin typeface="Meiryo UI"/>
-              </a:rPr>
-              <a:t>指導を充実</a:t>
-            </a:r>
-          </a:p>
-          <a:p>
-            <a:pPr algn="l"/>
-            <a:r>
-              <a:rPr sz="900" b="0">
-                <a:solidFill>
-                  <a:srgbClr val="333333"/>
-                </a:solidFill>
-                <a:ea typeface="Meiryo UI"/>
-                <a:latin typeface="Meiryo UI"/>
-              </a:rPr>
-              <a:t>△ 体育施設・特別教室の小中</a:t>
-            </a:r>
-          </a:p>
-          <a:p>
-            <a:pPr algn="l"/>
-            <a:r>
-              <a:rPr sz="900" b="0">
-                <a:solidFill>
-                  <a:srgbClr val="333333"/>
-                </a:solidFill>
-                <a:ea typeface="Meiryo UI"/>
-                <a:latin typeface="Meiryo UI"/>
-              </a:rPr>
-              <a:t>共用に体格差課題</a:t>
-            </a:r>
-          </a:p>
-        </p:txBody>
-      </p:sp>
-      <p:sp>
-        <p:nvSpPr>
-          <p:cNvPr id="17" name="Rectangle 16"/>
-          <p:cNvSpPr/>
-          <p:nvPr/>
-        </p:nvSpPr>
-        <p:spPr>
-          <a:xfrm>
-            <a:off x="6810000" y="1790000"/>
-            <a:ext cx="2150000" cy="280000"/>
-          </a:xfrm>
-          <a:prstGeom prst="rect">
-            <a:avLst/>
-          </a:prstGeom>
-          <a:solidFill>
-            <a:srgbClr val="6F5A9C"/>
-          </a:solidFill>
-          <a:ln>
-            <a:noFill/>
-          </a:ln>
-          <a:effectLst/>
-        </p:spPr>
-        <p:style>
-          <a:lnRef idx="1">
-            <a:schemeClr val="accent1"/>
-          </a:lnRef>
-          <a:fillRef idx="3">
-            <a:schemeClr val="accent1"/>
-          </a:fillRef>
-          <a:effectRef idx="2">
-            <a:schemeClr val="accent1"/>
-          </a:effectRef>
-          <a:fontRef idx="minor">
-            <a:schemeClr val="lt1"/>
-          </a:fontRef>
-        </p:style>
-        <p:txBody>
-          <a:bodyPr rtlCol="0" anchor="ctr" lIns="72000" rIns="72000" tIns="36000" bIns="36000" wrap="square"/>
-          <a:lstStyle/>
-          <a:p>
-            <a:pPr algn="ctr"/>
-            <a:r>
-              <a:rPr sz="1100" b="1">
-                <a:solidFill>
-                  <a:srgbClr val="FFFFFF"/>
-                </a:solidFill>
-                <a:ea typeface="Meiryo UI"/>
-                <a:latin typeface="Meiryo UI"/>
-              </a:rPr>
-              <a:t>④ 開かれた学校</a:t>
-            </a:r>
-          </a:p>
-        </p:txBody>
-      </p:sp>
-      <p:sp>
-        <p:nvSpPr>
-          <p:cNvPr id="18" name="Rectangle 17"/>
-          <p:cNvSpPr/>
-          <p:nvPr/>
-        </p:nvSpPr>
-        <p:spPr>
-          <a:xfrm>
-            <a:off x="6810000" y="2080000"/>
-            <a:ext cx="2150000" cy="1300000"/>
-          </a:xfrm>
-          <a:prstGeom prst="rect">
-            <a:avLst/>
-          </a:prstGeom>
-          <a:solidFill>
-            <a:srgbClr val="F7F7F7"/>
-          </a:solidFill>
-          <a:ln w="6350">
-            <a:solidFill>
-              <a:srgbClr val="6F5A9C"/>
-            </a:solidFill>
-          </a:ln>
-          <a:effectLst/>
-        </p:spPr>
-        <p:style>
-          <a:lnRef idx="1">
-            <a:schemeClr val="accent1"/>
-          </a:lnRef>
-          <a:fillRef idx="3">
-            <a:schemeClr val="accent1"/>
-          </a:fillRef>
-          <a:effectRef idx="2">
-            <a:schemeClr val="accent1"/>
-          </a:effectRef>
-          <a:fontRef idx="minor">
-            <a:schemeClr val="lt1"/>
-          </a:fontRef>
-        </p:style>
-        <p:txBody>
-          <a:bodyPr rtlCol="0" anchor="t" lIns="72000" rIns="72000" tIns="36000" bIns="36000" wrap="square"/>
-          <a:lstStyle/>
-          <a:p>
-            <a:pPr algn="l"/>
-            <a:r>
-              <a:rPr sz="900" b="0">
-                <a:solidFill>
-                  <a:srgbClr val="333333"/>
-                </a:solidFill>
-                <a:ea typeface="Meiryo UI"/>
-                <a:latin typeface="Meiryo UI"/>
-              </a:rPr>
-              <a:t>○ 学年・学級・委員会だより</a:t>
-            </a:r>
-          </a:p>
-          <a:p>
-            <a:pPr algn="l"/>
-            <a:r>
-              <a:rPr sz="900" b="0">
-                <a:solidFill>
-                  <a:srgbClr val="333333"/>
-                </a:solidFill>
-                <a:ea typeface="Meiryo UI"/>
-                <a:latin typeface="Meiryo UI"/>
-              </a:rPr>
-              <a:t>で授業様子を発信</a:t>
-            </a:r>
-          </a:p>
-          <a:p>
-            <a:pPr algn="l"/>
-            <a:r>
-              <a:rPr sz="900" b="0">
-                <a:solidFill>
-                  <a:srgbClr val="333333"/>
-                </a:solidFill>
-                <a:ea typeface="Meiryo UI"/>
-                <a:latin typeface="Meiryo UI"/>
-              </a:rPr>
-              <a:t>○ HP・たより・学校公開で</a:t>
-            </a:r>
-          </a:p>
-          <a:p>
-            <a:pPr algn="l"/>
-            <a:r>
-              <a:rPr sz="900" b="0">
-                <a:solidFill>
-                  <a:srgbClr val="333333"/>
-                </a:solidFill>
-                <a:ea typeface="Meiryo UI"/>
-                <a:latin typeface="Meiryo UI"/>
-              </a:rPr>
-              <a:t>教育活動を公開</a:t>
-            </a:r>
-          </a:p>
-          <a:p>
-            <a:pPr algn="l"/>
-            <a:r>
-              <a:rPr sz="900" b="0">
-                <a:solidFill>
-                  <a:srgbClr val="333333"/>
-                </a:solidFill>
-                <a:ea typeface="Meiryo UI"/>
-                <a:latin typeface="Meiryo UI"/>
-              </a:rPr>
-              <a:t>△ 家庭・地域への啓発を</a:t>
-            </a:r>
-          </a:p>
-          <a:p>
-            <a:pPr algn="l"/>
-            <a:r>
-              <a:rPr sz="900" b="0">
-                <a:solidFill>
-                  <a:srgbClr val="333333"/>
-                </a:solidFill>
-                <a:ea typeface="Meiryo UI"/>
-                <a:latin typeface="Meiryo UI"/>
-              </a:rPr>
-              <a:t>更に強化する必要</a:t>
-            </a:r>
-          </a:p>
-        </p:txBody>
-      </p:sp>
-      <p:sp>
-        <p:nvSpPr>
-          <p:cNvPr id="19" name="Rectangle 18"/>
-          <p:cNvSpPr/>
-          <p:nvPr/>
-        </p:nvSpPr>
-        <p:spPr>
-          <a:xfrm>
-            <a:off x="180000" y="3470000"/>
-            <a:ext cx="4350000" cy="260000"/>
-          </a:xfrm>
-          <a:prstGeom prst="rect">
-            <a:avLst/>
-          </a:prstGeom>
-          <a:solidFill>
-            <a:srgbClr val="4F81BD"/>
-          </a:solidFill>
-          <a:ln>
-            <a:noFill/>
-          </a:ln>
-          <a:effectLst/>
-        </p:spPr>
-        <p:style>
-          <a:lnRef idx="1">
-            <a:schemeClr val="accent1"/>
-          </a:lnRef>
-          <a:fillRef idx="3">
-            <a:schemeClr val="accent1"/>
-          </a:fillRef>
-          <a:effectRef idx="2">
-            <a:schemeClr val="accent1"/>
-          </a:effectRef>
-          <a:fontRef idx="minor">
-            <a:schemeClr val="lt1"/>
-          </a:fontRef>
-        </p:style>
-        <p:txBody>
-          <a:bodyPr rtlCol="0" anchor="ctr" lIns="90000" rIns="60000" tIns="10000" bIns="10000"/>
-          <a:lstStyle/>
-          <a:p>
-            <a:pPr algn="l"/>
-            <a:r>
-              <a:rPr sz="1000" b="1">
-                <a:solidFill>
-                  <a:srgbClr val="FFFFFF"/>
-                </a:solidFill>
-                <a:ea typeface="Meiryo UI"/>
-                <a:latin typeface="Meiryo UI"/>
-              </a:rPr>
-              <a:t>  R7 改善計画（具体策）</a:t>
-            </a:r>
-          </a:p>
-        </p:txBody>
-      </p:sp>
-      <p:sp>
-        <p:nvSpPr>
-          <p:cNvPr id="20" name="TextBox 19"/>
-          <p:cNvSpPr txBox="1"/>
-          <p:nvPr/>
-        </p:nvSpPr>
-        <p:spPr>
-          <a:xfrm>
-            <a:off x="180000" y="3760000"/>
-            <a:ext cx="4350000" cy="900000"/>
-          </a:xfrm>
-          <a:prstGeom prst="rect">
-            <a:avLst/>
-          </a:prstGeom>
-          <a:solidFill>
-            <a:srgbClr val="ECF3FA"/>
-          </a:solidFill>
-          <a:ln w="6350">
-            <a:solidFill>
-              <a:srgbClr val="4F81BD"/>
-            </a:solidFill>
-          </a:ln>
-        </p:spPr>
-        <p:txBody>
-          <a:bodyPr wrap="square" lIns="72000" rIns="72000" tIns="36000" bIns="36000" anchor="t">
-            <a:spAutoFit/>
-          </a:bodyPr>
-          <a:lstStyle/>
-          <a:p>
-            <a:pPr algn="l"/>
-            <a:r>
-              <a:rPr sz="900" b="0">
-                <a:solidFill>
-                  <a:srgbClr val="333333"/>
-                </a:solidFill>
-                <a:ea typeface="Meiryo UI"/>
-                <a:latin typeface="Meiryo UI"/>
-              </a:rPr>
-              <a:t>● 悉皆研修・OJTで全教員のICTスキル統一</a:t>
-            </a:r>
-          </a:p>
-          <a:p>
-            <a:pPr algn="l"/>
-            <a:r>
-              <a:rPr sz="900" b="0">
-                <a:solidFill>
-                  <a:srgbClr val="333333"/>
-                </a:solidFill>
-                <a:ea typeface="Meiryo UI"/>
-                <a:latin typeface="Meiryo UI"/>
-              </a:rPr>
-              <a:t>● AI集計で授業アンケート分析→PDCA高速化</a:t>
-            </a:r>
-          </a:p>
-          <a:p>
-            <a:pPr algn="l"/>
-            <a:r>
-              <a:rPr sz="900" b="0">
-                <a:solidFill>
-                  <a:srgbClr val="333333"/>
-                </a:solidFill>
-                <a:ea typeface="Meiryo UI"/>
-                <a:latin typeface="Meiryo UI"/>
-              </a:rPr>
-              <a:t>● 週3回いじめ防止対策会議を継続</a:t>
-            </a:r>
-          </a:p>
-          <a:p>
-            <a:pPr algn="l"/>
-            <a:r>
-              <a:rPr sz="900" b="0">
-                <a:solidFill>
-                  <a:srgbClr val="333333"/>
-                </a:solidFill>
-                <a:ea typeface="Meiryo UI"/>
-                <a:latin typeface="Meiryo UI"/>
-              </a:rPr>
-              <a:t>● Slack等で児童生徒変化をリアルタイム共有</a:t>
-            </a:r>
-          </a:p>
-          <a:p>
-            <a:pPr algn="l"/>
-            <a:r>
-              <a:rPr sz="900" b="0">
-                <a:solidFill>
-                  <a:srgbClr val="333333"/>
-                </a:solidFill>
-                <a:ea typeface="Meiryo UI"/>
-                <a:latin typeface="Meiryo UI"/>
-              </a:rPr>
-              <a:t>● 「空白の時間・場所」を物理的に減らす</a:t>
-            </a:r>
-          </a:p>
-        </p:txBody>
-      </p:sp>
-      <p:sp>
-        <p:nvSpPr>
-          <p:cNvPr id="21" name="Rectangle 20"/>
-          <p:cNvSpPr/>
-          <p:nvPr/>
-        </p:nvSpPr>
-        <p:spPr>
-          <a:xfrm>
-            <a:off x="4610000" y="3470000"/>
-            <a:ext cx="4350000" cy="260000"/>
-          </a:xfrm>
-          <a:prstGeom prst="rect">
-            <a:avLst/>
-          </a:prstGeom>
-          <a:solidFill>
-            <a:srgbClr val="1F4E79"/>
-          </a:solidFill>
-          <a:ln>
-            <a:noFill/>
-          </a:ln>
-          <a:effectLst/>
-        </p:spPr>
-        <p:style>
-          <a:lnRef idx="1">
-            <a:schemeClr val="accent1"/>
-          </a:lnRef>
-          <a:fillRef idx="3">
-            <a:schemeClr val="accent1"/>
-          </a:fillRef>
-          <a:effectRef idx="2">
-            <a:schemeClr val="accent1"/>
-          </a:effectRef>
-          <a:fontRef idx="minor">
-            <a:schemeClr val="lt1"/>
-          </a:fontRef>
-        </p:style>
-        <p:txBody>
-          <a:bodyPr rtlCol="0" anchor="ctr" lIns="90000" rIns="60000" tIns="10000" bIns="10000"/>
-          <a:lstStyle/>
-          <a:p>
-            <a:pPr algn="l"/>
-            <a:r>
-              <a:rPr sz="1000" b="1">
-                <a:solidFill>
-                  <a:srgbClr val="FFFFFF"/>
-                </a:solidFill>
-                <a:ea typeface="Meiryo UI"/>
-                <a:latin typeface="Meiryo UI"/>
-              </a:rPr>
-              <a:t>  校長の見解（次年度改善に向けて）</a:t>
-            </a:r>
-          </a:p>
-        </p:txBody>
-      </p:sp>
-      <p:sp>
-        <p:nvSpPr>
-          <p:cNvPr id="22" name="TextBox 21"/>
-          <p:cNvSpPr txBox="1"/>
-          <p:nvPr/>
-        </p:nvSpPr>
-        <p:spPr>
-          <a:xfrm>
-            <a:off x="4610000" y="3760000"/>
-            <a:ext cx="4350000" cy="900000"/>
-          </a:xfrm>
-          <a:prstGeom prst="rect">
-            <a:avLst/>
-          </a:prstGeom>
-          <a:solidFill>
-            <a:srgbClr val="F7F7F7"/>
-          </a:solidFill>
-          <a:ln w="6350">
-            <a:solidFill>
-              <a:srgbClr val="1F4E79"/>
-            </a:solidFill>
-          </a:ln>
-        </p:spPr>
-        <p:txBody>
-          <a:bodyPr wrap="square" lIns="72000" rIns="72000" tIns="36000" bIns="36000" anchor="t">
-            <a:spAutoFit/>
-          </a:bodyPr>
-          <a:lstStyle/>
-          <a:p>
-            <a:pPr algn="l"/>
-            <a:r>
-              <a:rPr sz="900" b="0">
-                <a:solidFill>
-                  <a:srgbClr val="333333"/>
-                </a:solidFill>
-                <a:ea typeface="Meiryo UI"/>
-                <a:latin typeface="Meiryo UI"/>
-              </a:rPr>
-              <a:t>「小中一貫教育校である本校は地域の期待も大きい。</a:t>
-            </a:r>
-          </a:p>
-          <a:p>
-            <a:pPr algn="l"/>
-            <a:r>
-              <a:rPr sz="900" b="0">
-                <a:solidFill>
-                  <a:srgbClr val="333333"/>
-                </a:solidFill>
-                <a:ea typeface="Meiryo UI"/>
-                <a:latin typeface="Meiryo UI"/>
-              </a:rPr>
-              <a:t> 期待に応えるためにも今年度の反省をもとに考えた</a:t>
-            </a:r>
-          </a:p>
-          <a:p>
-            <a:pPr algn="l"/>
-            <a:r>
-              <a:rPr sz="900" b="0">
-                <a:solidFill>
-                  <a:srgbClr val="333333"/>
-                </a:solidFill>
-                <a:ea typeface="Meiryo UI"/>
-                <a:latin typeface="Meiryo UI"/>
-              </a:rPr>
-              <a:t> 改善策を、まずは確実に実行していく。PDCAサイクル</a:t>
-            </a:r>
-          </a:p>
-          <a:p>
-            <a:pPr algn="l"/>
-            <a:r>
-              <a:rPr sz="900" b="0">
-                <a:solidFill>
-                  <a:srgbClr val="333333"/>
-                </a:solidFill>
-                <a:ea typeface="Meiryo UI"/>
-                <a:latin typeface="Meiryo UI"/>
-              </a:rPr>
-              <a:t> を活かして、年度途中でも改善策の妥当性を吟味し、</a:t>
-            </a:r>
-          </a:p>
-          <a:p>
-            <a:pPr algn="l"/>
-            <a:r>
-              <a:rPr sz="900" b="0">
-                <a:solidFill>
-                  <a:srgbClr val="333333"/>
-                </a:solidFill>
-                <a:ea typeface="Meiryo UI"/>
-                <a:latin typeface="Meiryo UI"/>
-              </a:rPr>
-              <a:t> 必要に応じて修正していく。」（R6・R7報告書より要約）</a:t>
-            </a:r>
-          </a:p>
-        </p:txBody>
-      </p:sp>
-      <p:sp>
-        <p:nvSpPr>
-          <p:cNvPr id="23" name="Rectangle 22"/>
-          <p:cNvSpPr/>
-          <p:nvPr/>
-        </p:nvSpPr>
-        <p:spPr>
-          <a:xfrm>
-            <a:off x="180000" y="4660000"/>
-            <a:ext cx="8780000" cy="180000"/>
-          </a:xfrm>
-          <a:prstGeom prst="rect">
-            <a:avLst/>
-          </a:prstGeom>
-          <a:solidFill>
-            <a:srgbClr val="6F5A9C"/>
-          </a:solidFill>
-          <a:ln>
-            <a:noFill/>
-          </a:ln>
-          <a:effectLst/>
-        </p:spPr>
-        <p:style>
-          <a:lnRef idx="1">
-            <a:schemeClr val="accent1"/>
-          </a:lnRef>
-          <a:fillRef idx="3">
-            <a:schemeClr val="accent1"/>
-          </a:fillRef>
-          <a:effectRef idx="2">
-            <a:schemeClr val="accent1"/>
-          </a:effectRef>
-          <a:fontRef idx="minor">
-            <a:schemeClr val="lt1"/>
-          </a:fontRef>
-        </p:style>
-        <p:txBody>
-          <a:bodyPr rtlCol="0" anchor="ctr" lIns="72000" rIns="72000" tIns="36000" bIns="36000" wrap="square"/>
-          <a:lstStyle/>
-          <a:p>
-            <a:pPr algn="ctr"/>
-            <a:r>
-              <a:rPr sz="1000" b="1">
-                <a:solidFill>
-                  <a:srgbClr val="FFFFFF"/>
-                </a:solidFill>
-                <a:ea typeface="Meiryo UI"/>
-                <a:latin typeface="Meiryo UI"/>
-              </a:rPr>
-              <a:t>学校は PDCA を回し改善努力を継続中。ただし統計データの傾向は単年の努力では覆らず、施設一体型化の構造的優位性は依然として未確認。</a:t>
-            </a:r>
-          </a:p>
-        </p:txBody>
-      </p:sp>
-    </p:spTree>
-  </p:cSld>
-  <p:clrMapOvr>
-    <a:masterClrMapping/>
-  </p:clrMapOvr>
-</p:sld>
-</file>
-
-<file path=ppt/slides/slide6.xml><?xml version="1.0" encoding="utf-8"?>
-<p:sld xmlns:a="http://schemas.openxmlformats.org/drawingml/2006/main" xmlns:p="http://schemas.openxmlformats.org/presentationml/2006/main" xmlns:r="http://schemas.openxmlformats.org/officeDocument/2006/relationships">
-  <p:cSld>
-    <p:spTree>
-      <p:nvGrpSpPr>
-        <p:cNvPr id="1" name=""/>
-        <p:cNvGrpSpPr/>
-        <p:nvPr/>
-      </p:nvGrpSpPr>
-      <p:grpSpPr/>
-      <p:sp>
-        <p:nvSpPr>
-          <p:cNvPr id="2" name="Rectangle 1"/>
-          <p:cNvSpPr/>
-          <p:nvPr/>
-        </p:nvSpPr>
-        <p:spPr>
-          <a:xfrm>
-            <a:off x="0" y="0"/>
-            <a:ext cx="9144000" cy="80000"/>
-          </a:xfrm>
-          <a:prstGeom prst="rect">
-            <a:avLst/>
-          </a:prstGeom>
-          <a:solidFill>
-            <a:srgbClr val="1F4E79"/>
-          </a:solidFill>
-          <a:ln>
-            <a:noFill/>
-          </a:ln>
-          <a:effectLst/>
-        </p:spPr>
-        <p:style>
-          <a:lnRef idx="1">
-            <a:schemeClr val="accent1"/>
-          </a:lnRef>
-          <a:fillRef idx="3">
-            <a:schemeClr val="accent1"/>
-          </a:fillRef>
-          <a:effectRef idx="2">
-            <a:schemeClr val="accent1"/>
-          </a:effectRef>
-          <a:fontRef idx="minor">
-            <a:schemeClr val="lt1"/>
-          </a:fontRef>
-        </p:style>
-        <p:txBody>
-          <a:bodyPr rtlCol="0" anchor="ctr"/>
-          <a:lstStyle/>
-          <a:p>
-            <a:pPr algn="ctr"/>
-          </a:p>
-        </p:txBody>
-      </p:sp>
-      <p:sp>
-        <p:nvSpPr>
-          <p:cNvPr id="3" name="Rectangle 2"/>
-          <p:cNvSpPr/>
-          <p:nvPr/>
-        </p:nvSpPr>
-        <p:spPr>
-          <a:xfrm>
-            <a:off x="180000" y="180000"/>
-            <a:ext cx="280000" cy="280000"/>
-          </a:xfrm>
-          <a:prstGeom prst="rect">
-            <a:avLst/>
-          </a:prstGeom>
-          <a:solidFill>
-            <a:srgbClr val="1F4E79"/>
-          </a:solidFill>
-          <a:ln>
-            <a:noFill/>
-          </a:ln>
-          <a:effectLst/>
-        </p:spPr>
-        <p:style>
-          <a:lnRef idx="1">
-            <a:schemeClr val="accent1"/>
-          </a:lnRef>
-          <a:fillRef idx="3">
-            <a:schemeClr val="accent1"/>
-          </a:fillRef>
-          <a:effectRef idx="2">
-            <a:schemeClr val="accent1"/>
-          </a:effectRef>
-          <a:fontRef idx="minor">
-            <a:schemeClr val="lt1"/>
-          </a:fontRef>
-        </p:style>
-        <p:txBody>
-          <a:bodyPr rtlCol="0" anchor="ctr" lIns="0" rIns="0" tIns="0" bIns="0"/>
-          <a:lstStyle/>
-          <a:p>
-            <a:pPr algn="ctr"/>
-            <a:r>
-              <a:rPr sz="1400" b="1">
-                <a:solidFill>
-                  <a:srgbClr val="FFFFFF"/>
-                </a:solidFill>
-                <a:ea typeface="Meiryo UI"/>
-                <a:latin typeface="Meiryo UI"/>
-              </a:rPr>
-              <a:t>5</a:t>
-            </a:r>
-          </a:p>
-        </p:txBody>
-      </p:sp>
-      <p:sp>
-        <p:nvSpPr>
-          <p:cNvPr id="4" name="TextBox 3"/>
-          <p:cNvSpPr txBox="1"/>
-          <p:nvPr/>
-        </p:nvSpPr>
-        <p:spPr>
-          <a:xfrm>
-            <a:off x="520000" y="150000"/>
-            <a:ext cx="7800000" cy="340000"/>
-          </a:xfrm>
-          <a:prstGeom prst="rect">
-            <a:avLst/>
-          </a:prstGeom>
-          <a:noFill/>
-        </p:spPr>
-        <p:txBody>
-          <a:bodyPr wrap="none" lIns="36000" tIns="0" bIns="0" anchor="ctr">
-            <a:spAutoFit/>
-          </a:bodyPr>
-          <a:lstStyle/>
-          <a:p>
-            <a:pPr algn="l"/>
-            <a:r>
-              <a:rPr sz="1800" b="1">
-                <a:solidFill>
-                  <a:srgbClr val="1F4E79"/>
-                </a:solidFill>
-                <a:ea typeface="Meiryo UI"/>
-                <a:latin typeface="Meiryo UI"/>
-              </a:rPr>
-              <a:t>結論：新規開設の効果なし／代替施策と費用対効果</a:t>
-            </a:r>
-          </a:p>
-        </p:txBody>
-      </p:sp>
-      <p:sp>
-        <p:nvSpPr>
-          <p:cNvPr id="5" name="Rectangle 4"/>
-          <p:cNvSpPr/>
-          <p:nvPr/>
-        </p:nvSpPr>
-        <p:spPr>
-          <a:xfrm>
-            <a:off x="180000" y="510000"/>
-            <a:ext cx="8780000" cy="15000"/>
-          </a:xfrm>
-          <a:prstGeom prst="rect">
-            <a:avLst/>
-          </a:prstGeom>
-          <a:solidFill>
-            <a:srgbClr val="5B9BD5"/>
-          </a:solidFill>
-          <a:ln>
-            <a:noFill/>
-          </a:ln>
-          <a:effectLst/>
-        </p:spPr>
-        <p:style>
-          <a:lnRef idx="1">
-            <a:schemeClr val="accent1"/>
-          </a:lnRef>
-          <a:fillRef idx="3">
-            <a:schemeClr val="accent1"/>
-          </a:fillRef>
-          <a:effectRef idx="2">
-            <a:schemeClr val="accent1"/>
-          </a:effectRef>
-          <a:fontRef idx="minor">
-            <a:schemeClr val="lt1"/>
-          </a:fontRef>
-        </p:style>
-        <p:txBody>
-          <a:bodyPr rtlCol="0" anchor="ctr"/>
-          <a:lstStyle/>
-          <a:p>
-            <a:pPr algn="ctr"/>
-          </a:p>
-        </p:txBody>
-      </p:sp>
-      <p:sp>
-        <p:nvSpPr>
-          <p:cNvPr id="6" name="TextBox 5"/>
-          <p:cNvSpPr txBox="1"/>
-          <p:nvPr/>
-        </p:nvSpPr>
-        <p:spPr>
-          <a:xfrm>
-            <a:off x="180000" y="4920000"/>
-            <a:ext cx="3000000" cy="180000"/>
-          </a:xfrm>
-          <a:prstGeom prst="rect">
-            <a:avLst/>
-          </a:prstGeom>
-          <a:noFill/>
-        </p:spPr>
-        <p:txBody>
-          <a:bodyPr wrap="none" lIns="0">
-            <a:spAutoFit/>
-          </a:bodyPr>
-          <a:lstStyle/>
-          <a:p>
-            <a:r>
-              <a:rPr sz="800" b="0">
-                <a:solidFill>
-                  <a:srgbClr val="767676"/>
-                </a:solidFill>
-                <a:ea typeface="Meiryo UI"/>
-                <a:latin typeface="Meiryo UI"/>
-              </a:rPr>
-              <a:t>練馬区教育委員会 教育振興部教育指導課</a:t>
-            </a:r>
-          </a:p>
-        </p:txBody>
-      </p:sp>
-      <p:sp>
-        <p:nvSpPr>
-          <p:cNvPr id="7" name="TextBox 6"/>
-          <p:cNvSpPr txBox="1"/>
-          <p:nvPr/>
-        </p:nvSpPr>
-        <p:spPr>
-          <a:xfrm>
-            <a:off x="8740000" y="4920000"/>
-            <a:ext cx="280000" cy="180000"/>
-          </a:xfrm>
-          <a:prstGeom prst="rect">
-            <a:avLst/>
-          </a:prstGeom>
-          <a:noFill/>
-        </p:spPr>
-        <p:txBody>
-          <a:bodyPr wrap="none" lIns="0">
-            <a:spAutoFit/>
-          </a:bodyPr>
-          <a:lstStyle/>
-          <a:p>
-            <a:pPr algn="r"/>
-            <a:r>
-              <a:rPr sz="800" b="0">
-                <a:solidFill>
-                  <a:srgbClr val="767676"/>
-                </a:solidFill>
-                <a:ea typeface="Meiryo UI"/>
-                <a:latin typeface="Meiryo UI"/>
-              </a:rPr>
-              <a:t>- 5 -</a:t>
             </a:r>
           </a:p>
         </p:txBody>

--- a/output/小中一貫教育（大泉桜学園）_改良版.pptx
+++ b/output/小中一貫教育（大泉桜学園）_改良版.pptx
@@ -13245,13 +13245,15 @@
                 <a:tableStyleId>{5C22544A-7EE6-4342-B048-85BDC9FD1C3A}</a:tableStyleId>
               </a:tblPr>
               <a:tblGrid>
-                <a:gridCol w="1110000"/>
-                <a:gridCol w="540000"/>
-                <a:gridCol w="540000"/>
-                <a:gridCol w="540000"/>
-                <a:gridCol w="540000"/>
-                <a:gridCol w="540000"/>
-                <a:gridCol w="540000"/>
+                <a:gridCol w="850000"/>
+                <a:gridCol w="437000"/>
+                <a:gridCol w="437000"/>
+                <a:gridCol w="437000"/>
+                <a:gridCol w="437000"/>
+                <a:gridCol w="437000"/>
+                <a:gridCol w="437000"/>
+                <a:gridCol w="437000"/>
+                <a:gridCol w="441000"/>
               </a:tblGrid>
               <a:tr h="164000">
                 <a:tc>
@@ -13261,7 +13263,7 @@
                     <a:p>
                       <a:pPr algn="ctr"/>
                       <a:r>
-                        <a:rPr sz="800" b="1">
+                        <a:rPr sz="700" b="1">
                           <a:solidFill>
                             <a:srgbClr val="FFFFFF"/>
                           </a:solidFill>
@@ -13285,7 +13287,7 @@
                     <a:p>
                       <a:pPr algn="ctr"/>
                       <a:r>
-                        <a:rPr sz="800" b="1">
+                        <a:rPr sz="700" b="1">
                           <a:solidFill>
                             <a:srgbClr val="FFFFFF"/>
                           </a:solidFill>
@@ -13309,7 +13311,7 @@
                     <a:p>
                       <a:pPr algn="ctr"/>
                       <a:r>
-                        <a:rPr sz="800" b="1">
+                        <a:rPr sz="700" b="1">
                           <a:solidFill>
                             <a:srgbClr val="FFFFFF"/>
                           </a:solidFill>
@@ -13333,7 +13335,7 @@
                     <a:p>
                       <a:pPr algn="ctr"/>
                       <a:r>
-                        <a:rPr sz="800" b="1">
+                        <a:rPr sz="700" b="1">
                           <a:solidFill>
                             <a:srgbClr val="FFFFFF"/>
                           </a:solidFill>
@@ -13357,13 +13359,37 @@
                     <a:p>
                       <a:pPr algn="ctr"/>
                       <a:r>
-                        <a:rPr sz="800" b="1">
+                        <a:rPr sz="700" b="1">
                           <a:solidFill>
                             <a:srgbClr val="FFFFFF"/>
                           </a:solidFill>
                           <a:ea typeface="Meiryo UI"/>
                           <a:latin typeface="Meiryo UI"/>
                         </a:rPr>
+                        <a:t>小R7</a:t>
+                      </a:r>
+                    </a:p>
+                  </a:txBody>
+                  <a:tcPr marL="36000" marR="36000" marT="18000" marB="18000">
+                    <a:solidFill>
+                      <a:srgbClr val="1F4E79"/>
+                    </a:solidFill>
+                  </a:tcPr>
+                </a:tc>
+                <a:tc>
+                  <a:txBody>
+                    <a:bodyPr wrap="square"/>
+                    <a:lstStyle/>
+                    <a:p>
+                      <a:pPr algn="ctr"/>
+                      <a:r>
+                        <a:rPr sz="700" b="1">
+                          <a:solidFill>
+                            <a:srgbClr val="FFFFFF"/>
+                          </a:solidFill>
+                          <a:ea typeface="Meiryo UI"/>
+                          <a:latin typeface="Meiryo UI"/>
+                        </a:rPr>
                         <a:t>中R4</a:t>
                       </a:r>
                     </a:p>
@@ -13381,7 +13407,7 @@
                     <a:p>
                       <a:pPr algn="ctr"/>
                       <a:r>
-                        <a:rPr sz="800" b="1">
+                        <a:rPr sz="700" b="1">
                           <a:solidFill>
                             <a:srgbClr val="FFFFFF"/>
                           </a:solidFill>
@@ -13405,7 +13431,7 @@
                     <a:p>
                       <a:pPr algn="ctr"/>
                       <a:r>
-                        <a:rPr sz="800" b="1">
+                        <a:rPr sz="700" b="1">
                           <a:solidFill>
                             <a:srgbClr val="FFFFFF"/>
                           </a:solidFill>
@@ -13413,6 +13439,30 @@
                           <a:latin typeface="Meiryo UI"/>
                         </a:rPr>
                         <a:t>中R6</a:t>
+                      </a:r>
+                    </a:p>
+                  </a:txBody>
+                  <a:tcPr marL="36000" marR="36000" marT="18000" marB="18000">
+                    <a:solidFill>
+                      <a:srgbClr val="1F4E79"/>
+                    </a:solidFill>
+                  </a:tcPr>
+                </a:tc>
+                <a:tc>
+                  <a:txBody>
+                    <a:bodyPr wrap="square"/>
+                    <a:lstStyle/>
+                    <a:p>
+                      <a:pPr algn="ctr"/>
+                      <a:r>
+                        <a:rPr sz="700" b="1">
+                          <a:solidFill>
+                            <a:srgbClr val="FFFFFF"/>
+                          </a:solidFill>
+                          <a:ea typeface="Meiryo UI"/>
+                          <a:latin typeface="Meiryo UI"/>
+                        </a:rPr>
+                        <a:t>中R7</a:t>
                       </a:r>
                     </a:p>
                   </a:txBody>
@@ -13431,7 +13481,7 @@
                     <a:p>
                       <a:pPr algn="ctr"/>
                       <a:r>
-                        <a:rPr sz="800" b="1">
+                        <a:rPr sz="700" b="1">
                           <a:solidFill>
                             <a:srgbClr val="333333"/>
                           </a:solidFill>
@@ -13455,7 +13505,7 @@
                     <a:p>
                       <a:pPr algn="ctr"/>
                       <a:r>
-                        <a:rPr sz="800" b="1">
+                        <a:rPr sz="700" b="1">
                           <a:solidFill>
                             <a:srgbClr val="C0504D"/>
                           </a:solidFill>
@@ -13479,7 +13529,7 @@
                     <a:p>
                       <a:pPr algn="ctr"/>
                       <a:r>
-                        <a:rPr sz="800" b="0">
+                        <a:rPr sz="700" b="0">
                           <a:solidFill>
                             <a:srgbClr val="333333"/>
                           </a:solidFill>
@@ -13503,7 +13553,7 @@
                     <a:p>
                       <a:pPr algn="ctr"/>
                       <a:r>
-                        <a:rPr sz="800" b="1">
+                        <a:rPr sz="700" b="1">
                           <a:solidFill>
                             <a:srgbClr val="C0504D"/>
                           </a:solidFill>
@@ -13527,7 +13577,31 @@
                     <a:p>
                       <a:pPr algn="ctr"/>
                       <a:r>
-                        <a:rPr sz="800" b="0">
+                        <a:rPr sz="700" b="1">
+                          <a:solidFill>
+                            <a:srgbClr val="C0504D"/>
+                          </a:solidFill>
+                          <a:ea typeface="Meiryo UI"/>
+                          <a:latin typeface="Meiryo UI"/>
+                        </a:rPr>
+                        <a:t>65</a:t>
+                      </a:r>
+                    </a:p>
+                  </a:txBody>
+                  <a:tcPr marL="36000" marR="36000" marT="18000" marB="18000">
+                    <a:solidFill>
+                      <a:srgbClr val="FBEEED"/>
+                    </a:solidFill>
+                  </a:tcPr>
+                </a:tc>
+                <a:tc>
+                  <a:txBody>
+                    <a:bodyPr wrap="square"/>
+                    <a:lstStyle/>
+                    <a:p>
+                      <a:pPr algn="ctr"/>
+                      <a:r>
+                        <a:rPr sz="700" b="0">
                           <a:solidFill>
                             <a:srgbClr val="333333"/>
                           </a:solidFill>
@@ -13551,7 +13625,7 @@
                     <a:p>
                       <a:pPr algn="ctr"/>
                       <a:r>
-                        <a:rPr sz="800" b="0">
+                        <a:rPr sz="700" b="0">
                           <a:solidFill>
                             <a:srgbClr val="333333"/>
                           </a:solidFill>
@@ -13575,7 +13649,7 @@
                     <a:p>
                       <a:pPr algn="ctr"/>
                       <a:r>
-                        <a:rPr sz="800" b="1">
+                        <a:rPr sz="700" b="1">
                           <a:solidFill>
                             <a:srgbClr val="C0504D"/>
                           </a:solidFill>
@@ -13583,6 +13657,30 @@
                           <a:latin typeface="Meiryo UI"/>
                         </a:rPr>
                         <a:t>60</a:t>
+                      </a:r>
+                    </a:p>
+                  </a:txBody>
+                  <a:tcPr marL="36000" marR="36000" marT="18000" marB="18000">
+                    <a:solidFill>
+                      <a:srgbClr val="FBEEED"/>
+                    </a:solidFill>
+                  </a:tcPr>
+                </a:tc>
+                <a:tc>
+                  <a:txBody>
+                    <a:bodyPr wrap="square"/>
+                    <a:lstStyle/>
+                    <a:p>
+                      <a:pPr algn="ctr"/>
+                      <a:r>
+                        <a:rPr sz="700" b="1">
+                          <a:solidFill>
+                            <a:srgbClr val="C0504D"/>
+                          </a:solidFill>
+                          <a:ea typeface="Meiryo UI"/>
+                          <a:latin typeface="Meiryo UI"/>
+                        </a:rPr>
+                        <a:t>56</a:t>
                       </a:r>
                     </a:p>
                   </a:txBody>
@@ -13601,7 +13699,7 @@
                     <a:p>
                       <a:pPr algn="ctr"/>
                       <a:r>
-                        <a:rPr sz="800" b="1">
+                        <a:rPr sz="700" b="1">
                           <a:solidFill>
                             <a:srgbClr val="333333"/>
                           </a:solidFill>
@@ -13625,7 +13723,7 @@
                     <a:p>
                       <a:pPr algn="ctr"/>
                       <a:r>
-                        <a:rPr sz="800" b="0">
+                        <a:rPr sz="700" b="0">
                           <a:solidFill>
                             <a:srgbClr val="333333"/>
                           </a:solidFill>
@@ -13649,7 +13747,7 @@
                     <a:p>
                       <a:pPr algn="ctr"/>
                       <a:r>
-                        <a:rPr sz="800" b="0">
+                        <a:rPr sz="700" b="0">
                           <a:solidFill>
                             <a:srgbClr val="333333"/>
                           </a:solidFill>
@@ -13673,7 +13771,7 @@
                     <a:p>
                       <a:pPr algn="ctr"/>
                       <a:r>
-                        <a:rPr sz="800" b="0">
+                        <a:rPr sz="700" b="0">
                           <a:solidFill>
                             <a:srgbClr val="333333"/>
                           </a:solidFill>
@@ -13697,7 +13795,31 @@
                     <a:p>
                       <a:pPr algn="ctr"/>
                       <a:r>
-                        <a:rPr sz="800" b="0">
+                        <a:rPr sz="700" b="0">
+                          <a:solidFill>
+                            <a:srgbClr val="333333"/>
+                          </a:solidFill>
+                          <a:ea typeface="Meiryo UI"/>
+                          <a:latin typeface="Meiryo UI"/>
+                        </a:rPr>
+                        <a:t>71</a:t>
+                      </a:r>
+                    </a:p>
+                  </a:txBody>
+                  <a:tcPr marL="36000" marR="36000" marT="18000" marB="18000">
+                    <a:solidFill>
+                      <a:srgbClr val="FFFFFF"/>
+                    </a:solidFill>
+                  </a:tcPr>
+                </a:tc>
+                <a:tc>
+                  <a:txBody>
+                    <a:bodyPr wrap="square"/>
+                    <a:lstStyle/>
+                    <a:p>
+                      <a:pPr algn="ctr"/>
+                      <a:r>
+                        <a:rPr sz="700" b="0">
                           <a:solidFill>
                             <a:srgbClr val="333333"/>
                           </a:solidFill>
@@ -13721,7 +13843,7 @@
                     <a:p>
                       <a:pPr algn="ctr"/>
                       <a:r>
-                        <a:rPr sz="800" b="0">
+                        <a:rPr sz="700" b="0">
                           <a:solidFill>
                             <a:srgbClr val="333333"/>
                           </a:solidFill>
@@ -13745,7 +13867,7 @@
                     <a:p>
                       <a:pPr algn="ctr"/>
                       <a:r>
-                        <a:rPr sz="800" b="0">
+                        <a:rPr sz="700" b="0">
                           <a:solidFill>
                             <a:srgbClr val="333333"/>
                           </a:solidFill>
@@ -13753,6 +13875,30 @@
                           <a:latin typeface="Meiryo UI"/>
                         </a:rPr>
                         <a:t>62</a:t>
+                      </a:r>
+                    </a:p>
+                  </a:txBody>
+                  <a:tcPr marL="36000" marR="36000" marT="18000" marB="18000">
+                    <a:solidFill>
+                      <a:srgbClr val="FFFFFF"/>
+                    </a:solidFill>
+                  </a:tcPr>
+                </a:tc>
+                <a:tc>
+                  <a:txBody>
+                    <a:bodyPr wrap="square"/>
+                    <a:lstStyle/>
+                    <a:p>
+                      <a:pPr algn="ctr"/>
+                      <a:r>
+                        <a:rPr sz="700" b="0">
+                          <a:solidFill>
+                            <a:srgbClr val="333333"/>
+                          </a:solidFill>
+                          <a:ea typeface="Meiryo UI"/>
+                          <a:latin typeface="Meiryo UI"/>
+                        </a:rPr>
+                        <a:t>58</a:t>
                       </a:r>
                     </a:p>
                   </a:txBody>
@@ -13771,7 +13917,7 @@
                     <a:p>
                       <a:pPr algn="ctr"/>
                       <a:r>
-                        <a:rPr sz="800" b="1">
+                        <a:rPr sz="700" b="1">
                           <a:solidFill>
                             <a:srgbClr val="333333"/>
                           </a:solidFill>
@@ -13795,7 +13941,7 @@
                     <a:p>
                       <a:pPr algn="ctr"/>
                       <a:r>
-                        <a:rPr sz="800" b="0">
+                        <a:rPr sz="700" b="0">
                           <a:solidFill>
                             <a:srgbClr val="333333"/>
                           </a:solidFill>
@@ -13819,7 +13965,7 @@
                     <a:p>
                       <a:pPr algn="ctr"/>
                       <a:r>
-                        <a:rPr sz="800" b="0">
+                        <a:rPr sz="700" b="0">
                           <a:solidFill>
                             <a:srgbClr val="333333"/>
                           </a:solidFill>
@@ -13843,7 +13989,7 @@
                     <a:p>
                       <a:pPr algn="ctr"/>
                       <a:r>
-                        <a:rPr sz="800" b="0">
+                        <a:rPr sz="700" b="0">
                           <a:solidFill>
                             <a:srgbClr val="333333"/>
                           </a:solidFill>
@@ -13867,7 +14013,7 @@
                     <a:p>
                       <a:pPr algn="ctr"/>
                       <a:r>
-                        <a:rPr sz="800" b="0">
+                        <a:rPr sz="700" b="0">
                           <a:solidFill>
                             <a:srgbClr val="333333"/>
                           </a:solidFill>
@@ -13891,7 +14037,31 @@
                     <a:p>
                       <a:pPr algn="ctr"/>
                       <a:r>
-                        <a:rPr sz="800" b="0">
+                        <a:rPr sz="700" b="0">
+                          <a:solidFill>
+                            <a:srgbClr val="333333"/>
+                          </a:solidFill>
+                          <a:ea typeface="Meiryo UI"/>
+                          <a:latin typeface="Meiryo UI"/>
+                        </a:rPr>
+                        <a:t>70</a:t>
+                      </a:r>
+                    </a:p>
+                  </a:txBody>
+                  <a:tcPr marL="36000" marR="36000" marT="18000" marB="18000">
+                    <a:solidFill>
+                      <a:srgbClr val="FFFFFF"/>
+                    </a:solidFill>
+                  </a:tcPr>
+                </a:tc>
+                <a:tc>
+                  <a:txBody>
+                    <a:bodyPr wrap="square"/>
+                    <a:lstStyle/>
+                    <a:p>
+                      <a:pPr algn="ctr"/>
+                      <a:r>
+                        <a:rPr sz="700" b="0">
                           <a:solidFill>
                             <a:srgbClr val="333333"/>
                           </a:solidFill>
@@ -13915,7 +14085,7 @@
                     <a:p>
                       <a:pPr algn="ctr"/>
                       <a:r>
-                        <a:rPr sz="800" b="0">
+                        <a:rPr sz="700" b="0">
                           <a:solidFill>
                             <a:srgbClr val="333333"/>
                           </a:solidFill>
@@ -13923,6 +14093,30 @@
                           <a:latin typeface="Meiryo UI"/>
                         </a:rPr>
                         <a:t>61</a:t>
+                      </a:r>
+                    </a:p>
+                  </a:txBody>
+                  <a:tcPr marL="36000" marR="36000" marT="18000" marB="18000">
+                    <a:solidFill>
+                      <a:srgbClr val="FFFFFF"/>
+                    </a:solidFill>
+                  </a:tcPr>
+                </a:tc>
+                <a:tc>
+                  <a:txBody>
+                    <a:bodyPr wrap="square"/>
+                    <a:lstStyle/>
+                    <a:p>
+                      <a:pPr algn="ctr"/>
+                      <a:r>
+                        <a:rPr sz="700" b="0">
+                          <a:solidFill>
+                            <a:srgbClr val="333333"/>
+                          </a:solidFill>
+                          <a:ea typeface="Meiryo UI"/>
+                          <a:latin typeface="Meiryo UI"/>
+                        </a:rPr>
+                        <a:t>57</a:t>
                       </a:r>
                     </a:p>
                   </a:txBody>
@@ -13941,7 +14135,7 @@
                     <a:p>
                       <a:pPr algn="ctr"/>
                       <a:r>
-                        <a:rPr sz="800" b="1">
+                        <a:rPr sz="700" b="1">
                           <a:solidFill>
                             <a:srgbClr val="333333"/>
                           </a:solidFill>
@@ -13965,7 +14159,7 @@
                     <a:p>
                       <a:pPr algn="ctr"/>
                       <a:r>
-                        <a:rPr sz="800" b="0">
+                        <a:rPr sz="700" b="0">
                           <a:solidFill>
                             <a:srgbClr val="333333"/>
                           </a:solidFill>
@@ -13989,7 +14183,7 @@
                     <a:p>
                       <a:pPr algn="ctr"/>
                       <a:r>
-                        <a:rPr sz="800" b="0">
+                        <a:rPr sz="700" b="0">
                           <a:solidFill>
                             <a:srgbClr val="333333"/>
                           </a:solidFill>
@@ -14013,7 +14207,7 @@
                     <a:p>
                       <a:pPr algn="ctr"/>
                       <a:r>
-                        <a:rPr sz="800" b="0">
+                        <a:rPr sz="700" b="0">
                           <a:solidFill>
                             <a:srgbClr val="333333"/>
                           </a:solidFill>
@@ -14037,7 +14231,31 @@
                     <a:p>
                       <a:pPr algn="ctr"/>
                       <a:r>
-                        <a:rPr sz="800" b="0">
+                        <a:rPr sz="700" b="0">
+                          <a:solidFill>
+                            <a:srgbClr val="333333"/>
+                          </a:solidFill>
+                          <a:ea typeface="Meiryo UI"/>
+                          <a:latin typeface="Meiryo UI"/>
+                        </a:rPr>
+                        <a:t>66.8</a:t>
+                      </a:r>
+                    </a:p>
+                  </a:txBody>
+                  <a:tcPr marL="36000" marR="36000" marT="18000" marB="18000">
+                    <a:solidFill>
+                      <a:srgbClr val="FFFFFF"/>
+                    </a:solidFill>
+                  </a:tcPr>
+                </a:tc>
+                <a:tc>
+                  <a:txBody>
+                    <a:bodyPr wrap="square"/>
+                    <a:lstStyle/>
+                    <a:p>
+                      <a:pPr algn="ctr"/>
+                      <a:r>
+                        <a:rPr sz="700" b="0">
                           <a:solidFill>
                             <a:srgbClr val="333333"/>
                           </a:solidFill>
@@ -14061,7 +14279,7 @@
                     <a:p>
                       <a:pPr algn="ctr"/>
                       <a:r>
-                        <a:rPr sz="800" b="0">
+                        <a:rPr sz="700" b="0">
                           <a:solidFill>
                             <a:srgbClr val="333333"/>
                           </a:solidFill>
@@ -14085,7 +14303,7 @@
                     <a:p>
                       <a:pPr algn="ctr"/>
                       <a:r>
-                        <a:rPr sz="800" b="0">
+                        <a:rPr sz="700" b="0">
                           <a:solidFill>
                             <a:srgbClr val="333333"/>
                           </a:solidFill>
@@ -14093,6 +14311,30 @@
                           <a:latin typeface="Meiryo UI"/>
                         </a:rPr>
                         <a:t>58.1</a:t>
+                      </a:r>
+                    </a:p>
+                  </a:txBody>
+                  <a:tcPr marL="36000" marR="36000" marT="18000" marB="18000">
+                    <a:solidFill>
+                      <a:srgbClr val="FFFFFF"/>
+                    </a:solidFill>
+                  </a:tcPr>
+                </a:tc>
+                <a:tc>
+                  <a:txBody>
+                    <a:bodyPr wrap="square"/>
+                    <a:lstStyle/>
+                    <a:p>
+                      <a:pPr algn="ctr"/>
+                      <a:r>
+                        <a:rPr sz="700" b="0">
+                          <a:solidFill>
+                            <a:srgbClr val="333333"/>
+                          </a:solidFill>
+                          <a:ea typeface="Meiryo UI"/>
+                          <a:latin typeface="Meiryo UI"/>
+                        </a:rPr>
+                        <a:t>54.3</a:t>
                       </a:r>
                     </a:p>
                   </a:txBody>
@@ -14180,13 +14422,15 @@
                 <a:tableStyleId>{5C22544A-7EE6-4342-B048-85BDC9FD1C3A}</a:tableStyleId>
               </a:tblPr>
               <a:tblGrid>
-                <a:gridCol w="1110000"/>
-                <a:gridCol w="540000"/>
-                <a:gridCol w="540000"/>
-                <a:gridCol w="540000"/>
-                <a:gridCol w="540000"/>
-                <a:gridCol w="540000"/>
-                <a:gridCol w="540000"/>
+                <a:gridCol w="850000"/>
+                <a:gridCol w="437000"/>
+                <a:gridCol w="437000"/>
+                <a:gridCol w="437000"/>
+                <a:gridCol w="437000"/>
+                <a:gridCol w="437000"/>
+                <a:gridCol w="437000"/>
+                <a:gridCol w="437000"/>
+                <a:gridCol w="441000"/>
               </a:tblGrid>
               <a:tr h="164000">
                 <a:tc>
@@ -14196,7 +14440,7 @@
                     <a:p>
                       <a:pPr algn="ctr"/>
                       <a:r>
-                        <a:rPr sz="800" b="1">
+                        <a:rPr sz="700" b="1">
                           <a:solidFill>
                             <a:srgbClr val="FFFFFF"/>
                           </a:solidFill>
@@ -14220,7 +14464,7 @@
                     <a:p>
                       <a:pPr algn="ctr"/>
                       <a:r>
-                        <a:rPr sz="800" b="1">
+                        <a:rPr sz="700" b="1">
                           <a:solidFill>
                             <a:srgbClr val="FFFFFF"/>
                           </a:solidFill>
@@ -14244,7 +14488,7 @@
                     <a:p>
                       <a:pPr algn="ctr"/>
                       <a:r>
-                        <a:rPr sz="800" b="1">
+                        <a:rPr sz="700" b="1">
                           <a:solidFill>
                             <a:srgbClr val="FFFFFF"/>
                           </a:solidFill>
@@ -14268,7 +14512,7 @@
                     <a:p>
                       <a:pPr algn="ctr"/>
                       <a:r>
-                        <a:rPr sz="800" b="1">
+                        <a:rPr sz="700" b="1">
                           <a:solidFill>
                             <a:srgbClr val="FFFFFF"/>
                           </a:solidFill>
@@ -14292,13 +14536,37 @@
                     <a:p>
                       <a:pPr algn="ctr"/>
                       <a:r>
-                        <a:rPr sz="800" b="1">
+                        <a:rPr sz="700" b="1">
                           <a:solidFill>
                             <a:srgbClr val="FFFFFF"/>
                           </a:solidFill>
                           <a:ea typeface="Meiryo UI"/>
                           <a:latin typeface="Meiryo UI"/>
                         </a:rPr>
+                        <a:t>小R7</a:t>
+                      </a:r>
+                    </a:p>
+                  </a:txBody>
+                  <a:tcPr marL="36000" marR="36000" marT="18000" marB="18000">
+                    <a:solidFill>
+                      <a:srgbClr val="1F4E79"/>
+                    </a:solidFill>
+                  </a:tcPr>
+                </a:tc>
+                <a:tc>
+                  <a:txBody>
+                    <a:bodyPr wrap="square"/>
+                    <a:lstStyle/>
+                    <a:p>
+                      <a:pPr algn="ctr"/>
+                      <a:r>
+                        <a:rPr sz="700" b="1">
+                          <a:solidFill>
+                            <a:srgbClr val="FFFFFF"/>
+                          </a:solidFill>
+                          <a:ea typeface="Meiryo UI"/>
+                          <a:latin typeface="Meiryo UI"/>
+                        </a:rPr>
                         <a:t>中R4</a:t>
                       </a:r>
                     </a:p>
@@ -14316,7 +14584,7 @@
                     <a:p>
                       <a:pPr algn="ctr"/>
                       <a:r>
-                        <a:rPr sz="800" b="1">
+                        <a:rPr sz="700" b="1">
                           <a:solidFill>
                             <a:srgbClr val="FFFFFF"/>
                           </a:solidFill>
@@ -14340,7 +14608,7 @@
                     <a:p>
                       <a:pPr algn="ctr"/>
                       <a:r>
-                        <a:rPr sz="800" b="1">
+                        <a:rPr sz="700" b="1">
                           <a:solidFill>
                             <a:srgbClr val="FFFFFF"/>
                           </a:solidFill>
@@ -14348,6 +14616,30 @@
                           <a:latin typeface="Meiryo UI"/>
                         </a:rPr>
                         <a:t>中R6</a:t>
+                      </a:r>
+                    </a:p>
+                  </a:txBody>
+                  <a:tcPr marL="36000" marR="36000" marT="18000" marB="18000">
+                    <a:solidFill>
+                      <a:srgbClr val="1F4E79"/>
+                    </a:solidFill>
+                  </a:tcPr>
+                </a:tc>
+                <a:tc>
+                  <a:txBody>
+                    <a:bodyPr wrap="square"/>
+                    <a:lstStyle/>
+                    <a:p>
+                      <a:pPr algn="ctr"/>
+                      <a:r>
+                        <a:rPr sz="700" b="1">
+                          <a:solidFill>
+                            <a:srgbClr val="FFFFFF"/>
+                          </a:solidFill>
+                          <a:ea typeface="Meiryo UI"/>
+                          <a:latin typeface="Meiryo UI"/>
+                        </a:rPr>
+                        <a:t>中R7</a:t>
                       </a:r>
                     </a:p>
                   </a:txBody>
@@ -14366,7 +14658,7 @@
                     <a:p>
                       <a:pPr algn="ctr"/>
                       <a:r>
-                        <a:rPr sz="800" b="1">
+                        <a:rPr sz="700" b="1">
                           <a:solidFill>
                             <a:srgbClr val="333333"/>
                           </a:solidFill>
@@ -14390,7 +14682,7 @@
                     <a:p>
                       <a:pPr algn="ctr"/>
                       <a:r>
-                        <a:rPr sz="800" b="1">
+                        <a:rPr sz="700" b="1">
                           <a:solidFill>
                             <a:srgbClr val="C0504D"/>
                           </a:solidFill>
@@ -14414,7 +14706,7 @@
                     <a:p>
                       <a:pPr algn="ctr"/>
                       <a:r>
-                        <a:rPr sz="800" b="0">
+                        <a:rPr sz="700" b="0">
                           <a:solidFill>
                             <a:srgbClr val="333333"/>
                           </a:solidFill>
@@ -14438,7 +14730,7 @@
                     <a:p>
                       <a:pPr algn="ctr"/>
                       <a:r>
-                        <a:rPr sz="800" b="1">
+                        <a:rPr sz="700" b="1">
                           <a:solidFill>
                             <a:srgbClr val="C0504D"/>
                           </a:solidFill>
@@ -14462,7 +14754,31 @@
                     <a:p>
                       <a:pPr algn="ctr"/>
                       <a:r>
-                        <a:rPr sz="800" b="0">
+                        <a:rPr sz="700" b="1">
+                          <a:solidFill>
+                            <a:srgbClr val="C0504D"/>
+                          </a:solidFill>
+                          <a:ea typeface="Meiryo UI"/>
+                          <a:latin typeface="Meiryo UI"/>
+                        </a:rPr>
+                        <a:t>52</a:t>
+                      </a:r>
+                    </a:p>
+                  </a:txBody>
+                  <a:tcPr marL="36000" marR="36000" marT="18000" marB="18000">
+                    <a:solidFill>
+                      <a:srgbClr val="FBEEED"/>
+                    </a:solidFill>
+                  </a:tcPr>
+                </a:tc>
+                <a:tc>
+                  <a:txBody>
+                    <a:bodyPr wrap="square"/>
+                    <a:lstStyle/>
+                    <a:p>
+                      <a:pPr algn="ctr"/>
+                      <a:r>
+                        <a:rPr sz="700" b="0">
                           <a:solidFill>
                             <a:srgbClr val="333333"/>
                           </a:solidFill>
@@ -14486,7 +14802,7 @@
                     <a:p>
                       <a:pPr algn="ctr"/>
                       <a:r>
-                        <a:rPr sz="800" b="0">
+                        <a:rPr sz="700" b="0">
                           <a:solidFill>
                             <a:srgbClr val="333333"/>
                           </a:solidFill>
@@ -14510,7 +14826,7 @@
                     <a:p>
                       <a:pPr algn="ctr"/>
                       <a:r>
-                        <a:rPr sz="800" b="1">
+                        <a:rPr sz="700" b="1">
                           <a:solidFill>
                             <a:srgbClr val="C0504D"/>
                           </a:solidFill>
@@ -14518,6 +14834,30 @@
                           <a:latin typeface="Meiryo UI"/>
                         </a:rPr>
                         <a:t>55</a:t>
+                      </a:r>
+                    </a:p>
+                  </a:txBody>
+                  <a:tcPr marL="36000" marR="36000" marT="18000" marB="18000">
+                    <a:solidFill>
+                      <a:srgbClr val="FBEEED"/>
+                    </a:solidFill>
+                  </a:tcPr>
+                </a:tc>
+                <a:tc>
+                  <a:txBody>
+                    <a:bodyPr wrap="square"/>
+                    <a:lstStyle/>
+                    <a:p>
+                      <a:pPr algn="ctr"/>
+                      <a:r>
+                        <a:rPr sz="700" b="1">
+                          <a:solidFill>
+                            <a:srgbClr val="C0504D"/>
+                          </a:solidFill>
+                          <a:ea typeface="Meiryo UI"/>
+                          <a:latin typeface="Meiryo UI"/>
+                        </a:rPr>
+                        <a:t>52</a:t>
                       </a:r>
                     </a:p>
                   </a:txBody>
@@ -14536,7 +14876,7 @@
                     <a:p>
                       <a:pPr algn="ctr"/>
                       <a:r>
-                        <a:rPr sz="800" b="1">
+                        <a:rPr sz="700" b="1">
                           <a:solidFill>
                             <a:srgbClr val="333333"/>
                           </a:solidFill>
@@ -14560,7 +14900,7 @@
                     <a:p>
                       <a:pPr algn="ctr"/>
                       <a:r>
-                        <a:rPr sz="800" b="0">
+                        <a:rPr sz="700" b="0">
                           <a:solidFill>
                             <a:srgbClr val="333333"/>
                           </a:solidFill>
@@ -14584,7 +14924,7 @@
                     <a:p>
                       <a:pPr algn="ctr"/>
                       <a:r>
-                        <a:rPr sz="800" b="0">
+                        <a:rPr sz="700" b="0">
                           <a:solidFill>
                             <a:srgbClr val="333333"/>
                           </a:solidFill>
@@ -14608,7 +14948,7 @@
                     <a:p>
                       <a:pPr algn="ctr"/>
                       <a:r>
-                        <a:rPr sz="800" b="0">
+                        <a:rPr sz="700" b="0">
                           <a:solidFill>
                             <a:srgbClr val="333333"/>
                           </a:solidFill>
@@ -14632,7 +14972,31 @@
                     <a:p>
                       <a:pPr algn="ctr"/>
                       <a:r>
-                        <a:rPr sz="800" b="0">
+                        <a:rPr sz="700" b="0">
+                          <a:solidFill>
+                            <a:srgbClr val="333333"/>
+                          </a:solidFill>
+                          <a:ea typeface="Meiryo UI"/>
+                          <a:latin typeface="Meiryo UI"/>
+                        </a:rPr>
+                        <a:t>65</a:t>
+                      </a:r>
+                    </a:p>
+                  </a:txBody>
+                  <a:tcPr marL="36000" marR="36000" marT="18000" marB="18000">
+                    <a:solidFill>
+                      <a:srgbClr val="FFFFFF"/>
+                    </a:solidFill>
+                  </a:tcPr>
+                </a:tc>
+                <a:tc>
+                  <a:txBody>
+                    <a:bodyPr wrap="square"/>
+                    <a:lstStyle/>
+                    <a:p>
+                      <a:pPr algn="ctr"/>
+                      <a:r>
+                        <a:rPr sz="700" b="0">
                           <a:solidFill>
                             <a:srgbClr val="333333"/>
                           </a:solidFill>
@@ -14656,7 +15020,7 @@
                     <a:p>
                       <a:pPr algn="ctr"/>
                       <a:r>
-                        <a:rPr sz="800" b="0">
+                        <a:rPr sz="700" b="0">
                           <a:solidFill>
                             <a:srgbClr val="333333"/>
                           </a:solidFill>
@@ -14680,7 +15044,7 @@
                     <a:p>
                       <a:pPr algn="ctr"/>
                       <a:r>
-                        <a:rPr sz="800" b="0">
+                        <a:rPr sz="700" b="0">
                           <a:solidFill>
                             <a:srgbClr val="333333"/>
                           </a:solidFill>
@@ -14688,6 +15052,30 @@
                           <a:latin typeface="Meiryo UI"/>
                         </a:rPr>
                         <a:t>60</a:t>
+                      </a:r>
+                    </a:p>
+                  </a:txBody>
+                  <a:tcPr marL="36000" marR="36000" marT="18000" marB="18000">
+                    <a:solidFill>
+                      <a:srgbClr val="FFFFFF"/>
+                    </a:solidFill>
+                  </a:tcPr>
+                </a:tc>
+                <a:tc>
+                  <a:txBody>
+                    <a:bodyPr wrap="square"/>
+                    <a:lstStyle/>
+                    <a:p>
+                      <a:pPr algn="ctr"/>
+                      <a:r>
+                        <a:rPr sz="700" b="0">
+                          <a:solidFill>
+                            <a:srgbClr val="333333"/>
+                          </a:solidFill>
+                          <a:ea typeface="Meiryo UI"/>
+                          <a:latin typeface="Meiryo UI"/>
+                        </a:rPr>
+                        <a:t>55</a:t>
                       </a:r>
                     </a:p>
                   </a:txBody>
@@ -14706,7 +15094,7 @@
                     <a:p>
                       <a:pPr algn="ctr"/>
                       <a:r>
-                        <a:rPr sz="800" b="1">
+                        <a:rPr sz="700" b="1">
                           <a:solidFill>
                             <a:srgbClr val="333333"/>
                           </a:solidFill>
@@ -14730,7 +15118,7 @@
                     <a:p>
                       <a:pPr algn="ctr"/>
                       <a:r>
-                        <a:rPr sz="800" b="0">
+                        <a:rPr sz="700" b="0">
                           <a:solidFill>
                             <a:srgbClr val="333333"/>
                           </a:solidFill>
@@ -14754,7 +15142,7 @@
                     <a:p>
                       <a:pPr algn="ctr"/>
                       <a:r>
-                        <a:rPr sz="800" b="0">
+                        <a:rPr sz="700" b="0">
                           <a:solidFill>
                             <a:srgbClr val="333333"/>
                           </a:solidFill>
@@ -14778,7 +15166,7 @@
                     <a:p>
                       <a:pPr algn="ctr"/>
                       <a:r>
-                        <a:rPr sz="800" b="0">
+                        <a:rPr sz="700" b="0">
                           <a:solidFill>
                             <a:srgbClr val="333333"/>
                           </a:solidFill>
@@ -14802,7 +15190,31 @@
                     <a:p>
                       <a:pPr algn="ctr"/>
                       <a:r>
-                        <a:rPr sz="800" b="0">
+                        <a:rPr sz="700" b="0">
+                          <a:solidFill>
+                            <a:srgbClr val="333333"/>
+                          </a:solidFill>
+                          <a:ea typeface="Meiryo UI"/>
+                          <a:latin typeface="Meiryo UI"/>
+                        </a:rPr>
+                        <a:t>64</a:t>
+                      </a:r>
+                    </a:p>
+                  </a:txBody>
+                  <a:tcPr marL="36000" marR="36000" marT="18000" marB="18000">
+                    <a:solidFill>
+                      <a:srgbClr val="FFFFFF"/>
+                    </a:solidFill>
+                  </a:tcPr>
+                </a:tc>
+                <a:tc>
+                  <a:txBody>
+                    <a:bodyPr wrap="square"/>
+                    <a:lstStyle/>
+                    <a:p>
+                      <a:pPr algn="ctr"/>
+                      <a:r>
+                        <a:rPr sz="700" b="0">
                           <a:solidFill>
                             <a:srgbClr val="333333"/>
                           </a:solidFill>
@@ -14826,7 +15238,7 @@
                     <a:p>
                       <a:pPr algn="ctr"/>
                       <a:r>
-                        <a:rPr sz="800" b="0">
+                        <a:rPr sz="700" b="0">
                           <a:solidFill>
                             <a:srgbClr val="333333"/>
                           </a:solidFill>
@@ -14850,7 +15262,7 @@
                     <a:p>
                       <a:pPr algn="ctr"/>
                       <a:r>
-                        <a:rPr sz="800" b="0">
+                        <a:rPr sz="700" b="0">
                           <a:solidFill>
                             <a:srgbClr val="333333"/>
                           </a:solidFill>
@@ -14858,6 +15270,30 @@
                           <a:latin typeface="Meiryo UI"/>
                         </a:rPr>
                         <a:t>57</a:t>
+                      </a:r>
+                    </a:p>
+                  </a:txBody>
+                  <a:tcPr marL="36000" marR="36000" marT="18000" marB="18000">
+                    <a:solidFill>
+                      <a:srgbClr val="FFFFFF"/>
+                    </a:solidFill>
+                  </a:tcPr>
+                </a:tc>
+                <a:tc>
+                  <a:txBody>
+                    <a:bodyPr wrap="square"/>
+                    <a:lstStyle/>
+                    <a:p>
+                      <a:pPr algn="ctr"/>
+                      <a:r>
+                        <a:rPr sz="700" b="0">
+                          <a:solidFill>
+                            <a:srgbClr val="333333"/>
+                          </a:solidFill>
+                          <a:ea typeface="Meiryo UI"/>
+                          <a:latin typeface="Meiryo UI"/>
+                        </a:rPr>
+                        <a:t>53</a:t>
                       </a:r>
                     </a:p>
                   </a:txBody>
@@ -14876,7 +15312,7 @@
                     <a:p>
                       <a:pPr algn="ctr"/>
                       <a:r>
-                        <a:rPr sz="800" b="1">
+                        <a:rPr sz="700" b="1">
                           <a:solidFill>
                             <a:srgbClr val="333333"/>
                           </a:solidFill>
@@ -14900,7 +15336,7 @@
                     <a:p>
                       <a:pPr algn="ctr"/>
                       <a:r>
-                        <a:rPr sz="800" b="0">
+                        <a:rPr sz="700" b="0">
                           <a:solidFill>
                             <a:srgbClr val="333333"/>
                           </a:solidFill>
@@ -14924,7 +15360,7 @@
                     <a:p>
                       <a:pPr algn="ctr"/>
                       <a:r>
-                        <a:rPr sz="800" b="0">
+                        <a:rPr sz="700" b="0">
                           <a:solidFill>
                             <a:srgbClr val="333333"/>
                           </a:solidFill>
@@ -14948,7 +15384,7 @@
                     <a:p>
                       <a:pPr algn="ctr"/>
                       <a:r>
-                        <a:rPr sz="800" b="0">
+                        <a:rPr sz="700" b="0">
                           <a:solidFill>
                             <a:srgbClr val="333333"/>
                           </a:solidFill>
@@ -14972,7 +15408,31 @@
                     <a:p>
                       <a:pPr algn="ctr"/>
                       <a:r>
-                        <a:rPr sz="800" b="0">
+                        <a:rPr sz="700" b="0">
+                          <a:solidFill>
+                            <a:srgbClr val="333333"/>
+                          </a:solidFill>
+                          <a:ea typeface="Meiryo UI"/>
+                          <a:latin typeface="Meiryo UI"/>
+                        </a:rPr>
+                        <a:t>58</a:t>
+                      </a:r>
+                    </a:p>
+                  </a:txBody>
+                  <a:tcPr marL="36000" marR="36000" marT="18000" marB="18000">
+                    <a:solidFill>
+                      <a:srgbClr val="FFFFFF"/>
+                    </a:solidFill>
+                  </a:tcPr>
+                </a:tc>
+                <a:tc>
+                  <a:txBody>
+                    <a:bodyPr wrap="square"/>
+                    <a:lstStyle/>
+                    <a:p>
+                      <a:pPr algn="ctr"/>
+                      <a:r>
+                        <a:rPr sz="700" b="0">
                           <a:solidFill>
                             <a:srgbClr val="333333"/>
                           </a:solidFill>
@@ -14996,7 +15456,7 @@
                     <a:p>
                       <a:pPr algn="ctr"/>
                       <a:r>
-                        <a:rPr sz="800" b="0">
+                        <a:rPr sz="700" b="0">
                           <a:solidFill>
                             <a:srgbClr val="333333"/>
                           </a:solidFill>
@@ -15020,7 +15480,7 @@
                     <a:p>
                       <a:pPr algn="ctr"/>
                       <a:r>
-                        <a:rPr sz="800" b="0">
+                        <a:rPr sz="700" b="0">
                           <a:solidFill>
                             <a:srgbClr val="333333"/>
                           </a:solidFill>
@@ -15028,6 +15488,30 @@
                           <a:latin typeface="Meiryo UI"/>
                         </a:rPr>
                         <a:t>52.5</a:t>
+                      </a:r>
+                    </a:p>
+                  </a:txBody>
+                  <a:tcPr marL="36000" marR="36000" marT="18000" marB="18000">
+                    <a:solidFill>
+                      <a:srgbClr val="FFFFFF"/>
+                    </a:solidFill>
+                  </a:tcPr>
+                </a:tc>
+                <a:tc>
+                  <a:txBody>
+                    <a:bodyPr wrap="square"/>
+                    <a:lstStyle/>
+                    <a:p>
+                      <a:pPr algn="ctr"/>
+                      <a:r>
+                        <a:rPr sz="700" b="0">
+                          <a:solidFill>
+                            <a:srgbClr val="333333"/>
+                          </a:solidFill>
+                          <a:ea typeface="Meiryo UI"/>
+                          <a:latin typeface="Meiryo UI"/>
+                        </a:rPr>
+                        <a:t>48.3</a:t>
                       </a:r>
                     </a:p>
                   </a:txBody>
@@ -15115,14 +15599,15 @@
                 <a:tableStyleId>{5C22544A-7EE6-4342-B048-85BDC9FD1C3A}</a:tableStyleId>
               </a:tblPr>
               <a:tblGrid>
-                <a:gridCol w="660000"/>
-                <a:gridCol w="527000"/>
-                <a:gridCol w="527000"/>
-                <a:gridCol w="527000"/>
-                <a:gridCol w="527000"/>
-                <a:gridCol w="527000"/>
-                <a:gridCol w="527000"/>
-                <a:gridCol w="528000"/>
+                <a:gridCol w="600000"/>
+                <a:gridCol w="468000"/>
+                <a:gridCol w="468000"/>
+                <a:gridCol w="468000"/>
+                <a:gridCol w="468000"/>
+                <a:gridCol w="468000"/>
+                <a:gridCol w="468000"/>
+                <a:gridCol w="468000"/>
+                <a:gridCol w="474000"/>
               </a:tblGrid>
               <a:tr h="140000">
                 <a:tc>
@@ -15317,6 +15802,30 @@
                     </a:solidFill>
                   </a:tcPr>
                 </a:tc>
+                <a:tc>
+                  <a:txBody>
+                    <a:bodyPr wrap="square"/>
+                    <a:lstStyle/>
+                    <a:p>
+                      <a:pPr algn="ctr"/>
+                      <a:r>
+                        <a:rPr sz="800" b="1">
+                          <a:solidFill>
+                            <a:srgbClr val="FFFFFF"/>
+                          </a:solidFill>
+                          <a:ea typeface="Meiryo UI"/>
+                          <a:latin typeface="Meiryo UI"/>
+                        </a:rPr>
+                        <a:t>R7</a:t>
+                      </a:r>
+                    </a:p>
+                  </a:txBody>
+                  <a:tcPr marL="36000" marR="36000" marT="18000" marB="18000">
+                    <a:solidFill>
+                      <a:srgbClr val="1F4E79"/>
+                    </a:solidFill>
+                  </a:tcPr>
+                </a:tc>
               </a:tr>
               <a:tr h="140000">
                 <a:tc>
@@ -15511,6 +16020,30 @@
                     </a:solidFill>
                   </a:tcPr>
                 </a:tc>
+                <a:tc>
+                  <a:txBody>
+                    <a:bodyPr wrap="square"/>
+                    <a:lstStyle/>
+                    <a:p>
+                      <a:pPr algn="ctr"/>
+                      <a:r>
+                        <a:rPr sz="800" b="1">
+                          <a:solidFill>
+                            <a:srgbClr val="C0504D"/>
+                          </a:solidFill>
+                          <a:ea typeface="Meiryo UI"/>
+                          <a:latin typeface="Meiryo UI"/>
+                        </a:rPr>
+                        <a:t>64</a:t>
+                      </a:r>
+                    </a:p>
+                  </a:txBody>
+                  <a:tcPr marL="36000" marR="36000" marT="18000" marB="18000">
+                    <a:solidFill>
+                      <a:srgbClr val="FBEEED"/>
+                    </a:solidFill>
+                  </a:tcPr>
+                </a:tc>
               </a:tr>
               <a:tr h="140000">
                 <a:tc>
@@ -15696,6 +16229,30 @@
                           <a:latin typeface="Meiryo UI"/>
                         </a:rPr>
                         <a:t>25</a:t>
+                      </a:r>
+                    </a:p>
+                  </a:txBody>
+                  <a:tcPr marL="36000" marR="36000" marT="18000" marB="18000">
+                    <a:solidFill>
+                      <a:srgbClr val="FBEEED"/>
+                    </a:solidFill>
+                  </a:tcPr>
+                </a:tc>
+                <a:tc>
+                  <a:txBody>
+                    <a:bodyPr wrap="square"/>
+                    <a:lstStyle/>
+                    <a:p>
+                      <a:pPr algn="ctr"/>
+                      <a:r>
+                        <a:rPr sz="800" b="1">
+                          <a:solidFill>
+                            <a:srgbClr val="C0504D"/>
+                          </a:solidFill>
+                          <a:ea typeface="Meiryo UI"/>
+                          <a:latin typeface="Meiryo UI"/>
+                        </a:rPr>
+                        <a:t>22</a:t>
                       </a:r>
                     </a:p>
                   </a:txBody>
@@ -19014,7 +19571,7 @@
             <a:avLst/>
           </a:prstGeom>
           <a:solidFill>
-            <a:srgbClr val="6F5A9C"/>
+            <a:srgbClr val="1F4E79"/>
           </a:solidFill>
           <a:ln>
             <a:noFill/>
@@ -19072,7 +19629,7 @@
           </a:solidFill>
           <a:ln w="6350">
             <a:solidFill>
-              <a:srgbClr val="6F5A9C"/>
+              <a:srgbClr val="1F4E79"/>
             </a:solidFill>
           </a:ln>
         </p:spPr>
@@ -19091,7 +19648,7 @@
                 <a:ea typeface="Meiryo UI"/>
                 <a:latin typeface="Meiryo UI"/>
               </a:rPr>
-              <a:t>● 不登校R7=34名で過去最多更新（小17・中17）</a:t>
+              <a:t>● 学力R7：小は国語65・算数52、中は国語56・数学52</a:t>
             </a:r>
           </a:p>
           <a:p>
@@ -19104,7 +19661,20 @@
                 <a:ea typeface="Meiryo UI"/>
                 <a:latin typeface="Meiryo UI"/>
               </a:rPr>
-              <a:t>● R6中3単独では不登校2名（区内4位＝少ない側）</a:t>
+              <a:t>  ─ 区平均・都平均を大きく下回り、小は区最下位水準</a:t>
+            </a:r>
+          </a:p>
+          <a:p>
+            <a:pPr algn="l"/>
+            <a:r>
+              <a:rPr sz="800" b="0">
+                <a:solidFill>
+                  <a:srgbClr val="333333"/>
+                </a:solidFill>
+                <a:ea typeface="Meiryo UI"/>
+                <a:latin typeface="Meiryo UI"/>
+              </a:rPr>
+              <a:t>● 不登校R7=34名で過去最多更新（小17・中17）</a:t>
             </a:r>
           </a:p>
           <a:p>
